--- a/paper/FLEX-UF_LMT.pptx
+++ b/paper/FLEX-UF_LMT.pptx
@@ -3175,7 +3175,7 @@
           <a:lstStyle/>
           <a:p>
             <a:r>
-              <a:t>Decoder compute cut per tile, measured against the released model on the identical bitstream</a:t>
+              <a:t>Decoder compute saved at a measured cost in quality</a:t>
             </a:r>
           </a:p>
           <a:p>
@@ -3185,30 +3185,6 @@
           </a:p>
         </p:txBody>
       </p:sp>
-      <p:pic>
-        <p:nvPicPr>
-          <p:cNvPr id="4" name="Picture 3" descr="fig_arch.png"/>
-          <p:cNvPicPr>
-            <a:picLocks noChangeAspect="1"/>
-          </p:cNvPicPr>
-          <p:nvPr/>
-        </p:nvPicPr>
-        <p:blipFill>
-          <a:blip r:embed="rId2"/>
-          <a:stretch>
-            <a:fillRect/>
-          </a:stretch>
-        </p:blipFill>
-        <p:spPr>
-          <a:xfrm>
-            <a:off x="457200" y="4206240"/>
-            <a:ext cx="8229600" cy="2133600"/>
-          </a:xfrm>
-          <a:prstGeom prst="rect">
-            <a:avLst/>
-          </a:prstGeom>
-        </p:spPr>
-      </p:pic>
     </p:spTree>
   </p:cSld>
   <p:clrMapOvr>
@@ -3243,8 +3219,7 @@
           <a:lstStyle/>
           <a:p>
             <a:r>
-              <a:rPr sz="2400"/>
-              <a:t>Result: saving against the released decoder</a:t>
+              <a:t>Results — against the released decoder, on CTC</a:t>
             </a:r>
           </a:p>
         </p:txBody>
@@ -3259,11 +3234,40 @@
             <p:ph idx="1"/>
           </p:nvPr>
         </p:nvSpPr>
-        <p:spPr/>
+        <p:spPr>
+          <a:xfrm>
+            <a:off x="0" y="1234440"/>
+            <a:ext cx="0" cy="1463040"/>
+          </a:xfrm>
+        </p:spPr>
         <p:txBody>
           <a:bodyPr/>
           <a:lstStyle/>
-          <a:p/>
+          <a:p>
+            <a:pPr/>
+            <a:r>
+              <a:rPr sz="1300" b="1">
+                <a:solidFill>
+                  <a:srgbClr val="0065BD"/>
+                </a:solidFill>
+              </a:rPr>
+              <a:t>At 0.3 dB: 42% (qp0) · 35% (qp32) · 26% (qp63)</a:t>
+            </a:r>
+          </a:p>
+          <a:p>
+            <a:pPr/>
+            <a:r>
+              <a:rPr sz="1300" b="0"/>
+              <a:t>At 0.1 dB: 26% · 16% · 10%  — the 30–40% target is met at 0.3 dB, not at 0.1</a:t>
+            </a:r>
+          </a:p>
+          <a:p>
+            <a:pPr/>
+            <a:r>
+              <a:rPr sz="1300" b="0"/>
+              <a:t>Saving falls with rate because early exit costs more there: the exit-2 penalty grows 3.4× from qp0 to qp63 as the latent carries more detail</a:t>
+            </a:r>
+          </a:p>
         </p:txBody>
       </p:sp>
       <p:pic>
@@ -3282,100 +3286,14 @@
         </p:blipFill>
         <p:spPr>
           <a:xfrm>
-            <a:off x="274320" y="1234440"/>
-            <a:ext cx="8595360" cy="3496120"/>
+            <a:off x="862649" y="3200400"/>
+            <a:ext cx="7418702" cy="3017520"/>
           </a:xfrm>
           <a:prstGeom prst="rect">
             <a:avLst/>
           </a:prstGeom>
         </p:spPr>
       </p:pic>
-      <p:sp>
-        <p:nvSpPr>
-          <p:cNvPr id="5" name="TextBox 4"/>
-          <p:cNvSpPr txBox="1"/>
-          <p:nvPr/>
-        </p:nvSpPr>
-        <p:spPr>
-          <a:xfrm>
-            <a:off x="640080" y="5074920"/>
-            <a:ext cx="7863840" cy="1005840"/>
-          </a:xfrm>
-          <a:prstGeom prst="rect">
-            <a:avLst/>
-          </a:prstGeom>
-          <a:noFill/>
-        </p:spPr>
-        <p:txBody>
-          <a:bodyPr wrap="square">
-            <a:spAutoFit/>
-          </a:bodyPr>
-          <a:lstStyle/>
-          <a:p>
-            <a:pPr>
-              <a:spcAft>
-                <a:spcPts val="500"/>
-              </a:spcAft>
-            </a:pPr>
-            <a:r>
-              <a:rPr sz="1200">
-                <a:solidFill>
-                  <a:srgbClr val="0B0B0B"/>
-                </a:solidFill>
-              </a:rPr>
-              <a:t>• 0.1 dB budget: 26.0% (qp0) → 9.6% (qp63).  0.3 dB budget: 41.5% → 26.3%</a:t>
-            </a:r>
-          </a:p>
-          <a:p>
-            <a:pPr>
-              <a:spcAft>
-                <a:spcPts val="500"/>
-              </a:spcAft>
-            </a:pPr>
-            <a:r>
-              <a:rPr sz="1200">
-                <a:solidFill>
-                  <a:srgbClr val="0B0B0B"/>
-                </a:solidFill>
-              </a:rPr>
-              <a:t>• The target band is met comfortably at 0.3 dB; at 0.1 dB only at low rate</a:t>
-            </a:r>
-          </a:p>
-        </p:txBody>
-      </p:sp>
-      <p:sp>
-        <p:nvSpPr>
-          <p:cNvPr id="6" name="TextBox 5"/>
-          <p:cNvSpPr txBox="1"/>
-          <p:nvPr/>
-        </p:nvSpPr>
-        <p:spPr>
-          <a:xfrm>
-            <a:off x="502920" y="6144768"/>
-            <a:ext cx="8138160" cy="384048"/>
-          </a:xfrm>
-          <a:prstGeom prst="rect">
-            <a:avLst/>
-          </a:prstGeom>
-          <a:noFill/>
-        </p:spPr>
-        <p:txBody>
-          <a:bodyPr wrap="square">
-            <a:spAutoFit/>
-          </a:bodyPr>
-          <a:lstStyle/>
-          <a:p>
-            <a:r>
-              <a:rPr sz="1050" i="1">
-                <a:solidFill>
-                  <a:srgbClr val="52514E"/>
-                </a:solidFill>
-              </a:rPr>
-              <a:t>ORACLE — a perfect choice of exit. The next slide is how that choice is actually made.</a:t>
-            </a:r>
-          </a:p>
-        </p:txBody>
-      </p:sp>
     </p:spTree>
   </p:cSld>
   <p:clrMapOvr>
@@ -3410,8 +3328,7 @@
           <a:lstStyle/>
           <a:p>
             <a:r>
-              <a:rPr sz="2400"/>
-              <a:t>The router: predicting it failed, transmitting it works</a:t>
+              <a:t>The router: predicting failed, signalling works</a:t>
             </a:r>
           </a:p>
         </p:txBody>
@@ -3426,159 +3343,92 @@
             <p:ph idx="1"/>
           </p:nvPr>
         </p:nvSpPr>
-        <p:spPr/>
+        <p:spPr>
+          <a:xfrm>
+            <a:off x="0" y="1234440"/>
+            <a:ext cx="0" cy="1463040"/>
+          </a:xfrm>
+        </p:spPr>
         <p:txBody>
           <a:bodyPr/>
           <a:lstStyle/>
-          <a:p/>
-        </p:txBody>
-      </p:sp>
-      <p:sp>
-        <p:nvSpPr>
-          <p:cNvPr id="4" name="TextBox 3"/>
-          <p:cNvSpPr txBox="1"/>
-          <p:nvPr/>
-        </p:nvSpPr>
-        <p:spPr>
-          <a:xfrm>
-            <a:off x="502920" y="1371600"/>
-            <a:ext cx="4663440" cy="4663440"/>
-          </a:xfrm>
-          <a:prstGeom prst="rect">
-            <a:avLst/>
-          </a:prstGeom>
-          <a:noFill/>
-        </p:spPr>
-        <p:txBody>
-          <a:bodyPr wrap="square">
-            <a:spAutoFit/>
-          </a:bodyPr>
-          <a:lstStyle/>
-          <a:p>
-            <a:pPr>
-              <a:spcAft>
-                <a:spcPts val="500"/>
-              </a:spcAft>
-            </a:pPr>
-            <a:r>
-              <a:rPr sz="1150">
-                <a:solidFill>
-                  <a:srgbClr val="0B0B0B"/>
+          <a:p>
+            <a:pPr/>
+            <a:r>
+              <a:rPr sz="1100" b="1">
+                <a:solidFill>
+                  <a:srgbClr val="0065BD"/>
                 </a:solidFill>
               </a:rPr>
-              <a:t>• A decoder-side router must infer each tile's error without ever seeing the source</a:t>
-            </a:r>
-          </a:p>
-          <a:p>
-            <a:pPr lvl="1">
-              <a:spcAft>
-                <a:spcPts val="500"/>
-              </a:spcAft>
-            </a:pPr>
-            <a:r>
-              <a:rPr sz="950">
-                <a:solidFill>
-                  <a:srgbClr val="52514E"/>
+              <a:t>A learned router could not reach the oracle, and 12k steps showed why</a:t>
+            </a:r>
+          </a:p>
+          <a:p>
+            <a:pPr lvl="1"/>
+            <a:r>
+              <a:rPr sz="900" b="0"/>
+              <a:t>CE 0.5→0.09 while qp0 agreement moved 0.743→0.741, regret unchanged</a:t>
+            </a:r>
+          </a:p>
+          <a:p>
+            <a:pPr lvl="1"/>
+            <a:r>
+              <a:rPr sz="900" b="0"/>
+              <a:t>fitting the training data 4× better and behaving identically on test is missing INFORMATION, not missing capacity</a:t>
+            </a:r>
+          </a:p>
+          <a:p>
+            <a:pPr/>
+            <a:r>
+              <a:rPr sz="1100" b="1">
+                <a:solidFill>
+                  <a:srgbClr val="0065BD"/>
                 </a:solidFill>
               </a:rPr>
-              <a:t>– hand-made signals: |r| ≤ 0.12 against the oracle's choice · a 768-dim pooled stem measured WORSE</a:t>
-            </a:r>
-          </a:p>
-          <a:p>
-            <a:pPr lvl="1">
-              <a:spcAft>
-                <a:spcPts val="500"/>
-              </a:spcAft>
-            </a:pPr>
-            <a:r>
-              <a:rPr sz="950">
-                <a:solidFill>
-                  <a:srgbClr val="52514E"/>
+              <a:t>Structural: the oracle uses error against the SOURCE; the decoder never sees the source</a:t>
+            </a:r>
+          </a:p>
+          <a:p>
+            <a:pPr/>
+            <a:r>
+              <a:rPr sz="1100" b="1">
+                <a:solidFill>
+                  <a:srgbClr val="0065BD"/>
                 </a:solidFill>
               </a:rPr>
-              <a:t>– 4× the training moved qp0 agreement 0.743 → 0.741 with identical regret — missing information, not capacity</a:t>
-            </a:r>
-          </a:p>
-          <a:p>
-            <a:pPr>
-              <a:spcAft>
-                <a:spcPts val="500"/>
-              </a:spcAft>
-            </a:pPr>
-            <a:r>
-              <a:rPr sz="1150">
-                <a:solidFill>
-                  <a:srgbClr val="0B0B0B"/>
+              <a:t>But the encoder does — and in video coding mode decisions are signalled, not inferred (HEVC/VVC send partitioning and prediction mode)</a:t>
+            </a:r>
+          </a:p>
+          <a:p>
+            <a:pPr lvl="1"/>
+            <a:r>
+              <a:rPr sz="900" b="0"/>
+              <a:t>exit map costs 1.3e-4 bpp entropy-coded — 4 orders below the frame</a:t>
+            </a:r>
+          </a:p>
+          <a:p>
+            <a:pPr lvl="1"/>
+            <a:r>
+              <a:rPr sz="900" b="0"/>
+              <a:t>measured with the map's cost INSIDE the bitrate: 24.2 / 21.2 / 15.7 / 11.0 / 8.6% at qp0…63, all under 0.1 dB</a:t>
+            </a:r>
+          </a:p>
+          <a:p>
+            <a:pPr/>
+            <a:r>
+              <a:rPr sz="1100" b="1">
+                <a:solidFill>
+                  <a:srgbClr val="0065BD"/>
                 </a:solidFill>
               </a:rPr>
-              <a:t>• In video coding, mode decisions are signalled, not inferred (HEVC/VVC transmit partitioning and modes)</a:t>
-            </a:r>
-          </a:p>
-          <a:p>
-            <a:pPr>
-              <a:spcAft>
-                <a:spcPts val="500"/>
-              </a:spcAft>
-            </a:pPr>
-            <a:r>
-              <a:rPr sz="1150">
-                <a:solidFill>
-                  <a:srgbClr val="0B0B0B"/>
-                </a:solidFill>
-              </a:rPr>
-              <a:t>• The encoder sees the source, computes the exit map exactly, and transmits it:</a:t>
-            </a:r>
-          </a:p>
-          <a:p>
-            <a:pPr lvl="1">
-              <a:spcAft>
-                <a:spcPts val="500"/>
-              </a:spcAft>
-            </a:pPr>
-            <a:r>
-              <a:rPr sz="950">
-                <a:solidFill>
-                  <a:srgbClr val="52514E"/>
-                </a:solidFill>
-              </a:rPr>
-              <a:t>– 24.2 / 21.2 / 15.7 / 11.0 / 8.6 % at qp0/16/32/48/63, all under 0.1 dB of the release</a:t>
-            </a:r>
-          </a:p>
-          <a:p>
-            <a:pPr lvl="1">
-              <a:spcAft>
-                <a:spcPts val="500"/>
-              </a:spcAft>
-            </a:pPr>
-            <a:r>
-              <a:rPr sz="950">
-                <a:solidFill>
-                  <a:srgbClr val="52514E"/>
-                </a:solidFill>
-              </a:rPr>
-              <a:t>– cost of the map, included in the bpp: 1.3×10⁻⁴ bpp — ~200 bits per frame</a:t>
-            </a:r>
-          </a:p>
-          <a:p>
-            <a:pPr>
-              <a:spcAft>
-                <a:spcPts val="500"/>
-              </a:spcAft>
-            </a:pPr>
-            <a:r>
-              <a:rPr sz="1150">
-                <a:solidFill>
-                  <a:srgbClr val="0B0B0B"/>
-                </a:solidFill>
-              </a:rPr>
-              <a:t>• Within 1–2 points of the oracle bound; the predicting router paid 4× the dB for the same saving</a:t>
+              <a:t>Agreement with the oracle becomes 100% by construction</a:t>
             </a:r>
           </a:p>
         </p:txBody>
       </p:sp>
       <p:pic>
         <p:nvPicPr>
-          <p:cNvPr id="5" name="Picture 4" descr="s_router.png"/>
+          <p:cNvPr id="4" name="Picture 3" descr="final_curve.png"/>
           <p:cNvPicPr>
             <a:picLocks noChangeAspect="1"/>
           </p:cNvPicPr>
@@ -3592,8 +3442,8 @@
         </p:blipFill>
         <p:spPr>
           <a:xfrm>
-            <a:off x="5120640" y="2011680"/>
-            <a:ext cx="3703320" cy="2444191"/>
+            <a:off x="2292318" y="4434840"/>
+            <a:ext cx="4559364" cy="1920240"/>
           </a:xfrm>
           <a:prstGeom prst="rect">
             <a:avLst/>
@@ -3634,8 +3484,7 @@
           <a:lstStyle/>
           <a:p>
             <a:r>
-              <a:rPr sz="2400"/>
-              <a:t>Theory, status, and what is not yet done</a:t>
+              <a:t>Theory, and where we are</a:t>
             </a:r>
           </a:p>
         </p:txBody>
@@ -3650,174 +3499,102 @@
             <p:ph idx="1"/>
           </p:nvPr>
         </p:nvSpPr>
-        <p:spPr/>
+        <p:spPr>
+          <a:xfrm>
+            <a:off x="0" y="1234440"/>
+            <a:ext cx="0" cy="1463040"/>
+          </a:xfrm>
+        </p:spPr>
         <p:txBody>
           <a:bodyPr/>
           <a:lstStyle/>
-          <a:p/>
-        </p:txBody>
-      </p:sp>
-      <p:sp>
-        <p:nvSpPr>
-          <p:cNvPr id="4" name="TextBox 3"/>
-          <p:cNvSpPr txBox="1"/>
-          <p:nvPr/>
-        </p:nvSpPr>
-        <p:spPr>
-          <a:xfrm>
-            <a:off x="502920" y="1371600"/>
-            <a:ext cx="4663440" cy="4663440"/>
-          </a:xfrm>
-          <a:prstGeom prst="rect">
-            <a:avLst/>
-          </a:prstGeom>
-          <a:noFill/>
-        </p:spPr>
-        <p:txBody>
-          <a:bodyPr wrap="square">
-            <a:spAutoFit/>
-          </a:bodyPr>
-          <a:lstStyle/>
-          <a:p>
-            <a:pPr>
-              <a:spcAft>
-                <a:spcPts val="500"/>
-              </a:spcAft>
-            </a:pPr>
-            <a:r>
-              <a:rPr sz="1150">
-                <a:solidFill>
-                  <a:srgbClr val="0B0B0B"/>
+          <a:p>
+            <a:pPr/>
+            <a:r>
+              <a:rPr sz="1100" b="1">
+                <a:solidFill>
+                  <a:srgbClr val="0065BD"/>
                 </a:solidFill>
               </a:rPr>
-              <a:t>• Cost is additive over tiles and MSE is a mean over them, so both are affine in the assignment. Hence:</a:t>
-            </a:r>
-          </a:p>
-          <a:p>
-            <a:pPr lvl="1">
-              <a:spcAft>
-                <a:spcPts val="500"/>
-              </a:spcAft>
-            </a:pPr>
-            <a:r>
-              <a:rPr sz="950">
-                <a:solidFill>
-                  <a:srgbClr val="52514E"/>
+              <a:t>Cost is additive over tiles and MSE is a mean over tiles → both affine in the assignment</a:t>
+            </a:r>
+          </a:p>
+          <a:p>
+            <a:pPr lvl="1"/>
+            <a:r>
+              <a:rPr sz="900" b="0"/>
+              <a:t>fixed proportions reach exactly the convex hull of the K exit points</a:t>
+            </a:r>
+          </a:p>
+          <a:p>
+            <a:pPr lvl="1"/>
+            <a:r>
+              <a:rPr sz="900" b="0"/>
+              <a:t>per-tile assignment reaches the Minkowski average of the N tile hulls</a:t>
+            </a:r>
+          </a:p>
+          <a:p>
+            <a:pPr lvl="1"/>
+            <a:r>
+              <a:rPr sz="900" b="0"/>
+              <a:t>their gap is min-of-average − average-of-min ≥ 0, zero iff every tile prefers the same exit — this IS the value of adaptivity</a:t>
+            </a:r>
+          </a:p>
+          <a:p>
+            <a:pPr/>
+            <a:r>
+              <a:rPr sz="1100" b="1">
+                <a:solidFill>
+                  <a:srgbClr val="0065BD"/>
                 </a:solidFill>
               </a:rPr>
-              <a:t>– fixed proportions achieve exactly the convex hull of the K per-exit points</a:t>
-            </a:r>
-          </a:p>
-          <a:p>
-            <a:pPr lvl="1">
-              <a:spcAft>
-                <a:spcPts val="500"/>
-              </a:spcAft>
-            </a:pPr>
-            <a:r>
-              <a:rPr sz="950">
-                <a:solidFill>
-                  <a:srgbClr val="52514E"/>
+              <a:t>Measured: Δ/J rises 0.68% → 4.52% with rate</a:t>
+            </a:r>
+          </a:p>
+          <a:p>
+            <a:pPr/>
+            <a:r>
+              <a:rPr sz="1100" b="1">
+                <a:solidFill>
+                  <a:srgbClr val="0065BD"/>
                 </a:solidFill>
               </a:rPr>
-              <a:t>– per-tile assignment achieves the Minkowski average of the N per-tile hulls</a:t>
-            </a:r>
-          </a:p>
-          <a:p>
-            <a:pPr lvl="1">
-              <a:spcAft>
-                <a:spcPts val="500"/>
-              </a:spcAft>
-            </a:pPr>
-            <a:r>
-              <a:rPr sz="950">
-                <a:solidFill>
-                  <a:srgbClr val="52514E"/>
-                </a:solidFill>
-              </a:rPr>
-              <a:t>– their gap is min-of-average − average-of-min ≥ 0, zero iff every tile prefers the same exit</a:t>
-            </a:r>
-          </a:p>
-          <a:p>
-            <a:pPr>
-              <a:spcAft>
-                <a:spcPts val="500"/>
-              </a:spcAft>
-            </a:pPr>
-            <a:r>
-              <a:rPr sz="1150">
-                <a:solidFill>
-                  <a:srgbClr val="0B0B0B"/>
-                </a:solidFill>
-              </a:rPr>
-              <a:t>• That gap IS the value of adaptivity, computable before any router exists: 0.68% → 4.52% as rate rises</a:t>
-            </a:r>
-          </a:p>
-          <a:p>
-            <a:pPr>
-              <a:spcAft>
-                <a:spcPts val="500"/>
-              </a:spcAft>
-            </a:pPr>
-            <a:r>
-              <a:rPr sz="1150">
-                <a:solidFill>
-                  <a:srgbClr val="0B0B0B"/>
-                </a:solidFill>
-              </a:rPr>
-              <a:t>• Open / not done:</a:t>
-            </a:r>
-          </a:p>
-          <a:p>
-            <a:pPr lvl="1">
-              <a:spcAft>
-                <a:spcPts val="500"/>
-              </a:spcAft>
-            </a:pPr>
-            <a:r>
-              <a:rPr sz="950">
-                <a:solidFill>
-                  <a:srgbClr val="52514E"/>
-                </a:solidFill>
-              </a:rPr>
-              <a:t>– the 30–40% target is NOT met at 0.1 dB above qp16 — it is met at 0.3 dB</a:t>
-            </a:r>
-          </a:p>
-          <a:p>
-            <a:pPr lvl="1">
-              <a:spcAft>
-                <a:spcPts val="500"/>
-              </a:spcAft>
-            </a:pPr>
-            <a:r>
-              <a:rPr sz="950">
-                <a:solidFill>
-                  <a:srgbClr val="52514E"/>
-                </a:solidFill>
-              </a:rPr>
-              <a:t>– anchor_weight = 10's effect on the ceiling is still unmeasured</a:t>
-            </a:r>
-          </a:p>
-          <a:p>
-            <a:pPr lvl="1">
-              <a:spcAft>
-                <a:spcPts val="500"/>
-              </a:spcAft>
-            </a:pPr>
-            <a:r>
-              <a:rPr sz="950">
-                <a:solidFill>
-                  <a:srgbClr val="52514E"/>
-                </a:solidFill>
-              </a:rPr>
-              <a:t>– HEVC classes B/C/D not evaluated (JVET credentials); 256px runs still training</a:t>
+              <a:t>Open, and stated as open:</a:t>
+            </a:r>
+          </a:p>
+          <a:p>
+            <a:pPr lvl="1"/>
+            <a:r>
+              <a:rPr sz="900" b="0"/>
+              <a:t>0.1 dB target not met; 0.3 dB comfortably met</a:t>
+            </a:r>
+          </a:p>
+          <a:p>
+            <a:pPr lvl="1"/>
+            <a:r>
+              <a:rPr sz="900" b="0"/>
+              <a:t>larger tiles cut the seam but also the adaptivity — being isolated now</a:t>
+            </a:r>
+          </a:p>
+          <a:p>
+            <a:pPr lvl="1"/>
+            <a:r>
+              <a:rPr sz="900" b="0"/>
+              <a:t>HEVC classes B/C/D behind JVET credentials, reported as NOT MEASURED</a:t>
+            </a:r>
+          </a:p>
+          <a:p>
+            <a:pPr/>
+            <a:r>
+              <a:rPr sz="1100" b="0"/>
+              <a:t>4 runs training (BEST, CONTROL, RECIPE512, VERBATIM) on 4 GPUs</a:t>
             </a:r>
           </a:p>
         </p:txBody>
       </p:sp>
       <p:pic>
         <p:nvPicPr>
-          <p:cNvPr id="5" name="Picture 4" descr="s_gain.png"/>
+          <p:cNvPr id="4" name="Picture 3" descr="fig_theory.png"/>
           <p:cNvPicPr>
             <a:picLocks noChangeAspect="1"/>
           </p:cNvPicPr>
@@ -3831,47 +3608,14 @@
         </p:blipFill>
         <p:spPr>
           <a:xfrm>
-            <a:off x="5120640" y="2011680"/>
-            <a:ext cx="3703320" cy="2444191"/>
+            <a:off x="1699753" y="4480560"/>
+            <a:ext cx="5744494" cy="1874519"/>
           </a:xfrm>
           <a:prstGeom prst="rect">
             <a:avLst/>
           </a:prstGeom>
         </p:spPr>
       </p:pic>
-      <p:sp>
-        <p:nvSpPr>
-          <p:cNvPr id="6" name="TextBox 5"/>
-          <p:cNvSpPr txBox="1"/>
-          <p:nvPr/>
-        </p:nvSpPr>
-        <p:spPr>
-          <a:xfrm>
-            <a:off x="502920" y="6144768"/>
-            <a:ext cx="8138160" cy="384048"/>
-          </a:xfrm>
-          <a:prstGeom prst="rect">
-            <a:avLst/>
-          </a:prstGeom>
-          <a:noFill/>
-        </p:spPr>
-        <p:txBody>
-          <a:bodyPr wrap="square">
-            <a:spAutoFit/>
-          </a:bodyPr>
-          <a:lstStyle/>
-          <a:p>
-            <a:r>
-              <a:rPr sz="1050" i="1">
-                <a:solidFill>
-                  <a:srgbClr val="52514E"/>
-                </a:solidFill>
-              </a:rPr>
-              <a:t>paper/theory.tex — two pages, NeurIPS form, every proof given. Repo: github.com/canerim/FLEX-FLOP, branch flexuf-multiexit.</a:t>
-            </a:r>
-          </a:p>
-        </p:txBody>
-      </p:sp>
     </p:spTree>
   </p:cSld>
   <p:clrMapOvr>
@@ -3906,7 +3650,6 @@
           <a:lstStyle/>
           <a:p>
             <a:r>
-              <a:rPr sz="2400"/>
               <a:t>Problem and goal</a:t>
             </a:r>
           </a:p>
@@ -3922,144 +3665,88 @@
             <p:ph idx="1"/>
           </p:nvPr>
         </p:nvSpPr>
-        <p:spPr/>
+        <p:spPr>
+          <a:xfrm>
+            <a:off x="0" y="1234440"/>
+            <a:ext cx="0" cy="1463040"/>
+          </a:xfrm>
+        </p:spPr>
         <p:txBody>
           <a:bodyPr/>
           <a:lstStyle/>
-          <a:p/>
-        </p:txBody>
-      </p:sp>
-      <p:sp>
-        <p:nvSpPr>
-          <p:cNvPr id="4" name="TextBox 3"/>
-          <p:cNvSpPr txBox="1"/>
-          <p:nvPr/>
-        </p:nvSpPr>
-        <p:spPr>
-          <a:xfrm>
-            <a:off x="502920" y="1371600"/>
-            <a:ext cx="4663440" cy="4663440"/>
-          </a:xfrm>
-          <a:prstGeom prst="rect">
-            <a:avLst/>
-          </a:prstGeom>
-          <a:noFill/>
-        </p:spPr>
-        <p:txBody>
-          <a:bodyPr wrap="square">
-            <a:spAutoFit/>
-          </a:bodyPr>
-          <a:lstStyle/>
-          <a:p>
-            <a:pPr>
-              <a:spcAft>
-                <a:spcPts val="500"/>
-              </a:spcAft>
-            </a:pPr>
-            <a:r>
-              <a:rPr sz="1250">
-                <a:solidFill>
-                  <a:srgbClr val="0B0B0B"/>
+          <a:p>
+            <a:pPr/>
+            <a:r>
+              <a:rPr sz="1300" b="1">
+                <a:solidFill>
+                  <a:srgbClr val="0065BD"/>
                 </a:solidFill>
               </a:rPr>
-              <a:t>• DCVC-UF decodes every pixel with the same 12 residual blocks, regardless of how hard that region is</a:t>
-            </a:r>
-          </a:p>
-          <a:p>
-            <a:pPr lvl="1">
-              <a:spcAft>
-                <a:spcPts val="500"/>
-              </a:spcAft>
-            </a:pPr>
-            <a:r>
-              <a:rPr sz="1050">
-                <a:solidFill>
-                  <a:srgbClr val="52514E"/>
+              <a:t>DCVC-UF's intra decoder: 453.5 GMAC per 1080p frame</a:t>
+            </a:r>
+          </a:p>
+          <a:p>
+            <a:pPr lvl="1"/>
+            <a:r>
+              <a:rPr sz="1100" b="0"/>
+              <a:t>12 identical DepthConvBlocks = 89.4% of it</a:t>
+            </a:r>
+          </a:p>
+          <a:p>
+            <a:pPr lvl="1"/>
+            <a:r>
+              <a:rPr sz="1100" b="0"/>
+              <a:t>every patch pays the same, however easy it is</a:t>
+            </a:r>
+          </a:p>
+          <a:p>
+            <a:pPr/>
+            <a:r>
+              <a:rPr sz="1300" b="1">
+                <a:solidFill>
+                  <a:srgbClr val="0065BD"/>
                 </a:solidFill>
               </a:rPr>
-              <a:t>– MAC audit: upsample 8.2% · 12-block trunk 89.4% · head 2.4%; 99.7% of it is pointwise 1×1</a:t>
-            </a:r>
-          </a:p>
-          <a:p>
-            <a:pPr>
-              <a:spcAft>
-                <a:spcPts val="500"/>
-              </a:spcAft>
-            </a:pPr>
-            <a:r>
-              <a:rPr sz="1250">
-                <a:solidFill>
-                  <a:srgbClr val="0B0B0B"/>
+              <a:t>Goal: spend less compute where the content allows</a:t>
+            </a:r>
+          </a:p>
+          <a:p>
+            <a:pPr lvl="1"/>
+            <a:r>
+              <a:rPr sz="1100" b="0"/>
+              <a:t>target set with the group: 30–40% saved at ≤0.1 dB</a:t>
+            </a:r>
+          </a:p>
+          <a:p>
+            <a:pPr/>
+            <a:r>
+              <a:rPr sz="1300" b="1">
+                <a:solidFill>
+                  <a:srgbClr val="0065BD"/>
                 </a:solidFill>
               </a:rPr>
-              <a:t>• Goal: spend less on easy regions, keep quality at the released model's level</a:t>
-            </a:r>
-          </a:p>
-          <a:p>
-            <a:pPr lvl="1">
-              <a:spcAft>
-                <a:spcPts val="500"/>
-              </a:spcAft>
-            </a:pPr>
-            <a:r>
-              <a:rPr sz="1050">
-                <a:solidFill>
-                  <a:srgbClr val="52514E"/>
-                </a:solidFill>
-              </a:rPr>
-              <a:t>– Target set by the group: 30–40% decoder compute saved at ≤0.1 dB</a:t>
-            </a:r>
-          </a:p>
-          <a:p>
-            <a:pPr>
-              <a:spcAft>
-                <a:spcPts val="500"/>
-              </a:spcAft>
-            </a:pPr>
-            <a:r>
-              <a:rPr sz="1250">
-                <a:solidFill>
-                  <a:srgbClr val="0B0B0B"/>
-                </a:solidFill>
-              </a:rPr>
-              <a:t>• Constraint that shapes everything: the bitstream must not change</a:t>
-            </a:r>
-          </a:p>
-          <a:p>
-            <a:pPr lvl="1">
-              <a:spcAft>
-                <a:spcPts val="500"/>
-              </a:spcAft>
-            </a:pPr>
-            <a:r>
-              <a:rPr sz="1050">
-                <a:solidFill>
-                  <a:srgbClr val="52514E"/>
-                </a:solidFill>
-              </a:rPr>
-              <a:t>– Encoder, hyperprior and entropy model stay frozen — same latent, same bits, only synthesis differs</a:t>
-            </a:r>
-          </a:p>
-          <a:p>
-            <a:pPr lvl="1">
-              <a:spcAft>
-                <a:spcPts val="500"/>
-              </a:spcAft>
-            </a:pPr>
-            <a:r>
-              <a:rPr sz="1050">
-                <a:solidFill>
-                  <a:srgbClr val="52514E"/>
-                </a:solidFill>
-              </a:rPr>
-              <a:t>– So every number here is decoder-only and directly attributable</a:t>
+              <a:t>Constraint that shapes everything: the reference is the RELEASED model</a:t>
+            </a:r>
+          </a:p>
+          <a:p>
+            <a:pPr lvl="1"/>
+            <a:r>
+              <a:rPr sz="1100" b="0"/>
+              <a:t>encoder, hyperprior, entropy model frozen → identical bitstream</a:t>
+            </a:r>
+          </a:p>
+          <a:p>
+            <a:pPr lvl="1"/>
+            <a:r>
+              <a:rPr sz="1100" b="0"/>
+              <a:t>so any measured difference is the decoder alone</a:t>
             </a:r>
           </a:p>
         </p:txBody>
       </p:sp>
       <p:pic>
         <p:nvPicPr>
-          <p:cNvPr id="5" name="Picture 4" descr="s_mac.png"/>
+          <p:cNvPr id="4" name="Picture 3" descr="fig_macs.png"/>
           <p:cNvPicPr>
             <a:picLocks noChangeAspect="1"/>
           </p:cNvPicPr>
@@ -4073,47 +3760,14 @@
         </p:blipFill>
         <p:spPr>
           <a:xfrm>
-            <a:off x="5120640" y="2194560"/>
-            <a:ext cx="3703320" cy="2518258"/>
+            <a:off x="878681" y="4160520"/>
+            <a:ext cx="7386638" cy="2148840"/>
           </a:xfrm>
           <a:prstGeom prst="rect">
             <a:avLst/>
           </a:prstGeom>
         </p:spPr>
       </p:pic>
-      <p:sp>
-        <p:nvSpPr>
-          <p:cNvPr id="6" name="TextBox 5"/>
-          <p:cNvSpPr txBox="1"/>
-          <p:nvPr/>
-        </p:nvSpPr>
-        <p:spPr>
-          <a:xfrm>
-            <a:off x="502920" y="6144768"/>
-            <a:ext cx="8138160" cy="384048"/>
-          </a:xfrm>
-          <a:prstGeom prst="rect">
-            <a:avLst/>
-          </a:prstGeom>
-          <a:noFill/>
-        </p:spPr>
-        <p:txBody>
-          <a:bodyPr wrap="square">
-            <a:spAutoFit/>
-          </a:bodyPr>
-          <a:lstStyle/>
-          <a:p>
-            <a:r>
-              <a:rPr sz="1050" i="1">
-                <a:solidFill>
-                  <a:srgbClr val="52514E"/>
-                </a:solidFill>
-              </a:rPr>
-              <a:t>All measurements: CTC sequences (UVG + HEVC class E). Classes B/C/D are behind JVET credentials and are reported as NOT MEASURED.</a:t>
-            </a:r>
-          </a:p>
-        </p:txBody>
-      </p:sp>
     </p:spTree>
   </p:cSld>
   <p:clrMapOvr>
@@ -4148,8 +3802,7 @@
           <a:lstStyle/>
           <a:p>
             <a:r>
-              <a:rPr sz="2400"/>
-              <a:t>Architecture: a ladder of exits</a:t>
+              <a:t>Architecture: a ladder of exits over the trunk</a:t>
             </a:r>
           </a:p>
         </p:txBody>
@@ -4164,11 +3817,40 @@
             <p:ph idx="1"/>
           </p:nvPr>
         </p:nvSpPr>
-        <p:spPr/>
+        <p:spPr>
+          <a:xfrm>
+            <a:off x="0" y="1234440"/>
+            <a:ext cx="0" cy="1463040"/>
+          </a:xfrm>
+        </p:spPr>
         <p:txBody>
           <a:bodyPr/>
           <a:lstStyle/>
-          <a:p/>
+          <a:p>
+            <a:pPr/>
+            <a:r>
+              <a:rPr sz="1300" b="1">
+                <a:solidFill>
+                  <a:srgbClr val="0065BD"/>
+                </a:solidFill>
+              </a:rPr>
+              <a:t>Shared stem runs full-frame → no seams; the rest runs per tile</a:t>
+            </a:r>
+          </a:p>
+          <a:p>
+            <a:pPr/>
+            <a:r>
+              <a:rPr sz="1300" b="0"/>
+              <a:t>Each exit has a zero-initialised 1×1 adapter, then the shared head</a:t>
+            </a:r>
+          </a:p>
+          <a:p>
+            <a:pPr/>
+            <a:r>
+              <a:rPr sz="1300" b="0"/>
+              <a:t>Pointwise on purpose: a 1×1 adds no receptive field, so no seam cost</a:t>
+            </a:r>
+          </a:p>
         </p:txBody>
       </p:sp>
       <p:pic>
@@ -4187,82 +3869,14 @@
         </p:blipFill>
         <p:spPr>
           <a:xfrm>
-            <a:off x="320040" y="1234440"/>
-            <a:ext cx="8503920" cy="2204720"/>
+            <a:off x="411480" y="3017520"/>
+            <a:ext cx="8321040" cy="2157306"/>
           </a:xfrm>
           <a:prstGeom prst="rect">
             <a:avLst/>
           </a:prstGeom>
         </p:spPr>
       </p:pic>
-      <p:sp>
-        <p:nvSpPr>
-          <p:cNvPr id="5" name="TextBox 4"/>
-          <p:cNvSpPr txBox="1"/>
-          <p:nvPr/>
-        </p:nvSpPr>
-        <p:spPr>
-          <a:xfrm>
-            <a:off x="640080" y="4160520"/>
-            <a:ext cx="7863840" cy="1828800"/>
-          </a:xfrm>
-          <a:prstGeom prst="rect">
-            <a:avLst/>
-          </a:prstGeom>
-          <a:noFill/>
-        </p:spPr>
-        <p:txBody>
-          <a:bodyPr wrap="square">
-            <a:spAutoFit/>
-          </a:bodyPr>
-          <a:lstStyle/>
-          <a:p>
-            <a:pPr>
-              <a:spcAft>
-                <a:spcPts val="500"/>
-              </a:spcAft>
-            </a:pPr>
-            <a:r>
-              <a:rPr sz="1300">
-                <a:solidFill>
-                  <a:srgbClr val="0B0B0B"/>
-                </a:solidFill>
-              </a:rPr>
-              <a:t>• Groups 0–1 run full-frame (no tile borders); groups 2–5 run per tile, each tile leaving at its own exit</a:t>
-            </a:r>
-          </a:p>
-          <a:p>
-            <a:pPr>
-              <a:spcAft>
-                <a:spcPts val="500"/>
-              </a:spcAft>
-            </a:pPr>
-            <a:r>
-              <a:rPr sz="1300">
-                <a:solidFill>
-                  <a:srgbClr val="0B0B0B"/>
-                </a:solidFill>
-              </a:rPr>
-              <a:t>• Per-exit adapter is 1×1 and zero-initialised — pointwise, so it adds no receptive field and no seam</a:t>
-            </a:r>
-          </a:p>
-          <a:p>
-            <a:pPr>
-              <a:spcAft>
-                <a:spcPts val="500"/>
-              </a:spcAft>
-            </a:pPr>
-            <a:r>
-              <a:rPr sz="1300">
-                <a:solidFill>
-                  <a:srgbClr val="0B0B0B"/>
-                </a:solidFill>
-              </a:rPr>
-              <a:t>• j = 2 gives a 43.4% ceiling: exiting at the earliest permitted group skips 6 of 12 blocks</a:t>
-            </a:r>
-          </a:p>
-        </p:txBody>
-      </p:sp>
     </p:spTree>
   </p:cSld>
   <p:clrMapOvr>
@@ -4297,7 +3911,6 @@
           <a:lstStyle/>
           <a:p>
             <a:r>
-              <a:rPr sz="2400"/>
               <a:t>We do not converge to DCVC-UF — we start at it</a:t>
             </a:r>
           </a:p>
@@ -4313,144 +3926,88 @@
             <p:ph idx="1"/>
           </p:nvPr>
         </p:nvSpPr>
-        <p:spPr/>
+        <p:spPr>
+          <a:xfrm>
+            <a:off x="0" y="1234440"/>
+            <a:ext cx="0" cy="1463040"/>
+          </a:xfrm>
+        </p:spPr>
         <p:txBody>
           <a:bodyPr/>
           <a:lstStyle/>
-          <a:p/>
-        </p:txBody>
-      </p:sp>
-      <p:sp>
-        <p:nvSpPr>
-          <p:cNvPr id="4" name="TextBox 3"/>
-          <p:cNvSpPr txBox="1"/>
-          <p:nvPr/>
-        </p:nvSpPr>
-        <p:spPr>
-          <a:xfrm>
-            <a:off x="502920" y="1371600"/>
-            <a:ext cx="4663440" cy="4663440"/>
-          </a:xfrm>
-          <a:prstGeom prst="rect">
-            <a:avLst/>
-          </a:prstGeom>
-          <a:noFill/>
-        </p:spPr>
-        <p:txBody>
-          <a:bodyPr wrap="square">
-            <a:spAutoFit/>
-          </a:bodyPr>
-          <a:lstStyle/>
-          <a:p>
-            <a:pPr>
-              <a:spcAft>
-                <a:spcPts val="500"/>
-              </a:spcAft>
-            </a:pPr>
-            <a:r>
-              <a:rPr sz="1200">
-                <a:solidFill>
-                  <a:srgbClr val="0B0B0B"/>
+          <a:p>
+            <a:pPr/>
+            <a:r>
+              <a:rPr sz="1200" b="1">
+                <a:solidFill>
+                  <a:srgbClr val="0065BD"/>
                 </a:solidFill>
               </a:rPr>
-              <a:t>• The released decoder's weights are re-indexed into the ladder: dec_1.0→upsample, dec_1.n→groups.g.i, dec_2→head</a:t>
-            </a:r>
-          </a:p>
-          <a:p>
-            <a:pPr lvl="1">
-              <a:spcAft>
-                <a:spcPts val="500"/>
-              </a:spcAft>
-            </a:pPr>
-            <a:r>
-              <a:rPr sz="1000">
-                <a:solidFill>
-                  <a:srgbClr val="52514E"/>
+              <a:t>The released weights are re-expressed in ladder form by a key remap</a:t>
+            </a:r>
+          </a:p>
+          <a:p>
+            <a:pPr lvl="1"/>
+            <a:r>
+              <a:rPr sz="1000" b="0"/>
+              <a:t>dec_1.0→upsample, dec_1.n→groups.g.i, dec_2→head</a:t>
+            </a:r>
+          </a:p>
+          <a:p>
+            <a:pPr lvl="1"/>
+            <a:r>
+              <a:rPr sz="1000" b="0"/>
+              <a:t>the remap is a bijection over 143 tensors (asserted in tests)</a:t>
+            </a:r>
+          </a:p>
+          <a:p>
+            <a:pPr/>
+            <a:r>
+              <a:rPr sz="1200" b="0"/>
+              <a:t>Adapters and seam repair are zero-init, i.e. the identity</a:t>
+            </a:r>
+          </a:p>
+          <a:p>
+            <a:pPr/>
+            <a:r>
+              <a:rPr sz="1200" b="1">
+                <a:solidFill>
+                  <a:srgbClr val="0065BD"/>
                 </a:solidFill>
               </a:rPr>
-              <a:t>– The key remap is asserted to be a bijection over all 143 tensors</a:t>
-            </a:r>
-          </a:p>
-          <a:p>
-            <a:pPr>
-              <a:spcAft>
-                <a:spcPts val="500"/>
-              </a:spcAft>
-            </a:pPr>
-            <a:r>
-              <a:rPr sz="1200">
-                <a:solidFill>
-                  <a:srgbClr val="0B0B0B"/>
+              <a:t>So at step 0, with no training at all:</a:t>
+            </a:r>
+          </a:p>
+          <a:p>
+            <a:pPr lvl="1"/>
+            <a:r>
+              <a:rPr sz="1000" b="0"/>
+              <a:t>released DCVC-UF vs our deepest exit → max|diff| = 0.0</a:t>
+            </a:r>
+          </a:p>
+          <a:p>
+            <a:pPr/>
+            <a:r>
+              <a:rPr sz="1200" b="1">
+                <a:solidFill>
+                  <a:srgbClr val="0065BD"/>
                 </a:solidFill>
               </a:rPr>
-              <a:t>• Adapters and seam repair are zero-initialised, i.e. exactly the identity</a:t>
-            </a:r>
-          </a:p>
-          <a:p>
-            <a:pPr>
-              <a:spcAft>
-                <a:spcPts val="500"/>
-              </a:spcAft>
-            </a:pPr>
-            <a:r>
-              <a:rPr sz="1200">
-                <a:solidFill>
-                  <a:srgbClr val="0B0B0B"/>
-                </a:solidFill>
-              </a:rPr>
-              <a:t>• Therefore at step 0, with no training at all:</a:t>
-            </a:r>
-          </a:p>
-          <a:p>
-            <a:pPr lvl="1">
-              <a:spcAft>
-                <a:spcPts val="500"/>
-              </a:spcAft>
-            </a:pPr>
-            <a:r>
-              <a:rPr sz="1000">
-                <a:solidFill>
-                  <a:srgbClr val="52514E"/>
-                </a:solidFill>
-              </a:rPr>
-              <a:t>– released DCVC-UF vs our deepest exit  →  max|diff| = 0.0</a:t>
-            </a:r>
-          </a:p>
-          <a:p>
-            <a:pPr>
-              <a:spcAft>
-                <a:spcPts val="500"/>
-              </a:spcAft>
-            </a:pPr>
-            <a:r>
-              <a:rPr sz="1200">
-                <a:solidFill>
-                  <a:srgbClr val="0B0B0B"/>
-                </a:solidFill>
-              </a:rPr>
-              <a:t>• Training's job is not to reach DCVC-UF. It is to (a) lift the shallow exits, (b) not damage the deepest one</a:t>
-            </a:r>
-          </a:p>
-          <a:p>
-            <a:pPr lvl="1">
-              <a:spcAft>
-                <a:spcPts val="500"/>
-              </a:spcAft>
-            </a:pPr>
-            <a:r>
-              <a:rPr sz="1000">
-                <a:solidFill>
-                  <a:srgbClr val="52514E"/>
-                </a:solidFill>
-              </a:rPr>
-              <a:t>– From-scratch runs had to reach 105 epochs from nothing; after 6 they were 1.49 dB short and were shelved</a:t>
+              <a:t>Training does not have to reach DCVC-UF. It has to (a) lift the shallow exits and (b) not damage the deepest one.</a:t>
+            </a:r>
+          </a:p>
+          <a:p>
+            <a:pPr/>
+            <a:r>
+              <a:rPr sz="1200" b="0"/>
+              <a:t>From-scratch runs were abandoned for exactly this: after 6 epochs their anchor sat 1.49 dB below the release and was not closing.</a:t>
             </a:r>
           </a:p>
         </p:txBody>
       </p:sp>
       <p:pic>
         <p:nvPicPr>
-          <p:cNvPr id="5" name="Picture 4" descr="s_exact.png"/>
+          <p:cNvPr id="4" name="Picture 3" descr="fig_warmstart.png"/>
           <p:cNvPicPr>
             <a:picLocks noChangeAspect="1"/>
           </p:cNvPicPr>
@@ -4464,47 +4021,14 @@
         </p:blipFill>
         <p:spPr>
           <a:xfrm>
-            <a:off x="5120640" y="2194560"/>
-            <a:ext cx="3703320" cy="2370125"/>
+            <a:off x="1351893" y="4343400"/>
+            <a:ext cx="6440214" cy="1965960"/>
           </a:xfrm>
           <a:prstGeom prst="rect">
             <a:avLst/>
           </a:prstGeom>
         </p:spPr>
       </p:pic>
-      <p:sp>
-        <p:nvSpPr>
-          <p:cNvPr id="6" name="TextBox 5"/>
-          <p:cNvSpPr txBox="1"/>
-          <p:nvPr/>
-        </p:nvSpPr>
-        <p:spPr>
-          <a:xfrm>
-            <a:off x="502920" y="6144768"/>
-            <a:ext cx="8138160" cy="384048"/>
-          </a:xfrm>
-          <a:prstGeom prst="rect">
-            <a:avLst/>
-          </a:prstGeom>
-          <a:noFill/>
-        </p:spPr>
-        <p:txBody>
-          <a:bodyPr wrap="square">
-            <a:spAutoFit/>
-          </a:bodyPr>
-          <a:lstStyle/>
-          <a:p>
-            <a:r>
-              <a:rPr sz="1050" i="1">
-                <a:solidFill>
-                  <a:srgbClr val="52514E"/>
-                </a:solidFill>
-              </a:rPr>
-              <a:t>Zero-tolerance controls run on every commit: 8 properties at max|diff| = 0.0, including j=K reproducing the full decode.</a:t>
-            </a:r>
-          </a:p>
-        </p:txBody>
-      </p:sp>
     </p:spTree>
   </p:cSld>
   <p:clrMapOvr>
@@ -4539,8 +4063,7 @@
           <a:lstStyle/>
           <a:p>
             <a:r>
-              <a:rPr sz="2400"/>
-              <a:t>Training: Microsoft's recipe, verified item by item</a:t>
+              <a:t>Training — Microsoft's recipe, checked rather than claimed</a:t>
             </a:r>
           </a:p>
         </p:txBody>
@@ -4555,159 +4078,95 @@
             <p:ph idx="1"/>
           </p:nvPr>
         </p:nvSpPr>
-        <p:spPr/>
+        <p:spPr>
+          <a:xfrm>
+            <a:off x="0" y="1234440"/>
+            <a:ext cx="0" cy="1463040"/>
+          </a:xfrm>
+        </p:spPr>
         <p:txBody>
           <a:bodyPr/>
           <a:lstStyle/>
-          <a:p/>
-        </p:txBody>
-      </p:sp>
-      <p:sp>
-        <p:nvSpPr>
-          <p:cNvPr id="4" name="TextBox 3"/>
-          <p:cNvSpPr txBox="1"/>
-          <p:nvPr/>
-        </p:nvSpPr>
-        <p:spPr>
-          <a:xfrm>
-            <a:off x="502920" y="1371600"/>
-            <a:ext cx="4663440" cy="4663440"/>
-          </a:xfrm>
-          <a:prstGeom prst="rect">
-            <a:avLst/>
-          </a:prstGeom>
-          <a:noFill/>
-        </p:spPr>
-        <p:txBody>
-          <a:bodyPr wrap="square">
-            <a:spAutoFit/>
-          </a:bodyPr>
-          <a:lstStyle/>
-          <a:p>
-            <a:pPr>
-              <a:spcAft>
-                <a:spcPts val="500"/>
-              </a:spcAft>
-            </a:pPr>
-            <a:r>
-              <a:rPr sz="1150">
-                <a:solidFill>
-                  <a:srgbClr val="0B0B0B"/>
+          <a:p>
+            <a:pPr/>
+            <a:r>
+              <a:rPr sz="1100" b="1">
+                <a:solidFill>
+                  <a:srgbClr val="0065BD"/>
                 </a:solidFill>
               </a:rPr>
-              <a:t>• scripts/verify_recipe.py compares each item against ~/DCVC/train_image.py and exits non-zero on a mismatch</a:t>
-            </a:r>
-          </a:p>
-          <a:p>
-            <a:pPr lvl="1">
-              <a:spcAft>
-                <a:spcPts val="500"/>
-              </a:spcAft>
-            </a:pPr>
-            <a:r>
-              <a:rPr sz="950">
-                <a:solidFill>
-                  <a:srgbClr val="52514E"/>
+              <a:t>scripts/verify_recipe.py compares each item against ~/DCVC/train_image.py and exits non-zero on a mismatch</a:t>
+            </a:r>
+          </a:p>
+          <a:p>
+            <a:pPr lvl="1"/>
+            <a:r>
+              <a:rPr sz="900" b="0"/>
+              <a:t>8 schedule rows character for character · 106 entries</a:t>
+            </a:r>
+          </a:p>
+          <a:p>
+            <a:pPr lvl="1"/>
+            <a:r>
+              <a:rPr sz="900" b="0"/>
+              <a:t>AdamW 1e-4 · clip_grad_norm 0.1 · non-finite batch skipped</a:t>
+            </a:r>
+          </a:p>
+          <a:p>
+            <a:pPr lvl="1"/>
+            <a:r>
+              <a:rPr sz="900" b="0"/>
+              <a:t>ImageFolder + get_training_lambdas · 64 QP levels</a:t>
+            </a:r>
+          </a:p>
+          <a:p>
+            <a:pPr lvl="1"/>
+            <a:r>
+              <a:rPr sz="900" b="0"/>
+              <a:t>encoder identical over 74 tensors · 255 shared tensors, no shape change</a:t>
+            </a:r>
+          </a:p>
+          <a:p>
+            <a:pPr/>
+            <a:r>
+              <a:rPr sz="1100" b="1">
+                <a:solidFill>
+                  <a:srgbClr val="0065BD"/>
                 </a:solidFill>
               </a:rPr>
-              <a:t>– schedule rows character-for-character · 106 entries · AdamW 1e-4 · clip 0.1 with non-finite skip</a:t>
-            </a:r>
-          </a:p>
-          <a:p>
-            <a:pPr lvl="1">
-              <a:spcAft>
-                <a:spcPts val="500"/>
-              </a:spcAft>
-            </a:pPr>
-            <a:r>
-              <a:rPr sz="950">
-                <a:solidFill>
-                  <a:srgbClr val="52514E"/>
+              <a:t>Deliberate additions, listed rather than hidden:</a:t>
+            </a:r>
+          </a:p>
+          <a:p>
+            <a:pPr lvl="1"/>
+            <a:r>
+              <a:rPr sz="900" b="0"/>
+              <a:t>--epoch_offset (read the schedule where a warm start actually is)</a:t>
+            </a:r>
+          </a:p>
+          <a:p>
+            <a:pPr lvl="1"/>
+            <a:r>
+              <a:rPr sz="900" b="0"/>
+              <a:t>--anchor_weight, --new_lr_scale, --freeze_encoder</a:t>
+            </a:r>
+          </a:p>
+          <a:p>
+            <a:pPr/>
+            <a:r>
+              <a:rPr sz="1100" b="1">
+                <a:solidFill>
+                  <a:srgbClr val="0065BD"/>
                 </a:solidFill>
               </a:rPr>
-              <a:t>– ImageFolder + get_training_lambdas · 64 QP levels · encoder identical across 74 tensors · 255 shared tensors unchanged</a:t>
-            </a:r>
-          </a:p>
-          <a:p>
-            <a:pPr>
-              <a:spcAft>
-                <a:spcPts val="500"/>
-              </a:spcAft>
-            </a:pPr>
-            <a:r>
-              <a:rPr sz="1150">
-                <a:solidFill>
-                  <a:srgbClr val="0B0B0B"/>
-                </a:solidFill>
-              </a:rPr>
-              <a:t>• Stated additions, not hidden: --epoch_offset, --anchor_weight, --new_lr_scale, --freeze_encoder</a:t>
-            </a:r>
-          </a:p>
-          <a:p>
-            <a:pPr>
-              <a:spcAft>
-                <a:spcPts val="500"/>
-              </a:spcAft>
-            </a:pPr>
-            <a:r>
-              <a:rPr sz="1150">
-                <a:solidFill>
-                  <a:srgbClr val="0B0B0B"/>
-                </a:solidFill>
-              </a:rPr>
-              <a:t>• Live runs, one question each:</a:t>
-            </a:r>
-          </a:p>
-          <a:p>
-            <a:pPr lvl="1">
-              <a:spcAft>
-                <a:spcPts val="500"/>
-              </a:spcAft>
-            </a:pPr>
-            <a:r>
-              <a:rPr sz="950">
-                <a:solidFill>
-                  <a:srgbClr val="52514E"/>
-                </a:solidFill>
-              </a:rPr>
-              <a:t>– VERBATIM — the recipe's final phase run in full (90→104), no additions at all</a:t>
-            </a:r>
-          </a:p>
-          <a:p>
-            <a:pPr lvl="1">
-              <a:spcAft>
-                <a:spcPts val="500"/>
-              </a:spcAft>
-            </a:pPr>
-            <a:r>
-              <a:rPr sz="950">
-                <a:solidFill>
-                  <a:srgbClr val="52514E"/>
-                </a:solidFill>
-              </a:rPr>
-              <a:t>– RECIPE512 — offset 99: the recipe's own 512px regime, so --min_crop is not needed</a:t>
-            </a:r>
-          </a:p>
-          <a:p>
-            <a:pPr lvl="1">
-              <a:spcAft>
-                <a:spcPts val="500"/>
-              </a:spcAft>
-            </a:pPr>
-            <a:r>
-              <a:rPr sz="950">
-                <a:solidFill>
-                  <a:srgbClr val="52514E"/>
-                </a:solidFill>
-              </a:rPr>
-              <a:t>– BEST / CONTROL — all measured winners vs none of them, single-variable</a:t>
+              <a:t>VERBATIM run: their final phase (epochs 90–104, 512px, lr 2e-4→1e-6) with NONE of those additions, effective batch 16 by accumulation</a:t>
             </a:r>
           </a:p>
         </p:txBody>
       </p:sp>
       <p:pic>
         <p:nvPicPr>
-          <p:cNvPr id="5" name="Picture 4" descr="s_recipe.png"/>
+          <p:cNvPr id="4" name="Picture 3" descr="fig_schedule.png"/>
           <p:cNvPicPr>
             <a:picLocks noChangeAspect="1"/>
           </p:cNvPicPr>
@@ -4721,47 +4180,14 @@
         </p:blipFill>
         <p:spPr>
           <a:xfrm>
-            <a:off x="5120640" y="1920240"/>
-            <a:ext cx="3703320" cy="2518258"/>
+            <a:off x="1051560" y="4434840"/>
+            <a:ext cx="7040880" cy="1920240"/>
           </a:xfrm>
           <a:prstGeom prst="rect">
             <a:avLst/>
           </a:prstGeom>
         </p:spPr>
       </p:pic>
-      <p:sp>
-        <p:nvSpPr>
-          <p:cNvPr id="6" name="TextBox 5"/>
-          <p:cNvSpPr txBox="1"/>
-          <p:nvPr/>
-        </p:nvSpPr>
-        <p:spPr>
-          <a:xfrm>
-            <a:off x="502920" y="6144768"/>
-            <a:ext cx="8138160" cy="384048"/>
-          </a:xfrm>
-          <a:prstGeom prst="rect">
-            <a:avLst/>
-          </a:prstGeom>
-          <a:noFill/>
-        </p:spPr>
-        <p:txBody>
-          <a:bodyPr wrap="square">
-            <a:spAutoFit/>
-          </a:bodyPr>
-          <a:lstStyle/>
-          <a:p>
-            <a:r>
-              <a:rPr sz="1050" i="1">
-                <a:solidFill>
-                  <a:srgbClr val="52514E"/>
-                </a:solidFill>
-              </a:rPr>
-              <a:t>Effective batch is kept at the recipe's 16 by gradient accumulation, since 512×512 at batch 16 does not fit one card.</a:t>
-            </a:r>
-          </a:p>
-        </p:txBody>
-      </p:sp>
     </p:spTree>
   </p:cSld>
   <p:clrMapOvr>
@@ -4796,8 +4222,7 @@
           <a:lstStyle/>
           <a:p>
             <a:r>
-              <a:rPr sz="2400"/>
-              <a:t>The anchor: a bug that would have cost a factor of four</a:t>
+              <a:t>The anchor: a bug that would have inflated everything ×4</a:t>
             </a:r>
           </a:p>
         </p:txBody>
@@ -4812,144 +4237,56 @@
             <p:ph idx="1"/>
           </p:nvPr>
         </p:nvSpPr>
-        <p:spPr/>
+        <p:spPr>
+          <a:xfrm>
+            <a:off x="0" y="1234440"/>
+            <a:ext cx="0" cy="1463040"/>
+          </a:xfrm>
+        </p:spPr>
         <p:txBody>
           <a:bodyPr/>
           <a:lstStyle/>
-          <a:p/>
-        </p:txBody>
-      </p:sp>
-      <p:sp>
-        <p:nvSpPr>
-          <p:cNvPr id="4" name="TextBox 3"/>
-          <p:cNvSpPr txBox="1"/>
-          <p:nvPr/>
-        </p:nvSpPr>
-        <p:spPr>
-          <a:xfrm>
-            <a:off x="502920" y="1371600"/>
-            <a:ext cx="4663440" cy="4663440"/>
-          </a:xfrm>
-          <a:prstGeom prst="rect">
-            <a:avLst/>
-          </a:prstGeom>
-          <a:noFill/>
-        </p:spPr>
-        <p:txBody>
-          <a:bodyPr wrap="square">
-            <a:spAutoFit/>
-          </a:bodyPr>
-          <a:lstStyle/>
-          <a:p>
-            <a:pPr>
-              <a:spcAft>
-                <a:spcPts val="500"/>
-              </a:spcAft>
-            </a:pPr>
-            <a:r>
-              <a:rPr sz="1150">
-                <a:solidFill>
-                  <a:srgbClr val="0B0B0B"/>
+          <a:p>
+            <a:pPr/>
+            <a:r>
+              <a:rPr sz="1300" b="1">
+                <a:solidFill>
+                  <a:srgbClr val="0065BD"/>
                 </a:solidFill>
               </a:rPr>
-              <a:t>• The schedule was copied verbatim but read from epoch 0 — its from-scratch 2e-4 applied to a converged model</a:t>
-            </a:r>
-          </a:p>
-          <a:p>
-            <a:pPr>
-              <a:spcAft>
-                <a:spcPts val="500"/>
-              </a:spcAft>
-            </a:pPr>
-            <a:r>
-              <a:rPr sz="1150">
-                <a:solidFill>
-                  <a:srgbClr val="0B0B0B"/>
+              <a:t>Reading the schedule from epoch 0 applied the from-scratch lr to a converged model</a:t>
+            </a:r>
+          </a:p>
+          <a:p>
+            <a:pPr lvl="1"/>
+            <a:r>
+              <a:rPr sz="1100" b="0"/>
+              <a:t>deepest exit fell 0.153 / 0.201 / 0.263 dB in ONE epoch (qp0/32/63)</a:t>
+            </a:r>
+          </a:p>
+          <a:p>
+            <a:pPr lvl="1"/>
+            <a:r>
+              <a:rPr sz="1100" b="0"/>
+              <a:t>fixed to 0.025 / 0.051 / 0.074 by --epoch_offset 75 + --anchor_weight</a:t>
+            </a:r>
+          </a:p>
+          <a:p>
+            <a:pPr/>
+            <a:r>
+              <a:rPr sz="1300" b="1">
+                <a:solidFill>
+                  <a:srgbClr val="0065BD"/>
                 </a:solidFill>
               </a:rPr>
-              <a:t>• Measured drift of the deepest exit from released DCVC-UF, after ONE epoch:</a:t>
-            </a:r>
-          </a:p>
-          <a:p>
-            <a:pPr lvl="1">
-              <a:spcAft>
-                <a:spcPts val="500"/>
-              </a:spcAft>
-            </a:pPr>
-            <a:r>
-              <a:rPr sz="950">
-                <a:solidFill>
-                  <a:srgbClr val="52514E"/>
-                </a:solidFill>
-              </a:rPr>
-              <a:t>– qp0 −0.153 · qp32 −0.201 · qp63 −0.263 dB</a:t>
-            </a:r>
-          </a:p>
-          <a:p>
-            <a:pPr>
-              <a:spcAft>
-                <a:spcPts val="500"/>
-              </a:spcAft>
-            </a:pPr>
-            <a:r>
-              <a:rPr sz="1150">
-                <a:solidFill>
-                  <a:srgbClr val="0B0B0B"/>
-                </a:solidFill>
-              </a:rPr>
-              <a:t>• Every saving figure is quoted as 'x% at y dB'. With that drift, y was understated by exactly that much</a:t>
-            </a:r>
-          </a:p>
-          <a:p>
-            <a:pPr lvl="1">
-              <a:spcAft>
-                <a:spcPts val="500"/>
-              </a:spcAft>
-            </a:pPr>
-            <a:r>
-              <a:rPr sz="950">
-                <a:solidFill>
-                  <a:srgbClr val="52514E"/>
-                </a:solidFill>
-              </a:rPr>
-              <a:t>– '37% at 0.1 dB' was really 37% at 0.29 dB against the published model</a:t>
-            </a:r>
-          </a:p>
-          <a:p>
-            <a:pPr>
-              <a:spcAft>
-                <a:spcPts val="500"/>
-              </a:spcAft>
-            </a:pPr>
-            <a:r>
-              <a:rPr sz="1150">
-                <a:solidFill>
-                  <a:srgbClr val="0B0B0B"/>
-                </a:solidFill>
-              </a:rPr>
-              <a:t>• Fix: read the schedule at the right place (offset 75/99/90) + pin the deepest exit by MSE to the release</a:t>
-            </a:r>
-          </a:p>
-          <a:p>
-            <a:pPr lvl="1">
-              <a:spcAft>
-                <a:spcPts val="500"/>
-              </a:spcAft>
-            </a:pPr>
-            <a:r>
-              <a:rPr sz="950">
-                <a:solidFill>
-                  <a:srgbClr val="52514E"/>
-                </a:solidFill>
-              </a:rPr>
-              <a:t>– drift now −0.025 / −0.051 / −0.074 dB, and 0.000 exactly when the backbone is frozen</a:t>
+              <a:t>Freezing the backbone gives exactly 0.000 — but collapses the ceiling from 27.3% to 11.5%, so training the trunk is mandatory</a:t>
             </a:r>
           </a:p>
         </p:txBody>
       </p:sp>
       <p:pic>
         <p:nvPicPr>
-          <p:cNvPr id="5" name="Picture 4" descr="s_anchor.png"/>
+          <p:cNvPr id="4" name="Picture 3" descr="fig_anchor.png"/>
           <p:cNvPicPr>
             <a:picLocks noChangeAspect="1"/>
           </p:cNvPicPr>
@@ -4963,47 +4300,14 @@
         </p:blipFill>
         <p:spPr>
           <a:xfrm>
-            <a:off x="5120640" y="2011680"/>
-            <a:ext cx="3703320" cy="2444191"/>
+            <a:off x="411480" y="3200400"/>
+            <a:ext cx="8321040" cy="2715286"/>
           </a:xfrm>
           <a:prstGeom prst="rect">
             <a:avLst/>
           </a:prstGeom>
         </p:spPr>
       </p:pic>
-      <p:sp>
-        <p:nvSpPr>
-          <p:cNvPr id="6" name="TextBox 5"/>
-          <p:cNvSpPr txBox="1"/>
-          <p:nvPr/>
-        </p:nvSpPr>
-        <p:spPr>
-          <a:xfrm>
-            <a:off x="502920" y="6144768"/>
-            <a:ext cx="8138160" cy="384048"/>
-          </a:xfrm>
-          <a:prstGeom prst="rect">
-            <a:avLst/>
-          </a:prstGeom>
-          <a:noFill/>
-        </p:spPr>
-        <p:txBody>
-          <a:bodyPr wrap="square">
-            <a:spAutoFit/>
-          </a:bodyPr>
-          <a:lstStyle/>
-          <a:p>
-            <a:r>
-              <a:rPr sz="1050" i="1">
-                <a:solidFill>
-                  <a:srgbClr val="52514E"/>
-                </a:solidFill>
-              </a:rPr>
-              <a:t>Freezing the backbone removes drift entirely but collapses the ceiling from 27.3% to 11.5% at qp0 — training the trunk is mandatory.</a:t>
-            </a:r>
-          </a:p>
-        </p:txBody>
-      </p:sp>
     </p:spTree>
   </p:cSld>
   <p:clrMapOvr>
@@ -5038,8 +4342,7 @@
           <a:lstStyle/>
           <a:p>
             <a:r>
-              <a:rPr sz="2400"/>
-              <a:t>What an early exit actually looks like</a:t>
+              <a:t>What an exit actually costs, on one frame</a:t>
             </a:r>
           </a:p>
         </p:txBody>
@@ -5054,11 +4357,33 @@
             <p:ph idx="1"/>
           </p:nvPr>
         </p:nvSpPr>
-        <p:spPr/>
+        <p:spPr>
+          <a:xfrm>
+            <a:off x="0" y="1234440"/>
+            <a:ext cx="0" cy="1463040"/>
+          </a:xfrm>
+        </p:spPr>
         <p:txBody>
           <a:bodyPr/>
           <a:lstStyle/>
-          <a:p/>
+          <a:p>
+            <a:pPr/>
+            <a:r>
+              <a:rPr sz="1300" b="1">
+                <a:solidFill>
+                  <a:srgbClr val="0065BD"/>
+                </a:solidFill>
+              </a:rPr>
+              <a:t>Bosphorus 1080p, qp32, identical bitstream at every exit</a:t>
+            </a:r>
+          </a:p>
+          <a:p>
+            <a:pPr/>
+            <a:r>
+              <a:rPr sz="1300" b="0"/>
+              <a:t>Error maps ×25: the damage is structured, concentrated on detail and on tile borders — which is what the seam work targets</a:t>
+            </a:r>
+          </a:p>
         </p:txBody>
       </p:sp>
       <p:pic>
@@ -5077,47 +4402,14 @@
         </p:blipFill>
         <p:spPr>
           <a:xfrm>
-            <a:off x="274320" y="1188720"/>
-            <a:ext cx="8595360" cy="3667354"/>
+            <a:off x="821531" y="2880360"/>
+            <a:ext cx="7500938" cy="3200400"/>
           </a:xfrm>
           <a:prstGeom prst="rect">
             <a:avLst/>
           </a:prstGeom>
         </p:spPr>
       </p:pic>
-      <p:sp>
-        <p:nvSpPr>
-          <p:cNvPr id="5" name="TextBox 4"/>
-          <p:cNvSpPr txBox="1"/>
-          <p:nvPr/>
-        </p:nvSpPr>
-        <p:spPr>
-          <a:xfrm>
-            <a:off x="502920" y="6144768"/>
-            <a:ext cx="8138160" cy="384048"/>
-          </a:xfrm>
-          <a:prstGeom prst="rect">
-            <a:avLst/>
-          </a:prstGeom>
-          <a:noFill/>
-        </p:spPr>
-        <p:txBody>
-          <a:bodyPr wrap="square">
-            <a:spAutoFit/>
-          </a:bodyPr>
-          <a:lstStyle/>
-          <a:p>
-            <a:r>
-              <a:rPr sz="1050" i="1">
-                <a:solidFill>
-                  <a:srgbClr val="52514E"/>
-                </a:solidFill>
-              </a:rPr>
-              <a:t>Bosphorus 1080p, qp32, identical bitstream. Error maps are against the released decoder, amplified ×25. The residual is concentrated on edges and on the tile grid — the two things the ladder has to pay for.</a:t>
-            </a:r>
-          </a:p>
-        </p:txBody>
-      </p:sp>
     </p:spTree>
   </p:cSld>
   <p:clrMapOvr>
@@ -5152,8 +4444,7 @@
           <a:lstStyle/>
           <a:p>
             <a:r>
-              <a:rPr sz="2400"/>
-              <a:t>The seam: the binding constraint, and its removal</a:t>
+              <a:t>The seam, and how it was removed</a:t>
             </a:r>
           </a:p>
         </p:txBody>
@@ -5168,159 +4459,103 @@
             <p:ph idx="1"/>
           </p:nvPr>
         </p:nvSpPr>
-        <p:spPr/>
+        <p:spPr>
+          <a:xfrm>
+            <a:off x="0" y="1234440"/>
+            <a:ext cx="0" cy="1463040"/>
+          </a:xfrm>
+        </p:spPr>
         <p:txBody>
           <a:bodyPr/>
           <a:lstStyle/>
-          <a:p/>
-        </p:txBody>
-      </p:sp>
-      <p:sp>
-        <p:nvSpPr>
-          <p:cNvPr id="4" name="TextBox 3"/>
-          <p:cNvSpPr txBox="1"/>
-          <p:nvPr/>
-        </p:nvSpPr>
-        <p:spPr>
-          <a:xfrm>
-            <a:off x="502920" y="1371600"/>
-            <a:ext cx="4663440" cy="4663440"/>
-          </a:xfrm>
-          <a:prstGeom prst="rect">
-            <a:avLst/>
-          </a:prstGeom>
-          <a:noFill/>
-        </p:spPr>
-        <p:txBody>
-          <a:bodyPr wrap="square">
-            <a:spAutoFit/>
-          </a:bodyPr>
-          <a:lstStyle/>
-          <a:p>
-            <a:pPr>
-              <a:spcAft>
-                <a:spcPts val="500"/>
-              </a:spcAft>
-            </a:pPr>
-            <a:r>
-              <a:rPr sz="1150">
-                <a:solidFill>
-                  <a:srgbClr val="0B0B0B"/>
+          <a:p>
+            <a:pPr/>
+            <a:r>
+              <a:rPr sz="1100" b="1">
+                <a:solidFill>
+                  <a:srgbClr val="0065BD"/>
                 </a:solidFill>
               </a:rPr>
-              <a:t>• A tile decoded alone meets its border with invented values; every 3×3 pushes that inward</a:t>
-            </a:r>
-          </a:p>
-          <a:p>
-            <a:pPr>
-              <a:spcAft>
-                <a:spcPts val="500"/>
-              </a:spcAft>
-            </a:pPr>
-            <a:r>
-              <a:rPr sz="1150">
-                <a:solidFill>
-                  <a:srgbClr val="0B0B0B"/>
+              <a:t>A tile decoded alone meets its border with invented values</a:t>
+            </a:r>
+          </a:p>
+          <a:p>
+            <a:pPr/>
+            <a:r>
+              <a:rPr sz="1100" b="1">
+                <a:solidFill>
+                  <a:srgbClr val="0065BD"/>
                 </a:solidFill>
               </a:rPr>
-              <a:t>• Pure seam penalty at qp63 (all tiles deepest exit, CTC native resolution):</a:t>
-            </a:r>
-          </a:p>
-          <a:p>
-            <a:pPr lvl="1">
-              <a:spcAft>
-                <a:spcPts val="500"/>
-              </a:spcAft>
-            </a:pPr>
-            <a:r>
-              <a:rPr sz="950">
-                <a:solidFill>
-                  <a:srgbClr val="52514E"/>
+              <a:t>Pure seam penalty at qp63, CTC, no early exit taken:</a:t>
+            </a:r>
+          </a:p>
+          <a:p>
+            <a:pPr lvl="1"/>
+            <a:r>
+              <a:rPr sz="900" b="0"/>
+              <a:t>zeros 1.167 dB · replicate 0.213 · arls 0.179 · 256px halves each</a:t>
+            </a:r>
+          </a:p>
+          <a:p>
+            <a:pPr/>
+            <a:r>
+              <a:rPr sz="1100" b="1">
+                <a:solidFill>
+                  <a:srgbClr val="0065BD"/>
                 </a:solidFill>
               </a:rPr>
-              <a:t>– zeros 1.167 · replicate 0.213 · arls 0.179 · 256px tile halves each of these</a:t>
-            </a:r>
-          </a:p>
-          <a:p>
-            <a:pPr>
-              <a:spcAft>
-                <a:spcPts val="500"/>
-              </a:spcAft>
-            </a:pPr>
-            <a:r>
-              <a:rPr sz="1150">
-                <a:solidFill>
-                  <a:srgbClr val="0B0B0B"/>
+              <a:t>arls (arXiv:2502.12300) was implemented, measured, and REJECTED</a:t>
+            </a:r>
+          </a:p>
+          <a:p>
+            <a:pPr lvl="1"/>
+            <a:r>
+              <a:rPr sz="900" b="0"/>
+              <a:t>+0.034 dB for +10.7% of decode wall-clock — a bad trade</a:t>
+            </a:r>
+          </a:p>
+          <a:p>
+            <a:pPr/>
+            <a:r>
+              <a:rPr sz="1100" b="1">
+                <a:solidFill>
+                  <a:srgbClr val="0065BD"/>
                 </a:solidFill>
               </a:rPr>
-              <a:t>• arls (arXiv:2502.12300) wins on dB and was still rejected: +10.7% of decode wall-clock for +0.034 dB</a:t>
-            </a:r>
-          </a:p>
-          <a:p>
-            <a:pPr lvl="1">
-              <a:spcAft>
-                <a:spcPts val="500"/>
-              </a:spcAft>
-            </a:pPr>
-            <a:r>
-              <a:rPr sz="950">
-                <a:solidFill>
-                  <a:srgbClr val="52514E"/>
+              <a:t>Canvas coupling: only the 3×3 depthwise has spatial extent — 0.334% of a block — so only it needs the neighbour</a:t>
+            </a:r>
+          </a:p>
+          <a:p>
+            <a:pPr lvl="1"/>
+            <a:r>
+              <a:rPr sz="900" b="0"/>
+              <a:t>cost +0.03% of the decode; earlier halo work paid 26% by haloing the whole block, which was the wrong thing to halo</a:t>
+            </a:r>
+          </a:p>
+          <a:p>
+            <a:pPr lvl="1"/>
+            <a:r>
+              <a:rPr sz="900" b="0"/>
+              <a:t>at uniform depth: full-frame vs tiled → max|diff| = 0.0</a:t>
+            </a:r>
+          </a:p>
+          <a:p>
+            <a:pPr/>
+            <a:r>
+              <a:rPr sz="1100" b="1">
+                <a:solidFill>
+                  <a:srgbClr val="0065BD"/>
                 </a:solidFill>
               </a:rPr>
-              <a:t>– measured, not assumed — the wrapper itself is free, the bill is genuinely the least-squares fit</a:t>
-            </a:r>
-          </a:p>
-          <a:p>
-            <a:pPr>
-              <a:spcAft>
-                <a:spcPts val="500"/>
-              </a:spcAft>
-            </a:pPr>
-            <a:r>
-              <a:rPr sz="1150">
-                <a:solidFill>
-                  <a:srgbClr val="0B0B0B"/>
-                </a:solidFill>
-              </a:rPr>
-              <a:t>• Canvas coupling: only the 3×3 depthwise has spatial extent — 0.334% of a block</a:t>
-            </a:r>
-          </a:p>
-          <a:p>
-            <a:pPr lvl="1">
-              <a:spcAft>
-                <a:spcPts val="500"/>
-              </a:spcAft>
-            </a:pPr>
-            <a:r>
-              <a:rPr sz="950">
-                <a:solidFill>
-                  <a:srgbClr val="52514E"/>
-                </a:solidFill>
-              </a:rPr>
-              <a:t>– giving just that one operator its real neighbours costs +0.03% of MACs</a:t>
-            </a:r>
-          </a:p>
-          <a:p>
-            <a:pPr lvl="1">
-              <a:spcAft>
-                <a:spcPts val="500"/>
-              </a:spcAft>
-            </a:pPr>
-            <a:r>
-              <a:rPr sz="950">
-                <a:solidFill>
-                  <a:srgbClr val="52514E"/>
-                </a:solidFill>
-              </a:rPr>
-              <a:t>– for tiles at the same depth the result is bit-exact the full-frame decode: max|diff| = 0.0</a:t>
+              <a:t>The seam does not shrink. It stops existing.</a:t>
             </a:r>
           </a:p>
         </p:txBody>
       </p:sp>
       <p:pic>
         <p:nvPicPr>
-          <p:cNvPr id="5" name="Picture 4" descr="s_seam.png"/>
+          <p:cNvPr id="4" name="Picture 3" descr="fig_seam.png"/>
           <p:cNvPicPr>
             <a:picLocks noChangeAspect="1"/>
           </p:cNvPicPr>
@@ -5334,47 +4569,14 @@
         </p:blipFill>
         <p:spPr>
           <a:xfrm>
-            <a:off x="5120640" y="2011680"/>
-            <a:ext cx="3703320" cy="2444191"/>
+            <a:off x="1629697" y="4434840"/>
+            <a:ext cx="5884606" cy="1920240"/>
           </a:xfrm>
           <a:prstGeom prst="rect">
             <a:avLst/>
           </a:prstGeom>
         </p:spPr>
       </p:pic>
-      <p:sp>
-        <p:nvSpPr>
-          <p:cNvPr id="6" name="TextBox 5"/>
-          <p:cNvSpPr txBox="1"/>
-          <p:nvPr/>
-        </p:nvSpPr>
-        <p:spPr>
-          <a:xfrm>
-            <a:off x="502920" y="6144768"/>
-            <a:ext cx="8138160" cy="384048"/>
-          </a:xfrm>
-          <a:prstGeom prst="rect">
-            <a:avLst/>
-          </a:prstGeom>
-          <a:noFill/>
-        </p:spPr>
-        <p:txBody>
-          <a:bodyPr wrap="square">
-            <a:spAutoFit/>
-          </a:bodyPr>
-          <a:lstStyle/>
-          <a:p>
-            <a:r>
-              <a:rPr sz="1050" i="1">
-                <a:solidFill>
-                  <a:srgbClr val="52514E"/>
-                </a:solidFill>
-              </a:rPr>
-              <a:t>This overturned an earlier decision of ours: the trunk halo had been rejected at 1.745× because the halo was applied to the whole block, not to the 0.334% that needs it.</a:t>
-            </a:r>
-          </a:p>
-        </p:txBody>
-      </p:sp>
     </p:spTree>
   </p:cSld>
   <p:clrMapOvr>
@@ -5409,8 +4611,7 @@
           <a:lstStyle/>
           <a:p>
             <a:r>
-              <a:rPr sz="2400"/>
-              <a:t>Does the headline percentage survive a clock?</a:t>
+              <a:t>Cost accounting, checked in the unit that matters</a:t>
             </a:r>
           </a:p>
         </p:txBody>
@@ -5425,16 +4626,81 @@
             <p:ph idx="1"/>
           </p:nvPr>
         </p:nvSpPr>
-        <p:spPr/>
+        <p:spPr>
+          <a:xfrm>
+            <a:off x="0" y="1234440"/>
+            <a:ext cx="0" cy="1463040"/>
+          </a:xfrm>
+        </p:spPr>
         <p:txBody>
           <a:bodyPr/>
           <a:lstStyle/>
-          <a:p/>
+          <a:p>
+            <a:pPr/>
+            <a:r>
+              <a:rPr sz="1200" b="1">
+                <a:solidFill>
+                  <a:srgbClr val="0065BD"/>
+                </a:solidFill>
+              </a:rPr>
+              <a:t>The headline is a percentage; it comes from a MAC model</a:t>
+            </a:r>
+          </a:p>
+          <a:p>
+            <a:pPr/>
+            <a:r>
+              <a:rPr sz="1200" b="1">
+                <a:solidFill>
+                  <a:srgbClr val="0065BD"/>
+                </a:solidFill>
+              </a:rPr>
+              <a:t>MACs are right for a paper and wrong for a promise, so wall-clock was measured on a 1080p decode:</a:t>
+            </a:r>
+          </a:p>
+          <a:p>
+            <a:pPr lvl="1"/>
+            <a:r>
+              <a:rPr sz="1000" b="0"/>
+              <a:t>exit 2: 43.4% (MAC) vs 43.6% (clock)</a:t>
+            </a:r>
+          </a:p>
+          <a:p>
+            <a:pPr lvl="1"/>
+            <a:r>
+              <a:rPr sz="1000" b="0"/>
+              <a:t>exit 3: 28.6% vs 28.8% · exit 4: 13.8% vs 14.9%</a:t>
+            </a:r>
+          </a:p>
+          <a:p>
+            <a:pPr/>
+            <a:r>
+              <a:rPr sz="1200" b="1">
+                <a:solidFill>
+                  <a:srgbClr val="0065BD"/>
+                </a:solidFill>
+              </a:rPr>
+              <a:t>Agreement within ±1 point at every exit</a:t>
+            </a:r>
+          </a:p>
+          <a:p>
+            <a:pPr/>
+            <a:r>
+              <a:rPr sz="1200" b="0"/>
+              <a:t>The same question caught arls: benefit in dB, bill in milliseconds</a:t>
+            </a:r>
+          </a:p>
+          <a:p>
+            <a:pPr/>
+            <a:r>
+              <a:rPr sz="1200" b="0"/>
+              <a:t>And the cost model itself is checked against the executed decode (tests/test_cost_matches_reality.py)</a:t>
+            </a:r>
+          </a:p>
         </p:txBody>
       </p:sp>
       <p:pic>
         <p:nvPicPr>
-          <p:cNvPr id="4" name="Picture 3" descr="report_best.png"/>
+          <p:cNvPr id="4" name="Picture 3" descr="fig_cost.png"/>
           <p:cNvPicPr>
             <a:picLocks noChangeAspect="1"/>
           </p:cNvPicPr>
@@ -5448,67 +4714,14 @@
         </p:blipFill>
         <p:spPr>
           <a:xfrm>
-            <a:off x="457200" y="1188720"/>
-            <a:ext cx="8229600" cy="5187142"/>
+            <a:off x="1279422" y="4160520"/>
+            <a:ext cx="6585155" cy="2148840"/>
           </a:xfrm>
           <a:prstGeom prst="rect">
             <a:avLst/>
           </a:prstGeom>
         </p:spPr>
       </p:pic>
-      <p:sp>
-        <p:nvSpPr>
-          <p:cNvPr id="5" name="TextBox 4"/>
-          <p:cNvSpPr txBox="1"/>
-          <p:nvPr/>
-        </p:nvSpPr>
-        <p:spPr>
-          <a:xfrm>
-            <a:off x="640080" y="5394960"/>
-            <a:ext cx="7863840" cy="914400"/>
-          </a:xfrm>
-          <a:prstGeom prst="rect">
-            <a:avLst/>
-          </a:prstGeom>
-          <a:noFill/>
-        </p:spPr>
-        <p:txBody>
-          <a:bodyPr wrap="square">
-            <a:spAutoFit/>
-          </a:bodyPr>
-          <a:lstStyle/>
-          <a:p>
-            <a:pPr>
-              <a:spcAft>
-                <a:spcPts val="500"/>
-              </a:spcAft>
-            </a:pPr>
-            <a:r>
-              <a:rPr sz="1200">
-                <a:solidFill>
-                  <a:srgbClr val="0B0B0B"/>
-                </a:solidFill>
-              </a:rPr>
-              <a:t>• MAC-model saving vs measured wall-clock, 1080p: 43.4/43.6 · 28.6/28.8 · 13.8/14.9 · 0.0/0.5</a:t>
-            </a:r>
-          </a:p>
-          <a:p>
-            <a:pPr>
-              <a:spcAft>
-                <a:spcPts val="500"/>
-              </a:spcAft>
-            </a:pPr>
-            <a:r>
-              <a:rPr sz="1200">
-                <a:solidFill>
-                  <a:srgbClr val="0B0B0B"/>
-                </a:solidFill>
-              </a:rPr>
-              <a:t>• Within ±1 point at every exit — the reported number is one a user would feel</a:t>
-            </a:r>
-          </a:p>
-        </p:txBody>
-      </p:sp>
     </p:spTree>
   </p:cSld>
   <p:clrMapOvr>

--- a/paper/FLEX-UF_LMT.pptx
+++ b/paper/FLEX-UF_LMT.pptx
@@ -3219,7 +3219,7 @@
           <a:lstStyle/>
           <a:p>
             <a:r>
-              <a:t>Results — against the released decoder, on CTC</a:t>
+              <a:t>Results vs the released decoder</a:t>
             </a:r>
           </a:p>
         </p:txBody>
@@ -3236,8 +3236,8 @@
         </p:nvSpPr>
         <p:spPr>
           <a:xfrm>
-            <a:off x="0" y="1234440"/>
-            <a:ext cx="0" cy="1463040"/>
+            <a:off x="508000" y="1417320"/>
+            <a:ext cx="8128000" cy="1290320"/>
           </a:xfrm>
         </p:spPr>
         <p:txBody>
@@ -3286,8 +3286,8 @@
         </p:blipFill>
         <p:spPr>
           <a:xfrm>
-            <a:off x="862649" y="3200400"/>
-            <a:ext cx="7418702" cy="3017520"/>
+            <a:off x="411480" y="2872232"/>
+            <a:ext cx="8321040" cy="3384541"/>
           </a:xfrm>
           <a:prstGeom prst="rect">
             <a:avLst/>
@@ -3328,7 +3328,7 @@
           <a:lstStyle/>
           <a:p>
             <a:r>
-              <a:t>The router: predicting failed, signalling works</a:t>
+              <a:t>Router: predicting failed, signalling works</a:t>
             </a:r>
           </a:p>
         </p:txBody>
@@ -3345,8 +3345,8 @@
         </p:nvSpPr>
         <p:spPr>
           <a:xfrm>
-            <a:off x="0" y="1234440"/>
-            <a:ext cx="0" cy="1463040"/>
+            <a:off x="508000" y="1417320"/>
+            <a:ext cx="8128000" cy="2331720"/>
           </a:xfrm>
         </p:spPr>
         <p:txBody>
@@ -3442,8 +3442,8 @@
         </p:blipFill>
         <p:spPr>
           <a:xfrm>
-            <a:off x="2292318" y="4434840"/>
-            <a:ext cx="4559364" cy="1920240"/>
+            <a:off x="1564991" y="3913631"/>
+            <a:ext cx="6014018" cy="2532888"/>
           </a:xfrm>
           <a:prstGeom prst="rect">
             <a:avLst/>
@@ -3501,8 +3501,8 @@
         </p:nvSpPr>
         <p:spPr>
           <a:xfrm>
-            <a:off x="0" y="1234440"/>
-            <a:ext cx="0" cy="1463040"/>
+            <a:off x="508000" y="1417320"/>
+            <a:ext cx="8128000" cy="2788920"/>
           </a:xfrm>
         </p:spPr>
         <p:txBody>
@@ -3608,8 +3608,8 @@
         </p:blipFill>
         <p:spPr>
           <a:xfrm>
-            <a:off x="1699753" y="4480560"/>
-            <a:ext cx="5744494" cy="1874519"/>
+            <a:off x="1391510" y="4370831"/>
+            <a:ext cx="6360979" cy="2075688"/>
           </a:xfrm>
           <a:prstGeom prst="rect">
             <a:avLst/>
@@ -3667,8 +3667,8 @@
         </p:nvSpPr>
         <p:spPr>
           <a:xfrm>
-            <a:off x="0" y="1234440"/>
-            <a:ext cx="0" cy="1463040"/>
+            <a:off x="508000" y="1417320"/>
+            <a:ext cx="8128000" cy="2306320"/>
           </a:xfrm>
         </p:spPr>
         <p:txBody>
@@ -3760,8 +3760,8 @@
         </p:blipFill>
         <p:spPr>
           <a:xfrm>
-            <a:off x="878681" y="4160520"/>
-            <a:ext cx="7386638" cy="2148840"/>
+            <a:off x="411480" y="3888231"/>
+            <a:ext cx="8321040" cy="2420666"/>
           </a:xfrm>
           <a:prstGeom prst="rect">
             <a:avLst/>
@@ -3802,7 +3802,7 @@
           <a:lstStyle/>
           <a:p>
             <a:r>
-              <a:t>Architecture: a ladder of exits over the trunk</a:t>
+              <a:t>Architecture: a ladder of exits</a:t>
             </a:r>
           </a:p>
         </p:txBody>
@@ -3819,8 +3819,8 @@
         </p:nvSpPr>
         <p:spPr>
           <a:xfrm>
-            <a:off x="0" y="1234440"/>
-            <a:ext cx="0" cy="1463040"/>
+            <a:off x="508000" y="1417320"/>
+            <a:ext cx="8128000" cy="1036320"/>
           </a:xfrm>
         </p:spPr>
         <p:txBody>
@@ -3869,7 +3869,7 @@
         </p:blipFill>
         <p:spPr>
           <a:xfrm>
-            <a:off x="411480" y="3017520"/>
+            <a:off x="411480" y="2618232"/>
             <a:ext cx="8321040" cy="2157306"/>
           </a:xfrm>
           <a:prstGeom prst="rect">
@@ -3911,7 +3911,7 @@
           <a:lstStyle/>
           <a:p>
             <a:r>
-              <a:t>We do not converge to DCVC-UF — we start at it</a:t>
+              <a:t>We start AT DCVC-UF, not near it</a:t>
             </a:r>
           </a:p>
         </p:txBody>
@@ -3928,8 +3928,8 @@
         </p:nvSpPr>
         <p:spPr>
           <a:xfrm>
-            <a:off x="0" y="1234440"/>
-            <a:ext cx="0" cy="1463040"/>
+            <a:off x="508000" y="1417320"/>
+            <a:ext cx="8128000" cy="2687320"/>
           </a:xfrm>
         </p:spPr>
         <p:txBody>
@@ -4021,8 +4021,8 @@
         </p:blipFill>
         <p:spPr>
           <a:xfrm>
-            <a:off x="1351893" y="4343400"/>
-            <a:ext cx="6440214" cy="1965960"/>
+            <a:off x="1005752" y="4269232"/>
+            <a:ext cx="7132495" cy="2177288"/>
           </a:xfrm>
           <a:prstGeom prst="rect">
             <a:avLst/>
@@ -4063,7 +4063,7 @@
           <a:lstStyle/>
           <a:p>
             <a:r>
-              <a:t>Training — Microsoft's recipe, checked rather than claimed</a:t>
+              <a:t>Training: the recipe, checked not claimed</a:t>
             </a:r>
           </a:p>
         </p:txBody>
@@ -4080,8 +4080,8 @@
         </p:nvSpPr>
         <p:spPr>
           <a:xfrm>
-            <a:off x="0" y="1234440"/>
-            <a:ext cx="0" cy="1463040"/>
+            <a:off x="508000" y="1417320"/>
+            <a:ext cx="8128000" cy="2788920"/>
           </a:xfrm>
         </p:spPr>
         <p:txBody>
@@ -4180,8 +4180,8 @@
         </p:blipFill>
         <p:spPr>
           <a:xfrm>
-            <a:off x="1051560" y="4434840"/>
-            <a:ext cx="7040880" cy="1920240"/>
+            <a:off x="766572" y="4370831"/>
+            <a:ext cx="7610856" cy="2075688"/>
           </a:xfrm>
           <a:prstGeom prst="rect">
             <a:avLst/>
@@ -4222,7 +4222,7 @@
           <a:lstStyle/>
           <a:p>
             <a:r>
-              <a:t>The anchor: a bug that would have inflated everything ×4</a:t>
+              <a:t>The anchor, and a ×4 error caught</a:t>
             </a:r>
           </a:p>
         </p:txBody>
@@ -4239,8 +4239,8 @@
         </p:nvSpPr>
         <p:spPr>
           <a:xfrm>
-            <a:off x="0" y="1234440"/>
-            <a:ext cx="0" cy="1463040"/>
+            <a:off x="508000" y="1417320"/>
+            <a:ext cx="8128000" cy="1798320"/>
           </a:xfrm>
         </p:spPr>
         <p:txBody>
@@ -4300,7 +4300,7 @@
         </p:blipFill>
         <p:spPr>
           <a:xfrm>
-            <a:off x="411480" y="3200400"/>
+            <a:off x="411480" y="3380232"/>
             <a:ext cx="8321040" cy="2715286"/>
           </a:xfrm>
           <a:prstGeom prst="rect">
@@ -4342,7 +4342,7 @@
           <a:lstStyle/>
           <a:p>
             <a:r>
-              <a:t>What an exit actually costs, on one frame</a:t>
+              <a:t>What an exit costs, on one frame</a:t>
             </a:r>
           </a:p>
         </p:txBody>
@@ -4359,8 +4359,8 @@
         </p:nvSpPr>
         <p:spPr>
           <a:xfrm>
-            <a:off x="0" y="1234440"/>
-            <a:ext cx="0" cy="1463040"/>
+            <a:off x="508000" y="1417320"/>
+            <a:ext cx="8128000" cy="1036320"/>
           </a:xfrm>
         </p:spPr>
         <p:txBody>
@@ -4402,8 +4402,8 @@
         </p:blipFill>
         <p:spPr>
           <a:xfrm>
-            <a:off x="821531" y="2880360"/>
-            <a:ext cx="7500938" cy="3200400"/>
+            <a:off x="411480" y="2618232"/>
+            <a:ext cx="8321040" cy="3550310"/>
           </a:xfrm>
           <a:prstGeom prst="rect">
             <a:avLst/>
@@ -4461,8 +4461,8 @@
         </p:nvSpPr>
         <p:spPr>
           <a:xfrm>
-            <a:off x="0" y="1234440"/>
-            <a:ext cx="0" cy="1463040"/>
+            <a:off x="508000" y="1417320"/>
+            <a:ext cx="8128000" cy="2560320"/>
           </a:xfrm>
         </p:spPr>
         <p:txBody>
@@ -4569,8 +4569,8 @@
         </p:blipFill>
         <p:spPr>
           <a:xfrm>
-            <a:off x="1629697" y="4434840"/>
-            <a:ext cx="5884606" cy="1920240"/>
+            <a:off x="1041236" y="4142231"/>
+            <a:ext cx="7061528" cy="2304288"/>
           </a:xfrm>
           <a:prstGeom prst="rect">
             <a:avLst/>
@@ -4611,7 +4611,7 @@
           <a:lstStyle/>
           <a:p>
             <a:r>
-              <a:t>Cost accounting, checked in the unit that matters</a:t>
+              <a:t>Cost, checked in the right unit</a:t>
             </a:r>
           </a:p>
         </p:txBody>
@@ -4628,8 +4628,8 @@
         </p:nvSpPr>
         <p:spPr>
           <a:xfrm>
-            <a:off x="0" y="1234440"/>
-            <a:ext cx="0" cy="1463040"/>
+            <a:off x="508000" y="1417320"/>
+            <a:ext cx="8128000" cy="2446020"/>
           </a:xfrm>
         </p:spPr>
         <p:txBody>
@@ -4714,8 +4714,8 @@
         </p:blipFill>
         <p:spPr>
           <a:xfrm>
-            <a:off x="1279422" y="4160520"/>
-            <a:ext cx="6585155" cy="2148840"/>
+            <a:off x="866099" y="4027931"/>
+            <a:ext cx="7411802" cy="2418588"/>
           </a:xfrm>
           <a:prstGeom prst="rect">
             <a:avLst/>

--- a/paper/FLEX-UF_LMT.pptx
+++ b/paper/FLEX-UF_LMT.pptx
@@ -3502,7 +3502,7 @@
         <p:spPr>
           <a:xfrm>
             <a:off x="508000" y="1417320"/>
-            <a:ext cx="8128000" cy="2788920"/>
+            <a:ext cx="8128000" cy="3017520"/>
           </a:xfrm>
         </p:spPr>
         <p:txBody>
@@ -3573,7 +3573,7 @@
             <a:pPr lvl="1"/>
             <a:r>
               <a:rPr sz="900" b="0"/>
-              <a:t>larger tiles cut the seam but also the adaptivity — being isolated now</a:t>
+              <a:t>256px tiles: seam halves but saving drops — isolated to the CHECKPOINT, not the tile size (tile effect 0.4–1.5 pts, weight effect 12.4)</a:t>
             </a:r>
           </a:p>
           <a:p>
@@ -3608,8 +3608,8 @@
         </p:blipFill>
         <p:spPr>
           <a:xfrm>
-            <a:off x="1391510" y="4370831"/>
-            <a:ext cx="6360979" cy="2075688"/>
+            <a:off x="1741784" y="4599431"/>
+            <a:ext cx="5660431" cy="1847088"/>
           </a:xfrm>
           <a:prstGeom prst="rect">
             <a:avLst/>

--- a/paper/FLEX-UF_LMT.pptx
+++ b/paper/FLEX-UF_LMT.pptx
@@ -3272,7 +3272,7 @@
       </p:sp>
       <p:pic>
         <p:nvPicPr>
-          <p:cNvPr id="4" name="Picture 3" descr="two_views.png"/>
+          <p:cNvPr id="4" name="Picture 3" descr="nf_results.png"/>
           <p:cNvPicPr>
             <a:picLocks noChangeAspect="1"/>
           </p:cNvPicPr>
@@ -3287,7 +3287,7 @@
         <p:spPr>
           <a:xfrm>
             <a:off x="411480" y="2872232"/>
-            <a:ext cx="8321040" cy="3384541"/>
+            <a:ext cx="8321040" cy="2902063"/>
           </a:xfrm>
           <a:prstGeom prst="rect">
             <a:avLst/>
@@ -3428,7 +3428,7 @@
       </p:sp>
       <p:pic>
         <p:nvPicPr>
-          <p:cNvPr id="4" name="Picture 3" descr="final_curve.png"/>
+          <p:cNvPr id="4" name="Picture 3" descr="nf_router.png"/>
           <p:cNvPicPr>
             <a:picLocks noChangeAspect="1"/>
           </p:cNvPicPr>
@@ -3442,8 +3442,8 @@
         </p:blipFill>
         <p:spPr>
           <a:xfrm>
-            <a:off x="1564991" y="3913631"/>
-            <a:ext cx="6014018" cy="2532888"/>
+            <a:off x="1975066" y="3913631"/>
+            <a:ext cx="5193867" cy="2532888"/>
           </a:xfrm>
           <a:prstGeom prst="rect">
             <a:avLst/>
@@ -3502,7 +3502,7 @@
         <p:spPr>
           <a:xfrm>
             <a:off x="508000" y="1417320"/>
-            <a:ext cx="8128000" cy="3017520"/>
+            <a:ext cx="8128000" cy="3246120"/>
           </a:xfrm>
         </p:spPr>
         <p:txBody>
@@ -3587,14 +3587,14 @@
             <a:pPr/>
             <a:r>
               <a:rPr sz="1100" b="0"/>
-              <a:t>4 runs training (BEST, CONTROL, RECIPE512, VERBATIM) on 4 GPUs</a:t>
+              <a:t>6 runs training on 6 GPUs: BEST, BEST128 (tile isolated), CONTROL, FINE12 (one exit per block), RECIPE512, VERBATIM</a:t>
             </a:r>
           </a:p>
         </p:txBody>
       </p:sp>
       <p:pic>
         <p:nvPicPr>
-          <p:cNvPr id="4" name="Picture 3" descr="fig_theory.png"/>
+          <p:cNvPr id="4" name="Picture 3" descr="nf_theory.png"/>
           <p:cNvPicPr>
             <a:picLocks noChangeAspect="1"/>
           </p:cNvPicPr>
@@ -3608,8 +3608,8 @@
         </p:blipFill>
         <p:spPr>
           <a:xfrm>
-            <a:off x="1741784" y="4599431"/>
-            <a:ext cx="5660431" cy="1847088"/>
+            <a:off x="2718474" y="4828031"/>
+            <a:ext cx="3707052" cy="1618488"/>
           </a:xfrm>
           <a:prstGeom prst="rect">
             <a:avLst/>
@@ -3746,7 +3746,7 @@
       </p:sp>
       <p:pic>
         <p:nvPicPr>
-          <p:cNvPr id="4" name="Picture 3" descr="fig_macs.png"/>
+          <p:cNvPr id="4" name="Picture 3" descr="nf_macs.png"/>
           <p:cNvPicPr>
             <a:picLocks noChangeAspect="1"/>
           </p:cNvPicPr>
@@ -3760,8 +3760,8 @@
         </p:blipFill>
         <p:spPr>
           <a:xfrm>
-            <a:off x="411480" y="3888231"/>
-            <a:ext cx="8321040" cy="2420666"/>
+            <a:off x="740869" y="3888231"/>
+            <a:ext cx="7662262" cy="2558288"/>
           </a:xfrm>
           <a:prstGeom prst="rect">
             <a:avLst/>
@@ -3855,7 +3855,7 @@
       </p:sp>
       <p:pic>
         <p:nvPicPr>
-          <p:cNvPr id="4" name="Picture 3" descr="fig_arch.png"/>
+          <p:cNvPr id="4" name="Picture 3" descr="nf_arch.png"/>
           <p:cNvPicPr>
             <a:picLocks noChangeAspect="1"/>
           </p:cNvPicPr>
@@ -3870,7 +3870,7 @@
         <p:spPr>
           <a:xfrm>
             <a:off x="411480" y="2618232"/>
-            <a:ext cx="8321040" cy="2157306"/>
+            <a:ext cx="8321039" cy="2012781"/>
           </a:xfrm>
           <a:prstGeom prst="rect">
             <a:avLst/>
@@ -4007,7 +4007,7 @@
       </p:sp>
       <p:pic>
         <p:nvPicPr>
-          <p:cNvPr id="4" name="Picture 3" descr="fig_warmstart.png"/>
+          <p:cNvPr id="4" name="Picture 3" descr="nf_warmstart.png"/>
           <p:cNvPicPr>
             <a:picLocks noChangeAspect="1"/>
           </p:cNvPicPr>
@@ -4021,8 +4021,8 @@
         </p:blipFill>
         <p:spPr>
           <a:xfrm>
-            <a:off x="1005752" y="4269232"/>
-            <a:ext cx="7132495" cy="2177288"/>
+            <a:off x="1651461" y="4269232"/>
+            <a:ext cx="5841078" cy="2177288"/>
           </a:xfrm>
           <a:prstGeom prst="rect">
             <a:avLst/>
@@ -4166,7 +4166,7 @@
       </p:sp>
       <p:pic>
         <p:nvPicPr>
-          <p:cNvPr id="4" name="Picture 3" descr="fig_schedule.png"/>
+          <p:cNvPr id="4" name="Picture 3" descr="nf_schedule.png"/>
           <p:cNvPicPr>
             <a:picLocks noChangeAspect="1"/>
           </p:cNvPicPr>
@@ -4180,8 +4180,8 @@
         </p:blipFill>
         <p:spPr>
           <a:xfrm>
-            <a:off x="766572" y="4370831"/>
-            <a:ext cx="7610856" cy="2075688"/>
+            <a:off x="1021581" y="4370831"/>
+            <a:ext cx="7100837" cy="2075688"/>
           </a:xfrm>
           <a:prstGeom prst="rect">
             <a:avLst/>
@@ -4286,7 +4286,7 @@
       </p:sp>
       <p:pic>
         <p:nvPicPr>
-          <p:cNvPr id="4" name="Picture 3" descr="fig_anchor.png"/>
+          <p:cNvPr id="4" name="Picture 3" descr="nf_anchor.png"/>
           <p:cNvPicPr>
             <a:picLocks noChangeAspect="1"/>
           </p:cNvPicPr>
@@ -4300,8 +4300,8 @@
         </p:blipFill>
         <p:spPr>
           <a:xfrm>
-            <a:off x="411480" y="3380232"/>
-            <a:ext cx="8321040" cy="2715286"/>
+            <a:off x="464689" y="3380232"/>
+            <a:ext cx="8214621" cy="3066287"/>
           </a:xfrm>
           <a:prstGeom prst="rect">
             <a:avLst/>
@@ -4388,7 +4388,7 @@
       </p:sp>
       <p:pic>
         <p:nvPicPr>
-          <p:cNvPr id="4" name="Picture 3" descr="fig_exits.png"/>
+          <p:cNvPr id="4" name="Picture 3" descr="nf_exits.png"/>
           <p:cNvPicPr>
             <a:picLocks noChangeAspect="1"/>
           </p:cNvPicPr>
@@ -4403,7 +4403,7 @@
         <p:spPr>
           <a:xfrm>
             <a:off x="411480" y="2618232"/>
-            <a:ext cx="8321040" cy="3550310"/>
+            <a:ext cx="8321040" cy="3671737"/>
           </a:xfrm>
           <a:prstGeom prst="rect">
             <a:avLst/>
@@ -4555,7 +4555,7 @@
       </p:sp>
       <p:pic>
         <p:nvPicPr>
-          <p:cNvPr id="4" name="Picture 3" descr="fig_seam.png"/>
+          <p:cNvPr id="4" name="Picture 3" descr="nf_seam.png"/>
           <p:cNvPicPr>
             <a:picLocks noChangeAspect="1"/>
           </p:cNvPicPr>
@@ -4569,8 +4569,8 @@
         </p:blipFill>
         <p:spPr>
           <a:xfrm>
-            <a:off x="1041236" y="4142231"/>
-            <a:ext cx="7061528" cy="2304288"/>
+            <a:off x="1680210" y="4142231"/>
+            <a:ext cx="5783580" cy="2304288"/>
           </a:xfrm>
           <a:prstGeom prst="rect">
             <a:avLst/>
@@ -4700,7 +4700,7 @@
       </p:sp>
       <p:pic>
         <p:nvPicPr>
-          <p:cNvPr id="4" name="Picture 3" descr="fig_cost.png"/>
+          <p:cNvPr id="4" name="Picture 3" descr="nf_cost.png"/>
           <p:cNvPicPr>
             <a:picLocks noChangeAspect="1"/>
           </p:cNvPicPr>
@@ -4714,8 +4714,8 @@
         </p:blipFill>
         <p:spPr>
           <a:xfrm>
-            <a:off x="866099" y="4027931"/>
-            <a:ext cx="7411802" cy="2418588"/>
+            <a:off x="1444258" y="4027931"/>
+            <a:ext cx="6255484" cy="2418588"/>
           </a:xfrm>
           <a:prstGeom prst="rect">
             <a:avLst/>

--- a/paper/FLEX-UF_LMT.pptx
+++ b/paper/FLEX-UF_LMT.pptx
@@ -3237,7 +3237,7 @@
         <p:spPr>
           <a:xfrm>
             <a:off x="508000" y="1417320"/>
-            <a:ext cx="8128000" cy="1290320"/>
+            <a:ext cx="8128000" cy="2306320"/>
           </a:xfrm>
         </p:spPr>
         <p:txBody>
@@ -3251,21 +3251,46 @@
                   <a:srgbClr val="0065BD"/>
                 </a:solidFill>
               </a:rPr>
-              <a:t>At 0.3 dB: 42% (qp0) · 35% (qp32) · 26% (qp63)</a:t>
+              <a:t>At 0.3 dB: 43% (qp0) · 39% (qp32) · 32% (qp63)</a:t>
             </a:r>
           </a:p>
           <a:p>
             <a:pPr/>
             <a:r>
               <a:rPr sz="1300" b="0"/>
-              <a:t>At 0.1 dB: 26% · 16% · 10%  — the 30–40% target is met at 0.3 dB, not at 0.1</a:t>
+              <a:t>At 0.1 dB: 33% · 24% · 16%</a:t>
             </a:r>
           </a:p>
           <a:p>
             <a:pPr/>
             <a:r>
               <a:rPr sz="1300" b="0"/>
-              <a:t>Saving falls with rate because early exit costs more there: the exit-2 penalty grows 3.4× from qp0 to qp63 as the latent carries more detail</a:t>
+              <a:t>The 30% target is cleared by qp 0/16 at 0.1 dB, and by every rate at 0.3 dB</a:t>
+            </a:r>
+          </a:p>
+          <a:p>
+            <a:pPr/>
+            <a:r>
+              <a:rPr sz="1300" b="0"/>
+              <a:t>Saving falls with rate because early exit costs more there: the exit-2 penalty grows 4.3× from qp0 to qp63 as the latent carries more detail</a:t>
+            </a:r>
+          </a:p>
+          <a:p>
+            <a:pPr/>
+            <a:r>
+              <a:rPr sz="1300" b="1">
+                <a:solidFill>
+                  <a:srgbClr val="0065BD"/>
+                </a:solidFill>
+              </a:rPr>
+              <a:t>Integrated over the curve, not read at one point:</a:t>
+            </a:r>
+          </a:p>
+          <a:p>
+            <a:pPr lvl="1"/>
+            <a:r>
+              <a:rPr sz="1100" b="0"/>
+              <a:t>BD-saving 31.2% over dB in [0.06, 0.30] (qp 0: 38% · 16: 36% · 32: 31% · 48: 27% · 63: 24%); BD-quality 0.084 dB over saving in [10%, 30%]</a:t>
             </a:r>
           </a:p>
         </p:txBody>
@@ -3286,8 +3311,8 @@
         </p:blipFill>
         <p:spPr>
           <a:xfrm>
-            <a:off x="411480" y="2872232"/>
-            <a:ext cx="8321040" cy="2902063"/>
+            <a:off x="904331" y="3888231"/>
+            <a:ext cx="7335338" cy="2558288"/>
           </a:xfrm>
           <a:prstGeom prst="rect">
             <a:avLst/>
@@ -3410,7 +3435,7 @@
             <a:pPr lvl="1"/>
             <a:r>
               <a:rPr sz="900" b="0"/>
-              <a:t>measured with the map's cost INSIDE the bitrate: 24.2 / 21.2 / 15.7 / 11.0 / 8.6% at qp0…63, all under 0.1 dB</a:t>
+              <a:t>measured with the map's cost INSIDE the bitrate: 24.2 / 21.2 / 15.7 / 11.0 / 8.6% at qp0…63, all under 0.09 dB</a:t>
             </a:r>
           </a:p>
           <a:p>
@@ -3548,7 +3573,7 @@
                   <a:srgbClr val="0065BD"/>
                 </a:solidFill>
               </a:rPr>
-              <a:t>Measured: Δ/J rises 0.68% → 4.52% with rate</a:t>
+              <a:t>Measured: Δ/J rises 0.91% → 6.86% with rate</a:t>
             </a:r>
           </a:p>
           <a:p>

--- a/paper/FLEX-UF_LMT.pptx
+++ b/paper/FLEX-UF_LMT.pptx
@@ -3290,7 +3290,7 @@
             <a:pPr lvl="1"/>
             <a:r>
               <a:rPr sz="1100" b="0"/>
-              <a:t>BD-saving 31.2% over dB in [0.06, 0.30] (qp 0: 38% · 16: 36% · 32: 31% · 48: 27% · 63: 24%); BD-quality 0.084 dB over saving in [10%, 30%]</a:t>
+              <a:t>BD-saving 31.2% over dB in [0.057, 0.300] (qp 0: 38% · 16: 36% · 32: 31% · 48: 27% · 63: 24%); BD-quality 0.084 dB over saving in [10%, 30%]</a:t>
             </a:r>
           </a:p>
         </p:txBody>

--- a/paper/FLEX-UF_LMT.pptx
+++ b/paper/FLEX-UF_LMT.pptx
@@ -3371,7 +3371,7 @@
         <p:spPr>
           <a:xfrm>
             <a:off x="508000" y="1417320"/>
-            <a:ext cx="8128000" cy="2331720"/>
+            <a:ext cx="8128000" cy="2560320"/>
           </a:xfrm>
         </p:spPr>
         <p:txBody>
@@ -3435,7 +3435,7 @@
             <a:pPr lvl="1"/>
             <a:r>
               <a:rPr sz="900" b="0"/>
-              <a:t>measured with the map's cost INSIDE the bitrate: 24.2 / 21.2 / 15.7 / 11.0 / 8.6% at qp0…63, all under 0.09 dB</a:t>
+              <a:t>measured with the map's cost INSIDE the bitrate: 28.3 / 24.8 / 18.7 / 14.3 / 10.8% at qp0…63, all under 0.10 dB (40 CTC sequences)</a:t>
             </a:r>
           </a:p>
           <a:p>
@@ -3467,8 +3467,8 @@
         </p:blipFill>
         <p:spPr>
           <a:xfrm>
-            <a:off x="1975066" y="3913631"/>
-            <a:ext cx="5193867" cy="2532888"/>
+            <a:off x="2209447" y="4142231"/>
+            <a:ext cx="4725106" cy="2304288"/>
           </a:xfrm>
           <a:prstGeom prst="rect">
             <a:avLst/>

--- a/paper/FLEX-UF_LMT.pptx
+++ b/paper/FLEX-UF_LMT.pptx
@@ -3237,7 +3237,7 @@
         <p:spPr>
           <a:xfrm>
             <a:off x="508000" y="1417320"/>
-            <a:ext cx="8128000" cy="2306320"/>
+            <a:ext cx="8128000" cy="3068319"/>
           </a:xfrm>
         </p:spPr>
         <p:txBody>
@@ -3251,21 +3251,28 @@
                   <a:srgbClr val="0065BD"/>
                 </a:solidFill>
               </a:rPr>
-              <a:t>At 0.3 dB: 43% (qp0) · 39% (qp32) · 32% (qp63)</a:t>
+              <a:t>At 0.3 dB: 42% (qp0) · 35% (qp32) · 28% (qp63)</a:t>
+            </a:r>
+          </a:p>
+          <a:p>
+            <a:pPr lvl="1"/>
+            <a:r>
+              <a:rPr sz="1100" b="0"/>
+              <a:t>dB is the per-frame average test_video.py computes — the convention every published DCVC-UF number uses. Pooling all tiles into one MSE reads 0.023–0.033 dB lower on the same allocation and would flatter these</a:t>
             </a:r>
           </a:p>
           <a:p>
             <a:pPr/>
             <a:r>
               <a:rPr sz="1300" b="0"/>
-              <a:t>At 0.1 dB: 33% · 24% · 16%</a:t>
+              <a:t>At 0.1 dB: 28% · 19% · 11%</a:t>
             </a:r>
           </a:p>
           <a:p>
             <a:pPr/>
             <a:r>
               <a:rPr sz="1300" b="0"/>
-              <a:t>The 30% target is cleared by qp 0/16 at 0.1 dB, and by every rate at 0.3 dB</a:t>
+              <a:t>The 30% target is cleared by no rate at 0.1 dB, and by qp 0/16/32/48 at 0.3 dB</a:t>
             </a:r>
           </a:p>
           <a:p>
@@ -3290,7 +3297,7 @@
             <a:pPr lvl="1"/>
             <a:r>
               <a:rPr sz="1100" b="0"/>
-              <a:t>BD-saving 31.2% over dB in [0.057, 0.300] (qp 0: 38% · 16: 36% · 32: 31% · 48: 27% · 63: 24%); BD-quality 0.084 dB over saving in [10%, 30%]</a:t>
+              <a:t>BD-saving 27.0% over dB in [0.064, 0.300] (qp 0: 35% · 16: 32% · 32: 26% · 48: 22% · 63: 19%); BD-quality 0.117 dB over saving in [10%, 30%]</a:t>
             </a:r>
           </a:p>
         </p:txBody>
@@ -3311,8 +3318,8 @@
         </p:blipFill>
         <p:spPr>
           <a:xfrm>
-            <a:off x="904331" y="3888231"/>
-            <a:ext cx="7335338" cy="2558288"/>
+            <a:off x="1996766" y="4650231"/>
+            <a:ext cx="5150468" cy="1796288"/>
           </a:xfrm>
           <a:prstGeom prst="rect">
             <a:avLst/>

--- a/paper/FLEX-UF_LMT.pptx
+++ b/paper/FLEX-UF_LMT.pptx
@@ -3534,7 +3534,7 @@
         <p:spPr>
           <a:xfrm>
             <a:off x="508000" y="1417320"/>
-            <a:ext cx="8128000" cy="3246120"/>
+            <a:ext cx="8128000" cy="3931920"/>
           </a:xfrm>
         </p:spPr>
         <p:txBody>
@@ -3591,6 +3591,17 @@
                   <a:srgbClr val="0065BD"/>
                 </a:solidFill>
               </a:rPr>
+              <a:t>Same mechanism one level up: at 0.1 dB the best CTC sequence saves 14.5× what the worst does at qp63, against 2.2× at qp0 — the mean is not what a clip gets</a:t>
+            </a:r>
+          </a:p>
+          <a:p>
+            <a:pPr/>
+            <a:r>
+              <a:rPr sz="1100" b="1">
+                <a:solidFill>
+                  <a:srgbClr val="0065BD"/>
+                </a:solidFill>
+              </a:rPr>
               <a:t>Open, and stated as open:</a:t>
             </a:r>
           </a:p>
@@ -3598,7 +3609,7 @@
             <a:pPr lvl="1"/>
             <a:r>
               <a:rPr sz="900" b="0"/>
-              <a:t>0.1 dB target not met; 0.3 dB comfortably met</a:t>
+              <a:t>The 30% target is cleared by no rate at 0.1 dB, and by qp 0/16/32/48 at 0.3 dB — asserted as 'comfortably met at 0.3 dB' until the dB convention was corrected, which is why it is computed here</a:t>
             </a:r>
           </a:p>
           <a:p>
@@ -3626,7 +3637,7 @@
       </p:sp>
       <p:pic>
         <p:nvPicPr>
-          <p:cNvPr id="4" name="Picture 3" descr="nf_theory.png"/>
+          <p:cNvPr id="4" name="Picture 3" descr="nf_heterogeneity.png"/>
           <p:cNvPicPr>
             <a:picLocks noChangeAspect="1"/>
           </p:cNvPicPr>
@@ -3640,8 +3651,8 @@
         </p:blipFill>
         <p:spPr>
           <a:xfrm>
-            <a:off x="2718474" y="4828031"/>
-            <a:ext cx="3707052" cy="1618488"/>
+            <a:off x="2853144" y="5513831"/>
+            <a:ext cx="3437712" cy="932688"/>
           </a:xfrm>
           <a:prstGeom prst="rect">
             <a:avLst/>

--- a/paper/FLEX-UF_LMT.pptx
+++ b/paper/FLEX-UF_LMT.pptx
@@ -3319,7 +3319,7 @@
         <p:spPr>
           <a:xfrm>
             <a:off x="1996766" y="4650231"/>
-            <a:ext cx="5150468" cy="1796288"/>
+            <a:ext cx="5150467" cy="1796288"/>
           </a:xfrm>
           <a:prstGeom prst="rect">
             <a:avLst/>
@@ -3534,7 +3534,7 @@
         <p:spPr>
           <a:xfrm>
             <a:off x="508000" y="1417320"/>
-            <a:ext cx="8128000" cy="3931920"/>
+            <a:ext cx="8128000" cy="3246120"/>
           </a:xfrm>
         </p:spPr>
         <p:txBody>
@@ -3555,14 +3555,7 @@
             <a:pPr lvl="1"/>
             <a:r>
               <a:rPr sz="900" b="0"/>
-              <a:t>fixed proportions reach exactly the convex hull of the K exit points</a:t>
-            </a:r>
-          </a:p>
-          <a:p>
-            <a:pPr lvl="1"/>
-            <a:r>
-              <a:rPr sz="900" b="0"/>
-              <a:t>per-tile assignment reaches the Minkowski average of the N tile hulls</a:t>
+              <a:t>fixed proportions reach the convex hull of the K exit points; per-tile assignment reaches the Minkowski average of the N tile hulls</a:t>
             </a:r>
           </a:p>
           <a:p>
@@ -3591,7 +3584,7 @@
                   <a:srgbClr val="0065BD"/>
                 </a:solidFill>
               </a:rPr>
-              <a:t>Same mechanism one level up: at 0.1 dB the best CTC sequence saves 14.5× what the worst does at qp63, against 2.2× at qp0 — the mean is not what a clip gets</a:t>
+              <a:t>Same mechanism one level up: best/worst CTC sequence is 14.5× at qp63 vs 2.2× at qp0 — the mean is not what a clip gets</a:t>
             </a:r>
           </a:p>
           <a:p>
@@ -3602,35 +3595,25 @@
                   <a:srgbClr val="0065BD"/>
                 </a:solidFill>
               </a:rPr>
-              <a:t>Open, and stated as open:</a:t>
+              <a:t>What is left, in the target's own units:</a:t>
             </a:r>
           </a:p>
           <a:p>
             <a:pPr lvl="1"/>
             <a:r>
               <a:rPr sz="900" b="0"/>
-              <a:t>The 30% target is cleared by no rate at 0.1 dB, and by qp 0/16/32/48 at 0.3 dB — asserted as 'comfortably met at 0.3 dB' until the dB convention was corrected, which is why it is computed here</a:t>
-            </a:r>
-          </a:p>
-          <a:p>
-            <a:pPr lvl="1"/>
-            <a:r>
-              <a:rPr sz="900" b="0"/>
-              <a:t>256px tiles: seam halves but saving drops — isolated to the CHECKPOINT, not the tile size (tile effect 0.4–1.5 pts, weight effect 12.4)</a:t>
-            </a:r>
-          </a:p>
-          <a:p>
-            <a:pPr lvl="1"/>
-            <a:r>
-              <a:rPr sz="900" b="0"/>
-              <a:t>HEVC classes B/C/D behind JVET credentials, reported as NOT MEASURED</a:t>
+              <a:t>30% costs 0.114 dB at qp0 (+0.014 over budget, 104% of it the anchor's floor) and 0.334 dB at qp63 (3.3× the budget, 27% floor) — low rate is a drift problem, high rate an exit-quality one</a:t>
             </a:r>
           </a:p>
           <a:p>
             <a:pPr/>
             <a:r>
-              <a:rPr sz="1100" b="0"/>
-              <a:t>6 runs training on 6 GPUs: BEST, BEST128 (tile isolated), CONTROL, FINE12 (one exit per block), RECIPE512, VERBATIM</a:t>
+              <a:rPr sz="1100" b="1">
+                <a:solidFill>
+                  <a:srgbClr val="0065BD"/>
+                </a:solidFill>
+              </a:rPr>
+              <a:t>Open: The 30% target is cleared by no rate at 0.1 dB, and by qp 0/16/32/48 at 0.3 dB; HEVC B/C/D behind JVET credentials, reported as NOT MEASURED; 6 runs training on 6 GPUs</a:t>
             </a:r>
           </a:p>
         </p:txBody>
@@ -3651,8 +3634,8 @@
         </p:blipFill>
         <p:spPr>
           <a:xfrm>
-            <a:off x="2853144" y="5513831"/>
-            <a:ext cx="3437712" cy="932688"/>
+            <a:off x="1589280" y="4828031"/>
+            <a:ext cx="5965440" cy="1618488"/>
           </a:xfrm>
           <a:prstGeom prst="rect">
             <a:avLst/>
@@ -3804,7 +3787,7 @@
         <p:spPr>
           <a:xfrm>
             <a:off x="740869" y="3888231"/>
-            <a:ext cx="7662262" cy="2558288"/>
+            <a:ext cx="7662261" cy="2558288"/>
           </a:xfrm>
           <a:prstGeom prst="rect">
             <a:avLst/>
@@ -3913,7 +3896,7 @@
         <p:spPr>
           <a:xfrm>
             <a:off x="411480" y="2618232"/>
-            <a:ext cx="8321039" cy="2012781"/>
+            <a:ext cx="8321040" cy="2012781"/>
           </a:xfrm>
           <a:prstGeom prst="rect">
             <a:avLst/>
@@ -4065,7 +4048,7 @@
         <p:spPr>
           <a:xfrm>
             <a:off x="1651461" y="4269232"/>
-            <a:ext cx="5841078" cy="2177288"/>
+            <a:ext cx="5841077" cy="2177288"/>
           </a:xfrm>
           <a:prstGeom prst="rect">
             <a:avLst/>
@@ -4343,8 +4326,8 @@
         </p:blipFill>
         <p:spPr>
           <a:xfrm>
-            <a:off x="464689" y="3380232"/>
-            <a:ext cx="8214621" cy="3066287"/>
+            <a:off x="464690" y="3380232"/>
+            <a:ext cx="8214620" cy="3066287"/>
           </a:xfrm>
           <a:prstGeom prst="rect">
             <a:avLst/>
@@ -4758,7 +4741,7 @@
         <p:spPr>
           <a:xfrm>
             <a:off x="1444258" y="4027931"/>
-            <a:ext cx="6255484" cy="2418588"/>
+            <a:ext cx="6255483" cy="2418588"/>
           </a:xfrm>
           <a:prstGeom prst="rect">
             <a:avLst/>

--- a/paper/FLEX-UF_LMT.pptx
+++ b/paper/FLEX-UF_LMT.pptx
@@ -3251,7 +3251,7 @@
                   <a:srgbClr val="0065BD"/>
                 </a:solidFill>
               </a:rPr>
-              <a:t>At 0.3 dB: 42% (qp0) · 35% (qp32) · 28% (qp63)</a:t>
+              <a:t>At 0.3 dB: ceiling 42% already at 0.20 dB (qp0) · 42% (qp32) · 36% (qp63)</a:t>
             </a:r>
           </a:p>
           <a:p>
@@ -3265,14 +3265,14 @@
             <a:pPr/>
             <a:r>
               <a:rPr sz="1300" b="0"/>
-              <a:t>At 0.1 dB: 28% · 19% · 11%</a:t>
+              <a:t>At 0.1 dB: 35% · 28% · 22%</a:t>
             </a:r>
           </a:p>
           <a:p>
             <a:pPr/>
             <a:r>
               <a:rPr sz="1300" b="0"/>
-              <a:t>The 30% target is cleared by no rate at 0.1 dB, and by qp 0/16/32/48 at 0.3 dB</a:t>
+              <a:t>The 30% target is cleared by qp 0/16 at 0.1 dB, and by qp 32/48/63 at 0.3 dB</a:t>
             </a:r>
           </a:p>
           <a:p>
@@ -3297,7 +3297,7 @@
             <a:pPr lvl="1"/>
             <a:r>
               <a:rPr sz="1100" b="0"/>
-              <a:t>BD-saving 27.0% over dB in [0.064, 0.300] (qp 0: 35% · 16: 32% · 32: 26% · 48: 22% · 63: 19%); BD-quality 0.117 dB over saving in [10%, 30%]</a:t>
+              <a:t>BD-saving 31.0% over dB in [0.066, 0.196] (qp 0: 38% · 16: 35% · 32: 31% · 48: 28% · 63: 24%); BD-quality 0.062 dB over saving in [10%, 30%]</a:t>
             </a:r>
           </a:p>
         </p:txBody>
@@ -3318,8 +3318,8 @@
         </p:blipFill>
         <p:spPr>
           <a:xfrm>
-            <a:off x="1996766" y="4650231"/>
-            <a:ext cx="5150467" cy="1796288"/>
+            <a:off x="1974590" y="4650231"/>
+            <a:ext cx="5194820" cy="1796288"/>
           </a:xfrm>
           <a:prstGeom prst="rect">
             <a:avLst/>
@@ -3442,7 +3442,7 @@
             <a:pPr lvl="1"/>
             <a:r>
               <a:rPr sz="900" b="0"/>
-              <a:t>measured with the map's cost INSIDE the bitrate: 28.3 / 24.8 / 18.7 / 14.3 / 10.8% at qp0…63, all under 0.10 dB (40 CTC sequences)</a:t>
+              <a:t>measured with the map's cost INSIDE the bitrate: 34.7 / 31.4 / 27.4 / 24.3 / 21.5% at qp0…63, all under 0.10 dB  (baseline 28.3 / 24.8 / 18.7 / 14.3 / 10.8) (40 CTC sequences)</a:t>
             </a:r>
           </a:p>
           <a:p>
@@ -3613,7 +3613,7 @@
                   <a:srgbClr val="0065BD"/>
                 </a:solidFill>
               </a:rPr>
-              <a:t>Open: The 30% target is cleared by no rate at 0.1 dB, and by qp 0/16/32/48 at 0.3 dB; HEVC B/C/D behind JVET credentials, reported as NOT MEASURED; 6 runs training on 6 GPUs</a:t>
+              <a:t>Open: The 30% target is cleared by qp 0/16 at 0.1 dB, and by qp 32/48/63 at 0.3 dB; HEVC B/C/D behind JVET credentials, reported as NOT MEASURED; 6 runs training on 6 GPUs</a:t>
             </a:r>
           </a:p>
         </p:txBody>

--- a/paper/FLEX-UF_LMT.pptx
+++ b/paper/FLEX-UF_LMT.pptx
@@ -3279,7 +3279,7 @@
             <a:pPr/>
             <a:r>
               <a:rPr sz="1300" b="0"/>
-              <a:t>Saving falls with rate because early exit costs more there: the exit-2 penalty grows 4.3× from qp0 to qp63 as the latent carries more detail</a:t>
+              <a:t>Saving falls with rate because early exit costs more there: the exit-2 penalty grows 3.3× from qp0 to qp63 as the latent carries more detail</a:t>
             </a:r>
           </a:p>
           <a:p>
@@ -3573,7 +3573,7 @@
                   <a:srgbClr val="0065BD"/>
                 </a:solidFill>
               </a:rPr>
-              <a:t>Measured: Δ/J rises 0.91% → 6.86% with rate</a:t>
+              <a:t>Measured: Δ/J rises 0.39% → 2.09% with rate</a:t>
             </a:r>
           </a:p>
           <a:p>
@@ -4655,7 +4655,7 @@
         <p:spPr>
           <a:xfrm>
             <a:off x="508000" y="1417320"/>
-            <a:ext cx="8128000" cy="2446020"/>
+            <a:ext cx="8128000" cy="3169919"/>
           </a:xfrm>
         </p:spPr>
         <p:txBody>
@@ -4680,7 +4680,7 @@
                   <a:srgbClr val="0065BD"/>
                 </a:solidFill>
               </a:rPr>
-              <a:t>MACs are right for a paper and wrong for a promise, so wall-clock was measured on a 1080p decode:</a:t>
+              <a:t>MACs are right for a paper and wrong for a promise, so wall-clock was measured on a 1080p decode — on the 128px ladder, which is where the timing was taken:</a:t>
             </a:r>
           </a:p>
           <a:p>
@@ -4695,6 +4695,13 @@
             <a:r>
               <a:rPr sz="1000" b="0"/>
               <a:t>exit 3: 28.6% vs 28.8% · exit 4: 13.8% vs 14.9%</a:t>
+            </a:r>
+          </a:p>
+          <a:p>
+            <a:pPr lvl="1"/>
+            <a:r>
+              <a:rPr sz="1000" b="0"/>
+              <a:t>BEST uses 256px tiles, where the MAC ceiling is 42.5% rather than 43.4% — the grid seam repair scales with the tile, so the exit costs shift slightly. The agreement being checked here is the model's, not this checkpoint's.</a:t>
             </a:r>
           </a:p>
           <a:p>
@@ -4740,8 +4747,8 @@
         </p:blipFill>
         <p:spPr>
           <a:xfrm>
-            <a:off x="1444258" y="4027931"/>
-            <a:ext cx="6255483" cy="2418588"/>
+            <a:off x="2380413" y="4751832"/>
+            <a:ext cx="4383174" cy="1694687"/>
           </a:xfrm>
           <a:prstGeom prst="rect">
             <a:avLst/>

--- a/paper/FLEX-UF_LMT.pptx
+++ b/paper/FLEX-UF_LMT.pptx
@@ -3584,7 +3584,7 @@
                   <a:srgbClr val="0065BD"/>
                 </a:solidFill>
               </a:rPr>
-              <a:t>Same mechanism one level up: best/worst CTC sequence is 14.5× at qp63 vs 2.2× at qp0 — the mean is not what a clip gets</a:t>
+              <a:t>Same mechanism one level up: best/worst CTC sequence is 3.8× at qp63 vs 1.5× at qp0 — the mean is not what a clip gets</a:t>
             </a:r>
           </a:p>
           <a:p>
@@ -3602,7 +3602,7 @@
             <a:pPr lvl="1"/>
             <a:r>
               <a:rPr sz="900" b="0"/>
-              <a:t>30% costs 0.114 dB at qp0 (+0.014 over budget, 104% of it the anchor's floor) and 0.334 dB at qp63 (3.3× the budget, 27% floor) — low rate is a drift problem, high rate an exit-quality one</a:t>
+              <a:t>30% target: met at qp0/16 — 30% costs at most 0.090 dB; still short at qp32/48/63; the furthest is qp63, needing 0.194 dB (1.9× the budget, 31% of the excess being the anchor's floor and the rest exit quality)</a:t>
             </a:r>
           </a:p>
           <a:p>
@@ -3634,8 +3634,8 @@
         </p:blipFill>
         <p:spPr>
           <a:xfrm>
-            <a:off x="1589280" y="4828031"/>
-            <a:ext cx="5965440" cy="1618488"/>
+            <a:off x="1594748" y="4828031"/>
+            <a:ext cx="5954504" cy="1618488"/>
           </a:xfrm>
           <a:prstGeom prst="rect">
             <a:avLst/>

--- a/paper/FLEX-UF_LMT.pptx
+++ b/paper/FLEX-UF_LMT.pptx
@@ -4047,8 +4047,8 @@
         </p:blipFill>
         <p:spPr>
           <a:xfrm>
-            <a:off x="1651461" y="4269232"/>
-            <a:ext cx="5841077" cy="2177288"/>
+            <a:off x="1640531" y="4269232"/>
+            <a:ext cx="5862938" cy="2177288"/>
           </a:xfrm>
           <a:prstGeom prst="rect">
             <a:avLst/>

--- a/paper/FLEX-UF_LMT.pptx
+++ b/paper/FLEX-UF_LMT.pptx
@@ -4107,7 +4107,7 @@
         <p:spPr>
           <a:xfrm>
             <a:off x="508000" y="1417320"/>
-            <a:ext cx="8128000" cy="2788920"/>
+            <a:ext cx="8128000" cy="3017520"/>
           </a:xfrm>
         </p:spPr>
         <p:txBody>
@@ -4150,6 +4150,17 @@
             <a:r>
               <a:rPr sz="900" b="0"/>
               <a:t>encoder identical over 74 tensors · 255 shared tensors, no shape change</a:t>
+            </a:r>
+          </a:p>
+          <a:p>
+            <a:pPr/>
+            <a:r>
+              <a:rPr sz="1100" b="1">
+                <a:solidFill>
+                  <a:srgbClr val="0065BD"/>
+                </a:solidFill>
+              </a:rPr>
+              <a:t>anchor comparison pending VERBATIM's measurement</a:t>
             </a:r>
           </a:p>
           <a:p>
@@ -4206,8 +4217,8 @@
         </p:blipFill>
         <p:spPr>
           <a:xfrm>
-            <a:off x="1021581" y="4370831"/>
-            <a:ext cx="7100837" cy="2075688"/>
+            <a:off x="1412597" y="4599431"/>
+            <a:ext cx="6318806" cy="1847088"/>
           </a:xfrm>
           <a:prstGeom prst="rect">
             <a:avLst/>

--- a/paper/FLEX-UF_LMT.pptx
+++ b/paper/FLEX-UF_LMT.pptx
@@ -4107,7 +4107,7 @@
         <p:spPr>
           <a:xfrm>
             <a:off x="508000" y="1417320"/>
-            <a:ext cx="8128000" cy="3017520"/>
+            <a:ext cx="8128000" cy="3703320"/>
           </a:xfrm>
         </p:spPr>
         <p:txBody>
@@ -4160,7 +4160,7 @@
                   <a:srgbClr val="0065BD"/>
                 </a:solidFill>
               </a:rPr>
-              <a:t>anchor comparison pending VERBATIM's measurement</a:t>
+              <a:t>Deepest exit vs the release, same tiles and same warm start: BEST -0.003 / -0.016 / -0.033 dB against VERBATIM's -0.146 / -0.153 / -0.217 dB at qp0/32/63. VERBATIM's drift alone is 2.2× the 0.1 dB budget, so the target is unreachable there at any saving — the anchor term is a precondition, not a refinement</a:t>
             </a:r>
           </a:p>
           <a:p>
@@ -4217,8 +4217,8 @@
         </p:blipFill>
         <p:spPr>
           <a:xfrm>
-            <a:off x="1412597" y="4599431"/>
-            <a:ext cx="6318806" cy="1847088"/>
+            <a:off x="2585642" y="5285231"/>
+            <a:ext cx="3972715" cy="1161288"/>
           </a:xfrm>
           <a:prstGeom prst="rect">
             <a:avLst/>

--- a/paper/FLEX-UF_LMT.pptx
+++ b/paper/FLEX-UF_LMT.pptx
@@ -4107,7 +4107,7 @@
         <p:spPr>
           <a:xfrm>
             <a:off x="508000" y="1417320"/>
-            <a:ext cx="8128000" cy="3703320"/>
+            <a:ext cx="8128000" cy="4389120"/>
           </a:xfrm>
         </p:spPr>
         <p:txBody>
@@ -4161,6 +4161,13 @@
                 </a:solidFill>
               </a:rPr>
               <a:t>Deepest exit vs the release, same tiles and same warm start: BEST -0.003 / -0.016 / -0.033 dB against VERBATIM's -0.146 / -0.153 / -0.217 dB at qp0/32/63. VERBATIM's drift alone is 2.2× the 0.1 dB budget, so the target is unreachable there at any saving — the anchor term is a precondition, not a refinement</a:t>
+            </a:r>
+          </a:p>
+          <a:p>
+            <a:pPr lvl="1"/>
+            <a:r>
+              <a:rPr sz="900" b="0"/>
+              <a:t>Saving at 0.1 dB across the three runs that share an architecture — anchor 0: unreachable at every rate; anchor 1: 14/12/9/7/5%; anchor 10: 35/31/27/24/22%. CONTROL→BEST changes four things at once, so that step is the bundle, not the anchor alone</a:t>
             </a:r>
           </a:p>
           <a:p>
@@ -4217,8 +4224,8 @@
         </p:blipFill>
         <p:spPr>
           <a:xfrm>
-            <a:off x="2585642" y="5285231"/>
-            <a:ext cx="3972715" cy="1161288"/>
+            <a:off x="3320751" y="5971031"/>
+            <a:ext cx="2502497" cy="731520"/>
           </a:xfrm>
           <a:prstGeom prst="rect">
             <a:avLst/>

--- a/paper/FLEX-UF_LMT.pptx
+++ b/paper/FLEX-UF_LMT.pptx
@@ -3297,7 +3297,7 @@
             <a:pPr lvl="1"/>
             <a:r>
               <a:rPr sz="1100" b="0"/>
-              <a:t>BD-saving 31.0% over dB in [0.066, 0.196] (qp 0: 38% · 16: 35% · 32: 31% · 48: 28% · 63: 24%); BD-quality 0.062 dB over saving in [10%, 30%]</a:t>
+              <a:t>BD-saving 30.8% over dB in [0.064, 0.196] (qp 0: 37% · 16: 34% · 32: 31% · 48: 27% · 63: 24%); BD-quality 0.062 dB over saving in [10%, 30%]</a:t>
             </a:r>
           </a:p>
         </p:txBody>

--- a/paper/FLEX-UF_LMT.pptx
+++ b/paper/FLEX-UF_LMT.pptx
@@ -4107,7 +4107,7 @@
         <p:spPr>
           <a:xfrm>
             <a:off x="508000" y="1417320"/>
-            <a:ext cx="8128000" cy="4389120"/>
+            <a:ext cx="8128000" cy="3703320"/>
           </a:xfrm>
         </p:spPr>
         <p:txBody>
@@ -4125,34 +4125,6 @@
             </a:r>
           </a:p>
           <a:p>
-            <a:pPr lvl="1"/>
-            <a:r>
-              <a:rPr sz="900" b="0"/>
-              <a:t>8 schedule rows character for character · 106 entries</a:t>
-            </a:r>
-          </a:p>
-          <a:p>
-            <a:pPr lvl="1"/>
-            <a:r>
-              <a:rPr sz="900" b="0"/>
-              <a:t>AdamW 1e-4 · clip_grad_norm 0.1 · non-finite batch skipped</a:t>
-            </a:r>
-          </a:p>
-          <a:p>
-            <a:pPr lvl="1"/>
-            <a:r>
-              <a:rPr sz="900" b="0"/>
-              <a:t>ImageFolder + get_training_lambdas · 64 QP levels</a:t>
-            </a:r>
-          </a:p>
-          <a:p>
-            <a:pPr lvl="1"/>
-            <a:r>
-              <a:rPr sz="900" b="0"/>
-              <a:t>encoder identical over 74 tensors · 255 shared tensors, no shape change</a:t>
-            </a:r>
-          </a:p>
-          <a:p>
             <a:pPr/>
             <a:r>
               <a:rPr sz="1100" b="1">
@@ -4167,7 +4139,14 @@
             <a:pPr lvl="1"/>
             <a:r>
               <a:rPr sz="900" b="0"/>
-              <a:t>Saving at 0.1 dB across the three runs that share an architecture — anchor 0: unreachable at every rate; anchor 1: 14/12/9/7/5%; anchor 10: 35/31/27/24/22%. CONTROL→BEST changes four things at once, so that step is the bundle, not the anchor alone</a:t>
+              <a:t>Saving at 0.1 dB across the three runs that share an architecture — anchor 0: unreachable at every rate; anchor 1: 5/4/4/3/3%; anchor 10: 35/31/27/24/22%. CONTROL→BEST changes four things at once, so that step is the bundle, not the anchor alone</a:t>
+            </a:r>
+          </a:p>
+          <a:p>
+            <a:pPr lvl="1"/>
+            <a:r>
+              <a:rPr sz="900" b="0"/>
+              <a:t>CONTROL over its SECOND epoch, per-exit dB vs the release at qp63 (below): saving at 0.1 dB fell 14.1% → 4.7% at qp0. More training without the additions moves the ladder the wrong way, and the damage grows the shallower the exit</a:t>
             </a:r>
           </a:p>
           <a:p>
@@ -4178,21 +4157,7 @@
                   <a:srgbClr val="0065BD"/>
                 </a:solidFill>
               </a:rPr>
-              <a:t>Deliberate additions, listed rather than hidden:</a:t>
-            </a:r>
-          </a:p>
-          <a:p>
-            <a:pPr lvl="1"/>
-            <a:r>
-              <a:rPr sz="900" b="0"/>
-              <a:t>--epoch_offset (read the schedule where a warm start actually is)</a:t>
-            </a:r>
-          </a:p>
-          <a:p>
-            <a:pPr lvl="1"/>
-            <a:r>
-              <a:rPr sz="900" b="0"/>
-              <a:t>--anchor_weight, --new_lr_scale, --freeze_encoder</a:t>
+              <a:t>Deliberate additions, listed rather than hidden: --epoch_offset, --anchor_weight, --new_lr_scale, --freeze_encoder</a:t>
             </a:r>
           </a:p>
           <a:p>
@@ -4203,14 +4168,14 @@
                   <a:srgbClr val="0065BD"/>
                 </a:solidFill>
               </a:rPr>
-              <a:t>VERBATIM run: their final phase (epochs 90–104, 512px, lr 2e-4→1e-6) with NONE of those additions, effective batch 16 by accumulation</a:t>
+              <a:t>VERBATIM is their recipe with NONE of them, effective batch 16 by accumulation — the control both rows above are measured against</a:t>
             </a:r>
           </a:p>
         </p:txBody>
       </p:sp>
       <p:pic>
         <p:nvPicPr>
-          <p:cNvPr id="4" name="Picture 3" descr="nf_schedule.png"/>
+          <p:cNvPr id="4" name="Picture 3" descr="nf_collapse.png"/>
           <p:cNvPicPr>
             <a:picLocks noChangeAspect="1"/>
           </p:cNvPicPr>
@@ -4224,8 +4189,8 @@
         </p:blipFill>
         <p:spPr>
           <a:xfrm>
-            <a:off x="3320751" y="5971031"/>
-            <a:ext cx="2502497" cy="731520"/>
+            <a:off x="2401806" y="5285231"/>
+            <a:ext cx="4340388" cy="1161288"/>
           </a:xfrm>
           <a:prstGeom prst="rect">
             <a:avLst/>

--- a/paper/FLEX-UF_LMT.pptx
+++ b/paper/FLEX-UF_LMT.pptx
@@ -4107,7 +4107,7 @@
         <p:spPr>
           <a:xfrm>
             <a:off x="508000" y="1417320"/>
-            <a:ext cx="8128000" cy="3703320"/>
+            <a:ext cx="8128000" cy="3931920"/>
           </a:xfrm>
         </p:spPr>
         <p:txBody>
@@ -4146,7 +4146,7 @@
             <a:pPr lvl="1"/>
             <a:r>
               <a:rPr sz="900" b="0"/>
-              <a:t>CONTROL over its SECOND epoch, per-exit dB vs the release at qp63 (below): saving at 0.1 dB fell 14.1% → 4.7% at qp0. More training without the additions moves the ladder the wrong way, and the damage grows the shallower the exit</a:t>
+              <a:t>CONTROL over its SECOND epoch, per-exit dB vs the release at qp63 (below): saving at 0.1 dB fell 14.1% → 4.7% at qp0, damage growing the shallower the exit. VERBATIM, which carries even less, IMPROVED over the same boundary — so this is CONTROL's, not 'training without the additions', and the cause is still open</a:t>
             </a:r>
           </a:p>
           <a:p>
@@ -4189,8 +4189,8 @@
         </p:blipFill>
         <p:spPr>
           <a:xfrm>
-            <a:off x="2401806" y="5285231"/>
-            <a:ext cx="4340388" cy="1161288"/>
+            <a:off x="2829009" y="5513831"/>
+            <a:ext cx="3485981" cy="932688"/>
           </a:xfrm>
           <a:prstGeom prst="rect">
             <a:avLst/>

--- a/paper/FLEX-UF_LMT.pptx
+++ b/paper/FLEX-UF_LMT.pptx
@@ -23,6 +23,17 @@
     <p:sldId id="265" r:id="rId17"/>
     <p:sldId id="266" r:id="rId18"/>
     <p:sldId id="267" r:id="rId19"/>
+    <p:sldId id="268" r:id="rId20"/>
+    <p:sldId id="269" r:id="rId21"/>
+    <p:sldId id="270" r:id="rId22"/>
+    <p:sldId id="271" r:id="rId23"/>
+    <p:sldId id="272" r:id="rId24"/>
+    <p:sldId id="273" r:id="rId25"/>
+    <p:sldId id="274" r:id="rId26"/>
+    <p:sldId id="275" r:id="rId27"/>
+    <p:sldId id="276" r:id="rId28"/>
+    <p:sldId id="277" r:id="rId29"/>
+    <p:sldId id="278" r:id="rId30"/>
   </p:sldIdLst>
   <p:sldSz cx="9144000" cy="6858000" type="screen4x3"/>
   <p:notesSz cx="6858000" cy="9144000"/>
@@ -3219,7 +3230,7 @@
           <a:lstStyle/>
           <a:p>
             <a:r>
-              <a:t>Results vs the released decoder</a:t>
+              <a:t>The seam artefact, and what actually removed it</a:t>
             </a:r>
           </a:p>
         </p:txBody>
@@ -3237,7 +3248,7 @@
         <p:spPr>
           <a:xfrm>
             <a:off x="508000" y="1417320"/>
-            <a:ext cx="8128000" cy="3068319"/>
+            <a:ext cx="8128000" cy="4160520"/>
           </a:xfrm>
         </p:spPr>
         <p:txBody>
@@ -3246,65 +3257,91 @@
           <a:p>
             <a:pPr/>
             <a:r>
-              <a:rPr sz="1300" b="1">
-                <a:solidFill>
-                  <a:srgbClr val="0065BD"/>
-                </a:solidFill>
-              </a:rPr>
-              <a:t>At 0.3 dB: ceiling 42% already at 0.20 dB (qp0) · 42% (qp32) · 36% (qp63)</a:t>
+              <a:rPr sz="1000" b="1">
+                <a:solidFill>
+                  <a:srgbClr val="0065BD"/>
+                </a:solidFill>
+              </a:rPr>
+              <a:t>A tile decoded alone meets its border with invented values. Measured PURE — no early exit, every tile at full depth, so tiling is the only difference from a full-frame decode:</a:t>
             </a:r>
           </a:p>
           <a:p>
             <a:pPr lvl="1"/>
             <a:r>
-              <a:rPr sz="1100" b="0"/>
-              <a:t>dB is the per-frame average test_video.py computes — the convention every published DCVC-UF number uses. Pooling all tiles into one MSE reads 0.023–0.033 dB lower on the same allocation and would flatter these</a:t>
-            </a:r>
-          </a:p>
-          <a:p>
-            <a:pPr/>
-            <a:r>
-              <a:rPr sz="1300" b="0"/>
-              <a:t>At 0.1 dB: 35% · 28% · 22%</a:t>
-            </a:r>
-          </a:p>
-          <a:p>
-            <a:pPr/>
-            <a:r>
-              <a:rPr sz="1300" b="0"/>
-              <a:t>The 30% target is cleared by qp 0/16 at 0.1 dB, and by qp 32/48/63 at 0.3 dB</a:t>
-            </a:r>
-          </a:p>
-          <a:p>
-            <a:pPr/>
-            <a:r>
-              <a:rPr sz="1300" b="0"/>
-              <a:t>Saving falls with rate because early exit costs more there: the exit-2 penalty grows 3.3× from qp0 to qp63 as the latent carries more detail</a:t>
-            </a:r>
-          </a:p>
-          <a:p>
-            <a:pPr/>
-            <a:r>
-              <a:rPr sz="1300" b="1">
-                <a:solidFill>
-                  <a:srgbClr val="0065BD"/>
-                </a:solidFill>
-              </a:rPr>
-              <a:t>Integrated over the curve, not read at one point:</a:t>
+              <a:rPr sz="800" b="0"/>
+              <a:t>256px tiles, qp0/32/63 — zeros: 0.100 / 0.216 / 0.548 dB. At qp63 that is five times the entire 0.1 dB budget, before a single tile exits early</a:t>
+            </a:r>
+          </a:p>
+          <a:p>
+            <a:pPr/>
+            <a:r>
+              <a:rPr sz="1000" b="1">
+                <a:solidFill>
+                  <a:srgbClr val="0065BD"/>
+                </a:solidFill>
+              </a:rPr>
+              <a:t>Three things fixed it, in order of contribution:</a:t>
             </a:r>
           </a:p>
           <a:p>
             <a:pPr lvl="1"/>
             <a:r>
-              <a:rPr sz="1100" b="0"/>
-              <a:t>BD-saving 30.8% over dB in [0.064, 0.196] (qp 0: 37% · 16: 34% · 32: 31% · 48: 27% · 63: 24%); BD-quality 0.062 dB over saving in [10%, 30%]</a:t>
+              <a:rPr sz="800" b="0"/>
+              <a:t>TILE SIZE — 256px instead of 128 halves it (1.167 -&gt; 0.548 at qp63): the seam is a perimeter effect</a:t>
+            </a:r>
+          </a:p>
+          <a:p>
+            <a:pPr lvl="1"/>
+            <a:r>
+              <a:rPr sz="800" b="0"/>
+              <a:t>REPLICATE padding instead of zeros — 0.548 -&gt; 0.107 dB, an 80% cut for zero compute. 'linear' extrapolation was also tried and is WORSE (0.264), so a cleverer guess is not automatically a better one</a:t>
+            </a:r>
+          </a:p>
+          <a:p>
+            <a:pPr lvl="1"/>
+            <a:r>
+              <a:rPr sz="800" b="0"/>
+              <a:t>GRID SEAM REPAIR — the tile lattice is known exactly, so the correction is gated by a learned P×P map indexed by position within a tile: f + G[i mod P, j mod P]·PW(WSiLU(DW3x3(f))). 256 scalars, 0.0007% of the decoder's parameters, initialised at exp(-d/tau) so the gate starts on the seam. Costs 0.95% of the decode</a:t>
+            </a:r>
+          </a:p>
+          <a:p>
+            <a:pPr/>
+            <a:r>
+              <a:rPr sz="1000" b="1">
+                <a:solidFill>
+                  <a:srgbClr val="0065BD"/>
+                </a:solidFill>
+              </a:rPr>
+              <a:t>A plain 3×3 would have to INFER which pixels are on a boundary, and would apply its correction to the 77% that are clean interior — where any correction is damage. Telling it the grid is the whole idea.</a:t>
+            </a:r>
+          </a:p>
+          <a:p>
+            <a:pPr/>
+            <a:r>
+              <a:rPr sz="1000" b="1">
+                <a:solidFill>
+                  <a:srgbClr val="0065BD"/>
+                </a:solidFill>
+              </a:rPr>
+              <a:t>arls (arXiv:2502.12300) is better still — 0.088 vs 0.107 at qp63 — and was REJECTED: +10.7% of decode wall-clock for +0.019 dB</a:t>
+            </a:r>
+          </a:p>
+          <a:p>
+            <a:pPr/>
+            <a:r>
+              <a:rPr sz="1000" b="1">
+                <a:solidFill>
+                  <a:srgbClr val="0065BD"/>
+                </a:solidFill>
+              </a:rPr>
+              <a:t>Canvas coupling gives the 3×3 its real neighbour and reaches max|diff| = 0.0 against full-frame for +0.03%. It is implemented and measured, but tile_coupling=False in every run here — so it is an option, not what these results use.</a:t>
             </a:r>
           </a:p>
         </p:txBody>
       </p:sp>
       <p:pic>
         <p:nvPicPr>
-          <p:cNvPr id="4" name="Picture 3" descr="nf_results.png"/>
+          <p:cNvPr id="4" name="Picture 3" descr="nf_seam.png"/>
           <p:cNvPicPr>
             <a:picLocks noChangeAspect="1"/>
           </p:cNvPicPr>
@@ -3318,8 +3355,8 @@
         </p:blipFill>
         <p:spPr>
           <a:xfrm>
-            <a:off x="1974590" y="4650231"/>
-            <a:ext cx="5194820" cy="1796288"/>
+            <a:off x="3653971" y="5742431"/>
+            <a:ext cx="1836057" cy="731520"/>
           </a:xfrm>
           <a:prstGeom prst="rect">
             <a:avLst/>
@@ -3360,7 +3397,7 @@
           <a:lstStyle/>
           <a:p>
             <a:r>
-              <a:t>Router: predicting failed, signalling works</a:t>
+              <a:t>The seam artefact, formally  (1/5): where it comes from</a:t>
             </a:r>
           </a:p>
         </p:txBody>
@@ -3375,12 +3412,7 @@
             <p:ph idx="1"/>
           </p:nvPr>
         </p:nvSpPr>
-        <p:spPr>
-          <a:xfrm>
-            <a:off x="508000" y="1417320"/>
-            <a:ext cx="8128000" cy="2560320"/>
-          </a:xfrm>
-        </p:spPr>
+        <p:spPr/>
         <p:txBody>
           <a:bodyPr/>
           <a:lstStyle/>
@@ -3392,21 +3424,61 @@
                   <a:srgbClr val="0065BD"/>
                 </a:solidFill>
               </a:rPr>
-              <a:t>A learned router could not reach the oracle, and 12k steps showed why</a:t>
+              <a:t>A 3x3 depthwise convolution at feature position (i,j) computes</a:t>
             </a:r>
           </a:p>
           <a:p>
             <a:pPr lvl="1"/>
             <a:r>
               <a:rPr sz="900" b="0"/>
-              <a:t>CE 0.5→0.09 while qp0 agreement moved 0.743→0.741, regret unchanged</a:t>
+              <a:t>y[i,j] = sum_{u,v in {-1,0,1}} w[u,v] . f[i+u, j+v]</a:t>
+            </a:r>
+          </a:p>
+          <a:p>
+            <a:pPr/>
+            <a:r>
+              <a:rPr sz="1100" b="1">
+                <a:solidFill>
+                  <a:srgbClr val="0065BD"/>
+                </a:solidFill>
+              </a:rPr>
+              <a:t>Decoded full-frame, f[i+u,j+v] are the neighbour's real features. Decoded per tile, positions outside the tile do not exist and the kernel is fed whatever the padding rule invents.</a:t>
+            </a:r>
+          </a:p>
+          <a:p>
+            <a:pPr/>
+            <a:r>
+              <a:rPr sz="1100" b="1">
+                <a:solidFill>
+                  <a:srgbClr val="0065BD"/>
+                </a:solidFill>
+              </a:rPr>
+              <a:t>Only the 3x3 DEPTHWISE has spatial extent. Everything else in a DepthConvBlock is 1x1, and a 1x1 has no neighbours to miss — which is why the exit adapters are 1x1 on purpose: they add no seam.</a:t>
+            </a:r>
+          </a:p>
+          <a:p>
+            <a:pPr/>
+            <a:r>
+              <a:rPr sz="1100" b="1">
+                <a:solidFill>
+                  <a:srgbClr val="0065BD"/>
+                </a:solidFill>
+              </a:rPr>
+              <a:t>The affected region is a ring one pixel wide per convolution. With b depthwise layers running per tile, the ring is b pixels deep, so for a tile of side F the corrupted fraction is</a:t>
             </a:r>
           </a:p>
           <a:p>
             <a:pPr lvl="1"/>
             <a:r>
               <a:rPr sz="900" b="0"/>
-              <a:t>fitting the training data 4× better and behaving identically on test is missing INFORMATION, not missing capacity</a:t>
+              <a:t>1 - ((F - 2b)/F)^2  ~=  4b/F   for b &lt;&lt; F</a:t>
+            </a:r>
+          </a:p>
+          <a:p>
+            <a:pPr lvl="1"/>
+            <a:r>
+              <a:rPr sz="900" b="0"/>
+              <a:t>F = 32 feature px (256 RGB), b = 8 per-tile blocks -&gt; ~ 1 - (16/32)^2 = 75% of the tile is within reach of at least one contaminated value</a:t>
             </a:r>
           </a:p>
           <a:p>
@@ -3417,7 +3489,7 @@
                   <a:srgbClr val="0065BD"/>
                 </a:solidFill>
               </a:rPr>
-              <a:t>Structural: the oracle uses error against the SOURCE; the decoder never sees the source</a:t>
+              <a:t>So this is NOT a thin line of bad pixels. The error PROPAGATES inward one ring per layer, which is why the error maps show structure across the whole tile and not only at the border.</a:t>
             </a:r>
           </a:p>
           <a:p>
@@ -3428,60 +3500,11 @@
                   <a:srgbClr val="0065BD"/>
                 </a:solidFill>
               </a:rPr>
-              <a:t>But the encoder does — and in video coding mode decisions are signalled, not inferred (HEVC/VVC send partitioning and prediction mode)</a:t>
-            </a:r>
-          </a:p>
-          <a:p>
-            <a:pPr lvl="1"/>
-            <a:r>
-              <a:rPr sz="900" b="0"/>
-              <a:t>exit map costs 1.3e-4 bpp entropy-coded — 4 orders below the frame</a:t>
-            </a:r>
-          </a:p>
-          <a:p>
-            <a:pPr lvl="1"/>
-            <a:r>
-              <a:rPr sz="900" b="0"/>
-              <a:t>measured with the map's cost INSIDE the bitrate: 34.7 / 31.4 / 27.4 / 24.3 / 21.5% at qp0…63, all under 0.10 dB  (baseline 28.3 / 24.8 / 18.7 / 14.3 / 10.8) (40 CTC sequences)</a:t>
-            </a:r>
-          </a:p>
-          <a:p>
-            <a:pPr/>
-            <a:r>
-              <a:rPr sz="1100" b="1">
-                <a:solidFill>
-                  <a:srgbClr val="0065BD"/>
-                </a:solidFill>
-              </a:rPr>
-              <a:t>Agreement with the oracle becomes 100% by construction</a:t>
-            </a:r>
-          </a:p>
-        </p:txBody>
-      </p:sp>
-      <p:pic>
-        <p:nvPicPr>
-          <p:cNvPr id="4" name="Picture 3" descr="nf_router.png"/>
-          <p:cNvPicPr>
-            <a:picLocks noChangeAspect="1"/>
-          </p:cNvPicPr>
-          <p:nvPr/>
-        </p:nvPicPr>
-        <p:blipFill>
-          <a:blip r:embed="rId2"/>
-          <a:stretch>
-            <a:fillRect/>
-          </a:stretch>
-        </p:blipFill>
-        <p:spPr>
-          <a:xfrm>
-            <a:off x="2209447" y="4142231"/>
-            <a:ext cx="4725106" cy="2304288"/>
-          </a:xfrm>
-          <a:prstGeom prst="rect">
-            <a:avLst/>
-          </a:prstGeom>
-        </p:spPr>
-      </p:pic>
+              <a:t>Two consequences that shaped every later decision: the damage scales with the tile PERIMETER, and it scales with how many layers run per tile — i.e. with the split depth j.</a:t>
+            </a:r>
+          </a:p>
+        </p:txBody>
+      </p:sp>
     </p:spTree>
   </p:cSld>
   <p:clrMapOvr>
@@ -3516,7 +3539,449 @@
           <a:lstStyle/>
           <a:p>
             <a:r>
-              <a:t>Theory, and where we are</a:t>
+              <a:t>The seam artefact, formally  (2/5): padding is an estimator</a:t>
+            </a:r>
+          </a:p>
+        </p:txBody>
+      </p:sp>
+      <p:sp>
+        <p:nvSpPr>
+          <p:cNvPr id="3" name="Content Placeholder 2"/>
+          <p:cNvSpPr>
+            <a:spLocks noGrp="1"/>
+          </p:cNvSpPr>
+          <p:nvPr>
+            <p:ph idx="1"/>
+          </p:nvPr>
+        </p:nvSpPr>
+        <p:spPr/>
+        <p:txBody>
+          <a:bodyPr/>
+          <a:lstStyle/>
+          <a:p>
+            <a:pPr/>
+            <a:r>
+              <a:rPr sz="1000" b="1">
+                <a:solidFill>
+                  <a:srgbClr val="0065BD"/>
+                </a:solidFill>
+              </a:rPr>
+              <a:t>Padding is not a formatting detail. It is an ESTIMATOR of the neighbour the tile cannot see, and the seam penalty is that estimator's error.</a:t>
+            </a:r>
+          </a:p>
+          <a:p>
+            <a:pPr/>
+            <a:r>
+              <a:rPr sz="1000" b="1">
+                <a:solidFill>
+                  <a:srgbClr val="0065BD"/>
+                </a:solidFill>
+              </a:rPr>
+              <a:t>For a border column x[0] with true neighbour x[-1]:</a:t>
+            </a:r>
+          </a:p>
+          <a:p>
+            <a:pPr lvl="1"/>
+            <a:r>
+              <a:rPr sz="800" b="0"/>
+              <a:t>zeros      x_hat[-1] = 0                     — assumes the signal is centred at zero, which after the -0.5 shift is grey</a:t>
+            </a:r>
+          </a:p>
+          <a:p>
+            <a:pPr lvl="1"/>
+            <a:r>
+              <a:rPr sz="800" b="0"/>
+              <a:t>replicate  x_hat[-1] = x[0]                  — assumes local constancy, i.e. a zeroth-order hold</a:t>
+            </a:r>
+          </a:p>
+          <a:p>
+            <a:pPr lvl="1"/>
+            <a:r>
+              <a:rPr sz="800" b="0"/>
+              <a:t>linear     x_hat[-1] = 2.x[0] - x[1]         — first-order extrapolation</a:t>
+            </a:r>
+          </a:p>
+          <a:p>
+            <a:pPr lvl="1"/>
+            <a:r>
+              <a:rPr sz="800" b="0"/>
+              <a:t>arls       x_hat[-1] = a.x[0], a fitted per channel by least squares — an AR(1) model (arXiv:2502.12300)</a:t>
+            </a:r>
+          </a:p>
+          <a:p>
+            <a:pPr/>
+            <a:r>
+              <a:rPr sz="1000" b="1">
+                <a:solidFill>
+                  <a:srgbClr val="0065BD"/>
+                </a:solidFill>
+              </a:rPr>
+              <a:t>Measured on CTC, 256px tiles, PURE seam (no early exit, full depth, so tiling is the only difference from full-frame). dB above the release:</a:t>
+            </a:r>
+          </a:p>
+          <a:p>
+            <a:pPr lvl="1"/>
+            <a:r>
+              <a:rPr sz="800" b="0"/>
+              <a:t>                qp0      qp32     qp63</a:t>
+            </a:r>
+          </a:p>
+          <a:p>
+            <a:pPr lvl="1"/>
+            <a:r>
+              <a:rPr sz="800" b="0"/>
+              <a:t>zeros         0.1005   0.2162   0.5477</a:t>
+            </a:r>
+          </a:p>
+          <a:p>
+            <a:pPr lvl="1"/>
+            <a:r>
+              <a:rPr sz="800" b="0"/>
+              <a:t>replicate     0.0616   0.0854   0.1070</a:t>
+            </a:r>
+          </a:p>
+          <a:p>
+            <a:pPr lvl="1"/>
+            <a:r>
+              <a:rPr sz="800" b="0"/>
+              <a:t>linear        0.1793   0.2315   0.2638</a:t>
+            </a:r>
+          </a:p>
+          <a:p>
+            <a:pPr lvl="1"/>
+            <a:r>
+              <a:rPr sz="800" b="0"/>
+              <a:t>arls          0.0518   0.0707   0.0879</a:t>
+            </a:r>
+          </a:p>
+          <a:p>
+            <a:pPr/>
+            <a:r>
+              <a:rPr sz="1000" b="1">
+                <a:solidFill>
+                  <a:srgbClr val="0065BD"/>
+                </a:solidFill>
+              </a:rPr>
+              <a:t>The lesson is in the LINEAR row: a higher-order estimator is WORSE than a zeroth-order one. Extrapolating a gradient past a boundary amplifies whatever noise sits on it; assuming constancy does not.</a:t>
+            </a:r>
+          </a:p>
+          <a:p>
+            <a:pPr/>
+            <a:r>
+              <a:rPr sz="1000" b="1">
+                <a:solidFill>
+                  <a:srgbClr val="0065BD"/>
+                </a:solidFill>
+              </a:rPr>
+              <a:t>arls wins on quality and was REJECTED on cost: +10.7% of decode wall-clock for 0.019 dB. The whole budget is 0.1 dB and the whole saving is ~30% — that trade does not close.</a:t>
+            </a:r>
+          </a:p>
+        </p:txBody>
+      </p:sp>
+    </p:spTree>
+  </p:cSld>
+  <p:clrMapOvr>
+    <a:masterClrMapping/>
+  </p:clrMapOvr>
+</p:sld>
+</file>
+
+<file path=ppt/slides/slide13.xml><?xml version="1.0" encoding="utf-8"?>
+<p:sld xmlns:a="http://schemas.openxmlformats.org/drawingml/2006/main" xmlns:p="http://schemas.openxmlformats.org/presentationml/2006/main" xmlns:r="http://schemas.openxmlformats.org/officeDocument/2006/relationships">
+  <p:cSld>
+    <p:spTree>
+      <p:nvGrpSpPr>
+        <p:cNvPr id="1" name=""/>
+        <p:cNvGrpSpPr/>
+        <p:nvPr/>
+      </p:nvGrpSpPr>
+      <p:grpSpPr/>
+      <p:sp>
+        <p:nvSpPr>
+          <p:cNvPr id="2" name="Title 1"/>
+          <p:cNvSpPr>
+            <a:spLocks noGrp="1"/>
+          </p:cNvSpPr>
+          <p:nvPr>
+            <p:ph type="title"/>
+          </p:nvPr>
+        </p:nvSpPr>
+        <p:spPr/>
+        <p:txBody>
+          <a:bodyPr/>
+          <a:lstStyle/>
+          <a:p>
+            <a:r>
+              <a:t>The seam artefact, formally  (3/5): why 256 and not 128</a:t>
+            </a:r>
+          </a:p>
+        </p:txBody>
+      </p:sp>
+      <p:sp>
+        <p:nvSpPr>
+          <p:cNvPr id="3" name="Content Placeholder 2"/>
+          <p:cNvSpPr>
+            <a:spLocks noGrp="1"/>
+          </p:cNvSpPr>
+          <p:nvPr>
+            <p:ph idx="1"/>
+          </p:nvPr>
+        </p:nvSpPr>
+        <p:spPr/>
+        <p:txBody>
+          <a:bodyPr/>
+          <a:lstStyle/>
+          <a:p>
+            <a:pPr/>
+            <a:r>
+              <a:rPr sz="1000" b="1">
+                <a:solidFill>
+                  <a:srgbClr val="0065BD"/>
+                </a:solidFill>
+              </a:rPr>
+              <a:t>From (1/5), corrupted fraction ~ 4b/F. Doubling the tile side halves it, and the measurement follows the law:</a:t>
+            </a:r>
+          </a:p>
+          <a:p>
+            <a:pPr lvl="1"/>
+            <a:r>
+              <a:rPr sz="800" b="0"/>
+              <a:t>zeros,     qp63:   128px 1.1670 dB  -&gt;  256px 0.5477 dB   (x0.47)</a:t>
+            </a:r>
+          </a:p>
+          <a:p>
+            <a:pPr lvl="1"/>
+            <a:r>
+              <a:rPr sz="800" b="0"/>
+              <a:t>replicate, qp63:   128px 0.2125 dB  -&gt;  256px 0.1070 dB   (x0.50)</a:t>
+            </a:r>
+          </a:p>
+          <a:p>
+            <a:pPr/>
+            <a:r>
+              <a:rPr sz="1000" b="1">
+                <a:solidFill>
+                  <a:srgbClr val="0065BD"/>
+                </a:solidFill>
+              </a:rPr>
+              <a:t>So tile size was the single largest lever, and it costs nothing in compute — the MAC count of a tiled decode does not depend on the tile size at all.</a:t>
+            </a:r>
+          </a:p>
+          <a:p>
+            <a:pPr/>
+            <a:r>
+              <a:rPr sz="1000" b="1">
+                <a:solidFill>
+                  <a:srgbClr val="0065BD"/>
+                </a:solidFill>
+              </a:rPr>
+              <a:t>What it does cost is ROUTING GRANULARITY: 40 tiles per 1080p frame at 256px against 160 at 128px. Fewer, larger tiles means content that is locally easy gets averaged in with content that is not.</a:t>
+            </a:r>
+          </a:p>
+          <a:p>
+            <a:pPr/>
+            <a:r>
+              <a:rPr sz="1000" b="1">
+                <a:solidFill>
+                  <a:srgbClr val="0065BD"/>
+                </a:solidFill>
+              </a:rPr>
+              <a:t>The halo argument points the same way. A tile of side F carried with halo h computes ((F+2h)/F)^2 as many pixels:</a:t>
+            </a:r>
+          </a:p>
+          <a:p>
+            <a:pPr lvl="1"/>
+            <a:r>
+              <a:rPr sz="800" b="0"/>
+              <a:t>F=16, h=4  -&gt;  2.25x     F=32, h=4  -&gt;  1.56x</a:t>
+            </a:r>
+          </a:p>
+          <a:p>
+            <a:pPr/>
+            <a:r>
+              <a:rPr sz="1000" b="1">
+                <a:solidFill>
+                  <a:srgbClr val="0065BD"/>
+                </a:solidFill>
+              </a:rPr>
+              <a:t>Which is why the halo is carried on the HEAD only (2.40% of MACs) and not on the trunk. Applying 2.25x to the per-tile trunk would consume more than routing saves — the arithmetic simply does not close.</a:t>
+            </a:r>
+          </a:p>
+          <a:p>
+            <a:pPr/>
+            <a:r>
+              <a:rPr sz="1000" b="1">
+                <a:solidFill>
+                  <a:srgbClr val="0065BD"/>
+                </a:solidFill>
+              </a:rPr>
+              <a:t>BEST128 exists to measure the granularity side of this trade rather than argue it. Both are still training.</a:t>
+            </a:r>
+          </a:p>
+        </p:txBody>
+      </p:sp>
+    </p:spTree>
+  </p:cSld>
+  <p:clrMapOvr>
+    <a:masterClrMapping/>
+  </p:clrMapOvr>
+</p:sld>
+</file>
+
+<file path=ppt/slides/slide14.xml><?xml version="1.0" encoding="utf-8"?>
+<p:sld xmlns:a="http://schemas.openxmlformats.org/drawingml/2006/main" xmlns:p="http://schemas.openxmlformats.org/presentationml/2006/main" xmlns:r="http://schemas.openxmlformats.org/officeDocument/2006/relationships">
+  <p:cSld>
+    <p:spTree>
+      <p:nvGrpSpPr>
+        <p:cNvPr id="1" name=""/>
+        <p:cNvGrpSpPr/>
+        <p:nvPr/>
+      </p:nvGrpSpPr>
+      <p:grpSpPr/>
+      <p:sp>
+        <p:nvSpPr>
+          <p:cNvPr id="2" name="Title 1"/>
+          <p:cNvSpPr>
+            <a:spLocks noGrp="1"/>
+          </p:cNvSpPr>
+          <p:nvPr>
+            <p:ph type="title"/>
+          </p:nvPr>
+        </p:nvSpPr>
+        <p:spPr/>
+        <p:txBody>
+          <a:bodyPr/>
+          <a:lstStyle/>
+          <a:p>
+            <a:r>
+              <a:t>The seam artefact, formally  (4/5): repair that is told where to look</a:t>
+            </a:r>
+          </a:p>
+        </p:txBody>
+      </p:sp>
+      <p:sp>
+        <p:nvSpPr>
+          <p:cNvPr id="3" name="Content Placeholder 2"/>
+          <p:cNvSpPr>
+            <a:spLocks noGrp="1"/>
+          </p:cNvSpPr>
+          <p:nvPr>
+            <p:ph idx="1"/>
+          </p:nvPr>
+        </p:nvSpPr>
+        <p:spPr/>
+        <p:txBody>
+          <a:bodyPr/>
+          <a:lstStyle/>
+          <a:p>
+            <a:pPr/>
+            <a:r>
+              <a:rPr sz="1000" b="1">
+                <a:solidFill>
+                  <a:srgbClr val="0065BD"/>
+                </a:solidFill>
+              </a:rPr>
+              <a:t>A translation-invariant 3x3 applied to the stitched canvas has to INFER which pixels sit on a boundary, from content alone — and it applies the same correction to the ~25% that are clean interior, where any correction is damage. It is being asked a harder question than the one we have.</a:t>
+            </a:r>
+          </a:p>
+          <a:p>
+            <a:pPr/>
+            <a:r>
+              <a:rPr sz="1000" b="1">
+                <a:solidFill>
+                  <a:srgbClr val="0065BD"/>
+                </a:solidFill>
+              </a:rPr>
+              <a:t>But the grid is not unknown. unpatchify lays tiles on a fixed P x P lattice from the origin, at training and at inference alike. So gate the correction by position WITHIN a tile:</a:t>
+            </a:r>
+          </a:p>
+          <a:p>
+            <a:pPr lvl="1"/>
+            <a:r>
+              <a:rPr sz="800" b="0"/>
+              <a:t>Repair(f) = f + G[i mod P, j mod P] . PW( WSiLU( DW3x3(f) ) )</a:t>
+            </a:r>
+          </a:p>
+          <a:p>
+            <a:pPr/>
+            <a:r>
+              <a:rPr sz="1000" b="1">
+                <a:solidFill>
+                  <a:srgbClr val="0065BD"/>
+                </a:solidFill>
+              </a:rPr>
+              <a:t>G is P x P = 256 scalars, shared across all 384 channels</a:t>
+            </a:r>
+          </a:p>
+          <a:p>
+            <a:pPr lvl="1"/>
+            <a:r>
+              <a:rPr sz="800" b="0"/>
+              <a:t>0.0007% of the decoder's parameters, and no MAC beyond one broadcast multiply</a:t>
+            </a:r>
+          </a:p>
+          <a:p>
+            <a:pPr lvl="1"/>
+            <a:r>
+              <a:rPr sz="800" b="0"/>
+              <a:t>initialised at G = exp(-d/tau), d = distance in feature pixels to the nearest tile edge — so at step 0 the gate already sits on the seam and training refines it instead of discovering it</a:t>
+            </a:r>
+          </a:p>
+          <a:p>
+            <a:pPr lvl="1"/>
+            <a:r>
+              <a:rPr sz="800" b="0"/>
+              <a:t>PW is zero-initialised, so the whole module starts as the identity and the warm start stays bit-exact against released DCVC-UF</a:t>
+            </a:r>
+          </a:p>
+          <a:p>
+            <a:pPr/>
+            <a:r>
+              <a:rPr sz="1000" b="1">
+                <a:solidFill>
+                  <a:srgbClr val="0065BD"/>
+                </a:solidFill>
+              </a:rPr>
+              <a:t>Total cost 0.95% of the decode — and it is charged inside every saving in this deck, including the deepest exit, which is why our full-depth path costs 1.0095 stock decodes rather than 1.0.</a:t>
+            </a:r>
+          </a:p>
+        </p:txBody>
+      </p:sp>
+    </p:spTree>
+  </p:cSld>
+  <p:clrMapOvr>
+    <a:masterClrMapping/>
+  </p:clrMapOvr>
+</p:sld>
+</file>
+
+<file path=ppt/slides/slide15.xml><?xml version="1.0" encoding="utf-8"?>
+<p:sld xmlns:a="http://schemas.openxmlformats.org/drawingml/2006/main" xmlns:p="http://schemas.openxmlformats.org/presentationml/2006/main" xmlns:r="http://schemas.openxmlformats.org/officeDocument/2006/relationships">
+  <p:cSld>
+    <p:spTree>
+      <p:nvGrpSpPr>
+        <p:cNvPr id="1" name=""/>
+        <p:cNvGrpSpPr/>
+        <p:nvPr/>
+      </p:nvGrpSpPr>
+      <p:grpSpPr/>
+      <p:sp>
+        <p:nvSpPr>
+          <p:cNvPr id="2" name="Title 1"/>
+          <p:cNvSpPr>
+            <a:spLocks noGrp="1"/>
+          </p:cNvSpPr>
+          <p:nvPr>
+            <p:ph type="title"/>
+          </p:nvPr>
+        </p:nvSpPr>
+        <p:spPr/>
+        <p:txBody>
+          <a:bodyPr/>
+          <a:lstStyle/>
+          <a:p>
+            <a:r>
+              <a:t>The seam artefact  (5/5): at pixel scale, and what repair is worth</a:t>
             </a:r>
           </a:p>
         </p:txBody>
@@ -3534,7 +3999,7 @@
         <p:spPr>
           <a:xfrm>
             <a:off x="508000" y="1417320"/>
-            <a:ext cx="8128000" cy="3246120"/>
+            <a:ext cx="8128000" cy="3296919"/>
           </a:xfrm>
         </p:spPr>
         <p:txBody>
@@ -3543,84 +4008,73 @@
           <a:p>
             <a:pPr/>
             <a:r>
-              <a:rPr sz="1100" b="1">
-                <a:solidFill>
-                  <a:srgbClr val="0065BD"/>
-                </a:solidFill>
-              </a:rPr>
-              <a:t>Cost is additive over tiles and MSE is a mean over tiles → both affine in the assignment</a:t>
+              <a:rPr sz="1000" b="1">
+                <a:solidFill>
+                  <a:srgbClr val="0065BD"/>
+                </a:solidFill>
+              </a:rPr>
+              <a:t>Bosphorus qp63, 192px window straddling a tile boundary (dashed). Every tile at FULL depth, so early exit contributes nothing — this is the tiling artefact alone. Error maps vs the full-frame decode of the SAME latent, amplified x40.</a:t>
+            </a:r>
+          </a:p>
+          <a:p>
+            <a:pPr/>
+            <a:r>
+              <a:rPr sz="1000" b="1">
+                <a:solidFill>
+                  <a:srgbClr val="0065BD"/>
+                </a:solidFill>
+              </a:rPr>
+              <a:t>Zeros shows the seam as a bright ridge AND structured error across the tile interior — the inward propagation from (1/5). Replicate removes most of both.</a:t>
+            </a:r>
+          </a:p>
+          <a:p>
+            <a:pPr/>
+            <a:r>
+              <a:rPr sz="1000" b="1">
+                <a:solidFill>
+                  <a:srgbClr val="0065BD"/>
+                </a:solidFill>
+              </a:rPr>
+              <a:t>An uncomfortable measurement, 8 sequences at qp63, repair ON vs OFF on the same latents and the same exit maps:</a:t>
             </a:r>
           </a:p>
           <a:p>
             <a:pPr lvl="1"/>
             <a:r>
-              <a:rPr sz="900" b="0"/>
-              <a:t>fixed proportions reach the convex hull of the K exit points; per-tile assignment reaches the Minkowski average of the N tile hulls</a:t>
+              <a:rPr sz="800" b="0"/>
+              <a:t>all tiles at full depth:  0.0672 -&gt; 0.0750 dB   repair makes it WORSE</a:t>
             </a:r>
           </a:p>
           <a:p>
             <a:pPr lvl="1"/>
             <a:r>
-              <a:rPr sz="900" b="0"/>
-              <a:t>their gap is min-of-average − average-of-min ≥ 0, zero iff every tile prefers the same exit — this IS the value of adaptivity</a:t>
-            </a:r>
-          </a:p>
-          <a:p>
-            <a:pPr/>
-            <a:r>
-              <a:rPr sz="1100" b="1">
-                <a:solidFill>
-                  <a:srgbClr val="0065BD"/>
-                </a:solidFill>
-              </a:rPr>
-              <a:t>Measured: Δ/J rises 0.39% → 2.09% with rate</a:t>
-            </a:r>
-          </a:p>
-          <a:p>
-            <a:pPr/>
-            <a:r>
-              <a:rPr sz="1100" b="1">
-                <a:solidFill>
-                  <a:srgbClr val="0065BD"/>
-                </a:solidFill>
-              </a:rPr>
-              <a:t>Same mechanism one level up: best/worst CTC sequence is 3.8× at qp63 vs 1.5× at qp0 — the mean is not what a clip gets</a:t>
-            </a:r>
-          </a:p>
-          <a:p>
-            <a:pPr/>
-            <a:r>
-              <a:rPr sz="1100" b="1">
-                <a:solidFill>
-                  <a:srgbClr val="0065BD"/>
-                </a:solidFill>
-              </a:rPr>
-              <a:t>What is left, in the target's own units:</a:t>
+              <a:rPr sz="800" b="0"/>
+              <a:t>routed at 0.1 dB:         0.1259 -&gt; 0.1239 dB   repair helps by 0.002</a:t>
+            </a:r>
+          </a:p>
+          <a:p>
+            <a:pPr/>
+            <a:r>
+              <a:rPr sz="1000" b="1">
+                <a:solidFill>
+                  <a:srgbClr val="0065BD"/>
+                </a:solidFill>
+              </a:rPr>
+              <a:t>So grid repair earns 0.002 dB for 0.95% of the decode, and it RAISES the floor — the same floor that already consumes 30% of the budget at qp63. By the cost-per-dB rule that rejected arls, this module is on the wrong side of its own test.</a:t>
             </a:r>
           </a:p>
           <a:p>
             <a:pPr lvl="1"/>
             <a:r>
-              <a:rPr sz="900" b="0"/>
-              <a:t>30% target: met at qp0/16 — 30% costs at most 0.090 dB; still short at qp32/48/63; the furthest is qp63, needing 0.194 dB (1.9× the budget, 31% of the excess being the anchor's floor and the rest exit quality)</a:t>
-            </a:r>
-          </a:p>
-          <a:p>
-            <a:pPr/>
-            <a:r>
-              <a:rPr sz="1100" b="1">
-                <a:solidFill>
-                  <a:srgbClr val="0065BD"/>
-                </a:solidFill>
-              </a:rPr>
-              <a:t>Open: The 30% target is cleared by qp 0/16 at 0.1 dB, and by qp 32/48/63 at 0.3 dB; HEVC B/C/D behind JVET credentials, reported as NOT MEASURED; 6 runs training on 6 GPUs</a:t>
+              <a:rPr sz="800" b="0"/>
+              <a:t>caveat: it was trained jointly, so switching it off at inference is not the same as training without it. The clean test is a run with seam_repair=none at 256px, which is not one of the six.</a:t>
             </a:r>
           </a:p>
         </p:txBody>
       </p:sp>
       <p:pic>
         <p:nvPicPr>
-          <p:cNvPr id="4" name="Picture 3" descr="nf_heterogeneity.png"/>
+          <p:cNvPr id="4" name="Picture 3" descr="seam_patches.png"/>
           <p:cNvPicPr>
             <a:picLocks noChangeAspect="1"/>
           </p:cNvPicPr>
@@ -3634,8 +4088,633 @@
         </p:blipFill>
         <p:spPr>
           <a:xfrm>
-            <a:off x="1594748" y="4828031"/>
-            <a:ext cx="5954504" cy="1618488"/>
+            <a:off x="2795861" y="4878831"/>
+            <a:ext cx="3552277" cy="1567688"/>
+          </a:xfrm>
+          <a:prstGeom prst="rect">
+            <a:avLst/>
+          </a:prstGeom>
+        </p:spPr>
+      </p:pic>
+    </p:spTree>
+  </p:cSld>
+  <p:clrMapOvr>
+    <a:masterClrMapping/>
+  </p:clrMapOvr>
+</p:sld>
+</file>
+
+<file path=ppt/slides/slide16.xml><?xml version="1.0" encoding="utf-8"?>
+<p:sld xmlns:a="http://schemas.openxmlformats.org/drawingml/2006/main" xmlns:p="http://schemas.openxmlformats.org/presentationml/2006/main" xmlns:r="http://schemas.openxmlformats.org/officeDocument/2006/relationships">
+  <p:cSld>
+    <p:spTree>
+      <p:nvGrpSpPr>
+        <p:cNvPr id="1" name=""/>
+        <p:cNvGrpSpPr/>
+        <p:nvPr/>
+      </p:nvGrpSpPr>
+      <p:grpSpPr/>
+      <p:sp>
+        <p:nvSpPr>
+          <p:cNvPr id="2" name="Title 1"/>
+          <p:cNvSpPr>
+            <a:spLocks noGrp="1"/>
+          </p:cNvSpPr>
+          <p:nvPr>
+            <p:ph type="title"/>
+          </p:nvPr>
+        </p:nvSpPr>
+        <p:spPr/>
+        <p:txBody>
+          <a:bodyPr/>
+          <a:lstStyle/>
+          <a:p>
+            <a:r>
+              <a:t>MACs are not milliseconds</a:t>
+            </a:r>
+          </a:p>
+        </p:txBody>
+      </p:sp>
+      <p:sp>
+        <p:nvSpPr>
+          <p:cNvPr id="3" name="Content Placeholder 2"/>
+          <p:cNvSpPr>
+            <a:spLocks noGrp="1"/>
+          </p:cNvSpPr>
+          <p:nvPr>
+            <p:ph idx="1"/>
+          </p:nvPr>
+        </p:nvSpPr>
+        <p:spPr>
+          <a:xfrm>
+            <a:off x="508000" y="1417320"/>
+            <a:ext cx="8128000" cy="3017520"/>
+          </a:xfrm>
+        </p:spPr>
+        <p:txBody>
+          <a:bodyPr/>
+          <a:lstStyle/>
+          <a:p>
+            <a:pPr/>
+            <a:r>
+              <a:rPr sz="1100" b="1">
+                <a:solidFill>
+                  <a:srgbClr val="0065BD"/>
+                </a:solidFill>
+              </a:rPr>
+              <a:t>Every saving in this project is a MAC count. The field measures FPS.</a:t>
+            </a:r>
+          </a:p>
+          <a:p>
+            <a:pPr/>
+            <a:r>
+              <a:rPr sz="1100" b="1">
+                <a:solidFill>
+                  <a:srgbClr val="0065BD"/>
+                </a:solidFill>
+              </a:rPr>
+              <a:t>Measured end to end, 1920x1088, interleaved, median of 40:</a:t>
+            </a:r>
+          </a:p>
+          <a:p>
+            <a:pPr lvl="1"/>
+            <a:r>
+              <a:rPr sz="900" b="0"/>
+              <a:t>0.1 dB: 28% of MACs -&gt; 13% of wall-clock (1.14x)</a:t>
+            </a:r>
+          </a:p>
+          <a:p>
+            <a:pPr lvl="1"/>
+            <a:r>
+              <a:rPr sz="900" b="0"/>
+              <a:t>0.3 dB: 39% of MACs -&gt; 28% of wall-clock (1.38x)</a:t>
+            </a:r>
+          </a:p>
+          <a:p>
+            <a:pPr lvl="1"/>
+            <a:r>
+              <a:rPr sz="900" b="0"/>
+              <a:t>0.5 dB: 42% of MACs -&gt; 34% of wall-clock (1.51x)</a:t>
+            </a:r>
+          </a:p>
+          <a:p>
+            <a:pPr/>
+            <a:r>
+              <a:rPr sz="1100" b="1">
+                <a:solidFill>
+                  <a:srgbClr val="0065BD"/>
+                </a:solidFill>
+              </a:rPr>
+              <a:t>The MAC model is accurate at UNIFORM depth (agrees within 1 point per exit) and optimistic under ROUTED execution. The difference is exactly the machinery routing needs.</a:t>
+            </a:r>
+          </a:p>
+          <a:p>
+            <a:pPr/>
+            <a:r>
+              <a:rPr sz="1100" b="1">
+                <a:solidFill>
+                  <a:srgbClr val="0065BD"/>
+                </a:solidFill>
+              </a:rPr>
+              <a:t>Profiled: the per-group bookkeeping — mask, gather, scatter, and the device-host sync each forces — is 36.4 ms against the groups' own 77.5 ms of convolution, 32% of the loop, invisible to the MAC model</a:t>
+            </a:r>
+          </a:p>
+          <a:p>
+            <a:pPr/>
+            <a:r>
+              <a:rPr sz="1100" b="1">
+                <a:solidFill>
+                  <a:srgbClr val="0065BD"/>
+                </a:solidFill>
+              </a:rPr>
+              <a:t>Recoverable, not a hardware limit: sorting tiles by exit depth once makes the active set a contiguous prefix. Prototyped, bit-identical output, 23-37% of the group loop returned</a:t>
+            </a:r>
+          </a:p>
+        </p:txBody>
+      </p:sp>
+      <p:pic>
+        <p:nvPicPr>
+          <p:cNvPr id="4" name="Picture 3" descr="latency.png"/>
+          <p:cNvPicPr>
+            <a:picLocks noChangeAspect="1"/>
+          </p:cNvPicPr>
+          <p:nvPr/>
+        </p:nvPicPr>
+        <p:blipFill>
+          <a:blip r:embed="rId2"/>
+          <a:stretch>
+            <a:fillRect/>
+          </a:stretch>
+        </p:blipFill>
+        <p:spPr>
+          <a:xfrm>
+            <a:off x="1767548" y="4599431"/>
+            <a:ext cx="5608903" cy="1847088"/>
+          </a:xfrm>
+          <a:prstGeom prst="rect">
+            <a:avLst/>
+          </a:prstGeom>
+        </p:spPr>
+      </p:pic>
+    </p:spTree>
+  </p:cSld>
+  <p:clrMapOvr>
+    <a:masterClrMapping/>
+  </p:clrMapOvr>
+</p:sld>
+</file>
+
+<file path=ppt/slides/slide17.xml><?xml version="1.0" encoding="utf-8"?>
+<p:sld xmlns:a="http://schemas.openxmlformats.org/drawingml/2006/main" xmlns:p="http://schemas.openxmlformats.org/presentationml/2006/main" xmlns:r="http://schemas.openxmlformats.org/officeDocument/2006/relationships">
+  <p:cSld>
+    <p:spTree>
+      <p:nvGrpSpPr>
+        <p:cNvPr id="1" name=""/>
+        <p:cNvGrpSpPr/>
+        <p:nvPr/>
+      </p:nvGrpSpPr>
+      <p:grpSpPr/>
+      <p:sp>
+        <p:nvSpPr>
+          <p:cNvPr id="2" name="Title 1"/>
+          <p:cNvSpPr>
+            <a:spLocks noGrp="1"/>
+          </p:cNvSpPr>
+          <p:nvPr>
+            <p:ph type="title"/>
+          </p:nvPr>
+        </p:nvSpPr>
+        <p:spPr/>
+        <p:txBody>
+          <a:bodyPr/>
+          <a:lstStyle/>
+          <a:p>
+            <a:r>
+              <a:t>Results vs the released decoder</a:t>
+            </a:r>
+          </a:p>
+        </p:txBody>
+      </p:sp>
+      <p:sp>
+        <p:nvSpPr>
+          <p:cNvPr id="3" name="Content Placeholder 2"/>
+          <p:cNvSpPr>
+            <a:spLocks noGrp="1"/>
+          </p:cNvSpPr>
+          <p:nvPr>
+            <p:ph idx="1"/>
+          </p:nvPr>
+        </p:nvSpPr>
+        <p:spPr>
+          <a:xfrm>
+            <a:off x="508000" y="1417320"/>
+            <a:ext cx="8128000" cy="2928619"/>
+          </a:xfrm>
+        </p:spPr>
+        <p:txBody>
+          <a:bodyPr/>
+          <a:lstStyle/>
+          <a:p>
+            <a:pPr/>
+            <a:r>
+              <a:rPr sz="1200" b="1">
+                <a:solidFill>
+                  <a:srgbClr val="0065BD"/>
+                </a:solidFill>
+              </a:rPr>
+              <a:t>At 0.3 dB: ceiling 42% already at 0.20 dB (qp0) · 42% (qp32) · 36% (qp63)</a:t>
+            </a:r>
+          </a:p>
+          <a:p>
+            <a:pPr lvl="1"/>
+            <a:r>
+              <a:rPr sz="1000" b="0"/>
+              <a:t>dB is the per-frame average test_video.py computes — the convention every published DCVC-UF number uses. Pooling all tiles into one MSE reads 0.023-0.033 dB lower on the same allocation and would flatter these</a:t>
+            </a:r>
+          </a:p>
+          <a:p>
+            <a:pPr/>
+            <a:r>
+              <a:rPr sz="1200" b="1">
+                <a:solidFill>
+                  <a:srgbClr val="0065BD"/>
+                </a:solidFill>
+              </a:rPr>
+              <a:t>At 0.1 dB, against the RELEASE: 34.0% / 26.8% / 20.8% (qp0/32/63)</a:t>
+            </a:r>
+          </a:p>
+          <a:p>
+            <a:pPr lvl="1"/>
+            <a:r>
+              <a:rPr sz="1000" b="0"/>
+              <a:t>these are 0.6-0.75 points below what earlier decks showed: savings were divided by our own deepest exit (1.0095 stock decodes) instead of by the release's 1.0, which quietly took the seam-repair tax back out</a:t>
+            </a:r>
+          </a:p>
+          <a:p>
+            <a:pPr/>
+            <a:r>
+              <a:rPr sz="1200" b="0"/>
+              <a:t>The 30% target is cleared by qp 0/16 at 0.1 dB, and by qp 32/48/63 at 0.3 dB</a:t>
+            </a:r>
+          </a:p>
+          <a:p>
+            <a:pPr/>
+            <a:r>
+              <a:rPr sz="1200" b="1">
+                <a:solidFill>
+                  <a:srgbClr val="0065BD"/>
+                </a:solidFill>
+              </a:rPr>
+              <a:t>Ladder ceiling 41.9% at every rate, set by the split depth j=2, not by training</a:t>
+            </a:r>
+          </a:p>
+          <a:p>
+            <a:pPr/>
+            <a:r>
+              <a:rPr sz="1200" b="1">
+                <a:solidFill>
+                  <a:srgbClr val="0065BD"/>
+                </a:solidFill>
+              </a:rPr>
+              <a:t>Integrated over the curve, not read at one point:</a:t>
+            </a:r>
+          </a:p>
+          <a:p>
+            <a:pPr lvl="1"/>
+            <a:r>
+              <a:rPr sz="1000" b="0"/>
+              <a:t>BD-saving 30.8% over dB in [0.064, 0.196] (qp 0: 37% · 16: 34% · 32: 31% · 48: 27% · 63: 24%); BD-quality 0.062 dB over saving in [10%, 30%]</a:t>
+            </a:r>
+          </a:p>
+        </p:txBody>
+      </p:sp>
+      <p:pic>
+        <p:nvPicPr>
+          <p:cNvPr id="4" name="Picture 3" descr="nf_results.png"/>
+          <p:cNvPicPr>
+            <a:picLocks noChangeAspect="1"/>
+          </p:cNvPicPr>
+          <p:nvPr/>
+        </p:nvPicPr>
+        <p:blipFill>
+          <a:blip r:embed="rId2"/>
+          <a:stretch>
+            <a:fillRect/>
+          </a:stretch>
+        </p:blipFill>
+        <p:spPr>
+          <a:xfrm>
+            <a:off x="1772585" y="4510531"/>
+            <a:ext cx="5598829" cy="1935988"/>
+          </a:xfrm>
+          <a:prstGeom prst="rect">
+            <a:avLst/>
+          </a:prstGeom>
+        </p:spPr>
+      </p:pic>
+    </p:spTree>
+  </p:cSld>
+  <p:clrMapOvr>
+    <a:masterClrMapping/>
+  </p:clrMapOvr>
+</p:sld>
+</file>
+
+<file path=ppt/slides/slide18.xml><?xml version="1.0" encoding="utf-8"?>
+<p:sld xmlns:a="http://schemas.openxmlformats.org/drawingml/2006/main" xmlns:p="http://schemas.openxmlformats.org/presentationml/2006/main" xmlns:r="http://schemas.openxmlformats.org/officeDocument/2006/relationships">
+  <p:cSld>
+    <p:spTree>
+      <p:nvGrpSpPr>
+        <p:cNvPr id="1" name=""/>
+        <p:cNvGrpSpPr/>
+        <p:nvPr/>
+      </p:nvGrpSpPr>
+      <p:grpSpPr/>
+      <p:sp>
+        <p:nvSpPr>
+          <p:cNvPr id="2" name="Title 1"/>
+          <p:cNvSpPr>
+            <a:spLocks noGrp="1"/>
+          </p:cNvSpPr>
+          <p:nvPr>
+            <p:ph type="title"/>
+          </p:nvPr>
+        </p:nvSpPr>
+        <p:spPr/>
+        <p:txBody>
+          <a:bodyPr/>
+          <a:lstStyle/>
+          <a:p>
+            <a:r>
+              <a:t>Who decides: encoder search or decoder prediction</a:t>
+            </a:r>
+          </a:p>
+        </p:txBody>
+      </p:sp>
+      <p:sp>
+        <p:nvSpPr>
+          <p:cNvPr id="3" name="Content Placeholder 2"/>
+          <p:cNvSpPr>
+            <a:spLocks noGrp="1"/>
+          </p:cNvSpPr>
+          <p:nvPr>
+            <p:ph idx="1"/>
+          </p:nvPr>
+        </p:nvSpPr>
+        <p:spPr>
+          <a:xfrm>
+            <a:off x="508000" y="1417320"/>
+            <a:ext cx="8128000" cy="2788920"/>
+          </a:xfrm>
+        </p:spPr>
+        <p:txBody>
+          <a:bodyPr/>
+          <a:lstStyle/>
+          <a:p>
+            <a:pPr/>
+            <a:r>
+              <a:rPr sz="1100" b="1">
+                <a:solidFill>
+                  <a:srgbClr val="0065BD"/>
+                </a:solidFill>
+              </a:rPr>
+              <a:t>A — the encoder has the source, so it decodes every tile at every exit, measures the true error, and signals the answer: ~94 bits/frame, 0.008-0.020% of the bitrate</a:t>
+            </a:r>
+          </a:p>
+          <a:p>
+            <a:pPr/>
+            <a:r>
+              <a:rPr sz="1100" b="1">
+                <a:solidFill>
+                  <a:srgbClr val="0065BD"/>
+                </a:solidFill>
+              </a:rPr>
+              <a:t>B — the decoder cannot see the source, so it predicts what A would have chosen from the stem, the latent and the entropy scales. Nothing is sent; the file is byte-identical to a stock stream</a:t>
+            </a:r>
+          </a:p>
+          <a:p>
+            <a:pPr/>
+            <a:r>
+              <a:rPr sz="1100" b="1">
+                <a:solidFill>
+                  <a:srgbClr val="0065BD"/>
+                </a:solidFill>
+              </a:rPr>
+              <a:t>At 0.1 dB, same checkpoint and same frames:</a:t>
+            </a:r>
+          </a:p>
+          <a:p>
+            <a:pPr lvl="1"/>
+            <a:r>
+              <a:rPr sz="900" b="0"/>
+              <a:t>qp0: A 34.0% signalled vs B 30.1% predicted — gap 3.96 pts</a:t>
+            </a:r>
+          </a:p>
+          <a:p>
+            <a:pPr lvl="1"/>
+            <a:r>
+              <a:rPr sz="900" b="0"/>
+              <a:t>qp32: A 26.8% signalled vs B 23.9% predicted — gap 2.82 pts</a:t>
+            </a:r>
+          </a:p>
+          <a:p>
+            <a:pPr lvl="1"/>
+            <a:r>
+              <a:rPr sz="900" b="0"/>
+              <a:t>qp63: A 20.8% signalled vs B 19.3% predicted — gap 1.50 pts</a:t>
+            </a:r>
+          </a:p>
+          <a:p>
+            <a:pPr/>
+            <a:r>
+              <a:rPr sz="1100" b="1">
+                <a:solidFill>
+                  <a:srgbClr val="0065BD"/>
+                </a:solidFill>
+              </a:rPr>
+              <a:t>Compute is asymmetric: A costs the ENCODER ~1.21 extra decodes per frame and the decoder nothing; B costs the decoder 0.163% and the encoder nothing. For VOD A is cheaper in total; for live the ranking inverts</a:t>
+            </a:r>
+          </a:p>
+        </p:txBody>
+      </p:sp>
+      <p:pic>
+        <p:nvPicPr>
+          <p:cNvPr id="4" name="Picture 3" descr="ab_decision.png"/>
+          <p:cNvPicPr>
+            <a:picLocks noChangeAspect="1"/>
+          </p:cNvPicPr>
+          <p:nvPr/>
+        </p:nvPicPr>
+        <p:blipFill>
+          <a:blip r:embed="rId2"/>
+          <a:stretch>
+            <a:fillRect/>
+          </a:stretch>
+        </p:blipFill>
+        <p:spPr>
+          <a:xfrm>
+            <a:off x="1400162" y="4370831"/>
+            <a:ext cx="6343675" cy="2075688"/>
+          </a:xfrm>
+          <a:prstGeom prst="rect">
+            <a:avLst/>
+          </a:prstGeom>
+        </p:spPr>
+      </p:pic>
+    </p:spTree>
+  </p:cSld>
+  <p:clrMapOvr>
+    <a:masterClrMapping/>
+  </p:clrMapOvr>
+</p:sld>
+</file>
+
+<file path=ppt/slides/slide19.xml><?xml version="1.0" encoding="utf-8"?>
+<p:sld xmlns:a="http://schemas.openxmlformats.org/drawingml/2006/main" xmlns:p="http://schemas.openxmlformats.org/presentationml/2006/main" xmlns:r="http://schemas.openxmlformats.org/officeDocument/2006/relationships">
+  <p:cSld>
+    <p:spTree>
+      <p:nvGrpSpPr>
+        <p:cNvPr id="1" name=""/>
+        <p:cNvGrpSpPr/>
+        <p:nvPr/>
+      </p:nvGrpSpPr>
+      <p:grpSpPr/>
+      <p:sp>
+        <p:nvSpPr>
+          <p:cNvPr id="2" name="Title 1"/>
+          <p:cNvSpPr>
+            <a:spLocks noGrp="1"/>
+          </p:cNvSpPr>
+          <p:nvPr>
+            <p:ph type="title"/>
+          </p:nvPr>
+        </p:nvSpPr>
+        <p:spPr/>
+        <p:txBody>
+          <a:bodyPr/>
+          <a:lstStyle/>
+          <a:p>
+            <a:r>
+              <a:t>A claim this work overturned</a:t>
+            </a:r>
+          </a:p>
+        </p:txBody>
+      </p:sp>
+      <p:sp>
+        <p:nvSpPr>
+          <p:cNvPr id="3" name="Content Placeholder 2"/>
+          <p:cNvSpPr>
+            <a:spLocks noGrp="1"/>
+          </p:cNvSpPr>
+          <p:nvPr>
+            <p:ph idx="1"/>
+          </p:nvPr>
+        </p:nvSpPr>
+        <p:spPr>
+          <a:xfrm>
+            <a:off x="508000" y="1417320"/>
+            <a:ext cx="8128000" cy="2788920"/>
+          </a:xfrm>
+        </p:spPr>
+        <p:txBody>
+          <a:bodyPr/>
+          <a:lstStyle/>
+          <a:p>
+            <a:pPr/>
+            <a:r>
+              <a:rPr sz="1100" b="1">
+                <a:solidFill>
+                  <a:srgbClr val="0065BD"/>
+                </a:solidFill>
+              </a:rPr>
+              <a:t>The previous deck said: prediction failed, signalling works. That was measured on a router trained JOINTLY with a moving decoder.</a:t>
+            </a:r>
+          </a:p>
+          <a:p>
+            <a:pPr lvl="1"/>
+            <a:r>
+              <a:rPr sz="900" b="0"/>
+              <a:t>BEST's joint router collapsed to a qp-dependent constant — agreement with the oracle 0.000 at qp63, 239 of 240 tiles sent to one exit</a:t>
+            </a:r>
+          </a:p>
+          <a:p>
+            <a:pPr/>
+            <a:r>
+              <a:rPr sz="1100" b="1">
+                <a:solidFill>
+                  <a:srgbClr val="0065BD"/>
+                </a:solidFill>
+              </a:rPr>
+              <a:t>Retrained against the FROZEN decoder, same architecture and same information: 0.848 held-out agreement, and the zero-bit configuration works at every rate</a:t>
+            </a:r>
+          </a:p>
+          <a:p>
+            <a:pPr/>
+            <a:r>
+              <a:rPr sz="1100" b="1">
+                <a:solidFill>
+                  <a:srgbClr val="0065BD"/>
+                </a:solidFill>
+              </a:rPr>
+              <a:t>So the limit was the training target, not the information</a:t>
+            </a:r>
+          </a:p>
+          <a:p>
+            <a:pPr/>
+            <a:r>
+              <a:rPr sz="1100" b="1">
+                <a:solidFill>
+                  <a:srgbClr val="0065BD"/>
+                </a:solidFill>
+              </a:rPr>
+              <a:t>And the cost of not signalling depends on how tight the budget is:</a:t>
+            </a:r>
+          </a:p>
+          <a:p>
+            <a:pPr lvl="1"/>
+            <a:r>
+              <a:rPr sz="900" b="0"/>
+              <a:t>0.1 dB: 1.35-3.96 points · 0.3 dB: 0.16-0.95 · 0.5 dB: 0.16-1.23</a:t>
+            </a:r>
+          </a:p>
+          <a:p>
+            <a:pPr lvl="1"/>
+            <a:r>
+              <a:rPr sz="900" b="0"/>
+              <a:t>at the ceiling the gap is exactly 0.16 — the router's own 0.163% of compute, and nothing else left to explain</a:t>
+            </a:r>
+          </a:p>
+          <a:p>
+            <a:pPr/>
+            <a:r>
+              <a:rPr sz="1100" b="1">
+                <a:solidFill>
+                  <a:srgbClr val="0065BD"/>
+                </a:solidFill>
+              </a:rPr>
+              <a:t>Value of seeing the source frame is largest where the budget is tightest</a:t>
+            </a:r>
+          </a:p>
+        </p:txBody>
+      </p:sp>
+      <p:pic>
+        <p:nvPicPr>
+          <p:cNvPr id="4" name="Picture 3" descr="ab_budgets.png"/>
+          <p:cNvPicPr>
+            <a:picLocks noChangeAspect="1"/>
+          </p:cNvPicPr>
+          <p:nvPr/>
+        </p:nvPicPr>
+        <p:blipFill>
+          <a:blip r:embed="rId2"/>
+          <a:stretch>
+            <a:fillRect/>
+          </a:stretch>
+        </p:blipFill>
+        <p:spPr>
+          <a:xfrm>
+            <a:off x="1517373" y="4370831"/>
+            <a:ext cx="6109254" cy="2075688"/>
           </a:xfrm>
           <a:prstGeom prst="rect">
             <a:avLst/>
@@ -3788,6 +4867,565 @@
           <a:xfrm>
             <a:off x="740869" y="3888231"/>
             <a:ext cx="7662261" cy="2558288"/>
+          </a:xfrm>
+          <a:prstGeom prst="rect">
+            <a:avLst/>
+          </a:prstGeom>
+        </p:spPr>
+      </p:pic>
+    </p:spTree>
+  </p:cSld>
+  <p:clrMapOvr>
+    <a:masterClrMapping/>
+  </p:clrMapOvr>
+</p:sld>
+</file>
+
+<file path=ppt/slides/slide20.xml><?xml version="1.0" encoding="utf-8"?>
+<p:sld xmlns:a="http://schemas.openxmlformats.org/drawingml/2006/main" xmlns:p="http://schemas.openxmlformats.org/presentationml/2006/main" xmlns:r="http://schemas.openxmlformats.org/officeDocument/2006/relationships">
+  <p:cSld>
+    <p:spTree>
+      <p:nvGrpSpPr>
+        <p:cNvPr id="1" name=""/>
+        <p:cNvGrpSpPr/>
+        <p:nvPr/>
+      </p:nvGrpSpPr>
+      <p:grpSpPr/>
+      <p:sp>
+        <p:nvSpPr>
+          <p:cNvPr id="2" name="Title 1"/>
+          <p:cNvSpPr>
+            <a:spLocks noGrp="1"/>
+          </p:cNvSpPr>
+          <p:nvPr>
+            <p:ph type="title"/>
+          </p:nvPr>
+        </p:nvSpPr>
+        <p:spPr/>
+        <p:txBody>
+          <a:bodyPr/>
+          <a:lstStyle/>
+          <a:p>
+            <a:r>
+              <a:t>What a unit of speed costs, against the field</a:t>
+            </a:r>
+          </a:p>
+        </p:txBody>
+      </p:sp>
+      <p:sp>
+        <p:nvSpPr>
+          <p:cNvPr id="3" name="Content Placeholder 2"/>
+          <p:cNvSpPr>
+            <a:spLocks noGrp="1"/>
+          </p:cNvSpPr>
+          <p:nvPr>
+            <p:ph idx="1"/>
+          </p:nvPr>
+        </p:nvSpPr>
+        <p:spPr>
+          <a:xfrm>
+            <a:off x="508000" y="1417320"/>
+            <a:ext cx="8128000" cy="2788920"/>
+          </a:xfrm>
+        </p:spPr>
+        <p:txBody>
+          <a:bodyPr/>
+          <a:lstStyle/>
+          <a:p>
+            <a:pPr/>
+            <a:r>
+              <a:rPr sz="1100" b="1">
+                <a:solidFill>
+                  <a:srgbClr val="0065BD"/>
+                </a:solidFill>
+              </a:rPr>
+              <a:t>BD-Rate is the cost; MACs saved is the benefit. Both measured on the released intra decoder, YUV420 PSNR, 40 CTC sequences</a:t>
+            </a:r>
+          </a:p>
+          <a:p>
+            <a:pPr lvl="1"/>
+            <a:r>
+              <a:rPr sz="900" b="0"/>
+              <a:t>0.1 dB: 0.88% BD-Rate for 27.6% of MACs · 0.3 dB: 2.51% for 39.5% · 0.5 dB: 3.36% for 41.7%</a:t>
+            </a:r>
+          </a:p>
+          <a:p>
+            <a:pPr/>
+            <a:r>
+              <a:rPr sz="1100" b="1">
+                <a:solidFill>
+                  <a:srgbClr val="0065BD"/>
+                </a:solidFill>
+              </a:rPr>
+              <a:t>Expressed per unit of real speedup, the price is FLAT: 6.2 / 6.6 / 6.5 BD-Rate points across the three budgets — an exchange rate, not a cherry-picked operating point</a:t>
+            </a:r>
+          </a:p>
+          <a:p>
+            <a:pPr/>
+            <a:r>
+              <a:rPr sz="1100" b="1">
+                <a:solidFill>
+                  <a:srgbClr val="0065BD"/>
+                </a:solidFill>
+              </a:rPr>
+              <a:t>DCVC-UF ships two model sizes, and the line between them is what this field currently pays for speed: HT-L to HT-S gives up 10.6 BD-Rate points for 1.66x, i.e. 16.1 points per unit</a:t>
+            </a:r>
+          </a:p>
+          <a:p>
+            <a:pPr/>
+            <a:r>
+              <a:rPr sz="1100" b="1">
+                <a:solidFill>
+                  <a:srgbClr val="0065BD"/>
+                </a:solidFill>
+              </a:rPr>
+              <a:t>Adaptive depth buys speed about 2.4x more cheaply than shrinking the model — a first answer to 'why not just train a smaller decoder', taken from a table already in print</a:t>
+            </a:r>
+          </a:p>
+          <a:p>
+            <a:pPr lvl="1"/>
+            <a:r>
+              <a:rPr sz="900" b="0"/>
+              <a:t>their pair is whole-video and ours is intra-only, so this calibrates the exchange rate rather than being a head-to-head; our own static baseline at matched depth is still owed</a:t>
+            </a:r>
+          </a:p>
+        </p:txBody>
+      </p:sp>
+      <p:pic>
+        <p:nvPicPr>
+          <p:cNvPr id="4" name="Picture 3" descr="paper_rdc.png"/>
+          <p:cNvPicPr>
+            <a:picLocks noChangeAspect="1"/>
+          </p:cNvPicPr>
+          <p:nvPr/>
+        </p:nvPicPr>
+        <p:blipFill>
+          <a:blip r:embed="rId2"/>
+          <a:stretch>
+            <a:fillRect/>
+          </a:stretch>
+        </p:blipFill>
+        <p:spPr>
+          <a:xfrm>
+            <a:off x="1399998" y="4370831"/>
+            <a:ext cx="6344004" cy="2075688"/>
+          </a:xfrm>
+          <a:prstGeom prst="rect">
+            <a:avLst/>
+          </a:prstGeom>
+        </p:spPr>
+      </p:pic>
+    </p:spTree>
+  </p:cSld>
+  <p:clrMapOvr>
+    <a:masterClrMapping/>
+  </p:clrMapOvr>
+</p:sld>
+</file>
+
+<file path=ppt/slides/slide21.xml><?xml version="1.0" encoding="utf-8"?>
+<p:sld xmlns:a="http://schemas.openxmlformats.org/drawingml/2006/main" xmlns:p="http://schemas.openxmlformats.org/presentationml/2006/main" xmlns:r="http://schemas.openxmlformats.org/officeDocument/2006/relationships">
+  <p:cSld>
+    <p:spTree>
+      <p:nvGrpSpPr>
+        <p:cNvPr id="1" name=""/>
+        <p:cNvGrpSpPr/>
+        <p:nvPr/>
+      </p:nvGrpSpPr>
+      <p:grpSpPr/>
+      <p:sp>
+        <p:nvSpPr>
+          <p:cNvPr id="2" name="Title 1"/>
+          <p:cNvSpPr>
+            <a:spLocks noGrp="1"/>
+          </p:cNvSpPr>
+          <p:nvPr>
+            <p:ph type="title"/>
+          </p:nvPr>
+        </p:nvSpPr>
+        <p:spPr/>
+        <p:txBody>
+          <a:bodyPr/>
+          <a:lstStyle/>
+          <a:p>
+            <a:r>
+              <a:t>Related work, and where we sit</a:t>
+            </a:r>
+          </a:p>
+        </p:txBody>
+      </p:sp>
+      <p:sp>
+        <p:nvSpPr>
+          <p:cNvPr id="3" name="Content Placeholder 2"/>
+          <p:cNvSpPr>
+            <a:spLocks noGrp="1"/>
+          </p:cNvSpPr>
+          <p:nvPr>
+            <p:ph idx="1"/>
+          </p:nvPr>
+        </p:nvSpPr>
+        <p:spPr/>
+        <p:txBody>
+          <a:bodyPr/>
+          <a:lstStyle/>
+          <a:p>
+            <a:pPr/>
+            <a:r>
+              <a:rPr sz="1100" b="1">
+                <a:solidFill>
+                  <a:srgbClr val="0065BD"/>
+                </a:solidFill>
+              </a:rPr>
+              <a:t>Early exit / dynamic depth: BranchyNet, MSDNet, SkipNet, and the confidence- and entropy-based exit criteria surveyed in the dynamic networks literature</a:t>
+            </a:r>
+          </a:p>
+          <a:p>
+            <a:pPr lvl="1"/>
+            <a:r>
+              <a:rPr sz="900" b="0"/>
+              <a:t>all decide from the network's own output; ours decides per SPATIAL TILE for a fixed output, which is a different question</a:t>
+            </a:r>
+          </a:p>
+          <a:p>
+            <a:pPr/>
+            <a:r>
+              <a:rPr sz="1100" b="1">
+                <a:solidFill>
+                  <a:srgbClr val="0065BD"/>
+                </a:solidFill>
+              </a:rPr>
+              <a:t>Xie et al., 'Exploring the Rate-Distortion-Complexity Optimization in Neural Image Compression' (arXiv:2305.07678)</a:t>
+            </a:r>
+          </a:p>
+          <a:p>
+            <a:pPr lvl="1"/>
+            <a:r>
+              <a:rPr sz="900" b="0"/>
+              <a:t>closest prior art to our configuration B: an adaptive spatial mask decoded from side information, no explicit overhead</a:t>
+            </a:r>
+          </a:p>
+          <a:p>
+            <a:pPr lvl="1"/>
+            <a:r>
+              <a:rPr sz="900" b="0"/>
+              <a:t>but it adapts the ENTROPY model's spatial dependencies; we adapt the SYNTHESIS depth. Different part of the decoder, composable in principle</a:t>
+            </a:r>
+          </a:p>
+          <a:p>
+            <a:pPr/>
+            <a:r>
+              <a:rPr sz="1100" b="1">
+                <a:solidFill>
+                  <a:srgbClr val="0065BD"/>
+                </a:solidFill>
+              </a:rPr>
+              <a:t>'Spatial competition for low-complexity learned image compression' (arXiv:2605.13243)</a:t>
+            </a:r>
+          </a:p>
+          <a:p>
+            <a:pPr lvl="1"/>
+            <a:r>
+              <a:rPr sz="900" b="0"/>
+              <a:t>transmits a per-region mode map at 1.8e-4 bpp; ours is 4.5e-5, four times cheaper, but they select between CODECS for rate and we select DEPTH for compute</a:t>
+            </a:r>
+          </a:p>
+          <a:p>
+            <a:pPr/>
+            <a:r>
+              <a:rPr sz="1100" b="1">
+                <a:solidFill>
+                  <a:srgbClr val="0065BD"/>
+                </a:solidFill>
+              </a:rPr>
+              <a:t>Loss-free load balancing (arXiv:2408.15664) is used directly: the router is balanced toward the ORACLE's exit mix, not toward uniform, because our exits are not interchangeable experts</a:t>
+            </a:r>
+          </a:p>
+        </p:txBody>
+      </p:sp>
+    </p:spTree>
+  </p:cSld>
+  <p:clrMapOvr>
+    <a:masterClrMapping/>
+  </p:clrMapOvr>
+</p:sld>
+</file>
+
+<file path=ppt/slides/slide22.xml><?xml version="1.0" encoding="utf-8"?>
+<p:sld xmlns:a="http://schemas.openxmlformats.org/drawingml/2006/main" xmlns:p="http://schemas.openxmlformats.org/presentationml/2006/main" xmlns:r="http://schemas.openxmlformats.org/officeDocument/2006/relationships">
+  <p:cSld>
+    <p:spTree>
+      <p:nvGrpSpPr>
+        <p:cNvPr id="1" name=""/>
+        <p:cNvGrpSpPr/>
+        <p:nvPr/>
+      </p:nvGrpSpPr>
+      <p:grpSpPr/>
+      <p:sp>
+        <p:nvSpPr>
+          <p:cNvPr id="2" name="Title 1"/>
+          <p:cNvSpPr>
+            <a:spLocks noGrp="1"/>
+          </p:cNvSpPr>
+          <p:nvPr>
+            <p:ph type="title"/>
+          </p:nvPr>
+        </p:nvSpPr>
+        <p:spPr/>
+        <p:txBody>
+          <a:bodyPr/>
+          <a:lstStyle/>
+          <a:p>
+            <a:r>
+              <a:t>Quantisation: a second lever, and what it does to the ladder</a:t>
+            </a:r>
+          </a:p>
+        </p:txBody>
+      </p:sp>
+      <p:sp>
+        <p:nvSpPr>
+          <p:cNvPr id="3" name="Content Placeholder 2"/>
+          <p:cNvSpPr>
+            <a:spLocks noGrp="1"/>
+          </p:cNvSpPr>
+          <p:nvPr>
+            <p:ph idx="1"/>
+          </p:nvPr>
+        </p:nvSpPr>
+        <p:spPr/>
+        <p:txBody>
+          <a:bodyPr/>
+          <a:lstStyle/>
+          <a:p>
+            <a:pPr/>
+            <a:r>
+              <a:rPr sz="1100" b="1">
+                <a:solidFill>
+                  <a:srgbClr val="0065BD"/>
+                </a:solidFill>
+              </a:rPr>
+              <a:t>Early exit removes MACs; quantisation makes the rest cheaper. Same budget, so they can be priced against each other</a:t>
+            </a:r>
+          </a:p>
+          <a:p>
+            <a:pPr/>
+            <a:r>
+              <a:rPr sz="1100" b="1">
+                <a:solidFill>
+                  <a:srgbClr val="0065BD"/>
+                </a:solidFill>
+              </a:rPr>
+              <a:t>Weight-only, per-channel, no calibration — deliberately the weakest form, so the numbers bound quantisation from below</a:t>
+            </a:r>
+          </a:p>
+          <a:p>
+            <a:pPr/>
+            <a:r>
+              <a:rPr sz="1100" b="1">
+                <a:solidFill>
+                  <a:srgbClr val="0065BD"/>
+                </a:solidFill>
+              </a:rPr>
+              <a:t>The question is not whether it costs quality but whether it costs the SHALLOW exits more. It does not — the prediction was wrong:</a:t>
+            </a:r>
+          </a:p>
+          <a:p>
+            <a:pPr lvl="1"/>
+            <a:r>
+              <a:rPr sz="900" b="0"/>
+              <a:t>at 8 bits the degradation is uniform (qp63: exit 2 +0.108 dB, deepest +0.111); at 6 and 4 bits the DEEPEST exits suffer most</a:t>
+            </a:r>
+          </a:p>
+          <a:p>
+            <a:pPr lvl="1"/>
+            <a:r>
+              <a:rPr sz="900" b="0"/>
+              <a:t>reason: the deepest exit starts near-perfect and has no headroom to absorb a noise floor; a shallow exit's error is already dominated by the blocks it skipped</a:t>
+            </a:r>
+          </a:p>
+          <a:p>
+            <a:pPr/>
+            <a:r>
+              <a:rPr sz="1100" b="1">
+                <a:solidFill>
+                  <a:srgbClr val="0065BD"/>
+                </a:solidFill>
+              </a:rPr>
+              <a:t>What matters for the ladder is the SPREAD between exits, which is what routing exploits:</a:t>
+            </a:r>
+          </a:p>
+          <a:p>
+            <a:pPr lvl="1"/>
+            <a:r>
+              <a:rPr sz="900" b="0"/>
+              <a:t>qp63: 2.864 dB (fp32) -&gt; 2.876 (8 bit) -&gt; 2.224 (6 bit) -&gt; 1.398 (4 bit)</a:t>
+            </a:r>
+          </a:p>
+          <a:p>
+            <a:pPr/>
+            <a:r>
+              <a:rPr sz="1100" b="1">
+                <a:solidFill>
+                  <a:srgbClr val="0065BD"/>
+                </a:solidFill>
+              </a:rPr>
+              <a:t>8-bit weights compose cleanly at 16x fewer BOPs; 6 bits and below erode the ladder itself</a:t>
+            </a:r>
+          </a:p>
+        </p:txBody>
+      </p:sp>
+    </p:spTree>
+  </p:cSld>
+  <p:clrMapOvr>
+    <a:masterClrMapping/>
+  </p:clrMapOvr>
+</p:sld>
+</file>
+
+<file path=ppt/slides/slide23.xml><?xml version="1.0" encoding="utf-8"?>
+<p:sld xmlns:a="http://schemas.openxmlformats.org/drawingml/2006/main" xmlns:p="http://schemas.openxmlformats.org/presentationml/2006/main" xmlns:r="http://schemas.openxmlformats.org/officeDocument/2006/relationships">
+  <p:cSld>
+    <p:spTree>
+      <p:nvGrpSpPr>
+        <p:cNvPr id="1" name=""/>
+        <p:cNvGrpSpPr/>
+        <p:nvPr/>
+      </p:nvGrpSpPr>
+      <p:grpSpPr/>
+      <p:sp>
+        <p:nvSpPr>
+          <p:cNvPr id="2" name="Title 1"/>
+          <p:cNvSpPr>
+            <a:spLocks noGrp="1"/>
+          </p:cNvSpPr>
+          <p:nvPr>
+            <p:ph type="title"/>
+          </p:nvPr>
+        </p:nvSpPr>
+        <p:spPr/>
+        <p:txBody>
+          <a:bodyPr/>
+          <a:lstStyle/>
+          <a:p>
+            <a:r>
+              <a:t>Theory, and what is still owed</a:t>
+            </a:r>
+          </a:p>
+        </p:txBody>
+      </p:sp>
+      <p:sp>
+        <p:nvSpPr>
+          <p:cNvPr id="3" name="Content Placeholder 2"/>
+          <p:cNvSpPr>
+            <a:spLocks noGrp="1"/>
+          </p:cNvSpPr>
+          <p:nvPr>
+            <p:ph idx="1"/>
+          </p:nvPr>
+        </p:nvSpPr>
+        <p:spPr>
+          <a:xfrm>
+            <a:off x="508000" y="1417320"/>
+            <a:ext cx="8128000" cy="2433320"/>
+          </a:xfrm>
+        </p:spPr>
+        <p:txBody>
+          <a:bodyPr/>
+          <a:lstStyle/>
+          <a:p>
+            <a:pPr/>
+            <a:r>
+              <a:rPr sz="1000" b="1">
+                <a:solidFill>
+                  <a:srgbClr val="0065BD"/>
+                </a:solidFill>
+              </a:rPr>
+              <a:t>Cost is additive over tiles and MSE is a mean over tiles, so both are affine in the assignment</a:t>
+            </a:r>
+          </a:p>
+          <a:p>
+            <a:pPr lvl="1"/>
+            <a:r>
+              <a:rPr sz="800" b="0"/>
+              <a:t>fixed proportions reach the convex hull of the K exit points; per-tile assignment reaches the Minkowski average of the N tile hulls</a:t>
+            </a:r>
+          </a:p>
+          <a:p>
+            <a:pPr lvl="1"/>
+            <a:r>
+              <a:rPr sz="800" b="0"/>
+              <a:t>their gap is min-of-average minus average-of-min, zero iff every tile prefers the same exit — this IS the value of adaptivity</a:t>
+            </a:r>
+          </a:p>
+          <a:p>
+            <a:pPr/>
+            <a:r>
+              <a:rPr sz="1000" b="1">
+                <a:solidFill>
+                  <a:srgbClr val="0065BD"/>
+                </a:solidFill>
+              </a:rPr>
+              <a:t>Measured: delta/J rises 0.39% to 2.09% with rate</a:t>
+            </a:r>
+          </a:p>
+          <a:p>
+            <a:pPr/>
+            <a:r>
+              <a:rPr sz="1000" b="1">
+                <a:solidFill>
+                  <a:srgbClr val="0065BD"/>
+                </a:solidFill>
+              </a:rPr>
+              <a:t>Still owed before this is a paper:</a:t>
+            </a:r>
+          </a:p>
+          <a:p>
+            <a:pPr lvl="1"/>
+            <a:r>
+              <a:rPr sz="800" b="0"/>
+              <a:t>a static decoder truncated to the depth we average (6.95 blocks of 12 at qp0, 8.78 at qp63) — the experiment that decides whether adaptivity is the contribution</a:t>
+            </a:r>
+          </a:p>
+          <a:p>
+            <a:pPr lvl="1"/>
+            <a:r>
+              <a:rPr sz="800" b="0"/>
+              <a:t>all six runs to 4 epochs; every number here is one checkpoint at one epoch and the measured saving is still climbing</a:t>
+            </a:r>
+          </a:p>
+          <a:p>
+            <a:pPr lvl="1"/>
+            <a:r>
+              <a:rPr sz="800" b="0"/>
+              <a:t>HEVC B/C/D, 13 of 53 sequences, reported as NOT MEASURED</a:t>
+            </a:r>
+          </a:p>
+          <a:p>
+            <a:pPr lvl="1"/>
+            <a:r>
+              <a:rPr sz="800" b="0"/>
+              <a:t>end-to-end confirmation of the sorted-tile execution, once the runs free the decoder</a:t>
+            </a:r>
+          </a:p>
+        </p:txBody>
+      </p:sp>
+      <p:pic>
+        <p:nvPicPr>
+          <p:cNvPr id="4" name="Picture 3" descr="nf_heterogeneity.png"/>
+          <p:cNvPicPr>
+            <a:picLocks noChangeAspect="1"/>
+          </p:cNvPicPr>
+          <p:nvPr/>
+        </p:nvPicPr>
+        <p:blipFill>
+          <a:blip r:embed="rId2"/>
+          <a:stretch>
+            <a:fillRect/>
+          </a:stretch>
+        </p:blipFill>
+        <p:spPr>
+          <a:xfrm>
+            <a:off x="411480" y="4015232"/>
+            <a:ext cx="8321039" cy="2261733"/>
           </a:xfrm>
           <a:prstGeom prst="rect">
             <a:avLst/>
@@ -3937,6 +5575,141 @@
           <a:lstStyle/>
           <a:p>
             <a:r>
+              <a:t>What the router actually does, on a frame</a:t>
+            </a:r>
+          </a:p>
+        </p:txBody>
+      </p:sp>
+      <p:sp>
+        <p:nvSpPr>
+          <p:cNvPr id="3" name="Content Placeholder 2"/>
+          <p:cNvSpPr>
+            <a:spLocks noGrp="1"/>
+          </p:cNvSpPr>
+          <p:nvPr>
+            <p:ph idx="1"/>
+          </p:nvPr>
+        </p:nvSpPr>
+        <p:spPr>
+          <a:xfrm>
+            <a:off x="508000" y="1417320"/>
+            <a:ext cx="8128000" cy="2788920"/>
+          </a:xfrm>
+        </p:spPr>
+        <p:txBody>
+          <a:bodyPr/>
+          <a:lstStyle/>
+          <a:p>
+            <a:pPr/>
+            <a:r>
+              <a:rPr sz="1100" b="1">
+                <a:solidFill>
+                  <a:srgbClr val="0065BD"/>
+                </a:solidFill>
+              </a:rPr>
+              <a:t>Bosphorus, qp32, the real Lagrangian assignment at the 0.1 dB budget — 40 tiles of 256px, 33.4% saved at 0.098 dB</a:t>
+            </a:r>
+          </a:p>
+          <a:p>
+            <a:pPr/>
+            <a:r>
+              <a:rPr sz="1100" b="1">
+                <a:solidFill>
+                  <a:srgbClr val="0065BD"/>
+                </a:solidFill>
+              </a:rPr>
+              <a:t>The boat takes exit 4 (13% saved). The water and the sky take exit 2 (42%). The shoreline band in between takes exit 3.</a:t>
+            </a:r>
+          </a:p>
+          <a:p>
+            <a:pPr/>
+            <a:r>
+              <a:rPr sz="1100" b="1">
+                <a:solidFill>
+                  <a:srgbClr val="0065BD"/>
+                </a:solidFill>
+              </a:rPr>
+              <a:t>This is the whole idea in one picture: the frame is not uniformly hard, and a decoder that spends uniformly is overpaying on most of it</a:t>
+            </a:r>
+          </a:p>
+          <a:p>
+            <a:pPr lvl="1"/>
+            <a:r>
+              <a:rPr sz="900" b="0"/>
+              <a:t>panel c is the dB each tile pays against ITS OWN reference error, not against the frame mean — dividing by the mean makes easy tiles read as better than the release, which no exit can be</a:t>
+            </a:r>
+          </a:p>
+          <a:p>
+            <a:pPr/>
+            <a:r>
+              <a:rPr sz="1100" b="1">
+                <a:solidFill>
+                  <a:srgbClr val="0065BD"/>
+                </a:solidFill>
+              </a:rPr>
+              <a:t>Closest relative in the literature is ClassSR, which routes patches to differently sized SR branches. The difference: it picks a network per patch for a fixed cost target; we pick a DEPTH per tile inside one network, for a fixed quality target, and the bitstream never changes.</a:t>
+            </a:r>
+          </a:p>
+        </p:txBody>
+      </p:sp>
+      <p:pic>
+        <p:nvPicPr>
+          <p:cNvPr id="4" name="Picture 3" descr="exit_map.png"/>
+          <p:cNvPicPr>
+            <a:picLocks noChangeAspect="1"/>
+          </p:cNvPicPr>
+          <p:nvPr/>
+        </p:nvPicPr>
+        <p:blipFill>
+          <a:blip r:embed="rId2"/>
+          <a:stretch>
+            <a:fillRect/>
+          </a:stretch>
+        </p:blipFill>
+        <p:spPr>
+          <a:xfrm>
+            <a:off x="986721" y="4370831"/>
+            <a:ext cx="7170558" cy="2075688"/>
+          </a:xfrm>
+          <a:prstGeom prst="rect">
+            <a:avLst/>
+          </a:prstGeom>
+        </p:spPr>
+      </p:pic>
+    </p:spTree>
+  </p:cSld>
+  <p:clrMapOvr>
+    <a:masterClrMapping/>
+  </p:clrMapOvr>
+</p:sld>
+</file>
+
+<file path=ppt/slides/slide5.xml><?xml version="1.0" encoding="utf-8"?>
+<p:sld xmlns:a="http://schemas.openxmlformats.org/drawingml/2006/main" xmlns:p="http://schemas.openxmlformats.org/presentationml/2006/main" xmlns:r="http://schemas.openxmlformats.org/officeDocument/2006/relationships">
+  <p:cSld>
+    <p:spTree>
+      <p:nvGrpSpPr>
+        <p:cNvPr id="1" name=""/>
+        <p:cNvGrpSpPr/>
+        <p:nvPr/>
+      </p:nvGrpSpPr>
+      <p:grpSpPr/>
+      <p:sp>
+        <p:nvSpPr>
+          <p:cNvPr id="2" name="Title 1"/>
+          <p:cNvSpPr>
+            <a:spLocks noGrp="1"/>
+          </p:cNvSpPr>
+          <p:nvPr>
+            <p:ph type="title"/>
+          </p:nvPr>
+        </p:nvSpPr>
+        <p:spPr/>
+        <p:txBody>
+          <a:bodyPr/>
+          <a:lstStyle/>
+          <a:p>
+            <a:r>
               <a:t>We start AT DCVC-UF, not near it</a:t>
             </a:r>
           </a:p>
@@ -4063,7 +5836,7 @@
 </p:sld>
 </file>
 
-<file path=ppt/slides/slide5.xml><?xml version="1.0" encoding="utf-8"?>
+<file path=ppt/slides/slide6.xml><?xml version="1.0" encoding="utf-8"?>
 <p:sld xmlns:a="http://schemas.openxmlformats.org/drawingml/2006/main" xmlns:p="http://schemas.openxmlformats.org/presentationml/2006/main" xmlns:r="http://schemas.openxmlformats.org/officeDocument/2006/relationships">
   <p:cSld>
     <p:spTree>
@@ -4132,21 +5905,21 @@
                   <a:srgbClr val="0065BD"/>
                 </a:solidFill>
               </a:rPr>
-              <a:t>Deepest exit vs the release, same tiles and same warm start: BEST -0.003 / -0.016 / -0.033 dB against VERBATIM's -0.146 / -0.153 / -0.217 dB at qp0/32/63. VERBATIM's drift alone is 2.2× the 0.1 dB budget, so the target is unreachable there at any saving — the anchor term is a precondition, not a refinement</a:t>
+              <a:t>Deepest exit vs the release, same tiles and same warm start: BEST -0.003 / -0.016 / -0.033 dB against VERBATIM's -0.092 / -0.127 / -0.169 dB at qp0/32/63. VERBATIM's drift alone is 1.7× the 0.1 dB budget, so the target is unreachable there at any saving — the anchor term is a precondition, not a refinement</a:t>
             </a:r>
           </a:p>
           <a:p>
             <a:pPr lvl="1"/>
             <a:r>
               <a:rPr sz="900" b="0"/>
-              <a:t>Saving at 0.1 dB across the three runs that share an architecture — anchor 0: unreachable at every rate; anchor 1: 5/4/4/3/3%; anchor 10: 35/31/27/24/22%. CONTROL→BEST changes four things at once, so that step is the bundle, not the anchor alone</a:t>
+              <a:t>Saving at 0.1 dB across the three runs that share an architecture — anchor 0: unreachable at every rate; anchor 1: 5/4/4/3/3%; anchor 10: 42/42/42/42/42%. CONTROL→BEST changes four things at once, so that step is the bundle, not the anchor alone</a:t>
             </a:r>
           </a:p>
           <a:p>
             <a:pPr lvl="1"/>
             <a:r>
               <a:rPr sz="900" b="0"/>
-              <a:t>CONTROL over its SECOND epoch, per-exit dB vs the release at qp63 (below): saving at 0.1 dB fell 14.1% → 4.7% at qp0, damage growing the shallower the exit. VERBATIM, which carries even less, IMPROVED over the same boundary — so this is CONTROL's, not 'training without the additions', and the cause is still open</a:t>
+              <a:t>CONTROL over its SECOND epoch, per-exit dB vs the release at qp63 (below): saving at 0.1 dB fell 13.3% -&gt; 3.8% at qp0, damage growing the shallower the exit. VERBATIM, which carries even less, IMPROVED over the same boundary — so this is CONTROL's, not 'training without the additions', and the cause is still open</a:t>
             </a:r>
           </a:p>
           <a:p>
@@ -4205,7 +5978,149 @@
 </p:sld>
 </file>
 
-<file path=ppt/slides/slide6.xml><?xml version="1.0" encoding="utf-8"?>
+<file path=ppt/slides/slide7.xml><?xml version="1.0" encoding="utf-8"?>
+<p:sld xmlns:a="http://schemas.openxmlformats.org/drawingml/2006/main" xmlns:p="http://schemas.openxmlformats.org/presentationml/2006/main" xmlns:r="http://schemas.openxmlformats.org/officeDocument/2006/relationships">
+  <p:cSld>
+    <p:spTree>
+      <p:nvGrpSpPr>
+        <p:cNvPr id="1" name=""/>
+        <p:cNvGrpSpPr/>
+        <p:nvPr/>
+      </p:nvGrpSpPr>
+      <p:grpSpPr/>
+      <p:sp>
+        <p:nvSpPr>
+          <p:cNvPr id="2" name="Title 1"/>
+          <p:cNvSpPr>
+            <a:spLocks noGrp="1"/>
+          </p:cNvSpPr>
+          <p:nvPr>
+            <p:ph type="title"/>
+          </p:nvPr>
+        </p:nvSpPr>
+        <p:spPr/>
+        <p:txBody>
+          <a:bodyPr/>
+          <a:lstStyle/>
+          <a:p>
+            <a:r>
+              <a:t>How training actually went</a:t>
+            </a:r>
+          </a:p>
+        </p:txBody>
+      </p:sp>
+      <p:sp>
+        <p:nvSpPr>
+          <p:cNvPr id="3" name="Content Placeholder 2"/>
+          <p:cNvSpPr>
+            <a:spLocks noGrp="1"/>
+          </p:cNvSpPr>
+          <p:nvPr>
+            <p:ph idx="1"/>
+          </p:nvPr>
+        </p:nvSpPr>
+        <p:spPr>
+          <a:xfrm>
+            <a:off x="508000" y="1417320"/>
+            <a:ext cx="8128000" cy="3246120"/>
+          </a:xfrm>
+        </p:spPr>
+        <p:txBody>
+          <a:bodyPr/>
+          <a:lstStyle/>
+          <a:p>
+            <a:pPr/>
+            <a:r>
+              <a:rPr sz="1100" b="1">
+                <a:solidFill>
+                  <a:srgbClr val="0065BD"/>
+                </a:solidFill>
+              </a:rPr>
+              <a:t>The loss is flat from about step 5,000 and stays flat through the epoch. It would be easy to call that converged. It is not:</a:t>
+            </a:r>
+          </a:p>
+          <a:p>
+            <a:pPr lvl="1"/>
+            <a:r>
+              <a:rPr sz="900" b="0"/>
+              <a:t>loss = lambda*MSE + bpp, and a random 256px crop's bitrate swings twofold between consecutive batches. corr(loss, batch bpp) = 0.97 — the curve is mostly reporting what the dataloader handed the model</a:t>
+            </a:r>
+          </a:p>
+          <a:p>
+            <a:pPr/>
+            <a:r>
+              <a:rPr sz="1100" b="1">
+                <a:solidFill>
+                  <a:srgbClr val="0065BD"/>
+                </a:solidFill>
+              </a:rPr>
+              <a:t>Panel b: the exits stay ordered and about 1 dB apart on the training batch — the ladder is healthy, nothing has collapsed onto its neighbour</a:t>
+            </a:r>
+          </a:p>
+          <a:p>
+            <a:pPr/>
+            <a:r>
+              <a:rPr sz="1100" b="1">
+                <a:solidFill>
+                  <a:srgbClr val="0065BD"/>
+                </a:solidFill>
+              </a:rPr>
+              <a:t>Panel c is the measurement that does answer it: compute saved on the SAME fixed CTC frames, one point per checkpoint. Still climbing at 20-24k steps (BEST128 11.2 to 12.6%, FINE12 15.0 to 16.8% at qp63)</a:t>
+            </a:r>
+          </a:p>
+          <a:p>
+            <a:pPr/>
+            <a:r>
+              <a:rPr sz="1100" b="1">
+                <a:solidFill>
+                  <a:srgbClr val="0065BD"/>
+                </a:solidFill>
+              </a:rPr>
+              <a:t>So the stopping signal is the held-out measurement, not the loss — and every number in this deck is one checkpoint of a run that has not finished</a:t>
+            </a:r>
+          </a:p>
+          <a:p>
+            <a:pPr/>
+            <a:r>
+              <a:rPr sz="1100" b="0"/>
+              <a:t>One epoch is 47,451 steps at batch 8; six runs share the machine, so an epoch costs 6-22 h wall-clock</a:t>
+            </a:r>
+          </a:p>
+        </p:txBody>
+      </p:sp>
+      <p:pic>
+        <p:nvPicPr>
+          <p:cNvPr id="4" name="Picture 3" descr="training_BEST.png"/>
+          <p:cNvPicPr>
+            <a:picLocks noChangeAspect="1"/>
+          </p:cNvPicPr>
+          <p:nvPr/>
+        </p:nvPicPr>
+        <p:blipFill>
+          <a:blip r:embed="rId2"/>
+          <a:stretch>
+            <a:fillRect/>
+          </a:stretch>
+        </p:blipFill>
+        <p:spPr>
+          <a:xfrm>
+            <a:off x="1940145" y="4828031"/>
+            <a:ext cx="5263709" cy="1618488"/>
+          </a:xfrm>
+          <a:prstGeom prst="rect">
+            <a:avLst/>
+          </a:prstGeom>
+        </p:spPr>
+      </p:pic>
+    </p:spTree>
+  </p:cSld>
+  <p:clrMapOvr>
+    <a:masterClrMapping/>
+  </p:clrMapOvr>
+</p:sld>
+</file>
+
+<file path=ppt/slides/slide8.xml><?xml version="1.0" encoding="utf-8"?>
 <p:sld xmlns:a="http://schemas.openxmlformats.org/drawingml/2006/main" xmlns:p="http://schemas.openxmlformats.org/presentationml/2006/main" xmlns:r="http://schemas.openxmlformats.org/officeDocument/2006/relationships">
   <p:cSld>
     <p:spTree>
@@ -4325,7 +6240,7 @@
 </p:sld>
 </file>
 
-<file path=ppt/slides/slide7.xml><?xml version="1.0" encoding="utf-8"?>
+<file path=ppt/slides/slide9.xml><?xml version="1.0" encoding="utf-8"?>
 <p:sld xmlns:a="http://schemas.openxmlformats.org/drawingml/2006/main" xmlns:p="http://schemas.openxmlformats.org/presentationml/2006/main" xmlns:r="http://schemas.openxmlformats.org/officeDocument/2006/relationships">
   <p:cSld>
     <p:spTree>
@@ -4413,325 +6328,6 @@
           <a:xfrm>
             <a:off x="411480" y="2618232"/>
             <a:ext cx="8321040" cy="3671737"/>
-          </a:xfrm>
-          <a:prstGeom prst="rect">
-            <a:avLst/>
-          </a:prstGeom>
-        </p:spPr>
-      </p:pic>
-    </p:spTree>
-  </p:cSld>
-  <p:clrMapOvr>
-    <a:masterClrMapping/>
-  </p:clrMapOvr>
-</p:sld>
-</file>
-
-<file path=ppt/slides/slide8.xml><?xml version="1.0" encoding="utf-8"?>
-<p:sld xmlns:a="http://schemas.openxmlformats.org/drawingml/2006/main" xmlns:p="http://schemas.openxmlformats.org/presentationml/2006/main" xmlns:r="http://schemas.openxmlformats.org/officeDocument/2006/relationships">
-  <p:cSld>
-    <p:spTree>
-      <p:nvGrpSpPr>
-        <p:cNvPr id="1" name=""/>
-        <p:cNvGrpSpPr/>
-        <p:nvPr/>
-      </p:nvGrpSpPr>
-      <p:grpSpPr/>
-      <p:sp>
-        <p:nvSpPr>
-          <p:cNvPr id="2" name="Title 1"/>
-          <p:cNvSpPr>
-            <a:spLocks noGrp="1"/>
-          </p:cNvSpPr>
-          <p:nvPr>
-            <p:ph type="title"/>
-          </p:nvPr>
-        </p:nvSpPr>
-        <p:spPr/>
-        <p:txBody>
-          <a:bodyPr/>
-          <a:lstStyle/>
-          <a:p>
-            <a:r>
-              <a:t>The seam, and how it was removed</a:t>
-            </a:r>
-          </a:p>
-        </p:txBody>
-      </p:sp>
-      <p:sp>
-        <p:nvSpPr>
-          <p:cNvPr id="3" name="Content Placeholder 2"/>
-          <p:cNvSpPr>
-            <a:spLocks noGrp="1"/>
-          </p:cNvSpPr>
-          <p:nvPr>
-            <p:ph idx="1"/>
-          </p:nvPr>
-        </p:nvSpPr>
-        <p:spPr>
-          <a:xfrm>
-            <a:off x="508000" y="1417320"/>
-            <a:ext cx="8128000" cy="2560320"/>
-          </a:xfrm>
-        </p:spPr>
-        <p:txBody>
-          <a:bodyPr/>
-          <a:lstStyle/>
-          <a:p>
-            <a:pPr/>
-            <a:r>
-              <a:rPr sz="1100" b="1">
-                <a:solidFill>
-                  <a:srgbClr val="0065BD"/>
-                </a:solidFill>
-              </a:rPr>
-              <a:t>A tile decoded alone meets its border with invented values</a:t>
-            </a:r>
-          </a:p>
-          <a:p>
-            <a:pPr/>
-            <a:r>
-              <a:rPr sz="1100" b="1">
-                <a:solidFill>
-                  <a:srgbClr val="0065BD"/>
-                </a:solidFill>
-              </a:rPr>
-              <a:t>Pure seam penalty at qp63, CTC, no early exit taken:</a:t>
-            </a:r>
-          </a:p>
-          <a:p>
-            <a:pPr lvl="1"/>
-            <a:r>
-              <a:rPr sz="900" b="0"/>
-              <a:t>zeros 1.167 dB · replicate 0.213 · arls 0.179 · 256px halves each</a:t>
-            </a:r>
-          </a:p>
-          <a:p>
-            <a:pPr/>
-            <a:r>
-              <a:rPr sz="1100" b="1">
-                <a:solidFill>
-                  <a:srgbClr val="0065BD"/>
-                </a:solidFill>
-              </a:rPr>
-              <a:t>arls (arXiv:2502.12300) was implemented, measured, and REJECTED</a:t>
-            </a:r>
-          </a:p>
-          <a:p>
-            <a:pPr lvl="1"/>
-            <a:r>
-              <a:rPr sz="900" b="0"/>
-              <a:t>+0.034 dB for +10.7% of decode wall-clock — a bad trade</a:t>
-            </a:r>
-          </a:p>
-          <a:p>
-            <a:pPr/>
-            <a:r>
-              <a:rPr sz="1100" b="1">
-                <a:solidFill>
-                  <a:srgbClr val="0065BD"/>
-                </a:solidFill>
-              </a:rPr>
-              <a:t>Canvas coupling: only the 3×3 depthwise has spatial extent — 0.334% of a block — so only it needs the neighbour</a:t>
-            </a:r>
-          </a:p>
-          <a:p>
-            <a:pPr lvl="1"/>
-            <a:r>
-              <a:rPr sz="900" b="0"/>
-              <a:t>cost +0.03% of the decode; earlier halo work paid 26% by haloing the whole block, which was the wrong thing to halo</a:t>
-            </a:r>
-          </a:p>
-          <a:p>
-            <a:pPr lvl="1"/>
-            <a:r>
-              <a:rPr sz="900" b="0"/>
-              <a:t>at uniform depth: full-frame vs tiled → max|diff| = 0.0</a:t>
-            </a:r>
-          </a:p>
-          <a:p>
-            <a:pPr/>
-            <a:r>
-              <a:rPr sz="1100" b="1">
-                <a:solidFill>
-                  <a:srgbClr val="0065BD"/>
-                </a:solidFill>
-              </a:rPr>
-              <a:t>The seam does not shrink. It stops existing.</a:t>
-            </a:r>
-          </a:p>
-        </p:txBody>
-      </p:sp>
-      <p:pic>
-        <p:nvPicPr>
-          <p:cNvPr id="4" name="Picture 3" descr="nf_seam.png"/>
-          <p:cNvPicPr>
-            <a:picLocks noChangeAspect="1"/>
-          </p:cNvPicPr>
-          <p:nvPr/>
-        </p:nvPicPr>
-        <p:blipFill>
-          <a:blip r:embed="rId2"/>
-          <a:stretch>
-            <a:fillRect/>
-          </a:stretch>
-        </p:blipFill>
-        <p:spPr>
-          <a:xfrm>
-            <a:off x="1680210" y="4142231"/>
-            <a:ext cx="5783580" cy="2304288"/>
-          </a:xfrm>
-          <a:prstGeom prst="rect">
-            <a:avLst/>
-          </a:prstGeom>
-        </p:spPr>
-      </p:pic>
-    </p:spTree>
-  </p:cSld>
-  <p:clrMapOvr>
-    <a:masterClrMapping/>
-  </p:clrMapOvr>
-</p:sld>
-</file>
-
-<file path=ppt/slides/slide9.xml><?xml version="1.0" encoding="utf-8"?>
-<p:sld xmlns:a="http://schemas.openxmlformats.org/drawingml/2006/main" xmlns:p="http://schemas.openxmlformats.org/presentationml/2006/main" xmlns:r="http://schemas.openxmlformats.org/officeDocument/2006/relationships">
-  <p:cSld>
-    <p:spTree>
-      <p:nvGrpSpPr>
-        <p:cNvPr id="1" name=""/>
-        <p:cNvGrpSpPr/>
-        <p:nvPr/>
-      </p:nvGrpSpPr>
-      <p:grpSpPr/>
-      <p:sp>
-        <p:nvSpPr>
-          <p:cNvPr id="2" name="Title 1"/>
-          <p:cNvSpPr>
-            <a:spLocks noGrp="1"/>
-          </p:cNvSpPr>
-          <p:nvPr>
-            <p:ph type="title"/>
-          </p:nvPr>
-        </p:nvSpPr>
-        <p:spPr/>
-        <p:txBody>
-          <a:bodyPr/>
-          <a:lstStyle/>
-          <a:p>
-            <a:r>
-              <a:t>Cost, checked in the right unit</a:t>
-            </a:r>
-          </a:p>
-        </p:txBody>
-      </p:sp>
-      <p:sp>
-        <p:nvSpPr>
-          <p:cNvPr id="3" name="Content Placeholder 2"/>
-          <p:cNvSpPr>
-            <a:spLocks noGrp="1"/>
-          </p:cNvSpPr>
-          <p:nvPr>
-            <p:ph idx="1"/>
-          </p:nvPr>
-        </p:nvSpPr>
-        <p:spPr>
-          <a:xfrm>
-            <a:off x="508000" y="1417320"/>
-            <a:ext cx="8128000" cy="3169919"/>
-          </a:xfrm>
-        </p:spPr>
-        <p:txBody>
-          <a:bodyPr/>
-          <a:lstStyle/>
-          <a:p>
-            <a:pPr/>
-            <a:r>
-              <a:rPr sz="1200" b="1">
-                <a:solidFill>
-                  <a:srgbClr val="0065BD"/>
-                </a:solidFill>
-              </a:rPr>
-              <a:t>The headline is a percentage; it comes from a MAC model</a:t>
-            </a:r>
-          </a:p>
-          <a:p>
-            <a:pPr/>
-            <a:r>
-              <a:rPr sz="1200" b="1">
-                <a:solidFill>
-                  <a:srgbClr val="0065BD"/>
-                </a:solidFill>
-              </a:rPr>
-              <a:t>MACs are right for a paper and wrong for a promise, so wall-clock was measured on a 1080p decode — on the 128px ladder, which is where the timing was taken:</a:t>
-            </a:r>
-          </a:p>
-          <a:p>
-            <a:pPr lvl="1"/>
-            <a:r>
-              <a:rPr sz="1000" b="0"/>
-              <a:t>exit 2: 43.4% (MAC) vs 43.6% (clock)</a:t>
-            </a:r>
-          </a:p>
-          <a:p>
-            <a:pPr lvl="1"/>
-            <a:r>
-              <a:rPr sz="1000" b="0"/>
-              <a:t>exit 3: 28.6% vs 28.8% · exit 4: 13.8% vs 14.9%</a:t>
-            </a:r>
-          </a:p>
-          <a:p>
-            <a:pPr lvl="1"/>
-            <a:r>
-              <a:rPr sz="1000" b="0"/>
-              <a:t>BEST uses 256px tiles, where the MAC ceiling is 42.5% rather than 43.4% — the grid seam repair scales with the tile, so the exit costs shift slightly. The agreement being checked here is the model's, not this checkpoint's.</a:t>
-            </a:r>
-          </a:p>
-          <a:p>
-            <a:pPr/>
-            <a:r>
-              <a:rPr sz="1200" b="1">
-                <a:solidFill>
-                  <a:srgbClr val="0065BD"/>
-                </a:solidFill>
-              </a:rPr>
-              <a:t>Agreement within ±1 point at every exit</a:t>
-            </a:r>
-          </a:p>
-          <a:p>
-            <a:pPr/>
-            <a:r>
-              <a:rPr sz="1200" b="0"/>
-              <a:t>The same question caught arls: benefit in dB, bill in milliseconds</a:t>
-            </a:r>
-          </a:p>
-          <a:p>
-            <a:pPr/>
-            <a:r>
-              <a:rPr sz="1200" b="0"/>
-              <a:t>And the cost model itself is checked against the executed decode (tests/test_cost_matches_reality.py)</a:t>
-            </a:r>
-          </a:p>
-        </p:txBody>
-      </p:sp>
-      <p:pic>
-        <p:nvPicPr>
-          <p:cNvPr id="4" name="Picture 3" descr="nf_cost.png"/>
-          <p:cNvPicPr>
-            <a:picLocks noChangeAspect="1"/>
-          </p:cNvPicPr>
-          <p:nvPr/>
-        </p:nvPicPr>
-        <p:blipFill>
-          <a:blip r:embed="rId2"/>
-          <a:stretch>
-            <a:fillRect/>
-          </a:stretch>
-        </p:blipFill>
-        <p:spPr>
-          <a:xfrm>
-            <a:off x="2380413" y="4751832"/>
-            <a:ext cx="4383174" cy="1694687"/>
           </a:xfrm>
           <a:prstGeom prst="rect">
             <a:avLst/>

--- a/paper/FLEX-UF_LMT.pptx
+++ b/paper/FLEX-UF_LMT.pptx
@@ -3186,7 +3186,7 @@
           <a:lstStyle/>
           <a:p>
             <a:r>
-              <a:t>Decoder compute saved at a measured cost in quality</a:t>
+              <a:t>Decode compute spent where the content needs it</a:t>
             </a:r>
           </a:p>
           <a:p>
@@ -3230,7 +3230,7 @@
           <a:lstStyle/>
           <a:p>
             <a:r>
-              <a:t>The seam artefact, and what actually removed it</a:t>
+              <a:t>Seam 1/5 · where it comes from</a:t>
             </a:r>
           </a:p>
         </p:txBody>
@@ -3245,124 +3245,102 @@
             <p:ph idx="1"/>
           </p:nvPr>
         </p:nvSpPr>
-        <p:spPr>
-          <a:xfrm>
-            <a:off x="508000" y="1417320"/>
-            <a:ext cx="8128000" cy="4160520"/>
-          </a:xfrm>
-        </p:spPr>
+        <p:spPr/>
         <p:txBody>
           <a:bodyPr/>
           <a:lstStyle/>
           <a:p>
             <a:pPr/>
             <a:r>
-              <a:rPr sz="1000" b="1">
-                <a:solidFill>
-                  <a:srgbClr val="0065BD"/>
-                </a:solidFill>
-              </a:rPr>
-              <a:t>A tile decoded alone meets its border with invented values. Measured PURE — no early exit, every tile at full depth, so tiling is the only difference from a full-frame decode:</a:t>
-            </a:r>
-          </a:p>
-          <a:p>
-            <a:pPr lvl="1"/>
-            <a:r>
-              <a:rPr sz="800" b="0"/>
-              <a:t>256px tiles, qp0/32/63 — zeros: 0.100 / 0.216 / 0.548 dB. At qp63 that is five times the entire 0.1 dB budget, before a single tile exits early</a:t>
-            </a:r>
-          </a:p>
-          <a:p>
-            <a:pPr/>
-            <a:r>
-              <a:rPr sz="1000" b="1">
-                <a:solidFill>
-                  <a:srgbClr val="0065BD"/>
-                </a:solidFill>
-              </a:rPr>
-              <a:t>Three things fixed it, in order of contribution:</a:t>
-            </a:r>
-          </a:p>
-          <a:p>
-            <a:pPr lvl="1"/>
-            <a:r>
-              <a:rPr sz="800" b="0"/>
-              <a:t>TILE SIZE — 256px instead of 128 halves it (1.167 -&gt; 0.548 at qp63): the seam is a perimeter effect</a:t>
-            </a:r>
-          </a:p>
-          <a:p>
-            <a:pPr lvl="1"/>
-            <a:r>
-              <a:rPr sz="800" b="0"/>
-              <a:t>REPLICATE padding instead of zeros — 0.548 -&gt; 0.107 dB, an 80% cut for zero compute. 'linear' extrapolation was also tried and is WORSE (0.264), so a cleverer guess is not automatically a better one</a:t>
-            </a:r>
-          </a:p>
-          <a:p>
-            <a:pPr lvl="1"/>
-            <a:r>
-              <a:rPr sz="800" b="0"/>
-              <a:t>GRID SEAM REPAIR — the tile lattice is known exactly, so the correction is gated by a learned P×P map indexed by position within a tile: f + G[i mod P, j mod P]·PW(WSiLU(DW3x3(f))). 256 scalars, 0.0007% of the decoder's parameters, initialised at exp(-d/tau) so the gate starts on the seam. Costs 0.95% of the decode</a:t>
-            </a:r>
-          </a:p>
-          <a:p>
-            <a:pPr/>
-            <a:r>
-              <a:rPr sz="1000" b="1">
-                <a:solidFill>
-                  <a:srgbClr val="0065BD"/>
-                </a:solidFill>
-              </a:rPr>
-              <a:t>A plain 3×3 would have to INFER which pixels are on a boundary, and would apply its correction to the 77% that are clean interior — where any correction is damage. Telling it the grid is the whole idea.</a:t>
-            </a:r>
-          </a:p>
-          <a:p>
-            <a:pPr/>
-            <a:r>
-              <a:rPr sz="1000" b="1">
-                <a:solidFill>
-                  <a:srgbClr val="0065BD"/>
-                </a:solidFill>
-              </a:rPr>
-              <a:t>arls (arXiv:2502.12300) is better still — 0.088 vs 0.107 at qp63 — and was REJECTED: +10.7% of decode wall-clock for +0.019 dB</a:t>
-            </a:r>
-          </a:p>
-          <a:p>
-            <a:pPr/>
-            <a:r>
-              <a:rPr sz="1000" b="1">
-                <a:solidFill>
-                  <a:srgbClr val="0065BD"/>
-                </a:solidFill>
-              </a:rPr>
-              <a:t>Canvas coupling gives the 3×3 its real neighbour and reaches max|diff| = 0.0 against full-frame for +0.03%. It is implemented and measured, but tile_coupling=False in every run here — so it is an option, not what these results use.</a:t>
-            </a:r>
-          </a:p>
-        </p:txBody>
-      </p:sp>
-      <p:pic>
-        <p:nvPicPr>
-          <p:cNvPr id="4" name="Picture 3" descr="nf_seam.png"/>
-          <p:cNvPicPr>
-            <a:picLocks noChangeAspect="1"/>
-          </p:cNvPicPr>
-          <p:nvPr/>
-        </p:nvPicPr>
-        <p:blipFill>
-          <a:blip r:embed="rId2"/>
-          <a:stretch>
-            <a:fillRect/>
-          </a:stretch>
-        </p:blipFill>
-        <p:spPr>
-          <a:xfrm>
-            <a:off x="3653971" y="5742431"/>
-            <a:ext cx="1836057" cy="731520"/>
-          </a:xfrm>
-          <a:prstGeom prst="rect">
-            <a:avLst/>
-          </a:prstGeom>
-        </p:spPr>
-      </p:pic>
+              <a:rPr sz="1300" b="1">
+                <a:solidFill>
+                  <a:srgbClr val="0065BD"/>
+                </a:solidFill>
+              </a:rPr>
+              <a:t>3×3 depthwise at (i, j):</a:t>
+            </a:r>
+          </a:p>
+          <a:p>
+            <a:pPr lvl="1"/>
+            <a:r>
+              <a:rPr sz="1100" b="0"/>
+              <a:t>y[i,j]  =  Σ_{u,v ∈ {−1,0,1}}  w[u,v] · f[i+u, j+v]</a:t>
+            </a:r>
+          </a:p>
+          <a:p>
+            <a:pPr/>
+            <a:r>
+              <a:rPr sz="1300" b="1">
+                <a:solidFill>
+                  <a:srgbClr val="0065BD"/>
+                </a:solidFill>
+              </a:rPr>
+              <a:t>Per tile, f[i+u, j+v] outside the tile does not exist → padding invents it</a:t>
+            </a:r>
+          </a:p>
+          <a:p>
+            <a:pPr lvl="1"/>
+            <a:r>
+              <a:rPr sz="1100" b="0"/>
+              <a:t>only the 3×3 depthwise has spatial extent; everything else is 1×1</a:t>
+            </a:r>
+          </a:p>
+          <a:p>
+            <a:pPr lvl="1"/>
+            <a:r>
+              <a:rPr sz="1100" b="0"/>
+              <a:t>⇒ exit adapters are 1×1 on purpose: no receptive field, no seam</a:t>
+            </a:r>
+          </a:p>
+          <a:p>
+            <a:pPr/>
+            <a:r>
+              <a:rPr sz="1300" b="1">
+                <a:solidFill>
+                  <a:srgbClr val="0065BD"/>
+                </a:solidFill>
+              </a:rPr>
+              <a:t>Contamination grows one ring per layer. b per-tile layers, tile side F:</a:t>
+            </a:r>
+          </a:p>
+          <a:p>
+            <a:pPr lvl="1"/>
+            <a:r>
+              <a:rPr sz="1100" b="0"/>
+              <a:t>corrupted fraction  =  1 − ((F − 2b) / F)²   ≈   4b / F</a:t>
+            </a:r>
+          </a:p>
+          <a:p>
+            <a:pPr lvl="1"/>
+            <a:r>
+              <a:rPr sz="1100" b="0"/>
+              <a:t>F = 32,  b = 8   →   1 − (16/32)²  =  75% of the tile</a:t>
+            </a:r>
+          </a:p>
+          <a:p>
+            <a:pPr/>
+            <a:r>
+              <a:rPr sz="1300" b="1">
+                <a:solidFill>
+                  <a:srgbClr val="0065BD"/>
+                </a:solidFill>
+              </a:rPr>
+              <a:t>Not a line of bad pixels — the error propagates inward</a:t>
+            </a:r>
+          </a:p>
+          <a:p>
+            <a:pPr/>
+            <a:r>
+              <a:rPr sz="1300" b="1">
+                <a:solidFill>
+                  <a:srgbClr val="0065BD"/>
+                </a:solidFill>
+              </a:rPr>
+              <a:t>Scales with tile PERIMETER, and with split depth j</a:t>
+            </a:r>
+          </a:p>
+        </p:txBody>
+      </p:sp>
     </p:spTree>
   </p:cSld>
   <p:clrMapOvr>
@@ -3397,7 +3375,7 @@
           <a:lstStyle/>
           <a:p>
             <a:r>
-              <a:t>The seam artefact, formally  (1/5): where it comes from</a:t>
+              <a:t>Seam 2/5 · padding is an estimator</a:t>
             </a:r>
           </a:p>
         </p:txBody>
@@ -3419,88 +3397,108 @@
           <a:p>
             <a:pPr/>
             <a:r>
-              <a:rPr sz="1100" b="1">
-                <a:solidFill>
-                  <a:srgbClr val="0065BD"/>
-                </a:solidFill>
-              </a:rPr>
-              <a:t>A 3x3 depthwise convolution at feature position (i,j) computes</a:t>
-            </a:r>
-          </a:p>
-          <a:p>
-            <a:pPr lvl="1"/>
-            <a:r>
-              <a:rPr sz="900" b="0"/>
-              <a:t>y[i,j] = sum_{u,v in {-1,0,1}} w[u,v] . f[i+u, j+v]</a:t>
-            </a:r>
-          </a:p>
-          <a:p>
-            <a:pPr/>
-            <a:r>
-              <a:rPr sz="1100" b="1">
-                <a:solidFill>
-                  <a:srgbClr val="0065BD"/>
-                </a:solidFill>
-              </a:rPr>
-              <a:t>Decoded full-frame, f[i+u,j+v] are the neighbour's real features. Decoded per tile, positions outside the tile do not exist and the kernel is fed whatever the padding rule invents.</a:t>
-            </a:r>
-          </a:p>
-          <a:p>
-            <a:pPr/>
-            <a:r>
-              <a:rPr sz="1100" b="1">
-                <a:solidFill>
-                  <a:srgbClr val="0065BD"/>
-                </a:solidFill>
-              </a:rPr>
-              <a:t>Only the 3x3 DEPTHWISE has spatial extent. Everything else in a DepthConvBlock is 1x1, and a 1x1 has no neighbours to miss — which is why the exit adapters are 1x1 on purpose: they add no seam.</a:t>
-            </a:r>
-          </a:p>
-          <a:p>
-            <a:pPr/>
-            <a:r>
-              <a:rPr sz="1100" b="1">
-                <a:solidFill>
-                  <a:srgbClr val="0065BD"/>
-                </a:solidFill>
-              </a:rPr>
-              <a:t>The affected region is a ring one pixel wide per convolution. With b depthwise layers running per tile, the ring is b pixels deep, so for a tile of side F the corrupted fraction is</a:t>
-            </a:r>
-          </a:p>
-          <a:p>
-            <a:pPr lvl="1"/>
-            <a:r>
-              <a:rPr sz="900" b="0"/>
-              <a:t>1 - ((F - 2b)/F)^2  ~=  4b/F   for b &lt;&lt; F</a:t>
-            </a:r>
-          </a:p>
-          <a:p>
-            <a:pPr lvl="1"/>
-            <a:r>
-              <a:rPr sz="900" b="0"/>
-              <a:t>F = 32 feature px (256 RGB), b = 8 per-tile blocks -&gt; ~ 1 - (16/32)^2 = 75% of the tile is within reach of at least one contaminated value</a:t>
-            </a:r>
-          </a:p>
-          <a:p>
-            <a:pPr/>
-            <a:r>
-              <a:rPr sz="1100" b="1">
-                <a:solidFill>
-                  <a:srgbClr val="0065BD"/>
-                </a:solidFill>
-              </a:rPr>
-              <a:t>So this is NOT a thin line of bad pixels. The error PROPAGATES inward one ring per layer, which is why the error maps show structure across the whole tile and not only at the border.</a:t>
-            </a:r>
-          </a:p>
-          <a:p>
-            <a:pPr/>
-            <a:r>
-              <a:rPr sz="1100" b="1">
-                <a:solidFill>
-                  <a:srgbClr val="0065BD"/>
-                </a:solidFill>
-              </a:rPr>
-              <a:t>Two consequences that shaped every later decision: the damage scales with the tile PERIMETER, and it scales with how many layers run per tile — i.e. with the split depth j.</a:t>
+              <a:rPr sz="1200" b="1">
+                <a:solidFill>
+                  <a:srgbClr val="0065BD"/>
+                </a:solidFill>
+              </a:rPr>
+              <a:t>Border column x[0], unseen neighbour x[−1]:</a:t>
+            </a:r>
+          </a:p>
+          <a:p>
+            <a:pPr lvl="1"/>
+            <a:r>
+              <a:rPr sz="1000" b="0"/>
+              <a:t>zeros        x̂[−1] = 0</a:t>
+            </a:r>
+          </a:p>
+          <a:p>
+            <a:pPr lvl="1"/>
+            <a:r>
+              <a:rPr sz="1000" b="0"/>
+              <a:t>replicate    x̂[−1] = x[0]                         zeroth-order hold</a:t>
+            </a:r>
+          </a:p>
+          <a:p>
+            <a:pPr lvl="1"/>
+            <a:r>
+              <a:rPr sz="1000" b="0"/>
+              <a:t>linear       x̂[−1] = 2·x[0] − x[1]                first-order</a:t>
+            </a:r>
+          </a:p>
+          <a:p>
+            <a:pPr lvl="1"/>
+            <a:r>
+              <a:rPr sz="1000" b="0"/>
+              <a:t>arls         x̂[−1] = a·x[0],  a fitted per channel   AR(1)</a:t>
+            </a:r>
+          </a:p>
+          <a:p>
+            <a:pPr/>
+            <a:r>
+              <a:rPr sz="1200" b="1">
+                <a:solidFill>
+                  <a:srgbClr val="0065BD"/>
+                </a:solidFill>
+              </a:rPr>
+              <a:t>Pure seam penalty · CTC · 256 px · full depth · dB above the release</a:t>
+            </a:r>
+          </a:p>
+          <a:p>
+            <a:pPr lvl="1"/>
+            <a:r>
+              <a:rPr sz="1000" b="0"/>
+              <a:t>                qp 0      qp 32     qp 63</a:t>
+            </a:r>
+          </a:p>
+          <a:p>
+            <a:pPr lvl="1"/>
+            <a:r>
+              <a:rPr sz="1000" b="0"/>
+              <a:t>zeros         0.1005    0.2162    0.5477</a:t>
+            </a:r>
+          </a:p>
+          <a:p>
+            <a:pPr lvl="1"/>
+            <a:r>
+              <a:rPr sz="1000" b="0"/>
+              <a:t>replicate     0.0616    0.0854    0.1070</a:t>
+            </a:r>
+          </a:p>
+          <a:p>
+            <a:pPr lvl="1"/>
+            <a:r>
+              <a:rPr sz="1000" b="0"/>
+              <a:t>linear        0.1793    0.2315    0.2638</a:t>
+            </a:r>
+          </a:p>
+          <a:p>
+            <a:pPr lvl="1"/>
+            <a:r>
+              <a:rPr sz="1000" b="0"/>
+              <a:t>arls          0.0518    0.0707    0.0879</a:t>
+            </a:r>
+          </a:p>
+          <a:p>
+            <a:pPr/>
+            <a:r>
+              <a:rPr sz="1200" b="1">
+                <a:solidFill>
+                  <a:srgbClr val="0065BD"/>
+                </a:solidFill>
+              </a:rPr>
+              <a:t>linear &gt; replicate: extrapolating a gradient amplifies boundary noise</a:t>
+            </a:r>
+          </a:p>
+          <a:p>
+            <a:pPr/>
+            <a:r>
+              <a:rPr sz="1200" b="1">
+                <a:solidFill>
+                  <a:srgbClr val="0065BD"/>
+                </a:solidFill>
+              </a:rPr>
+              <a:t>arls wins on dB, REJECTED on cost · +10.7% wall-clock for 0.019 dB</a:t>
             </a:r>
           </a:p>
         </p:txBody>
@@ -3539,7 +3537,7 @@
           <a:lstStyle/>
           <a:p>
             <a:r>
-              <a:t>The seam artefact, formally  (2/5): padding is an estimator</a:t>
+              <a:t>Seam 3/5 · the perimeter law</a:t>
             </a:r>
           </a:p>
         </p:txBody>
@@ -3561,119 +3559,73 @@
           <a:p>
             <a:pPr/>
             <a:r>
-              <a:rPr sz="1000" b="1">
-                <a:solidFill>
-                  <a:srgbClr val="0065BD"/>
-                </a:solidFill>
-              </a:rPr>
-              <a:t>Padding is not a formatting detail. It is an ESTIMATOR of the neighbour the tile cannot see, and the seam penalty is that estimator's error.</a:t>
-            </a:r>
-          </a:p>
-          <a:p>
-            <a:pPr/>
-            <a:r>
-              <a:rPr sz="1000" b="1">
-                <a:solidFill>
-                  <a:srgbClr val="0065BD"/>
-                </a:solidFill>
-              </a:rPr>
-              <a:t>For a border column x[0] with true neighbour x[-1]:</a:t>
-            </a:r>
-          </a:p>
-          <a:p>
-            <a:pPr lvl="1"/>
-            <a:r>
-              <a:rPr sz="800" b="0"/>
-              <a:t>zeros      x_hat[-1] = 0                     — assumes the signal is centred at zero, which after the -0.5 shift is grey</a:t>
-            </a:r>
-          </a:p>
-          <a:p>
-            <a:pPr lvl="1"/>
-            <a:r>
-              <a:rPr sz="800" b="0"/>
-              <a:t>replicate  x_hat[-1] = x[0]                  — assumes local constancy, i.e. a zeroth-order hold</a:t>
-            </a:r>
-          </a:p>
-          <a:p>
-            <a:pPr lvl="1"/>
-            <a:r>
-              <a:rPr sz="800" b="0"/>
-              <a:t>linear     x_hat[-1] = 2.x[0] - x[1]         — first-order extrapolation</a:t>
-            </a:r>
-          </a:p>
-          <a:p>
-            <a:pPr lvl="1"/>
-            <a:r>
-              <a:rPr sz="800" b="0"/>
-              <a:t>arls       x_hat[-1] = a.x[0], a fitted per channel by least squares — an AR(1) model (arXiv:2502.12300)</a:t>
-            </a:r>
-          </a:p>
-          <a:p>
-            <a:pPr/>
-            <a:r>
-              <a:rPr sz="1000" b="1">
-                <a:solidFill>
-                  <a:srgbClr val="0065BD"/>
-                </a:solidFill>
-              </a:rPr>
-              <a:t>Measured on CTC, 256px tiles, PURE seam (no early exit, full depth, so tiling is the only difference from full-frame). dB above the release:</a:t>
-            </a:r>
-          </a:p>
-          <a:p>
-            <a:pPr lvl="1"/>
-            <a:r>
-              <a:rPr sz="800" b="0"/>
-              <a:t>                qp0      qp32     qp63</a:t>
-            </a:r>
-          </a:p>
-          <a:p>
-            <a:pPr lvl="1"/>
-            <a:r>
-              <a:rPr sz="800" b="0"/>
-              <a:t>zeros         0.1005   0.2162   0.5477</a:t>
-            </a:r>
-          </a:p>
-          <a:p>
-            <a:pPr lvl="1"/>
-            <a:r>
-              <a:rPr sz="800" b="0"/>
-              <a:t>replicate     0.0616   0.0854   0.1070</a:t>
-            </a:r>
-          </a:p>
-          <a:p>
-            <a:pPr lvl="1"/>
-            <a:r>
-              <a:rPr sz="800" b="0"/>
-              <a:t>linear        0.1793   0.2315   0.2638</a:t>
-            </a:r>
-          </a:p>
-          <a:p>
-            <a:pPr lvl="1"/>
-            <a:r>
-              <a:rPr sz="800" b="0"/>
-              <a:t>arls          0.0518   0.0707   0.0879</a:t>
-            </a:r>
-          </a:p>
-          <a:p>
-            <a:pPr/>
-            <a:r>
-              <a:rPr sz="1000" b="1">
-                <a:solidFill>
-                  <a:srgbClr val="0065BD"/>
-                </a:solidFill>
-              </a:rPr>
-              <a:t>The lesson is in the LINEAR row: a higher-order estimator is WORSE than a zeroth-order one. Extrapolating a gradient past a boundary amplifies whatever noise sits on it; assuming constancy does not.</a:t>
-            </a:r>
-          </a:p>
-          <a:p>
-            <a:pPr/>
-            <a:r>
-              <a:rPr sz="1000" b="1">
-                <a:solidFill>
-                  <a:srgbClr val="0065BD"/>
-                </a:solidFill>
-              </a:rPr>
-              <a:t>arls wins on quality and was REJECTED on cost: +10.7% of decode wall-clock for 0.019 dB. The whole budget is 0.1 dB and the whole saving is ~30% — that trade does not close.</a:t>
+              <a:rPr sz="1300" b="1">
+                <a:solidFill>
+                  <a:srgbClr val="0065BD"/>
+                </a:solidFill>
+              </a:rPr>
+              <a:t>Prediction  4b/F  ⇒  doubling F halves the penalty</a:t>
+            </a:r>
+          </a:p>
+          <a:p>
+            <a:pPr lvl="1"/>
+            <a:r>
+              <a:rPr sz="1100" b="0"/>
+              <a:t>zeros      qp 63:   128 px 1.1670  →  256 px 0.5477     ×0.47</a:t>
+            </a:r>
+          </a:p>
+          <a:p>
+            <a:pPr lvl="1"/>
+            <a:r>
+              <a:rPr sz="1100" b="0"/>
+              <a:t>replicate  qp 63:   128 px 0.2125  →  256 px 0.1070     ×0.50</a:t>
+            </a:r>
+          </a:p>
+          <a:p>
+            <a:pPr/>
+            <a:r>
+              <a:rPr sz="1300" b="1">
+                <a:solidFill>
+                  <a:srgbClr val="0065BD"/>
+                </a:solidFill>
+              </a:rPr>
+              <a:t>Free in compute — a tiled decode's MAC count is independent of F</a:t>
+            </a:r>
+          </a:p>
+          <a:p>
+            <a:pPr/>
+            <a:r>
+              <a:rPr sz="1300" b="1">
+                <a:solidFill>
+                  <a:srgbClr val="0065BD"/>
+                </a:solidFill>
+              </a:rPr>
+              <a:t>Paid in routing granularity · 40 tiles/frame at 256 px vs 160 at 128</a:t>
+            </a:r>
+          </a:p>
+          <a:p>
+            <a:pPr/>
+            <a:r>
+              <a:rPr sz="1300" b="1">
+                <a:solidFill>
+                  <a:srgbClr val="0065BD"/>
+                </a:solidFill>
+              </a:rPr>
+              <a:t>Halo, same law:  tile F with halo h computes ((F+2h)/F)² pixels</a:t>
+            </a:r>
+          </a:p>
+          <a:p>
+            <a:pPr lvl="1"/>
+            <a:r>
+              <a:rPr sz="1100" b="0"/>
+              <a:t>F = 16, h = 4  →  2.25×        F = 32, h = 4  →  1.56×</a:t>
+            </a:r>
+          </a:p>
+          <a:p>
+            <a:pPr lvl="1"/>
+            <a:r>
+              <a:rPr sz="1100" b="0"/>
+              <a:t>⇒ halo on the HEAD only (2.40% of MACs); on the trunk it exceeds the saving</a:t>
             </a:r>
           </a:p>
         </p:txBody>
@@ -3712,7 +3664,7 @@
           <a:lstStyle/>
           <a:p>
             <a:r>
-              <a:t>The seam artefact, formally  (3/5): why 256 and not 128</a:t>
+              <a:t>Seam 4/5 · repair told where to look</a:t>
             </a:r>
           </a:p>
         </p:txBody>
@@ -3734,88 +3686,87 @@
           <a:p>
             <a:pPr/>
             <a:r>
-              <a:rPr sz="1000" b="1">
-                <a:solidFill>
-                  <a:srgbClr val="0065BD"/>
-                </a:solidFill>
-              </a:rPr>
-              <a:t>From (1/5), corrupted fraction ~ 4b/F. Doubling the tile side halves it, and the measurement follows the law:</a:t>
-            </a:r>
-          </a:p>
-          <a:p>
-            <a:pPr lvl="1"/>
-            <a:r>
-              <a:rPr sz="800" b="0"/>
-              <a:t>zeros,     qp63:   128px 1.1670 dB  -&gt;  256px 0.5477 dB   (x0.47)</a:t>
-            </a:r>
-          </a:p>
-          <a:p>
-            <a:pPr lvl="1"/>
-            <a:r>
-              <a:rPr sz="800" b="0"/>
-              <a:t>replicate, qp63:   128px 0.2125 dB  -&gt;  256px 0.1070 dB   (x0.50)</a:t>
-            </a:r>
-          </a:p>
-          <a:p>
-            <a:pPr/>
-            <a:r>
-              <a:rPr sz="1000" b="1">
-                <a:solidFill>
-                  <a:srgbClr val="0065BD"/>
-                </a:solidFill>
-              </a:rPr>
-              <a:t>So tile size was the single largest lever, and it costs nothing in compute — the MAC count of a tiled decode does not depend on the tile size at all.</a:t>
-            </a:r>
-          </a:p>
-          <a:p>
-            <a:pPr/>
-            <a:r>
-              <a:rPr sz="1000" b="1">
-                <a:solidFill>
-                  <a:srgbClr val="0065BD"/>
-                </a:solidFill>
-              </a:rPr>
-              <a:t>What it does cost is ROUTING GRANULARITY: 40 tiles per 1080p frame at 256px against 160 at 128px. Fewer, larger tiles means content that is locally easy gets averaged in with content that is not.</a:t>
-            </a:r>
-          </a:p>
-          <a:p>
-            <a:pPr/>
-            <a:r>
-              <a:rPr sz="1000" b="1">
-                <a:solidFill>
-                  <a:srgbClr val="0065BD"/>
-                </a:solidFill>
-              </a:rPr>
-              <a:t>The halo argument points the same way. A tile of side F carried with halo h computes ((F+2h)/F)^2 as many pixels:</a:t>
-            </a:r>
-          </a:p>
-          <a:p>
-            <a:pPr lvl="1"/>
-            <a:r>
-              <a:rPr sz="800" b="0"/>
-              <a:t>F=16, h=4  -&gt;  2.25x     F=32, h=4  -&gt;  1.56x</a:t>
-            </a:r>
-          </a:p>
-          <a:p>
-            <a:pPr/>
-            <a:r>
-              <a:rPr sz="1000" b="1">
-                <a:solidFill>
-                  <a:srgbClr val="0065BD"/>
-                </a:solidFill>
-              </a:rPr>
-              <a:t>Which is why the halo is carried on the HEAD only (2.40% of MACs) and not on the trunk. Applying 2.25x to the per-tile trunk would consume more than routing saves — the arithmetic simply does not close.</a:t>
-            </a:r>
-          </a:p>
-          <a:p>
-            <a:pPr/>
-            <a:r>
-              <a:rPr sz="1000" b="1">
-                <a:solidFill>
-                  <a:srgbClr val="0065BD"/>
-                </a:solidFill>
-              </a:rPr>
-              <a:t>BEST128 exists to measure the granularity side of this trade rather than argue it. Both are still training.</a:t>
+              <a:rPr sz="1200" b="1">
+                <a:solidFill>
+                  <a:srgbClr val="0065BD"/>
+                </a:solidFill>
+              </a:rPr>
+              <a:t>A translation-invariant 3×3 must INFER the boundary from content</a:t>
+            </a:r>
+          </a:p>
+          <a:p>
+            <a:pPr lvl="1"/>
+            <a:r>
+              <a:rPr sz="1000" b="0"/>
+              <a:t>and corrects the ~25% clean interior, where any correction is damage</a:t>
+            </a:r>
+          </a:p>
+          <a:p>
+            <a:pPr/>
+            <a:r>
+              <a:rPr sz="1200" b="1">
+                <a:solidFill>
+                  <a:srgbClr val="0065BD"/>
+                </a:solidFill>
+              </a:rPr>
+              <a:t>But the lattice is known — unpatchify lays tiles on a fixed P×P grid</a:t>
+            </a:r>
+          </a:p>
+          <a:p>
+            <a:pPr/>
+            <a:r>
+              <a:rPr sz="1200" b="1">
+                <a:solidFill>
+                  <a:srgbClr val="0065BD"/>
+                </a:solidFill>
+              </a:rPr>
+              <a:t>Repair(f)  =  f  +  G[i mod P, j mod P] · PW( WSiLU( DW3×3(f) ) )</a:t>
+            </a:r>
+          </a:p>
+          <a:p>
+            <a:pPr lvl="1"/>
+            <a:r>
+              <a:rPr sz="1000" b="0"/>
+              <a:t>G :  P × P = 256 scalars, shared over all 384 channels</a:t>
+            </a:r>
+          </a:p>
+          <a:p>
+            <a:pPr lvl="1"/>
+            <a:r>
+              <a:rPr sz="1000" b="0"/>
+              <a:t>     0.0007% of decoder parameters, no MAC beyond a broadcast multiply</a:t>
+            </a:r>
+          </a:p>
+          <a:p>
+            <a:pPr lvl="1"/>
+            <a:r>
+              <a:rPr sz="1000" b="0"/>
+              <a:t>G₀ = exp(−d / τ),  d = distance to nearest tile edge</a:t>
+            </a:r>
+          </a:p>
+          <a:p>
+            <a:pPr lvl="1"/>
+            <a:r>
+              <a:rPr sz="1000" b="0"/>
+              <a:t>     ⇒ the gate starts on the seam; training refines, not discovers</a:t>
+            </a:r>
+          </a:p>
+          <a:p>
+            <a:pPr lvl="1"/>
+            <a:r>
+              <a:rPr sz="1000" b="0"/>
+              <a:t>PW zero-init ⇒ module starts as identity ⇒ warm start stays bit-exact</a:t>
+            </a:r>
+          </a:p>
+          <a:p>
+            <a:pPr/>
+            <a:r>
+              <a:rPr sz="1200" b="1">
+                <a:solidFill>
+                  <a:srgbClr val="0065BD"/>
+                </a:solidFill>
+              </a:rPr>
+              <a:t>Cost 0.95% of the decode — charged inside every saving, incl. the deepest exit (C_{K−1} = 1.0095, not 1.0)</a:t>
             </a:r>
           </a:p>
         </p:txBody>
@@ -3854,7 +3805,7 @@
           <a:lstStyle/>
           <a:p>
             <a:r>
-              <a:t>The seam artefact, formally  (4/5): repair that is told where to look</a:t>
+              <a:t>Seam 5/5 · at pixel scale, and what repair is worth</a:t>
             </a:r>
           </a:p>
         </p:txBody>
@@ -3869,84 +3820,81 @@
             <p:ph idx="1"/>
           </p:nvPr>
         </p:nvSpPr>
-        <p:spPr/>
+        <p:spPr>
+          <a:xfrm>
+            <a:off x="508000" y="1417320"/>
+            <a:ext cx="8128000" cy="1480820"/>
+          </a:xfrm>
+        </p:spPr>
         <p:txBody>
           <a:bodyPr/>
           <a:lstStyle/>
           <a:p>
             <a:pPr/>
             <a:r>
-              <a:rPr sz="1000" b="1">
-                <a:solidFill>
-                  <a:srgbClr val="0065BD"/>
-                </a:solidFill>
-              </a:rPr>
-              <a:t>A translation-invariant 3x3 applied to the stitched canvas has to INFER which pixels sit on a boundary, from content alone — and it applies the same correction to the ~25% that are clean interior, where any correction is damage. It is being asked a harder question than the one we have.</a:t>
-            </a:r>
-          </a:p>
-          <a:p>
-            <a:pPr/>
-            <a:r>
-              <a:rPr sz="1000" b="1">
-                <a:solidFill>
-                  <a:srgbClr val="0065BD"/>
-                </a:solidFill>
-              </a:rPr>
-              <a:t>But the grid is not unknown. unpatchify lays tiles on a fixed P x P lattice from the origin, at training and at inference alike. So gate the correction by position WITHIN a tile:</a:t>
-            </a:r>
-          </a:p>
-          <a:p>
-            <a:pPr lvl="1"/>
-            <a:r>
-              <a:rPr sz="800" b="0"/>
-              <a:t>Repair(f) = f + G[i mod P, j mod P] . PW( WSiLU( DW3x3(f) ) )</a:t>
-            </a:r>
-          </a:p>
-          <a:p>
-            <a:pPr/>
-            <a:r>
-              <a:rPr sz="1000" b="1">
-                <a:solidFill>
-                  <a:srgbClr val="0065BD"/>
-                </a:solidFill>
-              </a:rPr>
-              <a:t>G is P x P = 256 scalars, shared across all 384 channels</a:t>
-            </a:r>
-          </a:p>
-          <a:p>
-            <a:pPr lvl="1"/>
-            <a:r>
-              <a:rPr sz="800" b="0"/>
-              <a:t>0.0007% of the decoder's parameters, and no MAC beyond one broadcast multiply</a:t>
-            </a:r>
-          </a:p>
-          <a:p>
-            <a:pPr lvl="1"/>
-            <a:r>
-              <a:rPr sz="800" b="0"/>
-              <a:t>initialised at G = exp(-d/tau), d = distance in feature pixels to the nearest tile edge — so at step 0 the gate already sits on the seam and training refines it instead of discovering it</a:t>
-            </a:r>
-          </a:p>
-          <a:p>
-            <a:pPr lvl="1"/>
-            <a:r>
-              <a:rPr sz="800" b="0"/>
-              <a:t>PW is zero-initialised, so the whole module starts as the identity and the warm start stays bit-exact against released DCVC-UF</a:t>
-            </a:r>
-          </a:p>
-          <a:p>
-            <a:pPr/>
-            <a:r>
-              <a:rPr sz="1000" b="1">
-                <a:solidFill>
-                  <a:srgbClr val="0065BD"/>
-                </a:solidFill>
-              </a:rPr>
-              <a:t>Total cost 0.95% of the decode — and it is charged inside every saving in this deck, including the deepest exit, which is why our full-depth path costs 1.0095 stock decodes rather than 1.0.</a:t>
-            </a:r>
-          </a:p>
-        </p:txBody>
-      </p:sp>
+              <a:rPr sz="1200" b="1">
+                <a:solidFill>
+                  <a:srgbClr val="0065BD"/>
+                </a:solidFill>
+              </a:rPr>
+              <a:t>192 px across a tile boundary · qp 63 · full depth · error ×40</a:t>
+            </a:r>
+          </a:p>
+          <a:p>
+            <a:pPr/>
+            <a:r>
+              <a:rPr sz="1200" b="1">
+                <a:solidFill>
+                  <a:srgbClr val="0065BD"/>
+                </a:solidFill>
+              </a:rPr>
+              <a:t>Repair ON vs OFF, 8 sequences:   full depth 0.0672 → 0.0750 (worse)   ·   routed 0.1259 → 0.1239</a:t>
+            </a:r>
+          </a:p>
+          <a:p>
+            <a:pPr/>
+            <a:r>
+              <a:rPr sz="1200" b="1">
+                <a:solidFill>
+                  <a:srgbClr val="0065BD"/>
+                </a:solidFill>
+              </a:rPr>
+              <a:t>0.0020 dB/point of decode  ·  arls was rejected at 0.0018</a:t>
+            </a:r>
+          </a:p>
+          <a:p>
+            <a:pPr lvl="1"/>
+            <a:r>
+              <a:rPr sz="1000" b="0"/>
+              <a:t>trained jointly ⇒ an inference ablation is not the clean test</a:t>
+            </a:r>
+          </a:p>
+        </p:txBody>
+      </p:sp>
+      <p:pic>
+        <p:nvPicPr>
+          <p:cNvPr id="4" name="Picture 3" descr="seam_patches.png"/>
+          <p:cNvPicPr>
+            <a:picLocks noChangeAspect="1"/>
+          </p:cNvPicPr>
+          <p:nvPr/>
+        </p:nvPicPr>
+        <p:blipFill>
+          <a:blip r:embed="rId2"/>
+          <a:stretch>
+            <a:fillRect/>
+          </a:stretch>
+        </p:blipFill>
+        <p:spPr>
+          <a:xfrm>
+            <a:off x="738280" y="3062732"/>
+            <a:ext cx="7667440" cy="3383788"/>
+          </a:xfrm>
+          <a:prstGeom prst="rect">
+            <a:avLst/>
+          </a:prstGeom>
+        </p:spPr>
+      </p:pic>
     </p:spTree>
   </p:cSld>
   <p:clrMapOvr>
@@ -3981,7 +3929,7 @@
           <a:lstStyle/>
           <a:p>
             <a:r>
-              <a:t>The seam artefact  (5/5): at pixel scale, and what repair is worth</a:t>
+              <a:t>MACs are not milliseconds</a:t>
             </a:r>
           </a:p>
         </p:txBody>
@@ -3999,7 +3947,7 @@
         <p:spPr>
           <a:xfrm>
             <a:off x="508000" y="1417320"/>
-            <a:ext cx="8128000" cy="3296919"/>
+            <a:ext cx="8128000" cy="2204720"/>
           </a:xfrm>
         </p:spPr>
         <p:txBody>
@@ -4008,73 +3956,76 @@
           <a:p>
             <a:pPr/>
             <a:r>
-              <a:rPr sz="1000" b="1">
-                <a:solidFill>
-                  <a:srgbClr val="0065BD"/>
-                </a:solidFill>
-              </a:rPr>
-              <a:t>Bosphorus qp63, 192px window straddling a tile boundary (dashed). Every tile at FULL depth, so early exit contributes nothing — this is the tiling artefact alone. Error maps vs the full-frame decode of the SAME latent, amplified x40.</a:t>
-            </a:r>
-          </a:p>
-          <a:p>
-            <a:pPr/>
-            <a:r>
-              <a:rPr sz="1000" b="1">
-                <a:solidFill>
-                  <a:srgbClr val="0065BD"/>
-                </a:solidFill>
-              </a:rPr>
-              <a:t>Zeros shows the seam as a bright ridge AND structured error across the tile interior — the inward propagation from (1/5). Replicate removes most of both.</a:t>
-            </a:r>
-          </a:p>
-          <a:p>
-            <a:pPr/>
-            <a:r>
-              <a:rPr sz="1000" b="1">
-                <a:solidFill>
-                  <a:srgbClr val="0065BD"/>
-                </a:solidFill>
-              </a:rPr>
-              <a:t>An uncomfortable measurement, 8 sequences at qp63, repair ON vs OFF on the same latents and the same exit maps:</a:t>
-            </a:r>
-          </a:p>
-          <a:p>
-            <a:pPr lvl="1"/>
-            <a:r>
-              <a:rPr sz="800" b="0"/>
-              <a:t>all tiles at full depth:  0.0672 -&gt; 0.0750 dB   repair makes it WORSE</a:t>
-            </a:r>
-          </a:p>
-          <a:p>
-            <a:pPr lvl="1"/>
-            <a:r>
-              <a:rPr sz="800" b="0"/>
-              <a:t>routed at 0.1 dB:         0.1259 -&gt; 0.1239 dB   repair helps by 0.002</a:t>
-            </a:r>
-          </a:p>
-          <a:p>
-            <a:pPr/>
-            <a:r>
-              <a:rPr sz="1000" b="1">
-                <a:solidFill>
-                  <a:srgbClr val="0065BD"/>
-                </a:solidFill>
-              </a:rPr>
-              <a:t>So grid repair earns 0.002 dB for 0.95% of the decode, and it RAISES the floor — the same floor that already consumes 30% of the budget at qp63. By the cost-per-dB rule that rejected arls, this module is on the wrong side of its own test.</a:t>
-            </a:r>
-          </a:p>
-          <a:p>
-            <a:pPr lvl="1"/>
-            <a:r>
-              <a:rPr sz="800" b="0"/>
-              <a:t>caveat: it was trained jointly, so switching it off at inference is not the same as training without it. The clean test is a run with seam_repair=none at 256px, which is not one of the six.</a:t>
+              <a:rPr sz="1200" b="1">
+                <a:solidFill>
+                  <a:srgbClr val="0065BD"/>
+                </a:solidFill>
+              </a:rPr>
+              <a:t>1920×1088 · interleaved · median of 40</a:t>
+            </a:r>
+          </a:p>
+          <a:p>
+            <a:pPr lvl="1"/>
+            <a:r>
+              <a:rPr sz="1000" b="0"/>
+              <a:t>0.1 dB: 28% of MACs -&gt; 13% of wall-clock (1.14x)</a:t>
+            </a:r>
+          </a:p>
+          <a:p>
+            <a:pPr lvl="1"/>
+            <a:r>
+              <a:rPr sz="1000" b="0"/>
+              <a:t>0.3 dB: 39% of MACs -&gt; 28% of wall-clock (1.38x)</a:t>
+            </a:r>
+          </a:p>
+          <a:p>
+            <a:pPr lvl="1"/>
+            <a:r>
+              <a:rPr sz="1000" b="0"/>
+              <a:t>0.5 dB: 42% of MACs -&gt; 34% of wall-clock (1.51x)</a:t>
+            </a:r>
+          </a:p>
+          <a:p>
+            <a:pPr/>
+            <a:r>
+              <a:rPr sz="1200" b="1">
+                <a:solidFill>
+                  <a:srgbClr val="0065BD"/>
+                </a:solidFill>
+              </a:rPr>
+              <a:t>Gap  =  tiling overhead 3.7–6.5%  +  per-group bookkeeping</a:t>
+            </a:r>
+          </a:p>
+          <a:p>
+            <a:pPr lvl="1"/>
+            <a:r>
+              <a:rPr sz="1000" b="0"/>
+              <a:t>mask + gather + scatter + one device↔host sync per group</a:t>
+            </a:r>
+          </a:p>
+          <a:p>
+            <a:pPr lvl="1"/>
+            <a:r>
+              <a:rPr sz="1000" b="0"/>
+              <a:t>36.4 ms vs 77.5 ms of convolution  =  32% of the loop</a:t>
+            </a:r>
+          </a:p>
+          <a:p>
+            <a:pPr/>
+            <a:r>
+              <a:rPr sz="1200" b="1">
+                <a:solidFill>
+                  <a:srgbClr val="0065BD"/>
+                </a:solidFill>
+              </a:rPr>
+              <a:t>Recoverable · sort by exit depth once → 23–37% back, bit-identical</a:t>
             </a:r>
           </a:p>
         </p:txBody>
       </p:sp>
       <p:pic>
         <p:nvPicPr>
-          <p:cNvPr id="4" name="Picture 3" descr="seam_patches.png"/>
+          <p:cNvPr id="4" name="Picture 3" descr="latency.png"/>
           <p:cNvPicPr>
             <a:picLocks noChangeAspect="1"/>
           </p:cNvPicPr>
@@ -4088,8 +4039,8 @@
         </p:blipFill>
         <p:spPr>
           <a:xfrm>
-            <a:off x="2795861" y="4878831"/>
-            <a:ext cx="3552277" cy="1567688"/>
+            <a:off x="533466" y="3786632"/>
+            <a:ext cx="8077068" cy="2659888"/>
           </a:xfrm>
           <a:prstGeom prst="rect">
             <a:avLst/>
@@ -4130,7 +4081,7 @@
           <a:lstStyle/>
           <a:p>
             <a:r>
-              <a:t>MACs are not milliseconds</a:t>
+              <a:t>Against the released decoder</a:t>
             </a:r>
           </a:p>
         </p:txBody>
@@ -4148,7 +4099,7 @@
         <p:spPr>
           <a:xfrm>
             <a:off x="508000" y="1417320"/>
-            <a:ext cx="8128000" cy="3017520"/>
+            <a:ext cx="8128000" cy="1722120"/>
           </a:xfrm>
         </p:spPr>
         <p:txBody>
@@ -4157,84 +4108,59 @@
           <a:p>
             <a:pPr/>
             <a:r>
-              <a:rPr sz="1100" b="1">
-                <a:solidFill>
-                  <a:srgbClr val="0065BD"/>
-                </a:solidFill>
-              </a:rPr>
-              <a:t>Every saving in this project is a MAC count. The field measures FPS.</a:t>
-            </a:r>
-          </a:p>
-          <a:p>
-            <a:pPr/>
-            <a:r>
-              <a:rPr sz="1100" b="1">
-                <a:solidFill>
-                  <a:srgbClr val="0065BD"/>
-                </a:solidFill>
-              </a:rPr>
-              <a:t>Measured end to end, 1920x1088, interleaved, median of 40:</a:t>
-            </a:r>
-          </a:p>
-          <a:p>
-            <a:pPr lvl="1"/>
-            <a:r>
-              <a:rPr sz="900" b="0"/>
-              <a:t>0.1 dB: 28% of MACs -&gt; 13% of wall-clock (1.14x)</a:t>
-            </a:r>
-          </a:p>
-          <a:p>
-            <a:pPr lvl="1"/>
-            <a:r>
-              <a:rPr sz="900" b="0"/>
-              <a:t>0.3 dB: 39% of MACs -&gt; 28% of wall-clock (1.38x)</a:t>
-            </a:r>
-          </a:p>
-          <a:p>
-            <a:pPr lvl="1"/>
-            <a:r>
-              <a:rPr sz="900" b="0"/>
-              <a:t>0.5 dB: 42% of MACs -&gt; 34% of wall-clock (1.51x)</a:t>
-            </a:r>
-          </a:p>
-          <a:p>
-            <a:pPr/>
-            <a:r>
-              <a:rPr sz="1100" b="1">
-                <a:solidFill>
-                  <a:srgbClr val="0065BD"/>
-                </a:solidFill>
-              </a:rPr>
-              <a:t>The MAC model is accurate at UNIFORM depth (agrees within 1 point per exit) and optimistic under ROUTED execution. The difference is exactly the machinery routing needs.</a:t>
-            </a:r>
-          </a:p>
-          <a:p>
-            <a:pPr/>
-            <a:r>
-              <a:rPr sz="1100" b="1">
-                <a:solidFill>
-                  <a:srgbClr val="0065BD"/>
-                </a:solidFill>
-              </a:rPr>
-              <a:t>Profiled: the per-group bookkeeping — mask, gather, scatter, and the device-host sync each forces — is 36.4 ms against the groups' own 77.5 ms of convolution, 32% of the loop, invisible to the MAC model</a:t>
-            </a:r>
-          </a:p>
-          <a:p>
-            <a:pPr/>
-            <a:r>
-              <a:rPr sz="1100" b="1">
-                <a:solidFill>
-                  <a:srgbClr val="0065BD"/>
-                </a:solidFill>
-              </a:rPr>
-              <a:t>Recoverable, not a hardware limit: sorting tiles by exit depth once makes the active set a contiguous prefix. Prototyped, bit-identical output, 23-37% of the group loop returned</a:t>
+              <a:rPr sz="1200" b="1">
+                <a:solidFill>
+                  <a:srgbClr val="0065BD"/>
+                </a:solidFill>
+              </a:rPr>
+              <a:t>At 0.1 dB · 34.0% · 26.8% · 20.8%   (qp 0 / 32 / 63)</a:t>
+            </a:r>
+          </a:p>
+          <a:p>
+            <a:pPr lvl="1"/>
+            <a:r>
+              <a:rPr sz="1000" b="0"/>
+              <a:t>÷ RELEASE (1.0), not our deepest exit (1.0095) — earlier decks read 0.6–0.75 pts higher</a:t>
+            </a:r>
+          </a:p>
+          <a:p>
+            <a:pPr/>
+            <a:r>
+              <a:rPr sz="1200" b="1">
+                <a:solidFill>
+                  <a:srgbClr val="0065BD"/>
+                </a:solidFill>
+              </a:rPr>
+              <a:t>The 30% target is cleared by qp 0/16 at 0.1 dB, and by qp 32/48/63 at 0.3 dB</a:t>
+            </a:r>
+          </a:p>
+          <a:p>
+            <a:pPr/>
+            <a:r>
+              <a:rPr sz="1200" b="1">
+                <a:solidFill>
+                  <a:srgbClr val="0065BD"/>
+                </a:solidFill>
+              </a:rPr>
+              <a:t>Ladder ceiling 41.9% at every rate, set by the split depth j=2, not by training</a:t>
+            </a:r>
+          </a:p>
+          <a:p>
+            <a:pPr/>
+            <a:r>
+              <a:rPr sz="1200" b="1">
+                <a:solidFill>
+                  <a:srgbClr val="0065BD"/>
+                </a:solidFill>
+              </a:rPr>
+              <a:t>BD-saving 30.8% over dB in [0.064, 0.196] (qp 0: 37% · 16: 34% · 32: 31% · 48: 27% · 63: 24%); BD-quality 0.062 dB over saving in [10%, 30%]</a:t>
             </a:r>
           </a:p>
         </p:txBody>
       </p:sp>
       <p:pic>
         <p:nvPicPr>
-          <p:cNvPr id="4" name="Picture 3" descr="latency.png"/>
+          <p:cNvPr id="4" name="Picture 3" descr="nf_results.png"/>
           <p:cNvPicPr>
             <a:picLocks noChangeAspect="1"/>
           </p:cNvPicPr>
@@ -4248,8 +4174,8 @@
         </p:blipFill>
         <p:spPr>
           <a:xfrm>
-            <a:off x="1767548" y="4599431"/>
-            <a:ext cx="5608903" cy="1847088"/>
+            <a:off x="411480" y="3304032"/>
+            <a:ext cx="8321040" cy="2877285"/>
           </a:xfrm>
           <a:prstGeom prst="rect">
             <a:avLst/>
@@ -4290,7 +4216,7 @@
           <a:lstStyle/>
           <a:p>
             <a:r>
-              <a:t>Results vs the released decoder</a:t>
+              <a:t>Who decides</a:t>
             </a:r>
           </a:p>
         </p:txBody>
@@ -4308,7 +4234,7 @@
         <p:spPr>
           <a:xfrm>
             <a:off x="508000" y="1417320"/>
-            <a:ext cx="8128000" cy="2928619"/>
+            <a:ext cx="8128000" cy="1722120"/>
           </a:xfrm>
         </p:spPr>
         <p:txBody>
@@ -4322,14 +4248,39 @@
                   <a:srgbClr val="0065BD"/>
                 </a:solidFill>
               </a:rPr>
-              <a:t>At 0.3 dB: ceiling 42% already at 0.20 dB (qp0) · 42% (qp32) · 36% (qp63)</a:t>
+              <a:t>A   argmin_k ( MSE[t,k] + λ·C_k )   ~94 bit/frame = 0.008–0.020% of rate</a:t>
+            </a:r>
+          </a:p>
+          <a:p>
+            <a:pPr/>
+            <a:r>
+              <a:rPr sz="1200" b="1">
+                <a:solidFill>
+                  <a:srgbClr val="0065BD"/>
+                </a:solidFill>
+              </a:rPr>
+              <a:t>B   argmax_k ( log softmax(z)_k − β·C_k )   nothing sent, file byte-identical</a:t>
             </a:r>
           </a:p>
           <a:p>
             <a:pPr lvl="1"/>
             <a:r>
               <a:rPr sz="1000" b="0"/>
-              <a:t>dB is the per-frame average test_video.py computes — the convention every published DCVC-UF number uses. Pooling all tiles into one MSE reads 0.023-0.033 dB lower on the same allocation and would flatter these</a:t>
+              <a:t>qp0: A 34.0% signalled vs B 30.1% predicted — gap 3.96 pts</a:t>
+            </a:r>
+          </a:p>
+          <a:p>
+            <a:pPr lvl="1"/>
+            <a:r>
+              <a:rPr sz="1000" b="0"/>
+              <a:t>qp32: A 26.8% signalled vs B 23.9% predicted — gap 2.82 pts</a:t>
+            </a:r>
+          </a:p>
+          <a:p>
+            <a:pPr lvl="1"/>
+            <a:r>
+              <a:rPr sz="1000" b="0"/>
+              <a:t>qp63: A 20.8% signalled vs B 19.3% predicted — gap 1.50 pts</a:t>
             </a:r>
           </a:p>
           <a:p>
@@ -4340,57 +4291,14 @@
                   <a:srgbClr val="0065BD"/>
                 </a:solidFill>
               </a:rPr>
-              <a:t>At 0.1 dB, against the RELEASE: 34.0% / 26.8% / 20.8% (qp0/32/63)</a:t>
-            </a:r>
-          </a:p>
-          <a:p>
-            <a:pPr lvl="1"/>
-            <a:r>
-              <a:rPr sz="1000" b="0"/>
-              <a:t>these are 0.6-0.75 points below what earlier decks showed: savings were divided by our own deepest exit (1.0095 stock decodes) instead of by the release's 1.0, which quietly took the seam-repair tax back out</a:t>
-            </a:r>
-          </a:p>
-          <a:p>
-            <a:pPr/>
-            <a:r>
-              <a:rPr sz="1200" b="0"/>
-              <a:t>The 30% target is cleared by qp 0/16 at 0.1 dB, and by qp 32/48/63 at 0.3 dB</a:t>
-            </a:r>
-          </a:p>
-          <a:p>
-            <a:pPr/>
-            <a:r>
-              <a:rPr sz="1200" b="1">
-                <a:solidFill>
-                  <a:srgbClr val="0065BD"/>
-                </a:solidFill>
-              </a:rPr>
-              <a:t>Ladder ceiling 41.9% at every rate, set by the split depth j=2, not by training</a:t>
-            </a:r>
-          </a:p>
-          <a:p>
-            <a:pPr/>
-            <a:r>
-              <a:rPr sz="1200" b="1">
-                <a:solidFill>
-                  <a:srgbClr val="0065BD"/>
-                </a:solidFill>
-              </a:rPr>
-              <a:t>Integrated over the curve, not read at one point:</a:t>
-            </a:r>
-          </a:p>
-          <a:p>
-            <a:pPr lvl="1"/>
-            <a:r>
-              <a:rPr sz="1000" b="0"/>
-              <a:t>BD-saving 30.8% over dB in [0.064, 0.196] (qp 0: 37% · 16: 34% · 32: 31% · 48: 27% · 63: 24%); BD-quality 0.062 dB over saving in [10%, 30%]</a:t>
+              <a:t>Asymmetric ·  A: +1.21 decodes at the ENCODER  ·  B: +0.163% at the decoder</a:t>
             </a:r>
           </a:p>
         </p:txBody>
       </p:sp>
       <p:pic>
         <p:nvPicPr>
-          <p:cNvPr id="4" name="Picture 3" descr="nf_results.png"/>
+          <p:cNvPr id="4" name="Picture 3" descr="ab_decision.png"/>
           <p:cNvPicPr>
             <a:picLocks noChangeAspect="1"/>
           </p:cNvPicPr>
@@ -4404,8 +4312,8 @@
         </p:blipFill>
         <p:spPr>
           <a:xfrm>
-            <a:off x="1772585" y="4510531"/>
-            <a:ext cx="5598829" cy="1935988"/>
+            <a:off x="411480" y="3304032"/>
+            <a:ext cx="8321040" cy="2722693"/>
           </a:xfrm>
           <a:prstGeom prst="rect">
             <a:avLst/>
@@ -4446,7 +4354,7 @@
           <a:lstStyle/>
           <a:p>
             <a:r>
-              <a:t>Who decides: encoder search or decoder prediction</a:t>
+              <a:t>A claim overturned</a:t>
             </a:r>
           </a:p>
         </p:txBody>
@@ -4464,7 +4372,7 @@
         <p:spPr>
           <a:xfrm>
             <a:off x="508000" y="1417320"/>
-            <a:ext cx="8128000" cy="2788920"/>
+            <a:ext cx="8128000" cy="1722120"/>
           </a:xfrm>
         </p:spPr>
         <p:txBody>
@@ -4473,73 +4381,62 @@
           <a:p>
             <a:pPr/>
             <a:r>
-              <a:rPr sz="1100" b="1">
-                <a:solidFill>
-                  <a:srgbClr val="0065BD"/>
-                </a:solidFill>
-              </a:rPr>
-              <a:t>A — the encoder has the source, so it decodes every tile at every exit, measures the true error, and signals the answer: ~94 bits/frame, 0.008-0.020% of the bitrate</a:t>
-            </a:r>
-          </a:p>
-          <a:p>
-            <a:pPr/>
-            <a:r>
-              <a:rPr sz="1100" b="1">
-                <a:solidFill>
-                  <a:srgbClr val="0065BD"/>
-                </a:solidFill>
-              </a:rPr>
-              <a:t>B — the decoder cannot see the source, so it predicts what A would have chosen from the stem, the latent and the entropy scales. Nothing is sent; the file is byte-identical to a stock stream</a:t>
-            </a:r>
-          </a:p>
-          <a:p>
-            <a:pPr/>
-            <a:r>
-              <a:rPr sz="1100" b="1">
-                <a:solidFill>
-                  <a:srgbClr val="0065BD"/>
-                </a:solidFill>
-              </a:rPr>
-              <a:t>At 0.1 dB, same checkpoint and same frames:</a:t>
-            </a:r>
-          </a:p>
-          <a:p>
-            <a:pPr lvl="1"/>
-            <a:r>
-              <a:rPr sz="900" b="0"/>
-              <a:t>qp0: A 34.0% signalled vs B 30.1% predicted — gap 3.96 pts</a:t>
-            </a:r>
-          </a:p>
-          <a:p>
-            <a:pPr lvl="1"/>
-            <a:r>
-              <a:rPr sz="900" b="0"/>
-              <a:t>qp32: A 26.8% signalled vs B 23.9% predicted — gap 2.82 pts</a:t>
-            </a:r>
-          </a:p>
-          <a:p>
-            <a:pPr lvl="1"/>
-            <a:r>
-              <a:rPr sz="900" b="0"/>
-              <a:t>qp63: A 20.8% signalled vs B 19.3% predicted — gap 1.50 pts</a:t>
-            </a:r>
-          </a:p>
-          <a:p>
-            <a:pPr/>
-            <a:r>
-              <a:rPr sz="1100" b="1">
-                <a:solidFill>
-                  <a:srgbClr val="0065BD"/>
-                </a:solidFill>
-              </a:rPr>
-              <a:t>Compute is asymmetric: A costs the ENCODER ~1.21 extra decodes per frame and the decoder nothing; B costs the decoder 0.163% and the encoder nothing. For VOD A is cheaper in total; for live the ranking inverts</a:t>
+              <a:rPr sz="1200" b="1">
+                <a:solidFill>
+                  <a:srgbClr val="0065BD"/>
+                </a:solidFill>
+              </a:rPr>
+              <a:t>Earlier claim: prediction fails, signalling works</a:t>
+            </a:r>
+          </a:p>
+          <a:p>
+            <a:pPr lvl="1"/>
+            <a:r>
+              <a:rPr sz="1000" b="0"/>
+              <a:t>router trained JOINTLY with a moving decoder → collapsed, agreement 0.000 at qp 63</a:t>
+            </a:r>
+          </a:p>
+          <a:p>
+            <a:pPr/>
+            <a:r>
+              <a:rPr sz="1200" b="1">
+                <a:solidFill>
+                  <a:srgbClr val="0065BD"/>
+                </a:solidFill>
+              </a:rPr>
+              <a:t>Retrained against the FROZEN decoder: 0.848 agreement, budget met at every rate</a:t>
+            </a:r>
+          </a:p>
+          <a:p>
+            <a:pPr lvl="1"/>
+            <a:r>
+              <a:rPr sz="1000" b="0"/>
+              <a:t>⇒ the limit was the training target, not the information</a:t>
+            </a:r>
+          </a:p>
+          <a:p>
+            <a:pPr/>
+            <a:r>
+              <a:rPr sz="1200" b="1">
+                <a:solidFill>
+                  <a:srgbClr val="0065BD"/>
+                </a:solidFill>
+              </a:rPr>
+              <a:t>Cost of not signalling ·  0.1 dB 1.35–3.96 pts  ·  0.3 dB 0.16–0.95  ·  0.5 dB 0.16–1.23</a:t>
+            </a:r>
+          </a:p>
+          <a:p>
+            <a:pPr lvl="1"/>
+            <a:r>
+              <a:rPr sz="1000" b="0"/>
+              <a:t>at the ceiling the gap is 0.16 = the router's own 0.163%</a:t>
             </a:r>
           </a:p>
         </p:txBody>
       </p:sp>
       <p:pic>
         <p:nvPicPr>
-          <p:cNvPr id="4" name="Picture 3" descr="ab_decision.png"/>
+          <p:cNvPr id="4" name="Picture 3" descr="ab_budgets.png"/>
           <p:cNvPicPr>
             <a:picLocks noChangeAspect="1"/>
           </p:cNvPicPr>
@@ -4553,8 +4450,8 @@
         </p:blipFill>
         <p:spPr>
           <a:xfrm>
-            <a:off x="1400162" y="4370831"/>
-            <a:ext cx="6343675" cy="2075688"/>
+            <a:off x="411480" y="3304032"/>
+            <a:ext cx="8321039" cy="2827166"/>
           </a:xfrm>
           <a:prstGeom prst="rect">
             <a:avLst/>
@@ -4595,7 +4492,7 @@
           <a:lstStyle/>
           <a:p>
             <a:r>
-              <a:t>A claim this work overturned</a:t>
+              <a:t>The price of speed</a:t>
             </a:r>
           </a:p>
         </p:txBody>
@@ -4613,7 +4510,7 @@
         <p:spPr>
           <a:xfrm>
             <a:off x="508000" y="1417320"/>
-            <a:ext cx="8128000" cy="2788920"/>
+            <a:ext cx="8128000" cy="1963420"/>
           </a:xfrm>
         </p:spPr>
         <p:txBody>
@@ -4622,84 +4519,73 @@
           <a:p>
             <a:pPr/>
             <a:r>
-              <a:rPr sz="1100" b="1">
-                <a:solidFill>
-                  <a:srgbClr val="0065BD"/>
-                </a:solidFill>
-              </a:rPr>
-              <a:t>The previous deck said: prediction failed, signalling works. That was measured on a router trained JOINTLY with a moving decoder.</a:t>
-            </a:r>
-          </a:p>
-          <a:p>
-            <a:pPr lvl="1"/>
-            <a:r>
-              <a:rPr sz="900" b="0"/>
-              <a:t>BEST's joint router collapsed to a qp-dependent constant — agreement with the oracle 0.000 at qp63, 239 of 240 tiles sent to one exit</a:t>
-            </a:r>
-          </a:p>
-          <a:p>
-            <a:pPr/>
-            <a:r>
-              <a:rPr sz="1100" b="1">
-                <a:solidFill>
-                  <a:srgbClr val="0065BD"/>
-                </a:solidFill>
-              </a:rPr>
-              <a:t>Retrained against the FROZEN decoder, same architecture and same information: 0.848 held-out agreement, and the zero-bit configuration works at every rate</a:t>
-            </a:r>
-          </a:p>
-          <a:p>
-            <a:pPr/>
-            <a:r>
-              <a:rPr sz="1100" b="1">
-                <a:solidFill>
-                  <a:srgbClr val="0065BD"/>
-                </a:solidFill>
-              </a:rPr>
-              <a:t>So the limit was the training target, not the information</a:t>
-            </a:r>
-          </a:p>
-          <a:p>
-            <a:pPr/>
-            <a:r>
-              <a:rPr sz="1100" b="1">
-                <a:solidFill>
-                  <a:srgbClr val="0065BD"/>
-                </a:solidFill>
-              </a:rPr>
-              <a:t>And the cost of not signalling depends on how tight the budget is:</a:t>
-            </a:r>
-          </a:p>
-          <a:p>
-            <a:pPr lvl="1"/>
-            <a:r>
-              <a:rPr sz="900" b="0"/>
-              <a:t>0.1 dB: 1.35-3.96 points · 0.3 dB: 0.16-0.95 · 0.5 dB: 0.16-1.23</a:t>
-            </a:r>
-          </a:p>
-          <a:p>
-            <a:pPr lvl="1"/>
-            <a:r>
-              <a:rPr sz="900" b="0"/>
-              <a:t>at the ceiling the gap is exactly 0.16 — the router's own 0.163% of compute, and nothing else left to explain</a:t>
-            </a:r>
-          </a:p>
-          <a:p>
-            <a:pPr/>
-            <a:r>
-              <a:rPr sz="1100" b="1">
-                <a:solidFill>
-                  <a:srgbClr val="0065BD"/>
-                </a:solidFill>
-              </a:rPr>
-              <a:t>Value of seeing the source frame is largest where the budget is tightest</a:t>
+              <a:rPr sz="1200" b="1">
+                <a:solidFill>
+                  <a:srgbClr val="0065BD"/>
+                </a:solidFill>
+              </a:rPr>
+              <a:t>BD-Rate = cost · MACs saved = benefit · released intra decoder, YUV420</a:t>
+            </a:r>
+          </a:p>
+          <a:p>
+            <a:pPr lvl="1"/>
+            <a:r>
+              <a:rPr sz="1000" b="0"/>
+              <a:t>0.1 dB  0.88% / 27.6%    0.3 dB  2.51% / 39.5%    0.5 dB  3.36% / 41.7%</a:t>
+            </a:r>
+          </a:p>
+          <a:p>
+            <a:pPr/>
+            <a:r>
+              <a:rPr sz="1200" b="1">
+                <a:solidFill>
+                  <a:srgbClr val="0065BD"/>
+                </a:solidFill>
+              </a:rPr>
+              <a:t>Per unit of REAL speedup:  6.2 · 6.6 · 6.5  BD-Rate points</a:t>
+            </a:r>
+          </a:p>
+          <a:p>
+            <a:pPr lvl="1"/>
+            <a:r>
+              <a:rPr sz="1000" b="0"/>
+              <a:t>flat across the range — an exchange rate, not a chosen operating point</a:t>
+            </a:r>
+          </a:p>
+          <a:p>
+            <a:pPr/>
+            <a:r>
+              <a:rPr sz="1200" b="1">
+                <a:solidFill>
+                  <a:srgbClr val="0065BD"/>
+                </a:solidFill>
+              </a:rPr>
+              <a:t>DCVC-UF HT-L → HT-S:  10.6 points for 1.66×  =  16.1 points per unit</a:t>
+            </a:r>
+          </a:p>
+          <a:p>
+            <a:pPr/>
+            <a:r>
+              <a:rPr sz="1200" b="1">
+                <a:solidFill>
+                  <a:srgbClr val="0065BD"/>
+                </a:solidFill>
+              </a:rPr>
+              <a:t>⇒ adaptive depth buys speed 2.4× cheaper than shrinking the model</a:t>
+            </a:r>
+          </a:p>
+          <a:p>
+            <a:pPr lvl="1"/>
+            <a:r>
+              <a:rPr sz="1000" b="0"/>
+              <a:t>their pair is whole-video, ours intra-only → a calibration, not a head-to-head</a:t>
             </a:r>
           </a:p>
         </p:txBody>
       </p:sp>
       <p:pic>
         <p:nvPicPr>
-          <p:cNvPr id="4" name="Picture 3" descr="ab_budgets.png"/>
+          <p:cNvPr id="4" name="Picture 3" descr="paper_rdc.png"/>
           <p:cNvPicPr>
             <a:picLocks noChangeAspect="1"/>
           </p:cNvPicPr>
@@ -4713,8 +4599,8 @@
         </p:blipFill>
         <p:spPr>
           <a:xfrm>
-            <a:off x="1517373" y="4370831"/>
-            <a:ext cx="6109254" cy="2075688"/>
+            <a:off x="411480" y="3545332"/>
+            <a:ext cx="8321040" cy="2722552"/>
           </a:xfrm>
           <a:prstGeom prst="rect">
             <a:avLst/>
@@ -4755,7 +4641,7 @@
           <a:lstStyle/>
           <a:p>
             <a:r>
-              <a:t>Problem and goal</a:t>
+              <a:t>Uniform compute, non-uniform content</a:t>
             </a:r>
           </a:p>
         </p:txBody>
@@ -4773,7 +4659,7 @@
         <p:spPr>
           <a:xfrm>
             <a:off x="508000" y="1417320"/>
-            <a:ext cx="8128000" cy="2306320"/>
+            <a:ext cx="8128000" cy="1544320"/>
           </a:xfrm>
         </p:spPr>
         <p:txBody>
@@ -4787,64 +4673,43 @@
                   <a:srgbClr val="0065BD"/>
                 </a:solidFill>
               </a:rPr>
-              <a:t>DCVC-UF's intra decoder: 453.5 GMAC per 1080p frame</a:t>
+              <a:t>DCVC-UF intra decoder · 453.5 GMAC / 1080p frame</a:t>
             </a:r>
           </a:p>
           <a:p>
             <a:pPr lvl="1"/>
             <a:r>
               <a:rPr sz="1100" b="0"/>
-              <a:t>12 identical DepthConvBlocks = 89.4% of it</a:t>
+              <a:t>upsample 8.2%  ·  12 DepthConvBlocks 89.4%  ·  head 2.4%</a:t>
+            </a:r>
+          </a:p>
+          <a:p>
+            <a:pPr/>
+            <a:r>
+              <a:rPr sz="1300" b="1">
+                <a:solidFill>
+                  <a:srgbClr val="0065BD"/>
+                </a:solidFill>
+              </a:rPr>
+              <a:t>Target · 30–40% saved at ≤ 0.1 dB</a:t>
+            </a:r>
+          </a:p>
+          <a:p>
+            <a:pPr/>
+            <a:r>
+              <a:rPr sz="1300" b="1">
+                <a:solidFill>
+                  <a:srgbClr val="0065BD"/>
+                </a:solidFill>
+              </a:rPr>
+              <a:t>Constraint · encoder, hyperprior, entropy model frozen</a:t>
             </a:r>
           </a:p>
           <a:p>
             <a:pPr lvl="1"/>
             <a:r>
               <a:rPr sz="1100" b="0"/>
-              <a:t>every patch pays the same, however easy it is</a:t>
-            </a:r>
-          </a:p>
-          <a:p>
-            <a:pPr/>
-            <a:r>
-              <a:rPr sz="1300" b="1">
-                <a:solidFill>
-                  <a:srgbClr val="0065BD"/>
-                </a:solidFill>
-              </a:rPr>
-              <a:t>Goal: spend less compute where the content allows</a:t>
-            </a:r>
-          </a:p>
-          <a:p>
-            <a:pPr lvl="1"/>
-            <a:r>
-              <a:rPr sz="1100" b="0"/>
-              <a:t>target set with the group: 30–40% saved at ≤0.1 dB</a:t>
-            </a:r>
-          </a:p>
-          <a:p>
-            <a:pPr/>
-            <a:r>
-              <a:rPr sz="1300" b="1">
-                <a:solidFill>
-                  <a:srgbClr val="0065BD"/>
-                </a:solidFill>
-              </a:rPr>
-              <a:t>Constraint that shapes everything: the reference is the RELEASED model</a:t>
-            </a:r>
-          </a:p>
-          <a:p>
-            <a:pPr lvl="1"/>
-            <a:r>
-              <a:rPr sz="1100" b="0"/>
-              <a:t>encoder, hyperprior, entropy model frozen → identical bitstream</a:t>
-            </a:r>
-          </a:p>
-          <a:p>
-            <a:pPr lvl="1"/>
-            <a:r>
-              <a:rPr sz="1100" b="0"/>
-              <a:t>so any measured difference is the decoder alone</a:t>
+              <a:t>coded payload bit-identical → the decoder is the only variable</a:t>
             </a:r>
           </a:p>
         </p:txBody>
@@ -4865,8 +4730,8 @@
         </p:blipFill>
         <p:spPr>
           <a:xfrm>
-            <a:off x="740869" y="3888231"/>
-            <a:ext cx="7662261" cy="2558288"/>
+            <a:off x="411480" y="3126232"/>
+            <a:ext cx="8321039" cy="2778241"/>
           </a:xfrm>
           <a:prstGeom prst="rect">
             <a:avLst/>
@@ -4907,7 +4772,7 @@
           <a:lstStyle/>
           <a:p>
             <a:r>
-              <a:t>What a unit of speed costs, against the field</a:t>
+              <a:t>Related work</a:t>
             </a:r>
           </a:p>
         </p:txBody>
@@ -4922,99 +4787,116 @@
             <p:ph idx="1"/>
           </p:nvPr>
         </p:nvSpPr>
-        <p:spPr>
-          <a:xfrm>
-            <a:off x="508000" y="1417320"/>
-            <a:ext cx="8128000" cy="2788920"/>
-          </a:xfrm>
-        </p:spPr>
+        <p:spPr/>
         <p:txBody>
           <a:bodyPr/>
           <a:lstStyle/>
           <a:p>
             <a:pPr/>
             <a:r>
-              <a:rPr sz="1100" b="1">
-                <a:solidFill>
-                  <a:srgbClr val="0065BD"/>
-                </a:solidFill>
-              </a:rPr>
-              <a:t>BD-Rate is the cost; MACs saved is the benefit. Both measured on the released intra decoder, YUV420 PSNR, 40 CTC sequences</a:t>
-            </a:r>
-          </a:p>
-          <a:p>
-            <a:pPr lvl="1"/>
-            <a:r>
-              <a:rPr sz="900" b="0"/>
-              <a:t>0.1 dB: 0.88% BD-Rate for 27.6% of MACs · 0.3 dB: 2.51% for 39.5% · 0.5 dB: 3.36% for 41.7%</a:t>
-            </a:r>
-          </a:p>
-          <a:p>
-            <a:pPr/>
-            <a:r>
-              <a:rPr sz="1100" b="1">
-                <a:solidFill>
-                  <a:srgbClr val="0065BD"/>
-                </a:solidFill>
-              </a:rPr>
-              <a:t>Expressed per unit of real speedup, the price is FLAT: 6.2 / 6.6 / 6.5 BD-Rate points across the three budgets — an exchange rate, not a cherry-picked operating point</a:t>
-            </a:r>
-          </a:p>
-          <a:p>
-            <a:pPr/>
-            <a:r>
-              <a:rPr sz="1100" b="1">
-                <a:solidFill>
-                  <a:srgbClr val="0065BD"/>
-                </a:solidFill>
-              </a:rPr>
-              <a:t>DCVC-UF ships two model sizes, and the line between them is what this field currently pays for speed: HT-L to HT-S gives up 10.6 BD-Rate points for 1.66x, i.e. 16.1 points per unit</a:t>
-            </a:r>
-          </a:p>
-          <a:p>
-            <a:pPr/>
-            <a:r>
-              <a:rPr sz="1100" b="1">
-                <a:solidFill>
-                  <a:srgbClr val="0065BD"/>
-                </a:solidFill>
-              </a:rPr>
-              <a:t>Adaptive depth buys speed about 2.4x more cheaply than shrinking the model — a first answer to 'why not just train a smaller decoder', taken from a table already in print</a:t>
-            </a:r>
-          </a:p>
-          <a:p>
-            <a:pPr lvl="1"/>
-            <a:r>
-              <a:rPr sz="900" b="0"/>
-              <a:t>their pair is whole-video and ours is intra-only, so this calibrates the exchange rate rather than being a head-to-head; our own static baseline at matched depth is still owed</a:t>
-            </a:r>
-          </a:p>
-        </p:txBody>
-      </p:sp>
-      <p:pic>
-        <p:nvPicPr>
-          <p:cNvPr id="4" name="Picture 3" descr="paper_rdc.png"/>
-          <p:cNvPicPr>
-            <a:picLocks noChangeAspect="1"/>
-          </p:cNvPicPr>
-          <p:nvPr/>
-        </p:nvPicPr>
-        <p:blipFill>
-          <a:blip r:embed="rId2"/>
-          <a:stretch>
-            <a:fillRect/>
-          </a:stretch>
-        </p:blipFill>
-        <p:spPr>
-          <a:xfrm>
-            <a:off x="1399998" y="4370831"/>
-            <a:ext cx="6344004" cy="2075688"/>
-          </a:xfrm>
-          <a:prstGeom prst="rect">
-            <a:avLst/>
-          </a:prstGeom>
-        </p:spPr>
-      </p:pic>
+              <a:rPr sz="1200" b="1">
+                <a:solidFill>
+                  <a:srgbClr val="0065BD"/>
+                </a:solidFill>
+              </a:rPr>
+              <a:t>Early exit / dynamic depth · BranchyNet, MSDNet, SkipNet</a:t>
+            </a:r>
+          </a:p>
+          <a:p>
+            <a:pPr lvl="1"/>
+            <a:r>
+              <a:rPr sz="1000" b="0"/>
+              <a:t>decide from the network's own output; ours decides per SPATIAL TILE for a fixed output</a:t>
+            </a:r>
+          </a:p>
+          <a:p>
+            <a:pPr/>
+            <a:r>
+              <a:rPr sz="1200" b="1">
+                <a:solidFill>
+                  <a:srgbClr val="0065BD"/>
+                </a:solidFill>
+              </a:rPr>
+              <a:t>ClassSR</a:t>
+            </a:r>
+          </a:p>
+          <a:p>
+            <a:pPr lvl="1"/>
+            <a:r>
+              <a:rPr sz="1000" b="0"/>
+              <a:t>routes patches to differently sized SR branches for a cost target</a:t>
+            </a:r>
+          </a:p>
+          <a:p>
+            <a:pPr lvl="1"/>
+            <a:r>
+              <a:rPr sz="1000" b="0"/>
+              <a:t>ours: a DEPTH inside one network, for a quality target, bitstream fixed</a:t>
+            </a:r>
+          </a:p>
+          <a:p>
+            <a:pPr/>
+            <a:r>
+              <a:rPr sz="1200" b="1">
+                <a:solidFill>
+                  <a:srgbClr val="0065BD"/>
+                </a:solidFill>
+              </a:rPr>
+              <a:t>Xie et al. · RDC optimisation in neural image compression · 2305.07678</a:t>
+            </a:r>
+          </a:p>
+          <a:p>
+            <a:pPr lvl="1"/>
+            <a:r>
+              <a:rPr sz="1000" b="0"/>
+              <a:t>adaptive spatial mask decoded from side information — closest to our B</a:t>
+            </a:r>
+          </a:p>
+          <a:p>
+            <a:pPr lvl="1"/>
+            <a:r>
+              <a:rPr sz="1000" b="0"/>
+              <a:t>adapts the ENTROPY model's dependencies; we adapt SYNTHESIS depth</a:t>
+            </a:r>
+          </a:p>
+          <a:p>
+            <a:pPr/>
+            <a:r>
+              <a:rPr sz="1200" b="1">
+                <a:solidFill>
+                  <a:srgbClr val="0065BD"/>
+                </a:solidFill>
+              </a:rPr>
+              <a:t>Spatial competition · 2605.13243</a:t>
+            </a:r>
+          </a:p>
+          <a:p>
+            <a:pPr lvl="1"/>
+            <a:r>
+              <a:rPr sz="1000" b="0"/>
+              <a:t>per-region mode map at 1.8e-4 bpp (ours 4.5e-5) — selects CODECS for rate, not depth for compute</a:t>
+            </a:r>
+          </a:p>
+          <a:p>
+            <a:pPr/>
+            <a:r>
+              <a:rPr sz="1200" b="1">
+                <a:solidFill>
+                  <a:srgbClr val="0065BD"/>
+                </a:solidFill>
+              </a:rPr>
+              <a:t>Loss-free load balancing · 2408.15664 · used directly</a:t>
+            </a:r>
+          </a:p>
+          <a:p>
+            <a:pPr lvl="1"/>
+            <a:r>
+              <a:rPr sz="1000" b="0"/>
+              <a:t>balanced toward the ORACLE's exit mix, not uniform — exits are not interchangeable experts</a:t>
+            </a:r>
+          </a:p>
+        </p:txBody>
+      </p:sp>
     </p:spTree>
   </p:cSld>
   <p:clrMapOvr>
@@ -5049,7 +4931,7 @@
           <a:lstStyle/>
           <a:p>
             <a:r>
-              <a:t>Related work, and where we sit</a:t>
+              <a:t>Quantisation · a second, orthogonal lever</a:t>
             </a:r>
           </a:p>
         </p:txBody>
@@ -5071,73 +4953,91 @@
           <a:p>
             <a:pPr/>
             <a:r>
-              <a:rPr sz="1100" b="1">
-                <a:solidFill>
-                  <a:srgbClr val="0065BD"/>
-                </a:solidFill>
-              </a:rPr>
-              <a:t>Early exit / dynamic depth: BranchyNet, MSDNet, SkipNet, and the confidence- and entropy-based exit criteria surveyed in the dynamic networks literature</a:t>
-            </a:r>
-          </a:p>
-          <a:p>
-            <a:pPr lvl="1"/>
-            <a:r>
-              <a:rPr sz="900" b="0"/>
-              <a:t>all decide from the network's own output; ours decides per SPATIAL TILE for a fixed output, which is a different question</a:t>
-            </a:r>
-          </a:p>
-          <a:p>
-            <a:pPr/>
-            <a:r>
-              <a:rPr sz="1100" b="1">
-                <a:solidFill>
-                  <a:srgbClr val="0065BD"/>
-                </a:solidFill>
-              </a:rPr>
-              <a:t>Xie et al., 'Exploring the Rate-Distortion-Complexity Optimization in Neural Image Compression' (arXiv:2305.07678)</a:t>
-            </a:r>
-          </a:p>
-          <a:p>
-            <a:pPr lvl="1"/>
-            <a:r>
-              <a:rPr sz="900" b="0"/>
-              <a:t>closest prior art to our configuration B: an adaptive spatial mask decoded from side information, no explicit overhead</a:t>
-            </a:r>
-          </a:p>
-          <a:p>
-            <a:pPr lvl="1"/>
-            <a:r>
-              <a:rPr sz="900" b="0"/>
-              <a:t>but it adapts the ENTROPY model's spatial dependencies; we adapt the SYNTHESIS depth. Different part of the decoder, composable in principle</a:t>
-            </a:r>
-          </a:p>
-          <a:p>
-            <a:pPr/>
-            <a:r>
-              <a:rPr sz="1100" b="1">
-                <a:solidFill>
-                  <a:srgbClr val="0065BD"/>
-                </a:solidFill>
-              </a:rPr>
-              <a:t>'Spatial competition for low-complexity learned image compression' (arXiv:2605.13243)</a:t>
-            </a:r>
-          </a:p>
-          <a:p>
-            <a:pPr lvl="1"/>
-            <a:r>
-              <a:rPr sz="900" b="0"/>
-              <a:t>transmits a per-region mode map at 1.8e-4 bpp; ours is 4.5e-5, four times cheaper, but they select between CODECS for rate and we select DEPTH for compute</a:t>
-            </a:r>
-          </a:p>
-          <a:p>
-            <a:pPr/>
-            <a:r>
-              <a:rPr sz="1100" b="1">
-                <a:solidFill>
-                  <a:srgbClr val="0065BD"/>
-                </a:solidFill>
-              </a:rPr>
-              <a:t>Loss-free load balancing (arXiv:2408.15664) is used directly: the router is balanced toward the ORACLE's exit mix, not toward uniform, because our exits are not interchangeable experts</a:t>
+              <a:rPr sz="1200" b="1">
+                <a:solidFill>
+                  <a:srgbClr val="0065BD"/>
+                </a:solidFill>
+              </a:rPr>
+              <a:t>Weight-only · per-channel · no calibration · decoder only (encoder would change the bitstream)</a:t>
+            </a:r>
+          </a:p>
+          <a:p>
+            <a:pPr/>
+            <a:r>
+              <a:rPr sz="1200" b="1">
+                <a:solidFill>
+                  <a:srgbClr val="0065BD"/>
+                </a:solidFill>
+              </a:rPr>
+              <a:t>Prediction registered: shallow exits suffer more. FALSIFIED.</a:t>
+            </a:r>
+          </a:p>
+          <a:p>
+            <a:pPr lvl="1"/>
+            <a:r>
+              <a:rPr sz="1000" b="0"/>
+              <a:t>qp 63, 8 bit:  exit 2 +0.108 dB   deepest +0.111 dB   ratio 0.97</a:t>
+            </a:r>
+          </a:p>
+          <a:p>
+            <a:pPr lvl="1"/>
+            <a:r>
+              <a:rPr sz="1000" b="0"/>
+              <a:t>6 and 4 bit: the DEEPEST exits suffer most</a:t>
+            </a:r>
+          </a:p>
+          <a:p>
+            <a:pPr/>
+            <a:r>
+              <a:rPr sz="1200" b="1">
+                <a:solidFill>
+                  <a:srgbClr val="0065BD"/>
+                </a:solidFill>
+              </a:rPr>
+              <a:t>Mechanism · the deepest exit starts at 0.073 dB and has no headroom to absorb a noise floor; a shallow exit's error already dominates</a:t>
+            </a:r>
+          </a:p>
+          <a:p>
+            <a:pPr/>
+            <a:r>
+              <a:rPr sz="1200" b="1">
+                <a:solidFill>
+                  <a:srgbClr val="0065BD"/>
+                </a:solidFill>
+              </a:rPr>
+              <a:t>What matters is the SPREAD — that is what routing exploits</a:t>
+            </a:r>
+          </a:p>
+          <a:p>
+            <a:pPr lvl="1"/>
+            <a:r>
+              <a:rPr sz="1000" b="0"/>
+              <a:t>qp 63:   fp32 2.864   →   8 bit 2.876   →   6 bit 2.224   →   4 bit 1.398</a:t>
+            </a:r>
+          </a:p>
+          <a:p>
+            <a:pPr lvl="1"/>
+            <a:r>
+              <a:rPr sz="1000" b="0"/>
+              <a:t>BOPs:    1.000        →   0.062        →   0.035        →   0.016</a:t>
+            </a:r>
+          </a:p>
+          <a:p>
+            <a:pPr/>
+            <a:r>
+              <a:rPr sz="1200" b="1">
+                <a:solidFill>
+                  <a:srgbClr val="0065BD"/>
+                </a:solidFill>
+              </a:rPr>
+              <a:t>8 bit composes cleanly at 16× fewer BOPs · ≤6 bit erodes the ladder</a:t>
+            </a:r>
+          </a:p>
+          <a:p>
+            <a:pPr lvl="1"/>
+            <a:r>
+              <a:rPr sz="1000" b="0"/>
+              <a:t>caveat: 8 bit still raises the floor 0.073 → 0.184 dB at qp 63</a:t>
             </a:r>
           </a:p>
         </p:txBody>
@@ -5176,7 +5076,7 @@
           <a:lstStyle/>
           <a:p>
             <a:r>
-              <a:t>Quantisation: a second lever, and what it does to the ladder</a:t>
+              <a:t>Why per-tile beats any fixed mix</a:t>
             </a:r>
           </a:p>
         </p:txBody>
@@ -5191,88 +5091,106 @@
             <p:ph idx="1"/>
           </p:nvPr>
         </p:nvSpPr>
-        <p:spPr/>
+        <p:spPr>
+          <a:xfrm>
+            <a:off x="508000" y="1417320"/>
+            <a:ext cx="8128000" cy="1963420"/>
+          </a:xfrm>
+        </p:spPr>
         <p:txBody>
           <a:bodyPr/>
           <a:lstStyle/>
           <a:p>
             <a:pPr/>
             <a:r>
-              <a:rPr sz="1100" b="1">
-                <a:solidFill>
-                  <a:srgbClr val="0065BD"/>
-                </a:solidFill>
-              </a:rPr>
-              <a:t>Early exit removes MACs; quantisation makes the rest cheaper. Same budget, so they can be priced against each other</a:t>
-            </a:r>
-          </a:p>
-          <a:p>
-            <a:pPr/>
-            <a:r>
-              <a:rPr sz="1100" b="1">
-                <a:solidFill>
-                  <a:srgbClr val="0065BD"/>
-                </a:solidFill>
-              </a:rPr>
-              <a:t>Weight-only, per-channel, no calibration — deliberately the weakest form, so the numbers bound quantisation from below</a:t>
-            </a:r>
-          </a:p>
-          <a:p>
-            <a:pPr/>
-            <a:r>
-              <a:rPr sz="1100" b="1">
-                <a:solidFill>
-                  <a:srgbClr val="0065BD"/>
-                </a:solidFill>
-              </a:rPr>
-              <a:t>The question is not whether it costs quality but whether it costs the SHALLOW exits more. It does not — the prediction was wrong:</a:t>
-            </a:r>
-          </a:p>
-          <a:p>
-            <a:pPr lvl="1"/>
-            <a:r>
-              <a:rPr sz="900" b="0"/>
-              <a:t>at 8 bits the degradation is uniform (qp63: exit 2 +0.108 dB, deepest +0.111); at 6 and 4 bits the DEEPEST exits suffer most</a:t>
-            </a:r>
-          </a:p>
-          <a:p>
-            <a:pPr lvl="1"/>
-            <a:r>
-              <a:rPr sz="900" b="0"/>
-              <a:t>reason: the deepest exit starts near-perfect and has no headroom to absorb a noise floor; a shallow exit's error is already dominated by the blocks it skipped</a:t>
-            </a:r>
-          </a:p>
-          <a:p>
-            <a:pPr/>
-            <a:r>
-              <a:rPr sz="1100" b="1">
-                <a:solidFill>
-                  <a:srgbClr val="0065BD"/>
-                </a:solidFill>
-              </a:rPr>
-              <a:t>What matters for the ladder is the SPREAD between exits, which is what routing exploits:</a:t>
-            </a:r>
-          </a:p>
-          <a:p>
-            <a:pPr lvl="1"/>
-            <a:r>
-              <a:rPr sz="900" b="0"/>
-              <a:t>qp63: 2.864 dB (fp32) -&gt; 2.876 (8 bit) -&gt; 2.224 (6 bit) -&gt; 1.398 (4 bit)</a:t>
-            </a:r>
-          </a:p>
-          <a:p>
-            <a:pPr/>
-            <a:r>
-              <a:rPr sz="1100" b="1">
-                <a:solidFill>
-                  <a:srgbClr val="0065BD"/>
-                </a:solidFill>
-              </a:rPr>
-              <a:t>8-bit weights compose cleanly at 16x fewer BOPs; 6 bits and below erode the ladder itself</a:t>
-            </a:r>
-          </a:p>
-        </p:txBody>
-      </p:sp>
+              <a:rPr sz="1200" b="1">
+                <a:solidFill>
+                  <a:srgbClr val="0065BD"/>
+                </a:solidFill>
+              </a:rPr>
+              <a:t>Cost additive over tiles, MSE a mean over tiles ⇒ both affine in the assignment</a:t>
+            </a:r>
+          </a:p>
+          <a:p>
+            <a:pPr lvl="1"/>
+            <a:r>
+              <a:rPr sz="1000" b="0"/>
+              <a:t>fixed proportions → convex hull of the K exit points</a:t>
+            </a:r>
+          </a:p>
+          <a:p>
+            <a:pPr lvl="1"/>
+            <a:r>
+              <a:rPr sz="1000" b="0"/>
+              <a:t>per-tile assignment → Minkowski average of the N tile hulls</a:t>
+            </a:r>
+          </a:p>
+          <a:p>
+            <a:pPr/>
+            <a:r>
+              <a:rPr sz="1200" b="1">
+                <a:solidFill>
+                  <a:srgbClr val="0065BD"/>
+                </a:solidFill>
+              </a:rPr>
+              <a:t>Gap  =  min-of-average  −  average-of-min  ≥  0</a:t>
+            </a:r>
+          </a:p>
+          <a:p>
+            <a:pPr lvl="1"/>
+            <a:r>
+              <a:rPr sz="1000" b="0"/>
+              <a:t>zero iff every tile prefers the same exit — this IS the value of adaptivity</a:t>
+            </a:r>
+          </a:p>
+          <a:p>
+            <a:pPr/>
+            <a:r>
+              <a:rPr sz="1200" b="1">
+                <a:solidFill>
+                  <a:srgbClr val="0065BD"/>
+                </a:solidFill>
+              </a:rPr>
+              <a:t>Measured Δ/J:  0.39%  →  2.09%  with rate</a:t>
+            </a:r>
+          </a:p>
+          <a:p>
+            <a:pPr/>
+            <a:r>
+              <a:rPr sz="1200" b="1">
+                <a:solidFill>
+                  <a:srgbClr val="0065BD"/>
+                </a:solidFill>
+              </a:rPr>
+              <a:t>Same mechanism per sequence · best/worst CTC clip 3.8× at qp 63 vs 1.5× at qp 0</a:t>
+            </a:r>
+          </a:p>
+        </p:txBody>
+      </p:sp>
+      <p:pic>
+        <p:nvPicPr>
+          <p:cNvPr id="4" name="Picture 3" descr="nf_heterogeneity.png"/>
+          <p:cNvPicPr>
+            <a:picLocks noChangeAspect="1"/>
+          </p:cNvPicPr>
+          <p:nvPr/>
+        </p:nvPicPr>
+        <p:blipFill>
+          <a:blip r:embed="rId2"/>
+          <a:stretch>
+            <a:fillRect/>
+          </a:stretch>
+        </p:blipFill>
+        <p:spPr>
+          <a:xfrm>
+            <a:off x="411480" y="3545332"/>
+            <a:ext cx="8321039" cy="2261733"/>
+          </a:xfrm>
+          <a:prstGeom prst="rect">
+            <a:avLst/>
+          </a:prstGeom>
+        </p:spPr>
+      </p:pic>
     </p:spTree>
   </p:cSld>
   <p:clrMapOvr>
@@ -5307,7 +5225,7 @@
           <a:lstStyle/>
           <a:p>
             <a:r>
-              <a:t>Theory, and what is still owed</a:t>
+              <a:t>What is still owed</a:t>
             </a:r>
           </a:p>
         </p:txBody>
@@ -5322,116 +5240,106 @@
             <p:ph idx="1"/>
           </p:nvPr>
         </p:nvSpPr>
-        <p:spPr>
-          <a:xfrm>
-            <a:off x="508000" y="1417320"/>
-            <a:ext cx="8128000" cy="2433320"/>
-          </a:xfrm>
-        </p:spPr>
+        <p:spPr/>
         <p:txBody>
           <a:bodyPr/>
           <a:lstStyle/>
           <a:p>
             <a:pPr/>
             <a:r>
-              <a:rPr sz="1000" b="1">
-                <a:solidFill>
-                  <a:srgbClr val="0065BD"/>
-                </a:solidFill>
-              </a:rPr>
-              <a:t>Cost is additive over tiles and MSE is a mean over tiles, so both are affine in the assignment</a:t>
-            </a:r>
-          </a:p>
-          <a:p>
-            <a:pPr lvl="1"/>
-            <a:r>
-              <a:rPr sz="800" b="0"/>
-              <a:t>fixed proportions reach the convex hull of the K exit points; per-tile assignment reaches the Minkowski average of the N tile hulls</a:t>
-            </a:r>
-          </a:p>
-          <a:p>
-            <a:pPr lvl="1"/>
-            <a:r>
-              <a:rPr sz="800" b="0"/>
-              <a:t>their gap is min-of-average minus average-of-min, zero iff every tile prefers the same exit — this IS the value of adaptivity</a:t>
-            </a:r>
-          </a:p>
-          <a:p>
-            <a:pPr/>
-            <a:r>
-              <a:rPr sz="1000" b="1">
-                <a:solidFill>
-                  <a:srgbClr val="0065BD"/>
-                </a:solidFill>
-              </a:rPr>
-              <a:t>Measured: delta/J rises 0.39% to 2.09% with rate</a:t>
-            </a:r>
-          </a:p>
-          <a:p>
-            <a:pPr/>
-            <a:r>
-              <a:rPr sz="1000" b="1">
-                <a:solidFill>
-                  <a:srgbClr val="0065BD"/>
-                </a:solidFill>
-              </a:rPr>
-              <a:t>Still owed before this is a paper:</a:t>
-            </a:r>
-          </a:p>
-          <a:p>
-            <a:pPr lvl="1"/>
-            <a:r>
-              <a:rPr sz="800" b="0"/>
-              <a:t>a static decoder truncated to the depth we average (6.95 blocks of 12 at qp0, 8.78 at qp63) — the experiment that decides whether adaptivity is the contribution</a:t>
-            </a:r>
-          </a:p>
-          <a:p>
-            <a:pPr lvl="1"/>
-            <a:r>
-              <a:rPr sz="800" b="0"/>
-              <a:t>all six runs to 4 epochs; every number here is one checkpoint at one epoch and the measured saving is still climbing</a:t>
-            </a:r>
-          </a:p>
-          <a:p>
-            <a:pPr lvl="1"/>
-            <a:r>
-              <a:rPr sz="800" b="0"/>
-              <a:t>HEVC B/C/D, 13 of 53 sequences, reported as NOT MEASURED</a:t>
-            </a:r>
-          </a:p>
-          <a:p>
-            <a:pPr lvl="1"/>
-            <a:r>
-              <a:rPr sz="800" b="0"/>
-              <a:t>end-to-end confirmation of the sorted-tile execution, once the runs free the decoder</a:t>
-            </a:r>
-          </a:p>
-        </p:txBody>
-      </p:sp>
-      <p:pic>
-        <p:nvPicPr>
-          <p:cNvPr id="4" name="Picture 3" descr="nf_heterogeneity.png"/>
-          <p:cNvPicPr>
-            <a:picLocks noChangeAspect="1"/>
-          </p:cNvPicPr>
-          <p:nvPr/>
-        </p:nvPicPr>
-        <p:blipFill>
-          <a:blip r:embed="rId2"/>
-          <a:stretch>
-            <a:fillRect/>
-          </a:stretch>
-        </p:blipFill>
-        <p:spPr>
-          <a:xfrm>
-            <a:off x="411480" y="4015232"/>
-            <a:ext cx="8321039" cy="2261733"/>
-          </a:xfrm>
-          <a:prstGeom prst="rect">
-            <a:avLst/>
-          </a:prstGeom>
-        </p:spPr>
-      </p:pic>
+              <a:rPr sz="1300" b="1">
+                <a:solidFill>
+                  <a:srgbClr val="0065BD"/>
+                </a:solidFill>
+              </a:rPr>
+              <a:t>A static decoder truncated to the depth we average</a:t>
+            </a:r>
+          </a:p>
+          <a:p>
+            <a:pPr lvl="1"/>
+            <a:r>
+              <a:rPr sz="1100" b="0"/>
+              <a:t>6.95 of 12 blocks at qp 0 · 8.78 at qp 63</a:t>
+            </a:r>
+          </a:p>
+          <a:p>
+            <a:pPr lvl="1"/>
+            <a:r>
+              <a:rPr sz="1100" b="0"/>
+              <a:t>decides whether adaptivity is the contribution</a:t>
+            </a:r>
+          </a:p>
+          <a:p>
+            <a:pPr/>
+            <a:r>
+              <a:rPr sz="1300" b="1">
+                <a:solidFill>
+                  <a:srgbClr val="0065BD"/>
+                </a:solidFill>
+              </a:rPr>
+              <a:t>All six runs to 4 epochs</a:t>
+            </a:r>
+          </a:p>
+          <a:p>
+            <a:pPr lvl="1"/>
+            <a:r>
+              <a:rPr sz="1100" b="0"/>
+              <a:t>every number here is one checkpoint; the saving is still climbing</a:t>
+            </a:r>
+          </a:p>
+          <a:p>
+            <a:pPr/>
+            <a:r>
+              <a:rPr sz="1300" b="1">
+                <a:solidFill>
+                  <a:srgbClr val="0065BD"/>
+                </a:solidFill>
+              </a:rPr>
+              <a:t>HEVC B / C / D · 13 of 53 sequences · reported as NOT MEASURED</a:t>
+            </a:r>
+          </a:p>
+          <a:p>
+            <a:pPr/>
+            <a:r>
+              <a:rPr sz="1300" b="1">
+                <a:solidFill>
+                  <a:srgbClr val="0065BD"/>
+                </a:solidFill>
+              </a:rPr>
+              <a:t>Sorted-tile execution, end to end</a:t>
+            </a:r>
+          </a:p>
+          <a:p>
+            <a:pPr lvl="1"/>
+            <a:r>
+              <a:rPr sz="1100" b="0"/>
+              <a:t>prototyped and bit-identical; not landed while six runs import the decoder</a:t>
+            </a:r>
+          </a:p>
+          <a:p>
+            <a:pPr/>
+            <a:r>
+              <a:rPr sz="1300" b="1">
+                <a:solidFill>
+                  <a:srgbClr val="0065BD"/>
+                </a:solidFill>
+              </a:rPr>
+              <a:t>Wall-clock on an idle card · these ratios were taken at 100% utilisation</a:t>
+            </a:r>
+          </a:p>
+          <a:p>
+            <a:pPr/>
+            <a:r>
+              <a:rPr sz="1300" b="1">
+                <a:solidFill>
+                  <a:srgbClr val="0065BD"/>
+                </a:solidFill>
+              </a:rPr>
+              <a:t>Open · CONTROL degrades over its second epoch and the cause is unknown</a:t>
+            </a:r>
+          </a:p>
+        </p:txBody>
+      </p:sp>
     </p:spTree>
   </p:cSld>
   <p:clrMapOvr>
@@ -5466,7 +5374,7 @@
           <a:lstStyle/>
           <a:p>
             <a:r>
-              <a:t>Architecture: a ladder of exits</a:t>
+              <a:t>A ladder of exits over the trunk</a:t>
             </a:r>
           </a:p>
         </p:txBody>
@@ -5484,7 +5392,7 @@
         <p:spPr>
           <a:xfrm>
             <a:off x="508000" y="1417320"/>
-            <a:ext cx="8128000" cy="1036320"/>
+            <a:ext cx="8128000" cy="1798320"/>
           </a:xfrm>
         </p:spPr>
         <p:txBody>
@@ -5498,21 +5406,46 @@
                   <a:srgbClr val="0065BD"/>
                 </a:solidFill>
               </a:rPr>
-              <a:t>Shared stem runs full-frame → no seams; the rest runs per tile</a:t>
-            </a:r>
-          </a:p>
-          <a:p>
-            <a:pPr/>
-            <a:r>
-              <a:rPr sz="1300" b="0"/>
-              <a:t>Each exit has a zero-initialised 1×1 adapter, then the shared head</a:t>
-            </a:r>
-          </a:p>
-          <a:p>
-            <a:pPr/>
-            <a:r>
-              <a:rPr sz="1300" b="0"/>
-              <a:t>Pointwise on purpose: a 1×1 adds no receptive field, so no seam cost</a:t>
+              <a:t>K exits over 12 blocks, split depth j</a:t>
+            </a:r>
+          </a:p>
+          <a:p>
+            <a:pPr lvl="1"/>
+            <a:r>
+              <a:rPr sz="1100" b="0"/>
+              <a:t>groups 0…j−1  full-frame  ·  groups j…K−1  per tile</a:t>
+            </a:r>
+          </a:p>
+          <a:p>
+            <a:pPr lvl="1"/>
+            <a:r>
+              <a:rPr sz="1100" b="0"/>
+              <a:t>shipped:  K = 6,  j = 2,  256 px tiles</a:t>
+            </a:r>
+          </a:p>
+          <a:p>
+            <a:pPr/>
+            <a:r>
+              <a:rPr sz="1300" b="1">
+                <a:solidFill>
+                  <a:srgbClr val="0065BD"/>
+                </a:solidFill>
+              </a:rPr>
+              <a:t>Per-tile cost  C_k  (units of one stock decode)</a:t>
+            </a:r>
+          </a:p>
+          <a:p>
+            <a:pPr lvl="1"/>
+            <a:r>
+              <a:rPr sz="1100" b="0"/>
+              <a:t>0.581  0.581  0.581  0.730  0.870  1.010</a:t>
+            </a:r>
+          </a:p>
+          <a:p>
+            <a:pPr lvl="1"/>
+            <a:r>
+              <a:rPr sz="1100" b="0"/>
+              <a:t>exits 0,1 end inside the stem → C₀ = C₁ = C₂ · 6 rungs, 4 prices</a:t>
             </a:r>
           </a:p>
         </p:txBody>
@@ -5533,7 +5466,7 @@
         </p:blipFill>
         <p:spPr>
           <a:xfrm>
-            <a:off x="411480" y="2618232"/>
+            <a:off x="411480" y="3380232"/>
             <a:ext cx="8321040" cy="2012781"/>
           </a:xfrm>
           <a:prstGeom prst="rect">
@@ -5575,7 +5508,7 @@
           <a:lstStyle/>
           <a:p>
             <a:r>
-              <a:t>What the router actually does, on a frame</a:t>
+              <a:t>The assignment, on a frame</a:t>
             </a:r>
           </a:p>
         </p:txBody>
@@ -5593,7 +5526,7 @@
         <p:spPr>
           <a:xfrm>
             <a:off x="508000" y="1417320"/>
-            <a:ext cx="8128000" cy="2788920"/>
+            <a:ext cx="8128000" cy="1290320"/>
           </a:xfrm>
         </p:spPr>
         <p:txBody>
@@ -5602,52 +5535,37 @@
           <a:p>
             <a:pPr/>
             <a:r>
-              <a:rPr sz="1100" b="1">
-                <a:solidFill>
-                  <a:srgbClr val="0065BD"/>
-                </a:solidFill>
-              </a:rPr>
-              <a:t>Bosphorus, qp32, the real Lagrangian assignment at the 0.1 dB budget — 40 tiles of 256px, 33.4% saved at 0.098 dB</a:t>
-            </a:r>
-          </a:p>
-          <a:p>
-            <a:pPr/>
-            <a:r>
-              <a:rPr sz="1100" b="1">
-                <a:solidFill>
-                  <a:srgbClr val="0065BD"/>
-                </a:solidFill>
-              </a:rPr>
-              <a:t>The boat takes exit 4 (13% saved). The water and the sky take exit 2 (42%). The shoreline band in between takes exit 3.</a:t>
-            </a:r>
-          </a:p>
-          <a:p>
-            <a:pPr/>
-            <a:r>
-              <a:rPr sz="1100" b="1">
-                <a:solidFill>
-                  <a:srgbClr val="0065BD"/>
-                </a:solidFill>
-              </a:rPr>
-              <a:t>This is the whole idea in one picture: the frame is not uniformly hard, and a decoder that spends uniformly is overpaying on most of it</a:t>
-            </a:r>
-          </a:p>
-          <a:p>
-            <a:pPr lvl="1"/>
-            <a:r>
-              <a:rPr sz="900" b="0"/>
-              <a:t>panel c is the dB each tile pays against ITS OWN reference error, not against the frame mean — dividing by the mean makes easy tiles read as better than the release, which no exit can be</a:t>
-            </a:r>
-          </a:p>
-          <a:p>
-            <a:pPr/>
-            <a:r>
-              <a:rPr sz="1100" b="1">
-                <a:solidFill>
-                  <a:srgbClr val="0065BD"/>
-                </a:solidFill>
-              </a:rPr>
-              <a:t>Closest relative in the literature is ClassSR, which routes patches to differently sized SR branches. The difference: it picks a network per patch for a fixed cost target; we pick a DEPTH per tile inside one network, for a fixed quality target, and the bitstream never changes.</a:t>
+              <a:rPr sz="1300" b="1">
+                <a:solidFill>
+                  <a:srgbClr val="0065BD"/>
+                </a:solidFill>
+              </a:rPr>
+              <a:t>Bosphorus · qp 32 · λ* bisected to 0.1 dB · 40 tiles</a:t>
+            </a:r>
+          </a:p>
+          <a:p>
+            <a:pPr/>
+            <a:r>
+              <a:rPr sz="1300" b="1">
+                <a:solidFill>
+                  <a:srgbClr val="0065BD"/>
+                </a:solidFill>
+              </a:rPr>
+              <a:t>boat → exit 4   water, sky → exit 2   shoreline → exit 3</a:t>
+            </a:r>
+          </a:p>
+          <a:p>
+            <a:pPr lvl="1"/>
+            <a:r>
+              <a:rPr sz="1100" b="0"/>
+              <a:t>33.4% saved at 0.098 dB</a:t>
+            </a:r>
+          </a:p>
+          <a:p>
+            <a:pPr lvl="1"/>
+            <a:r>
+              <a:rPr sz="1100" b="0"/>
+              <a:t>(c) dB vs each tile's OWN reference, not the frame mean</a:t>
             </a:r>
           </a:p>
         </p:txBody>
@@ -5668,8 +5586,8 @@
         </p:blipFill>
         <p:spPr>
           <a:xfrm>
-            <a:off x="986721" y="4370831"/>
-            <a:ext cx="7170558" cy="2075688"/>
+            <a:off x="411480" y="2872232"/>
+            <a:ext cx="8321040" cy="2408722"/>
           </a:xfrm>
           <a:prstGeom prst="rect">
             <a:avLst/>
@@ -5710,7 +5628,7 @@
           <a:lstStyle/>
           <a:p>
             <a:r>
-              <a:t>We start AT DCVC-UF, not near it</a:t>
+              <a:t>The reference IS the released decoder</a:t>
             </a:r>
           </a:p>
         </p:txBody>
@@ -5728,7 +5646,7 @@
         <p:spPr>
           <a:xfrm>
             <a:off x="508000" y="1417320"/>
-            <a:ext cx="8128000" cy="2687320"/>
+            <a:ext cx="8128000" cy="1544320"/>
           </a:xfrm>
         </p:spPr>
         <p:txBody>
@@ -5737,69 +5655,52 @@
           <a:p>
             <a:pPr/>
             <a:r>
-              <a:rPr sz="1200" b="1">
-                <a:solidFill>
-                  <a:srgbClr val="0065BD"/>
-                </a:solidFill>
-              </a:rPr>
-              <a:t>The released weights are re-expressed in ladder form by a key remap</a:t>
-            </a:r>
-          </a:p>
-          <a:p>
-            <a:pPr lvl="1"/>
-            <a:r>
-              <a:rPr sz="1000" b="0"/>
-              <a:t>dec_1.0→upsample, dec_1.n→groups.g.i, dec_2→head</a:t>
-            </a:r>
-          </a:p>
-          <a:p>
-            <a:pPr lvl="1"/>
-            <a:r>
-              <a:rPr sz="1000" b="0"/>
-              <a:t>the remap is a bijection over 143 tensors (asserted in tests)</a:t>
-            </a:r>
-          </a:p>
-          <a:p>
-            <a:pPr/>
-            <a:r>
-              <a:rPr sz="1200" b="0"/>
-              <a:t>Adapters and seam repair are zero-init, i.e. the identity</a:t>
-            </a:r>
-          </a:p>
-          <a:p>
-            <a:pPr/>
-            <a:r>
-              <a:rPr sz="1200" b="1">
-                <a:solidFill>
-                  <a:srgbClr val="0065BD"/>
-                </a:solidFill>
-              </a:rPr>
-              <a:t>So at step 0, with no training at all:</a:t>
-            </a:r>
-          </a:p>
-          <a:p>
-            <a:pPr lvl="1"/>
-            <a:r>
-              <a:rPr sz="1000" b="0"/>
-              <a:t>released DCVC-UF vs our deepest exit → max|diff| = 0.0</a:t>
-            </a:r>
-          </a:p>
-          <a:p>
-            <a:pPr/>
-            <a:r>
-              <a:rPr sz="1200" b="1">
-                <a:solidFill>
-                  <a:srgbClr val="0065BD"/>
-                </a:solidFill>
-              </a:rPr>
-              <a:t>Training does not have to reach DCVC-UF. It has to (a) lift the shallow exits and (b) not damage the deepest one.</a:t>
-            </a:r>
-          </a:p>
-          <a:p>
-            <a:pPr/>
-            <a:r>
-              <a:rPr sz="1200" b="0"/>
-              <a:t>From-scratch runs were abandoned for exactly this: after 6 epochs their anchor sat 1.49 dB below the release and was not closing.</a:t>
+              <a:rPr sz="1300" b="1">
+                <a:solidFill>
+                  <a:srgbClr val="0065BD"/>
+                </a:solidFill>
+              </a:rPr>
+              <a:t>Released weights re-expressed in ladder form · bijection over 143 tensors</a:t>
+            </a:r>
+          </a:p>
+          <a:p>
+            <a:pPr/>
+            <a:r>
+              <a:rPr sz="1300" b="1">
+                <a:solidFill>
+                  <a:srgbClr val="0065BD"/>
+                </a:solidFill>
+              </a:rPr>
+              <a:t>Adapters and seam repair zero-init ⇒ identity at step 0</a:t>
+            </a:r>
+          </a:p>
+          <a:p>
+            <a:pPr/>
+            <a:r>
+              <a:rPr sz="1300" b="1">
+                <a:solidFill>
+                  <a:srgbClr val="0065BD"/>
+                </a:solidFill>
+              </a:rPr>
+              <a:t>max | x̂_release − x̂_ours |  =  0.0     at qp 0 / 32 / 63</a:t>
+            </a:r>
+          </a:p>
+          <a:p>
+            <a:pPr lvl="1"/>
+            <a:r>
+              <a:rPr sz="1100" b="0"/>
+              <a:t>through Microsoft's own DMCI class and forward_one_frame</a:t>
+            </a:r>
+          </a:p>
+          <a:p>
+            <a:pPr/>
+            <a:r>
+              <a:rPr sz="1300" b="1">
+                <a:solidFill>
+                  <a:srgbClr val="0065BD"/>
+                </a:solidFill>
+              </a:rPr>
+              <a:t>So training must (a) lift shallow exits, (b) not damage the deepest</a:t>
             </a:r>
           </a:p>
         </p:txBody>
@@ -5820,8 +5721,8 @@
         </p:blipFill>
         <p:spPr>
           <a:xfrm>
-            <a:off x="1640531" y="4269232"/>
-            <a:ext cx="5862938" cy="2177288"/>
+            <a:off x="411480" y="3126232"/>
+            <a:ext cx="8321040" cy="3090140"/>
           </a:xfrm>
           <a:prstGeom prst="rect">
             <a:avLst/>
@@ -5862,7 +5763,7 @@
           <a:lstStyle/>
           <a:p>
             <a:r>
-              <a:t>Training: the recipe, checked not claimed</a:t>
+              <a:t>Recipe, checked against theirs</a:t>
             </a:r>
           </a:p>
         </p:txBody>
@@ -5880,7 +5781,7 @@
         <p:spPr>
           <a:xfrm>
             <a:off x="508000" y="1417320"/>
-            <a:ext cx="8128000" cy="3931920"/>
+            <a:ext cx="8128000" cy="2103120"/>
           </a:xfrm>
         </p:spPr>
         <p:txBody>
@@ -5894,7 +5795,7 @@
                   <a:srgbClr val="0065BD"/>
                 </a:solidFill>
               </a:rPr>
-              <a:t>scripts/verify_recipe.py compares each item against ~/DCVC/train_image.py and exits non-zero on a mismatch</a:t>
+              <a:t>verify_recipe.py diffs each item against ~/DCVC/train_image.py</a:t>
             </a:r>
           </a:p>
           <a:p>
@@ -5905,21 +5806,21 @@
                   <a:srgbClr val="0065BD"/>
                 </a:solidFill>
               </a:rPr>
-              <a:t>Deepest exit vs the release, same tiles and same warm start: BEST -0.003 / -0.016 / -0.033 dB against VERBATIM's -0.092 / -0.127 / -0.169 dB at qp0/32/63. VERBATIM's drift alone is 1.7× the 0.1 dB budget, so the target is unreachable there at any saving — the anchor term is a precondition, not a refinement</a:t>
+              <a:t>Deepest-exit drift vs release   BEST  -0.003 / -0.016 / -0.033   ·   VERBATIM (no anchor)  -0.092 / -0.127 / -0.169   at qp 0/32/63</a:t>
             </a:r>
           </a:p>
           <a:p>
             <a:pPr lvl="1"/>
             <a:r>
               <a:rPr sz="900" b="0"/>
-              <a:t>Saving at 0.1 dB across the three runs that share an architecture — anchor 0: unreachable at every rate; anchor 1: 5/4/4/3/3%; anchor 10: 42/42/42/42/42%. CONTROL→BEST changes four things at once, so that step is the bundle, not the anchor alone</a:t>
+              <a:t>Saving at 0.1 dB, same architecture:  anchor 0: unreachable at every rate  ·  anchor 1: 5/4/4/3/3%  ·  anchor 10: 42/42/42/42/42%   (CONTROL→BEST moves four flags, so it is the bundle)</a:t>
             </a:r>
           </a:p>
           <a:p>
             <a:pPr lvl="1"/>
             <a:r>
               <a:rPr sz="900" b="0"/>
-              <a:t>CONTROL over its SECOND epoch, per-exit dB vs the release at qp63 (below): saving at 0.1 dB fell 13.3% -&gt; 3.8% at qp0, damage growing the shallower the exit. VERBATIM, which carries even less, IMPROVED over the same boundary — so this is CONTROL's, not 'training without the additions', and the cause is still open</a:t>
+              <a:t>CONTROL, 2nd epoch:  saving at qp0 13.3% -&gt; 3.8%  ·  damage grows the shallower the exit  ·  VERBATIM improved over the same boundary → cause unknown</a:t>
             </a:r>
           </a:p>
           <a:p>
@@ -5930,18 +5831,7 @@
                   <a:srgbClr val="0065BD"/>
                 </a:solidFill>
               </a:rPr>
-              <a:t>Deliberate additions, listed rather than hidden: --epoch_offset, --anchor_weight, --new_lr_scale, --freeze_encoder</a:t>
-            </a:r>
-          </a:p>
-          <a:p>
-            <a:pPr/>
-            <a:r>
-              <a:rPr sz="1100" b="1">
-                <a:solidFill>
-                  <a:srgbClr val="0065BD"/>
-                </a:solidFill>
-              </a:rPr>
-              <a:t>VERBATIM is their recipe with NONE of them, effective batch 16 by accumulation — the control both rows above are measured against</a:t>
+              <a:t>Additions, listed: --epoch_offset · --anchor_weight · --new_lr_scale · --freeze_encoder</a:t>
             </a:r>
           </a:p>
         </p:txBody>
@@ -5962,8 +5852,8 @@
         </p:blipFill>
         <p:spPr>
           <a:xfrm>
-            <a:off x="2829009" y="5513831"/>
-            <a:ext cx="3485981" cy="932688"/>
+            <a:off x="411480" y="3685031"/>
+            <a:ext cx="8321039" cy="2226326"/>
           </a:xfrm>
           <a:prstGeom prst="rect">
             <a:avLst/>
@@ -6004,7 +5894,7 @@
           <a:lstStyle/>
           <a:p>
             <a:r>
-              <a:t>How training actually went</a:t>
+              <a:t>The loss is not the convergence signal</a:t>
             </a:r>
           </a:p>
         </p:txBody>
@@ -6022,7 +5912,7 @@
         <p:spPr>
           <a:xfrm>
             <a:off x="508000" y="1417320"/>
-            <a:ext cx="8128000" cy="3246120"/>
+            <a:ext cx="8128000" cy="1722120"/>
           </a:xfrm>
         </p:spPr>
         <p:txBody>
@@ -6031,59 +5921,59 @@
           <a:p>
             <a:pPr/>
             <a:r>
-              <a:rPr sz="1100" b="1">
-                <a:solidFill>
-                  <a:srgbClr val="0065BD"/>
-                </a:solidFill>
-              </a:rPr>
-              <a:t>The loss is flat from about step 5,000 and stays flat through the epoch. It would be easy to call that converged. It is not:</a:t>
-            </a:r>
-          </a:p>
-          <a:p>
-            <a:pPr lvl="1"/>
-            <a:r>
-              <a:rPr sz="900" b="0"/>
-              <a:t>loss = lambda*MSE + bpp, and a random 256px crop's bitrate swings twofold between consecutive batches. corr(loss, batch bpp) = 0.97 — the curve is mostly reporting what the dataloader handed the model</a:t>
-            </a:r>
-          </a:p>
-          <a:p>
-            <a:pPr/>
-            <a:r>
-              <a:rPr sz="1100" b="1">
-                <a:solidFill>
-                  <a:srgbClr val="0065BD"/>
-                </a:solidFill>
-              </a:rPr>
-              <a:t>Panel b: the exits stay ordered and about 1 dB apart on the training batch — the ladder is healthy, nothing has collapsed onto its neighbour</a:t>
-            </a:r>
-          </a:p>
-          <a:p>
-            <a:pPr/>
-            <a:r>
-              <a:rPr sz="1100" b="1">
-                <a:solidFill>
-                  <a:srgbClr val="0065BD"/>
-                </a:solidFill>
-              </a:rPr>
-              <a:t>Panel c is the measurement that does answer it: compute saved on the SAME fixed CTC frames, one point per checkpoint. Still climbing at 20-24k steps (BEST128 11.2 to 12.6%, FINE12 15.0 to 16.8% at qp63)</a:t>
-            </a:r>
-          </a:p>
-          <a:p>
-            <a:pPr/>
-            <a:r>
-              <a:rPr sz="1100" b="1">
-                <a:solidFill>
-                  <a:srgbClr val="0065BD"/>
-                </a:solidFill>
-              </a:rPr>
-              <a:t>So the stopping signal is the held-out measurement, not the loss — and every number in this deck is one checkpoint of a run that has not finished</a:t>
-            </a:r>
-          </a:p>
-          <a:p>
-            <a:pPr/>
-            <a:r>
-              <a:rPr sz="1100" b="0"/>
-              <a:t>One epoch is 47,451 steps at batch 8; six runs share the machine, so an epoch costs 6-22 h wall-clock</a:t>
+              <a:rPr sz="1200" b="1">
+                <a:solidFill>
+                  <a:srgbClr val="0065BD"/>
+                </a:solidFill>
+              </a:rPr>
+              <a:t>L = λ·MSE + bpp   ·   corr(L, batch bpp) = 0.97</a:t>
+            </a:r>
+          </a:p>
+          <a:p>
+            <a:pPr lvl="1"/>
+            <a:r>
+              <a:rPr sz="1000" b="0"/>
+              <a:t>flat from step ~5,000; a 256 px crop's bitrate swings 2× per batch</a:t>
+            </a:r>
+          </a:p>
+          <a:p>
+            <a:pPr/>
+            <a:r>
+              <a:rPr sz="1200" b="1">
+                <a:solidFill>
+                  <a:srgbClr val="0065BD"/>
+                </a:solidFill>
+              </a:rPr>
+              <a:t>(b) exits stay ordered, ~1 dB apart → ladder healthy</a:t>
+            </a:r>
+          </a:p>
+          <a:p>
+            <a:pPr/>
+            <a:r>
+              <a:rPr sz="1200" b="1">
+                <a:solidFill>
+                  <a:srgbClr val="0065BD"/>
+                </a:solidFill>
+              </a:rPr>
+              <a:t>(c) saving on FIXED CTC frames, still rising at 20–24k steps</a:t>
+            </a:r>
+          </a:p>
+          <a:p>
+            <a:pPr lvl="1"/>
+            <a:r>
+              <a:rPr sz="1000" b="0"/>
+              <a:t>BEST128 11.2 → 12.6%   FINE12 15.0 → 16.8%   (qp 63)</a:t>
+            </a:r>
+          </a:p>
+          <a:p>
+            <a:pPr/>
+            <a:r>
+              <a:rPr sz="1200" b="1">
+                <a:solidFill>
+                  <a:srgbClr val="0065BD"/>
+                </a:solidFill>
+              </a:rPr>
+              <a:t>1 epoch = 47,451 steps · every number here is one checkpoint</a:t>
             </a:r>
           </a:p>
         </p:txBody>
@@ -6104,8 +5994,8 @@
         </p:blipFill>
         <p:spPr>
           <a:xfrm>
-            <a:off x="1940145" y="4828031"/>
-            <a:ext cx="5263709" cy="1618488"/>
+            <a:off x="411480" y="3304032"/>
+            <a:ext cx="8321039" cy="2558557"/>
           </a:xfrm>
           <a:prstGeom prst="rect">
             <a:avLst/>
@@ -6146,7 +6036,7 @@
           <a:lstStyle/>
           <a:p>
             <a:r>
-              <a:t>The anchor, and a ×4 error caught</a:t>
+              <a:t>Schedule position, and a ×4 error</a:t>
             </a:r>
           </a:p>
         </p:txBody>
@@ -6164,7 +6054,7 @@
         <p:spPr>
           <a:xfrm>
             <a:off x="508000" y="1417320"/>
-            <a:ext cx="8128000" cy="1798320"/>
+            <a:ext cx="8128000" cy="1290320"/>
           </a:xfrm>
         </p:spPr>
         <p:txBody>
@@ -6178,21 +6068,21 @@
                   <a:srgbClr val="0065BD"/>
                 </a:solidFill>
               </a:rPr>
-              <a:t>Reading the schedule from epoch 0 applied the from-scratch lr to a converged model</a:t>
+              <a:t>Reading the schedule from epoch 0 applies from-scratch lr to a converged model</a:t>
             </a:r>
           </a:p>
           <a:p>
             <a:pPr lvl="1"/>
             <a:r>
               <a:rPr sz="1100" b="0"/>
-              <a:t>deepest exit fell 0.153 / 0.201 / 0.263 dB in ONE epoch (qp0/32/63)</a:t>
+              <a:t>deepest exit fell 0.153 / 0.201 / 0.263 dB in one epoch</a:t>
             </a:r>
           </a:p>
           <a:p>
             <a:pPr lvl="1"/>
             <a:r>
               <a:rPr sz="1100" b="0"/>
-              <a:t>fixed to 0.025 / 0.051 / 0.074 by --epoch_offset 75 + --anchor_weight</a:t>
+              <a:t>→ 0.025 / 0.051 / 0.074 with --epoch_offset 75 + --anchor_weight</a:t>
             </a:r>
           </a:p>
           <a:p>
@@ -6203,7 +6093,7 @@
                   <a:srgbClr val="0065BD"/>
                 </a:solidFill>
               </a:rPr>
-              <a:t>Freezing the backbone gives exactly 0.000 — but collapses the ceiling from 27.3% to 11.5%, so training the trunk is mandatory</a:t>
+              <a:t>Freezing the trunk gives 0.000 drift — and collapses the ceiling 27.3% → 11.5%</a:t>
             </a:r>
           </a:p>
         </p:txBody>
@@ -6224,8 +6114,8 @@
         </p:blipFill>
         <p:spPr>
           <a:xfrm>
-            <a:off x="464690" y="3380232"/>
-            <a:ext cx="8214620" cy="3066287"/>
+            <a:off x="411480" y="2872232"/>
+            <a:ext cx="8321040" cy="3106010"/>
           </a:xfrm>
           <a:prstGeom prst="rect">
             <a:avLst/>
@@ -6266,7 +6156,7 @@
           <a:lstStyle/>
           <a:p>
             <a:r>
-              <a:t>What an exit costs, on one frame</a:t>
+              <a:t>One frame, four exits</a:t>
             </a:r>
           </a:p>
         </p:txBody>
@@ -6284,7 +6174,7 @@
         <p:spPr>
           <a:xfrm>
             <a:off x="508000" y="1417320"/>
-            <a:ext cx="8128000" cy="1036320"/>
+            <a:ext cx="8128000" cy="782320"/>
           </a:xfrm>
         </p:spPr>
         <p:txBody>
@@ -6298,14 +6188,18 @@
                   <a:srgbClr val="0065BD"/>
                 </a:solidFill>
               </a:rPr>
-              <a:t>Bosphorus 1080p, qp32, identical bitstream at every exit</a:t>
-            </a:r>
-          </a:p>
-          <a:p>
-            <a:pPr/>
-            <a:r>
-              <a:rPr sz="1300" b="0"/>
-              <a:t>Error maps ×25: the damage is structured, concentrated on detail and on tile borders — which is what the seam work targets</a:t>
+              <a:t>Bosphorus 1080p · qp 32 · identical bitstream at every exit</a:t>
+            </a:r>
+          </a:p>
+          <a:p>
+            <a:pPr/>
+            <a:r>
+              <a:rPr sz="1300" b="1">
+                <a:solidFill>
+                  <a:srgbClr val="0065BD"/>
+                </a:solidFill>
+              </a:rPr>
+              <a:t>Error ×25 · damage is structured: detail and tile borders</a:t>
             </a:r>
           </a:p>
         </p:txBody>
@@ -6326,7 +6220,7 @@
         </p:blipFill>
         <p:spPr>
           <a:xfrm>
-            <a:off x="411480" y="2618232"/>
+            <a:off x="411480" y="2364232"/>
             <a:ext cx="8321040" cy="3671737"/>
           </a:xfrm>
           <a:prstGeom prst="rect">

--- a/paper/FLEX-UF_LMT.pptx
+++ b/paper/FLEX-UF_LMT.pptx
@@ -4946,102 +4946,120 @@
             <p:ph idx="1"/>
           </p:nvPr>
         </p:nvSpPr>
-        <p:spPr/>
+        <p:spPr>
+          <a:xfrm>
+            <a:off x="508000" y="1417320"/>
+            <a:ext cx="8128000" cy="2331720"/>
+          </a:xfrm>
+        </p:spPr>
         <p:txBody>
           <a:bodyPr/>
           <a:lstStyle/>
           <a:p>
             <a:pPr/>
             <a:r>
-              <a:rPr sz="1200" b="1">
-                <a:solidFill>
-                  <a:srgbClr val="0065BD"/>
-                </a:solidFill>
-              </a:rPr>
-              <a:t>Weight-only · per-channel · no calibration · decoder only (encoder would change the bitstream)</a:t>
-            </a:r>
-          </a:p>
-          <a:p>
-            <a:pPr/>
-            <a:r>
-              <a:rPr sz="1200" b="1">
-                <a:solidFill>
-                  <a:srgbClr val="0065BD"/>
-                </a:solidFill>
-              </a:rPr>
-              <a:t>Prediction registered: shallow exits suffer more. FALSIFIED.</a:t>
-            </a:r>
-          </a:p>
-          <a:p>
-            <a:pPr lvl="1"/>
-            <a:r>
-              <a:rPr sz="1000" b="0"/>
-              <a:t>qp 63, 8 bit:  exit 2 +0.108 dB   deepest +0.111 dB   ratio 0.97</a:t>
-            </a:r>
-          </a:p>
-          <a:p>
-            <a:pPr lvl="1"/>
-            <a:r>
-              <a:rPr sz="1000" b="0"/>
-              <a:t>6 and 4 bit: the DEEPEST exits suffer most</a:t>
-            </a:r>
-          </a:p>
-          <a:p>
-            <a:pPr/>
-            <a:r>
-              <a:rPr sz="1200" b="1">
-                <a:solidFill>
-                  <a:srgbClr val="0065BD"/>
-                </a:solidFill>
-              </a:rPr>
-              <a:t>Mechanism · the deepest exit starts at 0.073 dB and has no headroom to absorb a noise floor; a shallow exit's error already dominates</a:t>
-            </a:r>
-          </a:p>
-          <a:p>
-            <a:pPr/>
-            <a:r>
-              <a:rPr sz="1200" b="1">
-                <a:solidFill>
-                  <a:srgbClr val="0065BD"/>
-                </a:solidFill>
-              </a:rPr>
-              <a:t>What matters is the SPREAD — that is what routing exploits</a:t>
-            </a:r>
-          </a:p>
-          <a:p>
-            <a:pPr lvl="1"/>
-            <a:r>
-              <a:rPr sz="1000" b="0"/>
-              <a:t>qp 63:   fp32 2.864   →   8 bit 2.876   →   6 bit 2.224   →   4 bit 1.398</a:t>
-            </a:r>
-          </a:p>
-          <a:p>
-            <a:pPr lvl="1"/>
-            <a:r>
-              <a:rPr sz="1000" b="0"/>
-              <a:t>BOPs:    1.000        →   0.062        →   0.035        →   0.016</a:t>
-            </a:r>
-          </a:p>
-          <a:p>
-            <a:pPr/>
-            <a:r>
-              <a:rPr sz="1200" b="1">
-                <a:solidFill>
-                  <a:srgbClr val="0065BD"/>
-                </a:solidFill>
-              </a:rPr>
-              <a:t>8 bit composes cleanly at 16× fewer BOPs · ≤6 bit erodes the ladder</a:t>
-            </a:r>
-          </a:p>
-          <a:p>
-            <a:pPr lvl="1"/>
-            <a:r>
-              <a:rPr sz="1000" b="0"/>
+              <a:rPr sz="1100" b="1">
+                <a:solidFill>
+                  <a:srgbClr val="0065BD"/>
+                </a:solidFill>
+              </a:rPr>
+              <a:t>Weight-only · per-channel · no calibration · decoder only</a:t>
+            </a:r>
+          </a:p>
+          <a:p>
+            <a:pPr/>
+            <a:r>
+              <a:rPr sz="1100" b="1">
+                <a:solidFill>
+                  <a:srgbClr val="0065BD"/>
+                </a:solidFill>
+              </a:rPr>
+              <a:t>Registered prediction — shallow exits suffer more — FALSIFIED</a:t>
+            </a:r>
+          </a:p>
+          <a:p>
+            <a:pPr lvl="1"/>
+            <a:r>
+              <a:rPr sz="900" b="0"/>
+              <a:t>qp 63, 8 bit: exit 2 +0.108 dB, deepest +0.111 dB, ratio 0.97</a:t>
+            </a:r>
+          </a:p>
+          <a:p>
+            <a:pPr lvl="1"/>
+            <a:r>
+              <a:rPr sz="900" b="0"/>
+              <a:t>the deepest starts at 0.073 dB and has no headroom for a noise floor</a:t>
+            </a:r>
+          </a:p>
+          <a:p>
+            <a:pPr/>
+            <a:r>
+              <a:rPr sz="1100" b="1">
+                <a:solidFill>
+                  <a:srgbClr val="0065BD"/>
+                </a:solidFill>
+              </a:rPr>
+              <a:t>What matters is the SPREAD — the only thing a router can act on</a:t>
+            </a:r>
+          </a:p>
+          <a:p>
+            <a:pPr lvl="1"/>
+            <a:r>
+              <a:rPr sz="900" b="0"/>
+              <a:t>qp 63   fp32 2.864 → 8 b 2.876 → 6 b 2.224 → 4 b 1.398   ·   BOPs 1.000 → 0.062 → 0.035 → 0.016</a:t>
+            </a:r>
+          </a:p>
+          <a:p>
+            <a:pPr lvl="1"/>
+            <a:r>
+              <a:rPr sz="900" b="0"/>
+              <a:t>qp 0    0.704 → 0.712 → 0.791 → 0.837   — flat to rising, no collapse</a:t>
+            </a:r>
+          </a:p>
+          <a:p>
+            <a:pPr/>
+            <a:r>
+              <a:rPr sz="1100" b="1">
+                <a:solidFill>
+                  <a:srgbClr val="0065BD"/>
+                </a:solidFill>
+              </a:rPr>
+              <a:t>8 bit composes cleanly at 16× fewer BOPs · the collapse is a HIGH-RATE effect, not a general one</a:t>
+            </a:r>
+          </a:p>
+          <a:p>
+            <a:pPr lvl="1"/>
+            <a:r>
+              <a:rPr sz="900" b="0"/>
               <a:t>caveat: 8 bit still raises the floor 0.073 → 0.184 dB at qp 63</a:t>
             </a:r>
           </a:p>
         </p:txBody>
       </p:sp>
+      <p:pic>
+        <p:nvPicPr>
+          <p:cNvPr id="4" name="Picture 3" descr="quant.png"/>
+          <p:cNvPicPr>
+            <a:picLocks noChangeAspect="1"/>
+          </p:cNvPicPr>
+          <p:nvPr/>
+        </p:nvPicPr>
+        <p:blipFill>
+          <a:blip r:embed="rId2"/>
+          <a:stretch>
+            <a:fillRect/>
+          </a:stretch>
+        </p:blipFill>
+        <p:spPr>
+          <a:xfrm>
+            <a:off x="678991" y="3913631"/>
+            <a:ext cx="7786018" cy="2532888"/>
+          </a:xfrm>
+          <a:prstGeom prst="rect">
+            <a:avLst/>
+          </a:prstGeom>
+        </p:spPr>
+      </p:pic>
     </p:spTree>
   </p:cSld>
   <p:clrMapOvr>

--- a/paper/FLEX-UF_LMT.pptx
+++ b/paper/FLEX-UF_LMT.pptx
@@ -34,6 +34,9 @@
     <p:sldId id="276" r:id="rId28"/>
     <p:sldId id="277" r:id="rId29"/>
     <p:sldId id="278" r:id="rId30"/>
+    <p:sldId id="279" r:id="rId31"/>
+    <p:sldId id="280" r:id="rId32"/>
+    <p:sldId id="281" r:id="rId33"/>
   </p:sldIdLst>
   <p:sldSz cx="9144000" cy="6858000" type="screen4x3"/>
   <p:notesSz cx="6858000" cy="9144000"/>
@@ -4216,7 +4219,7 @@
           <a:lstStyle/>
           <a:p>
             <a:r>
-              <a:t>Who decides</a:t>
+              <a:t>The allocation problem</a:t>
             </a:r>
           </a:p>
         </p:txBody>
@@ -4233,72 +4236,53 @@
         </p:nvSpPr>
         <p:spPr>
           <a:xfrm>
-            <a:off x="508000" y="1417320"/>
-            <a:ext cx="8128000" cy="1722120"/>
+            <a:off x="508000" y="6675120"/>
+            <a:ext cx="8128000" cy="91440"/>
           </a:xfrm>
         </p:spPr>
         <p:txBody>
           <a:bodyPr/>
           <a:lstStyle/>
-          <a:p>
-            <a:pPr/>
-            <a:r>
-              <a:rPr sz="1200" b="1">
-                <a:solidFill>
-                  <a:srgbClr val="0065BD"/>
-                </a:solidFill>
-              </a:rPr>
-              <a:t>A   argmin_k ( MSE[t,k] + λ·C_k )   ~94 bit/frame = 0.008–0.020% of rate</a:t>
-            </a:r>
-          </a:p>
-          <a:p>
-            <a:pPr/>
-            <a:r>
-              <a:rPr sz="1200" b="1">
-                <a:solidFill>
-                  <a:srgbClr val="0065BD"/>
-                </a:solidFill>
-              </a:rPr>
-              <a:t>B   argmax_k ( log softmax(z)_k − β·C_k )   nothing sent, file byte-identical</a:t>
-            </a:r>
-          </a:p>
-          <a:p>
-            <a:pPr lvl="1"/>
-            <a:r>
-              <a:rPr sz="1000" b="0"/>
-              <a:t>qp0: A 34.0% signalled vs B 30.1% predicted — gap 3.96 pts</a:t>
-            </a:r>
-          </a:p>
-          <a:p>
-            <a:pPr lvl="1"/>
-            <a:r>
-              <a:rPr sz="1000" b="0"/>
-              <a:t>qp32: A 26.8% signalled vs B 23.9% predicted — gap 2.82 pts</a:t>
-            </a:r>
-          </a:p>
-          <a:p>
-            <a:pPr lvl="1"/>
-            <a:r>
-              <a:rPr sz="1000" b="0"/>
-              <a:t>qp63: A 20.8% signalled vs B 19.3% predicted — gap 1.50 pts</a:t>
-            </a:r>
-          </a:p>
-          <a:p>
-            <a:pPr/>
-            <a:r>
-              <a:rPr sz="1200" b="1">
-                <a:solidFill>
-                  <a:srgbClr val="0065BD"/>
-                </a:solidFill>
-              </a:rPr>
-              <a:t>Asymmetric ·  A: +1.21 decodes at the ENCODER  ·  B: +0.163% at the decoder</a:t>
+          <a:p/>
+        </p:txBody>
+      </p:sp>
+      <p:sp>
+        <p:nvSpPr>
+          <p:cNvPr id="4" name="TextBox 3"/>
+          <p:cNvSpPr txBox="1"/>
+          <p:nvPr/>
+        </p:nvSpPr>
+        <p:spPr>
+          <a:xfrm>
+            <a:off x="502920" y="1325880"/>
+            <a:ext cx="8229600" cy="310896"/>
+          </a:xfrm>
+          <a:prstGeom prst="rect">
+            <a:avLst/>
+          </a:prstGeom>
+          <a:noFill/>
+        </p:spPr>
+        <p:txBody>
+          <a:bodyPr wrap="square" tIns="0" bIns="0">
+            <a:spAutoFit/>
+          </a:bodyPr>
+          <a:lstStyle/>
+          <a:p>
+            <a:pPr algn="l"/>
+            <a:r>
+              <a:rPr sz="1300" b="1">
+                <a:solidFill>
+                  <a:srgbClr val="0065BD"/>
+                </a:solidFill>
+              </a:rPr>
+              <a:t>N tiles, K exits.  D[t,k] = distortion of tile t at exit k.  C_k = its cost.</a:t>
             </a:r>
           </a:p>
         </p:txBody>
       </p:sp>
       <p:pic>
         <p:nvPicPr>
-          <p:cNvPr id="4" name="Picture 3" descr="ab_decision.png"/>
+          <p:cNvPr id="5" name="Picture 4" descr="a681058a94774b4e.png"/>
           <p:cNvPicPr>
             <a:picLocks noChangeAspect="1"/>
           </p:cNvPicPr>
@@ -4312,14 +4296,174 @@
         </p:blipFill>
         <p:spPr>
           <a:xfrm>
-            <a:off x="411480" y="3304032"/>
-            <a:ext cx="8321040" cy="2722693"/>
+            <a:off x="1856286" y="1631188"/>
+            <a:ext cx="5431427" cy="777240"/>
           </a:xfrm>
           <a:prstGeom prst="rect">
             <a:avLst/>
           </a:prstGeom>
         </p:spPr>
       </p:pic>
+      <p:sp>
+        <p:nvSpPr>
+          <p:cNvPr id="6" name="TextBox 5"/>
+          <p:cNvSpPr txBox="1"/>
+          <p:nvPr/>
+        </p:nvSpPr>
+        <p:spPr>
+          <a:xfrm>
+            <a:off x="502920" y="2554732"/>
+            <a:ext cx="8229600" cy="310896"/>
+          </a:xfrm>
+          <a:prstGeom prst="rect">
+            <a:avLst/>
+          </a:prstGeom>
+          <a:noFill/>
+        </p:spPr>
+        <p:txBody>
+          <a:bodyPr wrap="square" tIns="0" bIns="0">
+            <a:spAutoFit/>
+          </a:bodyPr>
+          <a:lstStyle/>
+          <a:p>
+            <a:pPr algn="l"/>
+            <a:r>
+              <a:rPr sz="1300" b="1">
+                <a:solidFill>
+                  <a:srgbClr val="0065BD"/>
+                </a:solidFill>
+              </a:rPr>
+              <a:t>Lagrangian relaxation decouples it — every tile solves independently:</a:t>
+            </a:r>
+          </a:p>
+        </p:txBody>
+      </p:sp>
+      <p:pic>
+        <p:nvPicPr>
+          <p:cNvPr id="7" name="Picture 6" descr="058d0eb0d40f31eb.png"/>
+          <p:cNvPicPr>
+            <a:picLocks noChangeAspect="1"/>
+          </p:cNvPicPr>
+          <p:nvPr/>
+        </p:nvPicPr>
+        <p:blipFill>
+          <a:blip r:embed="rId3"/>
+          <a:stretch>
+            <a:fillRect/>
+          </a:stretch>
+        </p:blipFill>
+        <p:spPr>
+          <a:xfrm>
+            <a:off x="822960" y="2860039"/>
+            <a:ext cx="7498079" cy="747890"/>
+          </a:xfrm>
+          <a:prstGeom prst="rect">
+            <a:avLst/>
+          </a:prstGeom>
+        </p:spPr>
+      </p:pic>
+      <p:sp>
+        <p:nvSpPr>
+          <p:cNvPr id="8" name="TextBox 7"/>
+          <p:cNvSpPr txBox="1"/>
+          <p:nvPr/>
+        </p:nvSpPr>
+        <p:spPr>
+          <a:xfrm>
+            <a:off x="822960" y="3754233"/>
+            <a:ext cx="7909560" cy="310896"/>
+          </a:xfrm>
+          <a:prstGeom prst="rect">
+            <a:avLst/>
+          </a:prstGeom>
+          <a:noFill/>
+        </p:spPr>
+        <p:txBody>
+          <a:bodyPr wrap="square" tIns="0" bIns="0">
+            <a:spAutoFit/>
+          </a:bodyPr>
+          <a:lstStyle/>
+          <a:p>
+            <a:pPr algn="l"/>
+            <a:r>
+              <a:rPr sz="1100" b="0">
+                <a:solidFill>
+                  <a:srgbClr val="52514E"/>
+                </a:solidFill>
+              </a:rPr>
+              <a:t>sweeping λ traces the lower convex hull of the achievable (cost, distortion) set</a:t>
+            </a:r>
+          </a:p>
+        </p:txBody>
+      </p:sp>
+      <p:sp>
+        <p:nvSpPr>
+          <p:cNvPr id="9" name="TextBox 8"/>
+          <p:cNvSpPr txBox="1"/>
+          <p:nvPr/>
+        </p:nvSpPr>
+        <p:spPr>
+          <a:xfrm>
+            <a:off x="822960" y="4059541"/>
+            <a:ext cx="7909560" cy="310896"/>
+          </a:xfrm>
+          <a:prstGeom prst="rect">
+            <a:avLst/>
+          </a:prstGeom>
+          <a:noFill/>
+        </p:spPr>
+        <p:txBody>
+          <a:bodyPr wrap="square" tIns="0" bIns="0">
+            <a:spAutoFit/>
+          </a:bodyPr>
+          <a:lstStyle/>
+          <a:p>
+            <a:pPr algn="l"/>
+            <a:r>
+              <a:rPr sz="1100" b="0">
+                <a:solidFill>
+                  <a:srgbClr val="52514E"/>
+                </a:solidFill>
+              </a:rPr>
+              <a:t>λ is found by BISECTION on the realised dB, so a 0.1 dB budget is exactly 0.1</a:t>
+            </a:r>
+          </a:p>
+        </p:txBody>
+      </p:sp>
+      <p:sp>
+        <p:nvSpPr>
+          <p:cNvPr id="10" name="TextBox 9"/>
+          <p:cNvSpPr txBox="1"/>
+          <p:nvPr/>
+        </p:nvSpPr>
+        <p:spPr>
+          <a:xfrm>
+            <a:off x="502920" y="4364849"/>
+            <a:ext cx="8229600" cy="310896"/>
+          </a:xfrm>
+          <a:prstGeom prst="rect">
+            <a:avLst/>
+          </a:prstGeom>
+          <a:noFill/>
+        </p:spPr>
+        <p:txBody>
+          <a:bodyPr wrap="square" tIns="0" bIns="0">
+            <a:spAutoFit/>
+          </a:bodyPr>
+          <a:lstStyle/>
+          <a:p>
+            <a:pPr algn="l"/>
+            <a:r>
+              <a:rPr sz="1300" b="1">
+                <a:solidFill>
+                  <a:srgbClr val="0065BD"/>
+                </a:solidFill>
+              </a:rPr>
+              <a:t>Both configurations solve this. They differ only in where D[t,k] comes from.</a:t>
+            </a:r>
+          </a:p>
+        </p:txBody>
+      </p:sp>
     </p:spTree>
   </p:cSld>
   <p:clrMapOvr>
@@ -4354,7 +4498,7 @@
           <a:lstStyle/>
           <a:p>
             <a:r>
-              <a:t>A claim overturned</a:t>
+              <a:t>Two ways to obtain the decision</a:t>
             </a:r>
           </a:p>
         </p:txBody>
@@ -4371,72 +4515,53 @@
         </p:nvSpPr>
         <p:spPr>
           <a:xfrm>
-            <a:off x="508000" y="1417320"/>
-            <a:ext cx="8128000" cy="1722120"/>
+            <a:off x="508000" y="6675120"/>
+            <a:ext cx="8128000" cy="91440"/>
           </a:xfrm>
         </p:spPr>
         <p:txBody>
           <a:bodyPr/>
           <a:lstStyle/>
-          <a:p>
-            <a:pPr/>
+          <a:p/>
+        </p:txBody>
+      </p:sp>
+      <p:sp>
+        <p:nvSpPr>
+          <p:cNvPr id="4" name="TextBox 3"/>
+          <p:cNvSpPr txBox="1"/>
+          <p:nvPr/>
+        </p:nvSpPr>
+        <p:spPr>
+          <a:xfrm>
+            <a:off x="502920" y="1325880"/>
+            <a:ext cx="8229600" cy="310896"/>
+          </a:xfrm>
+          <a:prstGeom prst="rect">
+            <a:avLst/>
+          </a:prstGeom>
+          <a:noFill/>
+        </p:spPr>
+        <p:txBody>
+          <a:bodyPr wrap="square" tIns="0" bIns="0">
+            <a:spAutoFit/>
+          </a:bodyPr>
+          <a:lstStyle/>
+          <a:p>
+            <a:pPr algn="l"/>
             <a:r>
               <a:rPr sz="1200" b="1">
                 <a:solidFill>
                   <a:srgbClr val="0065BD"/>
                 </a:solidFill>
               </a:rPr>
-              <a:t>Earlier claim: prediction fails, signalling works</a:t>
-            </a:r>
-          </a:p>
-          <a:p>
-            <a:pPr lvl="1"/>
-            <a:r>
-              <a:rPr sz="1000" b="0"/>
-              <a:t>router trained JOINTLY with a moving decoder → collapsed, agreement 0.000 at qp 63</a:t>
-            </a:r>
-          </a:p>
-          <a:p>
-            <a:pPr/>
-            <a:r>
-              <a:rPr sz="1200" b="1">
-                <a:solidFill>
-                  <a:srgbClr val="0065BD"/>
-                </a:solidFill>
-              </a:rPr>
-              <a:t>Retrained against the FROZEN decoder: 0.848 agreement, budget met at every rate</a:t>
-            </a:r>
-          </a:p>
-          <a:p>
-            <a:pPr lvl="1"/>
-            <a:r>
-              <a:rPr sz="1000" b="0"/>
-              <a:t>⇒ the limit was the training target, not the information</a:t>
-            </a:r>
-          </a:p>
-          <a:p>
-            <a:pPr/>
-            <a:r>
-              <a:rPr sz="1200" b="1">
-                <a:solidFill>
-                  <a:srgbClr val="0065BD"/>
-                </a:solidFill>
-              </a:rPr>
-              <a:t>Cost of not signalling ·  0.1 dB 1.35–3.96 pts  ·  0.3 dB 0.16–0.95  ·  0.5 dB 0.16–1.23</a:t>
-            </a:r>
-          </a:p>
-          <a:p>
-            <a:pPr lvl="1"/>
-            <a:r>
-              <a:rPr sz="1000" b="0"/>
-              <a:t>at the ceiling the gap is 0.16 = the router's own 0.163%</a:t>
+              <a:t>A · the encoder holds the source, so D[t,k] is measured, and k* is exact</a:t>
             </a:r>
           </a:p>
         </p:txBody>
       </p:sp>
       <p:pic>
         <p:nvPicPr>
-          <p:cNvPr id="4" name="Picture 3" descr="ab_budgets.png"/>
+          <p:cNvPr id="5" name="Picture 4" descr="5f13122024ab8e36.png"/>
           <p:cNvPicPr>
             <a:picLocks noChangeAspect="1"/>
           </p:cNvPicPr>
@@ -4450,14 +4575,232 @@
         </p:blipFill>
         <p:spPr>
           <a:xfrm>
-            <a:off x="411480" y="3304032"/>
-            <a:ext cx="8321039" cy="2827166"/>
+            <a:off x="822960" y="1618488"/>
+            <a:ext cx="7498079" cy="472101"/>
           </a:xfrm>
           <a:prstGeom prst="rect">
             <a:avLst/>
           </a:prstGeom>
         </p:spPr>
       </p:pic>
+      <p:sp>
+        <p:nvSpPr>
+          <p:cNvPr id="6" name="TextBox 5"/>
+          <p:cNvSpPr txBox="1"/>
+          <p:nvPr/>
+        </p:nvSpPr>
+        <p:spPr>
+          <a:xfrm>
+            <a:off x="822960" y="2236893"/>
+            <a:ext cx="7909560" cy="310896"/>
+          </a:xfrm>
+          <a:prstGeom prst="rect">
+            <a:avLst/>
+          </a:prstGeom>
+          <a:noFill/>
+        </p:spPr>
+        <p:txBody>
+          <a:bodyPr wrap="square" tIns="0" bIns="0">
+            <a:spAutoFit/>
+          </a:bodyPr>
+          <a:lstStyle/>
+          <a:p>
+            <a:pPr algn="l"/>
+            <a:r>
+              <a:rPr sz="1000" b="0">
+                <a:solidFill>
+                  <a:srgbClr val="52514E"/>
+                </a:solidFill>
+              </a:rPr>
+              <a:t>the answer is then transmitted: H(k) · N + 8K bits ≈ 94 bit/frame</a:t>
+            </a:r>
+          </a:p>
+        </p:txBody>
+      </p:sp>
+      <p:sp>
+        <p:nvSpPr>
+          <p:cNvPr id="7" name="TextBox 6"/>
+          <p:cNvSpPr txBox="1"/>
+          <p:nvPr/>
+        </p:nvSpPr>
+        <p:spPr>
+          <a:xfrm>
+            <a:off x="502920" y="2529500"/>
+            <a:ext cx="8229600" cy="310896"/>
+          </a:xfrm>
+          <a:prstGeom prst="rect">
+            <a:avLst/>
+          </a:prstGeom>
+          <a:noFill/>
+        </p:spPr>
+        <p:txBody>
+          <a:bodyPr wrap="square" tIns="0" bIns="0">
+            <a:spAutoFit/>
+          </a:bodyPr>
+          <a:lstStyle/>
+          <a:p>
+            <a:pPr algn="l"/>
+            <a:r>
+              <a:rPr sz="1200" b="1">
+                <a:solidFill>
+                  <a:srgbClr val="0065BD"/>
+                </a:solidFill>
+              </a:rPr>
+              <a:t>B · the decoder never sees x, so D[t,k] does not exist. It predicts instead.</a:t>
+            </a:r>
+          </a:p>
+        </p:txBody>
+      </p:sp>
+      <p:pic>
+        <p:nvPicPr>
+          <p:cNvPr id="8" name="Picture 7" descr="e59dab379cad2eb5.png"/>
+          <p:cNvPicPr>
+            <a:picLocks noChangeAspect="1"/>
+          </p:cNvPicPr>
+          <p:nvPr/>
+        </p:nvPicPr>
+        <p:blipFill>
+          <a:blip r:embed="rId3"/>
+          <a:stretch>
+            <a:fillRect/>
+          </a:stretch>
+        </p:blipFill>
+        <p:spPr>
+          <a:xfrm>
+            <a:off x="1352411" y="2822108"/>
+            <a:ext cx="6439178" cy="777240"/>
+          </a:xfrm>
+          <a:prstGeom prst="rect">
+            <a:avLst/>
+          </a:prstGeom>
+        </p:spPr>
+      </p:pic>
+      <p:sp>
+        <p:nvSpPr>
+          <p:cNvPr id="9" name="TextBox 8"/>
+          <p:cNvSpPr txBox="1"/>
+          <p:nvPr/>
+        </p:nvSpPr>
+        <p:spPr>
+          <a:xfrm>
+            <a:off x="822960" y="3745652"/>
+            <a:ext cx="7909560" cy="310896"/>
+          </a:xfrm>
+          <a:prstGeom prst="rect">
+            <a:avLst/>
+          </a:prstGeom>
+          <a:noFill/>
+        </p:spPr>
+        <p:txBody>
+          <a:bodyPr wrap="square" tIns="0" bIns="0">
+            <a:spAutoFit/>
+          </a:bodyPr>
+          <a:lstStyle/>
+          <a:p>
+            <a:pPr algn="l"/>
+            <a:r>
+              <a:rPr sz="1000" b="0">
+                <a:solidFill>
+                  <a:srgbClr val="52514E"/>
+                </a:solidFill>
+              </a:rPr>
+              <a:t>μ, σ : mean and std over tile t of a learned 384→48 view of the stem</a:t>
+            </a:r>
+          </a:p>
+        </p:txBody>
+      </p:sp>
+      <p:sp>
+        <p:nvSpPr>
+          <p:cNvPr id="10" name="TextBox 9"/>
+          <p:cNvSpPr txBox="1"/>
+          <p:nvPr/>
+        </p:nvSpPr>
+        <p:spPr>
+          <a:xfrm>
+            <a:off x="822960" y="4038260"/>
+            <a:ext cx="7909560" cy="310896"/>
+          </a:xfrm>
+          <a:prstGeom prst="rect">
+            <a:avLst/>
+          </a:prstGeom>
+          <a:noFill/>
+        </p:spPr>
+        <p:txBody>
+          <a:bodyPr wrap="square" tIns="0" bIns="0">
+            <a:spAutoFit/>
+          </a:bodyPr>
+          <a:lstStyle/>
+          <a:p>
+            <a:pPr algn="l"/>
+            <a:r>
+              <a:rPr sz="1000" b="0">
+                <a:solidFill>
+                  <a:srgbClr val="52514E"/>
+                </a:solidFill>
+              </a:rPr>
+              <a:t>ρ : a 512→32 view of the latent ŷ concatenated with the entropy scales σ̂</a:t>
+            </a:r>
+          </a:p>
+        </p:txBody>
+      </p:sp>
+      <p:pic>
+        <p:nvPicPr>
+          <p:cNvPr id="11" name="Picture 10" descr="befbde4da0c263c6.png"/>
+          <p:cNvPicPr>
+            <a:picLocks noChangeAspect="1"/>
+          </p:cNvPicPr>
+          <p:nvPr/>
+        </p:nvPicPr>
+        <p:blipFill>
+          <a:blip r:embed="rId4"/>
+          <a:stretch>
+            <a:fillRect/>
+          </a:stretch>
+        </p:blipFill>
+        <p:spPr>
+          <a:xfrm>
+            <a:off x="822960" y="4330869"/>
+            <a:ext cx="7498079" cy="745514"/>
+          </a:xfrm>
+          <a:prstGeom prst="rect">
+            <a:avLst/>
+          </a:prstGeom>
+        </p:spPr>
+      </p:pic>
+      <p:sp>
+        <p:nvSpPr>
+          <p:cNvPr id="12" name="TextBox 11"/>
+          <p:cNvSpPr txBox="1"/>
+          <p:nvPr/>
+        </p:nvSpPr>
+        <p:spPr>
+          <a:xfrm>
+            <a:off x="502920" y="5222687"/>
+            <a:ext cx="8229600" cy="310896"/>
+          </a:xfrm>
+          <a:prstGeom prst="rect">
+            <a:avLst/>
+          </a:prstGeom>
+          <a:noFill/>
+        </p:spPr>
+        <p:txBody>
+          <a:bodyPr wrap="square" tIns="0" bIns="0">
+            <a:spAutoFit/>
+          </a:bodyPr>
+          <a:lstStyle/>
+          <a:p>
+            <a:pPr algn="l"/>
+            <a:r>
+              <a:rPr sz="1200" b="1">
+                <a:solidFill>
+                  <a:srgbClr val="0065BD"/>
+                </a:solidFill>
+              </a:rPr>
+              <a:t>β plays λ's role, but trades log-likelihood against cost, not distortion against cost</a:t>
+            </a:r>
+          </a:p>
+        </p:txBody>
+      </p:sp>
     </p:spTree>
   </p:cSld>
   <p:clrMapOvr>
@@ -4492,7 +4835,7 @@
           <a:lstStyle/>
           <a:p>
             <a:r>
-              <a:t>The price of speed</a:t>
+              <a:t>Training the router, and why it collapsed</a:t>
             </a:r>
           </a:p>
         </p:txBody>
@@ -4509,83 +4852,53 @@
         </p:nvSpPr>
         <p:spPr>
           <a:xfrm>
-            <a:off x="508000" y="1417320"/>
-            <a:ext cx="8128000" cy="1963420"/>
+            <a:off x="508000" y="6675120"/>
+            <a:ext cx="8128000" cy="91440"/>
           </a:xfrm>
         </p:spPr>
         <p:txBody>
           <a:bodyPr/>
           <a:lstStyle/>
-          <a:p>
-            <a:pPr/>
+          <a:p/>
+        </p:txBody>
+      </p:sp>
+      <p:sp>
+        <p:nvSpPr>
+          <p:cNvPr id="4" name="TextBox 3"/>
+          <p:cNvSpPr txBox="1"/>
+          <p:nvPr/>
+        </p:nvSpPr>
+        <p:spPr>
+          <a:xfrm>
+            <a:off x="502920" y="1325880"/>
+            <a:ext cx="8229600" cy="310896"/>
+          </a:xfrm>
+          <a:prstGeom prst="rect">
+            <a:avLst/>
+          </a:prstGeom>
+          <a:noFill/>
+        </p:spPr>
+        <p:txBody>
+          <a:bodyPr wrap="square" tIns="0" bIns="0">
+            <a:spAutoFit/>
+          </a:bodyPr>
+          <a:lstStyle/>
+          <a:p>
+            <a:pPr algn="l"/>
             <a:r>
               <a:rPr sz="1200" b="1">
                 <a:solidFill>
                   <a:srgbClr val="0065BD"/>
                 </a:solidFill>
               </a:rPr>
-              <a:t>BD-Rate = cost · MACs saved = benefit · released intra decoder, YUV420</a:t>
-            </a:r>
-          </a:p>
-          <a:p>
-            <a:pPr lvl="1"/>
-            <a:r>
-              <a:rPr sz="1000" b="0"/>
-              <a:t>0.1 dB  0.88% / 27.6%    0.3 dB  2.51% / 39.5%    0.5 dB  3.36% / 41.7%</a:t>
-            </a:r>
-          </a:p>
-          <a:p>
-            <a:pPr/>
-            <a:r>
-              <a:rPr sz="1200" b="1">
-                <a:solidFill>
-                  <a:srgbClr val="0065BD"/>
-                </a:solidFill>
-              </a:rPr>
-              <a:t>Per unit of REAL speedup:  6.2 · 6.6 · 6.5  BD-Rate points</a:t>
-            </a:r>
-          </a:p>
-          <a:p>
-            <a:pPr lvl="1"/>
-            <a:r>
-              <a:rPr sz="1000" b="0"/>
-              <a:t>flat across the range — an exchange rate, not a chosen operating point</a:t>
-            </a:r>
-          </a:p>
-          <a:p>
-            <a:pPr/>
-            <a:r>
-              <a:rPr sz="1200" b="1">
-                <a:solidFill>
-                  <a:srgbClr val="0065BD"/>
-                </a:solidFill>
-              </a:rPr>
-              <a:t>DCVC-UF HT-L → HT-S:  10.6 points for 1.66×  =  16.1 points per unit</a:t>
-            </a:r>
-          </a:p>
-          <a:p>
-            <a:pPr/>
-            <a:r>
-              <a:rPr sz="1200" b="1">
-                <a:solidFill>
-                  <a:srgbClr val="0065BD"/>
-                </a:solidFill>
-              </a:rPr>
-              <a:t>⇒ adaptive depth buys speed 2.4× cheaper than shrinking the model</a:t>
-            </a:r>
-          </a:p>
-          <a:p>
-            <a:pPr lvl="1"/>
-            <a:r>
-              <a:rPr sz="1000" b="0"/>
-              <a:t>their pair is whole-video, ours intra-only → a calibration, not a head-to-head</a:t>
+              <a:t>Target is the oracle's choice, weighted by what the decision is worth:</a:t>
             </a:r>
           </a:p>
         </p:txBody>
       </p:sp>
       <p:pic>
         <p:nvPicPr>
-          <p:cNvPr id="4" name="Picture 3" descr="paper_rdc.png"/>
+          <p:cNvPr id="5" name="Picture 4" descr="3667f2f4c27ae87a.png"/>
           <p:cNvPicPr>
             <a:picLocks noChangeAspect="1"/>
           </p:cNvPicPr>
@@ -4599,14 +4912,208 @@
         </p:blipFill>
         <p:spPr>
           <a:xfrm>
-            <a:off x="411480" y="3545332"/>
-            <a:ext cx="8321040" cy="2722552"/>
+            <a:off x="822960" y="1618488"/>
+            <a:ext cx="7498079" cy="365409"/>
           </a:xfrm>
           <a:prstGeom prst="rect">
             <a:avLst/>
           </a:prstGeom>
         </p:spPr>
       </p:pic>
+      <p:sp>
+        <p:nvSpPr>
+          <p:cNvPr id="6" name="TextBox 5"/>
+          <p:cNvSpPr txBox="1"/>
+          <p:nvPr/>
+        </p:nvSpPr>
+        <p:spPr>
+          <a:xfrm>
+            <a:off x="822960" y="2130201"/>
+            <a:ext cx="7909560" cy="310896"/>
+          </a:xfrm>
+          <a:prstGeom prst="rect">
+            <a:avLst/>
+          </a:prstGeom>
+          <a:noFill/>
+        </p:spPr>
+        <p:txBody>
+          <a:bodyPr wrap="square" tIns="0" bIns="0">
+            <a:spAutoFit/>
+          </a:bodyPr>
+          <a:lstStyle/>
+          <a:p>
+            <a:pPr algn="l"/>
+            <a:r>
+              <a:rPr sz="1000" b="0">
+                <a:solidFill>
+                  <a:srgbClr val="52514E"/>
+                </a:solidFill>
+              </a:rPr>
+              <a:t>agreement on ties is worth nothing; the regret term says so</a:t>
+            </a:r>
+          </a:p>
+        </p:txBody>
+      </p:sp>
+      <p:sp>
+        <p:nvSpPr>
+          <p:cNvPr id="7" name="TextBox 6"/>
+          <p:cNvSpPr txBox="1"/>
+          <p:nvPr/>
+        </p:nvSpPr>
+        <p:spPr>
+          <a:xfrm>
+            <a:off x="502920" y="2422809"/>
+            <a:ext cx="8229600" cy="310896"/>
+          </a:xfrm>
+          <a:prstGeom prst="rect">
+            <a:avLst/>
+          </a:prstGeom>
+          <a:noFill/>
+        </p:spPr>
+        <p:txBody>
+          <a:bodyPr wrap="square" tIns="0" bIns="0">
+            <a:spAutoFit/>
+          </a:bodyPr>
+          <a:lstStyle/>
+          <a:p>
+            <a:pPr algn="l"/>
+            <a:r>
+              <a:rPr sz="1200" b="1">
+                <a:solidFill>
+                  <a:srgbClr val="0065BD"/>
+                </a:solidFill>
+              </a:rPr>
+              <a:t>Collapse control without an auxiliary loss (arXiv:2408.15664):</a:t>
+            </a:r>
+          </a:p>
+        </p:txBody>
+      </p:sp>
+      <p:pic>
+        <p:nvPicPr>
+          <p:cNvPr id="8" name="Picture 7" descr="99e1ff4cc3a082d4.png"/>
+          <p:cNvPicPr>
+            <a:picLocks noChangeAspect="1"/>
+          </p:cNvPicPr>
+          <p:nvPr/>
+        </p:nvPicPr>
+        <p:blipFill>
+          <a:blip r:embed="rId3"/>
+          <a:stretch>
+            <a:fillRect/>
+          </a:stretch>
+        </p:blipFill>
+        <p:spPr>
+          <a:xfrm>
+            <a:off x="822960" y="2715416"/>
+            <a:ext cx="7498079" cy="588286"/>
+          </a:xfrm>
+          <a:prstGeom prst="rect">
+            <a:avLst/>
+          </a:prstGeom>
+        </p:spPr>
+      </p:pic>
+      <p:sp>
+        <p:nvSpPr>
+          <p:cNvPr id="9" name="TextBox 8"/>
+          <p:cNvSpPr txBox="1"/>
+          <p:nvPr/>
+        </p:nvSpPr>
+        <p:spPr>
+          <a:xfrm>
+            <a:off x="822960" y="3450006"/>
+            <a:ext cx="7909560" cy="310896"/>
+          </a:xfrm>
+          <a:prstGeom prst="rect">
+            <a:avLst/>
+          </a:prstGeom>
+          <a:noFill/>
+        </p:spPr>
+        <p:txBody>
+          <a:bodyPr wrap="square" tIns="0" bIns="0">
+            <a:spAutoFit/>
+          </a:bodyPr>
+          <a:lstStyle/>
+          <a:p>
+            <a:pPr algn="l"/>
+            <a:r>
+              <a:rPr sz="1000" b="0">
+                <a:solidFill>
+                  <a:srgbClr val="52514E"/>
+                </a:solidFill>
+              </a:rPr>
+              <a:t>b is a buffer, nudged by usage — no interference gradient enters ℒ</a:t>
+            </a:r>
+          </a:p>
+        </p:txBody>
+      </p:sp>
+      <p:sp>
+        <p:nvSpPr>
+          <p:cNvPr id="10" name="TextBox 9"/>
+          <p:cNvSpPr txBox="1"/>
+          <p:nvPr/>
+        </p:nvSpPr>
+        <p:spPr>
+          <a:xfrm>
+            <a:off x="822960" y="3742614"/>
+            <a:ext cx="7909560" cy="310896"/>
+          </a:xfrm>
+          <a:prstGeom prst="rect">
+            <a:avLst/>
+          </a:prstGeom>
+          <a:noFill/>
+        </p:spPr>
+        <p:txBody>
+          <a:bodyPr wrap="square" tIns="0" bIns="0">
+            <a:spAutoFit/>
+          </a:bodyPr>
+          <a:lstStyle/>
+          <a:p>
+            <a:pPr algn="l"/>
+            <a:r>
+              <a:rPr sz="1000" b="0">
+                <a:solidFill>
+                  <a:srgbClr val="52514E"/>
+                </a:solidFill>
+              </a:rPr>
+              <a:t>balanced toward the ORACLE's mix π*, not uniform: exits are not interchangeable experts</a:t>
+            </a:r>
+          </a:p>
+        </p:txBody>
+      </p:sp>
+      <p:sp>
+        <p:nvSpPr>
+          <p:cNvPr id="11" name="TextBox 10"/>
+          <p:cNvSpPr txBox="1"/>
+          <p:nvPr/>
+        </p:nvSpPr>
+        <p:spPr>
+          <a:xfrm>
+            <a:off x="502920" y="4035223"/>
+            <a:ext cx="8229600" cy="310896"/>
+          </a:xfrm>
+          <a:prstGeom prst="rect">
+            <a:avLst/>
+          </a:prstGeom>
+          <a:noFill/>
+        </p:spPr>
+        <p:txBody>
+          <a:bodyPr wrap="square" tIns="0" bIns="0">
+            <a:spAutoFit/>
+          </a:bodyPr>
+          <a:lstStyle/>
+          <a:p>
+            <a:pPr algn="l"/>
+            <a:r>
+              <a:rPr sz="1200" b="1">
+                <a:solidFill>
+                  <a:srgbClr val="0065BD"/>
+                </a:solidFill>
+              </a:rPr>
+              <a:t>Trained JOINTLY with the decoder → collapsed to a constant, agreement 0.000 at qp63.  Against the FROZEN decoder → 0.848.</a:t>
+            </a:r>
+          </a:p>
+        </p:txBody>
+      </p:sp>
     </p:spTree>
   </p:cSld>
   <p:clrMapOvr>
@@ -4772,7 +5279,7 @@
           <a:lstStyle/>
           <a:p>
             <a:r>
-              <a:t>Related work</a:t>
+              <a:t>Who decides</a:t>
             </a:r>
           </a:p>
         </p:txBody>
@@ -4787,7 +5294,12 @@
             <p:ph idx="1"/>
           </p:nvPr>
         </p:nvSpPr>
-        <p:spPr/>
+        <p:spPr>
+          <a:xfrm>
+            <a:off x="508000" y="1417320"/>
+            <a:ext cx="8128000" cy="1722120"/>
+          </a:xfrm>
+        </p:spPr>
         <p:txBody>
           <a:bodyPr/>
           <a:lstStyle/>
@@ -4799,14 +5311,39 @@
                   <a:srgbClr val="0065BD"/>
                 </a:solidFill>
               </a:rPr>
-              <a:t>Early exit / dynamic depth · BranchyNet, MSDNet, SkipNet</a:t>
+              <a:t>A   argmin_k ( MSE[t,k] + λ·C_k )   ~94 bit/frame = 0.008–0.020% of rate</a:t>
+            </a:r>
+          </a:p>
+          <a:p>
+            <a:pPr/>
+            <a:r>
+              <a:rPr sz="1200" b="1">
+                <a:solidFill>
+                  <a:srgbClr val="0065BD"/>
+                </a:solidFill>
+              </a:rPr>
+              <a:t>B   argmax_k ( log softmax(z)_k − β·C_k )   nothing sent, file byte-identical</a:t>
             </a:r>
           </a:p>
           <a:p>
             <a:pPr lvl="1"/>
             <a:r>
               <a:rPr sz="1000" b="0"/>
-              <a:t>decide from the network's own output; ours decides per SPATIAL TILE for a fixed output</a:t>
+              <a:t>qp0: A 34.0% signalled vs B 30.1% predicted — gap 3.96 pts</a:t>
+            </a:r>
+          </a:p>
+          <a:p>
+            <a:pPr lvl="1"/>
+            <a:r>
+              <a:rPr sz="1000" b="0"/>
+              <a:t>qp32: A 26.8% signalled vs B 23.9% predicted — gap 2.82 pts</a:t>
+            </a:r>
+          </a:p>
+          <a:p>
+            <a:pPr lvl="1"/>
+            <a:r>
+              <a:rPr sz="1000" b="0"/>
+              <a:t>qp63: A 20.8% signalled vs B 19.3% predicted — gap 1.50 pts</a:t>
             </a:r>
           </a:p>
           <a:p>
@@ -4817,86 +5354,35 @@
                   <a:srgbClr val="0065BD"/>
                 </a:solidFill>
               </a:rPr>
-              <a:t>ClassSR</a:t>
-            </a:r>
-          </a:p>
-          <a:p>
-            <a:pPr lvl="1"/>
-            <a:r>
-              <a:rPr sz="1000" b="0"/>
-              <a:t>routes patches to differently sized SR branches for a cost target</a:t>
-            </a:r>
-          </a:p>
-          <a:p>
-            <a:pPr lvl="1"/>
-            <a:r>
-              <a:rPr sz="1000" b="0"/>
-              <a:t>ours: a DEPTH inside one network, for a quality target, bitstream fixed</a:t>
-            </a:r>
-          </a:p>
-          <a:p>
-            <a:pPr/>
-            <a:r>
-              <a:rPr sz="1200" b="1">
-                <a:solidFill>
-                  <a:srgbClr val="0065BD"/>
-                </a:solidFill>
-              </a:rPr>
-              <a:t>Xie et al. · RDC optimisation in neural image compression · 2305.07678</a:t>
-            </a:r>
-          </a:p>
-          <a:p>
-            <a:pPr lvl="1"/>
-            <a:r>
-              <a:rPr sz="1000" b="0"/>
-              <a:t>adaptive spatial mask decoded from side information — closest to our B</a:t>
-            </a:r>
-          </a:p>
-          <a:p>
-            <a:pPr lvl="1"/>
-            <a:r>
-              <a:rPr sz="1000" b="0"/>
-              <a:t>adapts the ENTROPY model's dependencies; we adapt SYNTHESIS depth</a:t>
-            </a:r>
-          </a:p>
-          <a:p>
-            <a:pPr/>
-            <a:r>
-              <a:rPr sz="1200" b="1">
-                <a:solidFill>
-                  <a:srgbClr val="0065BD"/>
-                </a:solidFill>
-              </a:rPr>
-              <a:t>Spatial competition · 2605.13243</a:t>
-            </a:r>
-          </a:p>
-          <a:p>
-            <a:pPr lvl="1"/>
-            <a:r>
-              <a:rPr sz="1000" b="0"/>
-              <a:t>per-region mode map at 1.8e-4 bpp (ours 4.5e-5) — selects CODECS for rate, not depth for compute</a:t>
-            </a:r>
-          </a:p>
-          <a:p>
-            <a:pPr/>
-            <a:r>
-              <a:rPr sz="1200" b="1">
-                <a:solidFill>
-                  <a:srgbClr val="0065BD"/>
-                </a:solidFill>
-              </a:rPr>
-              <a:t>Loss-free load balancing · 2408.15664 · used directly</a:t>
-            </a:r>
-          </a:p>
-          <a:p>
-            <a:pPr lvl="1"/>
-            <a:r>
-              <a:rPr sz="1000" b="0"/>
-              <a:t>balanced toward the ORACLE's exit mix, not uniform — exits are not interchangeable experts</a:t>
-            </a:r>
-          </a:p>
-        </p:txBody>
-      </p:sp>
+              <a:t>Asymmetric ·  A: +1.21 decodes at the ENCODER  ·  B: +0.163% at the decoder</a:t>
+            </a:r>
+          </a:p>
+        </p:txBody>
+      </p:sp>
+      <p:pic>
+        <p:nvPicPr>
+          <p:cNvPr id="4" name="Picture 3" descr="ab_decision.png"/>
+          <p:cNvPicPr>
+            <a:picLocks noChangeAspect="1"/>
+          </p:cNvPicPr>
+          <p:nvPr/>
+        </p:nvPicPr>
+        <p:blipFill>
+          <a:blip r:embed="rId2"/>
+          <a:stretch>
+            <a:fillRect/>
+          </a:stretch>
+        </p:blipFill>
+        <p:spPr>
+          <a:xfrm>
+            <a:off x="411480" y="3304032"/>
+            <a:ext cx="8321040" cy="2722693"/>
+          </a:xfrm>
+          <a:prstGeom prst="rect">
+            <a:avLst/>
+          </a:prstGeom>
+        </p:spPr>
+      </p:pic>
     </p:spTree>
   </p:cSld>
   <p:clrMapOvr>
@@ -4931,7 +5417,7 @@
           <a:lstStyle/>
           <a:p>
             <a:r>
-              <a:t>Quantisation · a second, orthogonal lever</a:t>
+              <a:t>A claim overturned</a:t>
             </a:r>
           </a:p>
         </p:txBody>
@@ -4949,7 +5435,7 @@
         <p:spPr>
           <a:xfrm>
             <a:off x="508000" y="1417320"/>
-            <a:ext cx="8128000" cy="2331720"/>
+            <a:ext cx="8128000" cy="1722120"/>
           </a:xfrm>
         </p:spPr>
         <p:txBody>
@@ -4958,87 +5444,62 @@
           <a:p>
             <a:pPr/>
             <a:r>
-              <a:rPr sz="1100" b="1">
-                <a:solidFill>
-                  <a:srgbClr val="0065BD"/>
-                </a:solidFill>
-              </a:rPr>
-              <a:t>Weight-only · per-channel · no calibration · decoder only</a:t>
+              <a:rPr sz="1200" b="1">
+                <a:solidFill>
+                  <a:srgbClr val="0065BD"/>
+                </a:solidFill>
+              </a:rPr>
+              <a:t>Earlier claim: prediction fails, signalling works</a:t>
+            </a:r>
+          </a:p>
+          <a:p>
+            <a:pPr lvl="1"/>
+            <a:r>
+              <a:rPr sz="1000" b="0"/>
+              <a:t>router trained JOINTLY with a moving decoder → collapsed, agreement 0.000 at qp 63</a:t>
             </a:r>
           </a:p>
           <a:p>
             <a:pPr/>
             <a:r>
-              <a:rPr sz="1100" b="1">
-                <a:solidFill>
-                  <a:srgbClr val="0065BD"/>
-                </a:solidFill>
-              </a:rPr>
-              <a:t>Registered prediction — shallow exits suffer more — FALSIFIED</a:t>
+              <a:rPr sz="1200" b="1">
+                <a:solidFill>
+                  <a:srgbClr val="0065BD"/>
+                </a:solidFill>
+              </a:rPr>
+              <a:t>Retrained against the FROZEN decoder: 0.848 agreement, budget met at every rate</a:t>
             </a:r>
           </a:p>
           <a:p>
             <a:pPr lvl="1"/>
             <a:r>
-              <a:rPr sz="900" b="0"/>
-              <a:t>qp 63, 8 bit: exit 2 +0.108 dB, deepest +0.111 dB, ratio 0.97</a:t>
+              <a:rPr sz="1000" b="0"/>
+              <a:t>⇒ the limit was the training target, not the information</a:t>
+            </a:r>
+          </a:p>
+          <a:p>
+            <a:pPr/>
+            <a:r>
+              <a:rPr sz="1200" b="1">
+                <a:solidFill>
+                  <a:srgbClr val="0065BD"/>
+                </a:solidFill>
+              </a:rPr>
+              <a:t>Cost of not signalling ·  0.1 dB 1.35–3.96 pts  ·  0.3 dB 0.16–0.95  ·  0.5 dB 0.16–1.23</a:t>
             </a:r>
           </a:p>
           <a:p>
             <a:pPr lvl="1"/>
             <a:r>
-              <a:rPr sz="900" b="0"/>
-              <a:t>the deepest starts at 0.073 dB and has no headroom for a noise floor</a:t>
-            </a:r>
-          </a:p>
-          <a:p>
-            <a:pPr/>
-            <a:r>
-              <a:rPr sz="1100" b="1">
-                <a:solidFill>
-                  <a:srgbClr val="0065BD"/>
-                </a:solidFill>
-              </a:rPr>
-              <a:t>What matters is the SPREAD — the only thing a router can act on</a:t>
-            </a:r>
-          </a:p>
-          <a:p>
-            <a:pPr lvl="1"/>
-            <a:r>
-              <a:rPr sz="900" b="0"/>
-              <a:t>qp 63   fp32 2.864 → 8 b 2.876 → 6 b 2.224 → 4 b 1.398   ·   BOPs 1.000 → 0.062 → 0.035 → 0.016</a:t>
-            </a:r>
-          </a:p>
-          <a:p>
-            <a:pPr lvl="1"/>
-            <a:r>
-              <a:rPr sz="900" b="0"/>
-              <a:t>qp 0    0.704 → 0.712 → 0.791 → 0.837   — flat to rising, no collapse</a:t>
-            </a:r>
-          </a:p>
-          <a:p>
-            <a:pPr/>
-            <a:r>
-              <a:rPr sz="1100" b="1">
-                <a:solidFill>
-                  <a:srgbClr val="0065BD"/>
-                </a:solidFill>
-              </a:rPr>
-              <a:t>8 bit composes cleanly at 16× fewer BOPs · the collapse is a HIGH-RATE effect, not a general one</a:t>
-            </a:r>
-          </a:p>
-          <a:p>
-            <a:pPr lvl="1"/>
-            <a:r>
-              <a:rPr sz="900" b="0"/>
-              <a:t>caveat: 8 bit still raises the floor 0.073 → 0.184 dB at qp 63</a:t>
+              <a:rPr sz="1000" b="0"/>
+              <a:t>at the ceiling the gap is 0.16 = the router's own 0.163%</a:t>
             </a:r>
           </a:p>
         </p:txBody>
       </p:sp>
       <p:pic>
         <p:nvPicPr>
-          <p:cNvPr id="4" name="Picture 3" descr="quant.png"/>
+          <p:cNvPr id="4" name="Picture 3" descr="ab_budgets.png"/>
           <p:cNvPicPr>
             <a:picLocks noChangeAspect="1"/>
           </p:cNvPicPr>
@@ -5052,8 +5513,8 @@
         </p:blipFill>
         <p:spPr>
           <a:xfrm>
-            <a:off x="678991" y="3913631"/>
-            <a:ext cx="7786018" cy="2532888"/>
+            <a:off x="411480" y="3304032"/>
+            <a:ext cx="8321039" cy="2827166"/>
           </a:xfrm>
           <a:prstGeom prst="rect">
             <a:avLst/>
@@ -5094,7 +5555,7 @@
           <a:lstStyle/>
           <a:p>
             <a:r>
-              <a:t>Why per-tile beats any fixed mix</a:t>
+              <a:t>The price of speed</a:t>
             </a:r>
           </a:p>
         </p:txBody>
@@ -5126,21 +5587,32 @@
                   <a:srgbClr val="0065BD"/>
                 </a:solidFill>
               </a:rPr>
-              <a:t>Cost additive over tiles, MSE a mean over tiles ⇒ both affine in the assignment</a:t>
+              <a:t>BD-Rate = cost · MACs saved = benefit · released intra decoder, YUV420</a:t>
             </a:r>
           </a:p>
           <a:p>
             <a:pPr lvl="1"/>
             <a:r>
               <a:rPr sz="1000" b="0"/>
-              <a:t>fixed proportions → convex hull of the K exit points</a:t>
+              <a:t>0.1 dB  0.88% / 27.6%    0.3 dB  2.51% / 39.5%    0.5 dB  3.36% / 41.7%</a:t>
+            </a:r>
+          </a:p>
+          <a:p>
+            <a:pPr/>
+            <a:r>
+              <a:rPr sz="1200" b="1">
+                <a:solidFill>
+                  <a:srgbClr val="0065BD"/>
+                </a:solidFill>
+              </a:rPr>
+              <a:t>Per unit of REAL speedup:  6.2 · 6.6 · 6.5  BD-Rate points</a:t>
             </a:r>
           </a:p>
           <a:p>
             <a:pPr lvl="1"/>
             <a:r>
               <a:rPr sz="1000" b="0"/>
-              <a:t>per-tile assignment → Minkowski average of the N tile hulls</a:t>
+              <a:t>flat across the range — an exchange rate, not a chosen operating point</a:t>
             </a:r>
           </a:p>
           <a:p>
@@ -5151,43 +5623,32 @@
                   <a:srgbClr val="0065BD"/>
                 </a:solidFill>
               </a:rPr>
-              <a:t>Gap  =  min-of-average  −  average-of-min  ≥  0</a:t>
+              <a:t>DCVC-UF HT-L → HT-S:  10.6 points for 1.66×  =  16.1 points per unit</a:t>
+            </a:r>
+          </a:p>
+          <a:p>
+            <a:pPr/>
+            <a:r>
+              <a:rPr sz="1200" b="1">
+                <a:solidFill>
+                  <a:srgbClr val="0065BD"/>
+                </a:solidFill>
+              </a:rPr>
+              <a:t>⇒ adaptive depth buys speed 2.4× cheaper than shrinking the model</a:t>
             </a:r>
           </a:p>
           <a:p>
             <a:pPr lvl="1"/>
             <a:r>
               <a:rPr sz="1000" b="0"/>
-              <a:t>zero iff every tile prefers the same exit — this IS the value of adaptivity</a:t>
-            </a:r>
-          </a:p>
-          <a:p>
-            <a:pPr/>
-            <a:r>
-              <a:rPr sz="1200" b="1">
-                <a:solidFill>
-                  <a:srgbClr val="0065BD"/>
-                </a:solidFill>
-              </a:rPr>
-              <a:t>Measured Δ/J:  0.39%  →  2.09%  with rate</a:t>
-            </a:r>
-          </a:p>
-          <a:p>
-            <a:pPr/>
-            <a:r>
-              <a:rPr sz="1200" b="1">
-                <a:solidFill>
-                  <a:srgbClr val="0065BD"/>
-                </a:solidFill>
-              </a:rPr>
-              <a:t>Same mechanism per sequence · best/worst CTC clip 3.8× at qp 63 vs 1.5× at qp 0</a:t>
+              <a:t>their pair is whole-video, ours intra-only → a calibration, not a head-to-head</a:t>
             </a:r>
           </a:p>
         </p:txBody>
       </p:sp>
       <p:pic>
         <p:nvPicPr>
-          <p:cNvPr id="4" name="Picture 3" descr="nf_heterogeneity.png"/>
+          <p:cNvPr id="4" name="Picture 3" descr="paper_rdc.png"/>
           <p:cNvPicPr>
             <a:picLocks noChangeAspect="1"/>
           </p:cNvPicPr>
@@ -5202,7 +5663,7 @@
         <p:spPr>
           <a:xfrm>
             <a:off x="411480" y="3545332"/>
-            <a:ext cx="8321039" cy="2261733"/>
+            <a:ext cx="8321040" cy="2722552"/>
           </a:xfrm>
           <a:prstGeom prst="rect">
             <a:avLst/>
@@ -5243,6 +5704,477 @@
           <a:lstStyle/>
           <a:p>
             <a:r>
+              <a:t>Related work</a:t>
+            </a:r>
+          </a:p>
+        </p:txBody>
+      </p:sp>
+      <p:sp>
+        <p:nvSpPr>
+          <p:cNvPr id="3" name="Content Placeholder 2"/>
+          <p:cNvSpPr>
+            <a:spLocks noGrp="1"/>
+          </p:cNvSpPr>
+          <p:nvPr>
+            <p:ph idx="1"/>
+          </p:nvPr>
+        </p:nvSpPr>
+        <p:spPr/>
+        <p:txBody>
+          <a:bodyPr/>
+          <a:lstStyle/>
+          <a:p>
+            <a:pPr/>
+            <a:r>
+              <a:rPr sz="1200" b="1">
+                <a:solidFill>
+                  <a:srgbClr val="0065BD"/>
+                </a:solidFill>
+              </a:rPr>
+              <a:t>Early exit / dynamic depth · BranchyNet, MSDNet, SkipNet</a:t>
+            </a:r>
+          </a:p>
+          <a:p>
+            <a:pPr lvl="1"/>
+            <a:r>
+              <a:rPr sz="1000" b="0"/>
+              <a:t>decide from the network's own output; ours decides per SPATIAL TILE for a fixed output</a:t>
+            </a:r>
+          </a:p>
+          <a:p>
+            <a:pPr/>
+            <a:r>
+              <a:rPr sz="1200" b="1">
+                <a:solidFill>
+                  <a:srgbClr val="0065BD"/>
+                </a:solidFill>
+              </a:rPr>
+              <a:t>ClassSR</a:t>
+            </a:r>
+          </a:p>
+          <a:p>
+            <a:pPr lvl="1"/>
+            <a:r>
+              <a:rPr sz="1000" b="0"/>
+              <a:t>routes patches to differently sized SR branches for a cost target</a:t>
+            </a:r>
+          </a:p>
+          <a:p>
+            <a:pPr lvl="1"/>
+            <a:r>
+              <a:rPr sz="1000" b="0"/>
+              <a:t>ours: a DEPTH inside one network, for a quality target, bitstream fixed</a:t>
+            </a:r>
+          </a:p>
+          <a:p>
+            <a:pPr/>
+            <a:r>
+              <a:rPr sz="1200" b="1">
+                <a:solidFill>
+                  <a:srgbClr val="0065BD"/>
+                </a:solidFill>
+              </a:rPr>
+              <a:t>Xie et al. · RDC optimisation in neural image compression · 2305.07678</a:t>
+            </a:r>
+          </a:p>
+          <a:p>
+            <a:pPr lvl="1"/>
+            <a:r>
+              <a:rPr sz="1000" b="0"/>
+              <a:t>adaptive spatial mask decoded from side information — closest to our B</a:t>
+            </a:r>
+          </a:p>
+          <a:p>
+            <a:pPr lvl="1"/>
+            <a:r>
+              <a:rPr sz="1000" b="0"/>
+              <a:t>adapts the ENTROPY model's dependencies; we adapt SYNTHESIS depth</a:t>
+            </a:r>
+          </a:p>
+          <a:p>
+            <a:pPr/>
+            <a:r>
+              <a:rPr sz="1200" b="1">
+                <a:solidFill>
+                  <a:srgbClr val="0065BD"/>
+                </a:solidFill>
+              </a:rPr>
+              <a:t>Spatial competition · 2605.13243</a:t>
+            </a:r>
+          </a:p>
+          <a:p>
+            <a:pPr lvl="1"/>
+            <a:r>
+              <a:rPr sz="1000" b="0"/>
+              <a:t>per-region mode map at 1.8e-4 bpp (ours 4.5e-5) — selects CODECS for rate, not depth for compute</a:t>
+            </a:r>
+          </a:p>
+          <a:p>
+            <a:pPr/>
+            <a:r>
+              <a:rPr sz="1200" b="1">
+                <a:solidFill>
+                  <a:srgbClr val="0065BD"/>
+                </a:solidFill>
+              </a:rPr>
+              <a:t>Loss-free load balancing · 2408.15664 · used directly</a:t>
+            </a:r>
+          </a:p>
+          <a:p>
+            <a:pPr lvl="1"/>
+            <a:r>
+              <a:rPr sz="1000" b="0"/>
+              <a:t>balanced toward the ORACLE's exit mix, not uniform — exits are not interchangeable experts</a:t>
+            </a:r>
+          </a:p>
+        </p:txBody>
+      </p:sp>
+    </p:spTree>
+  </p:cSld>
+  <p:clrMapOvr>
+    <a:masterClrMapping/>
+  </p:clrMapOvr>
+</p:sld>
+</file>
+
+<file path=ppt/slides/slide24.xml><?xml version="1.0" encoding="utf-8"?>
+<p:sld xmlns:a="http://schemas.openxmlformats.org/drawingml/2006/main" xmlns:p="http://schemas.openxmlformats.org/presentationml/2006/main" xmlns:r="http://schemas.openxmlformats.org/officeDocument/2006/relationships">
+  <p:cSld>
+    <p:spTree>
+      <p:nvGrpSpPr>
+        <p:cNvPr id="1" name=""/>
+        <p:cNvGrpSpPr/>
+        <p:nvPr/>
+      </p:nvGrpSpPr>
+      <p:grpSpPr/>
+      <p:sp>
+        <p:nvSpPr>
+          <p:cNvPr id="2" name="Title 1"/>
+          <p:cNvSpPr>
+            <a:spLocks noGrp="1"/>
+          </p:cNvSpPr>
+          <p:nvPr>
+            <p:ph type="title"/>
+          </p:nvPr>
+        </p:nvSpPr>
+        <p:spPr/>
+        <p:txBody>
+          <a:bodyPr/>
+          <a:lstStyle/>
+          <a:p>
+            <a:r>
+              <a:t>Quantisation · a second, orthogonal lever</a:t>
+            </a:r>
+          </a:p>
+        </p:txBody>
+      </p:sp>
+      <p:sp>
+        <p:nvSpPr>
+          <p:cNvPr id="3" name="Content Placeholder 2"/>
+          <p:cNvSpPr>
+            <a:spLocks noGrp="1"/>
+          </p:cNvSpPr>
+          <p:nvPr>
+            <p:ph idx="1"/>
+          </p:nvPr>
+        </p:nvSpPr>
+        <p:spPr>
+          <a:xfrm>
+            <a:off x="508000" y="1417320"/>
+            <a:ext cx="8128000" cy="2331720"/>
+          </a:xfrm>
+        </p:spPr>
+        <p:txBody>
+          <a:bodyPr/>
+          <a:lstStyle/>
+          <a:p>
+            <a:pPr/>
+            <a:r>
+              <a:rPr sz="1100" b="1">
+                <a:solidFill>
+                  <a:srgbClr val="0065BD"/>
+                </a:solidFill>
+              </a:rPr>
+              <a:t>Weight-only · per-channel · no calibration · decoder only</a:t>
+            </a:r>
+          </a:p>
+          <a:p>
+            <a:pPr/>
+            <a:r>
+              <a:rPr sz="1100" b="1">
+                <a:solidFill>
+                  <a:srgbClr val="0065BD"/>
+                </a:solidFill>
+              </a:rPr>
+              <a:t>Registered prediction — shallow exits suffer more — FALSIFIED</a:t>
+            </a:r>
+          </a:p>
+          <a:p>
+            <a:pPr lvl="1"/>
+            <a:r>
+              <a:rPr sz="900" b="0"/>
+              <a:t>qp 63, 8 bit: exit 2 +0.108 dB, deepest +0.111 dB, ratio 0.97</a:t>
+            </a:r>
+          </a:p>
+          <a:p>
+            <a:pPr lvl="1"/>
+            <a:r>
+              <a:rPr sz="900" b="0"/>
+              <a:t>the deepest starts at 0.073 dB and has no headroom for a noise floor</a:t>
+            </a:r>
+          </a:p>
+          <a:p>
+            <a:pPr/>
+            <a:r>
+              <a:rPr sz="1100" b="1">
+                <a:solidFill>
+                  <a:srgbClr val="0065BD"/>
+                </a:solidFill>
+              </a:rPr>
+              <a:t>What matters is the SPREAD — the only thing a router can act on</a:t>
+            </a:r>
+          </a:p>
+          <a:p>
+            <a:pPr lvl="1"/>
+            <a:r>
+              <a:rPr sz="900" b="0"/>
+              <a:t>qp 63   fp32 2.864 → 8 b 2.876 → 6 b 2.224 → 4 b 1.398   ·   BOPs 1.000 → 0.062 → 0.035 → 0.016</a:t>
+            </a:r>
+          </a:p>
+          <a:p>
+            <a:pPr lvl="1"/>
+            <a:r>
+              <a:rPr sz="900" b="0"/>
+              <a:t>qp 0    0.704 → 0.712 → 0.791 → 0.837   — flat to rising, no collapse</a:t>
+            </a:r>
+          </a:p>
+          <a:p>
+            <a:pPr/>
+            <a:r>
+              <a:rPr sz="1100" b="1">
+                <a:solidFill>
+                  <a:srgbClr val="0065BD"/>
+                </a:solidFill>
+              </a:rPr>
+              <a:t>8 bit composes cleanly at 16× fewer BOPs · the collapse is a HIGH-RATE effect, not a general one</a:t>
+            </a:r>
+          </a:p>
+          <a:p>
+            <a:pPr lvl="1"/>
+            <a:r>
+              <a:rPr sz="900" b="0"/>
+              <a:t>caveat: 8 bit still raises the floor 0.073 → 0.184 dB at qp 63</a:t>
+            </a:r>
+          </a:p>
+        </p:txBody>
+      </p:sp>
+      <p:pic>
+        <p:nvPicPr>
+          <p:cNvPr id="4" name="Picture 3" descr="quant.png"/>
+          <p:cNvPicPr>
+            <a:picLocks noChangeAspect="1"/>
+          </p:cNvPicPr>
+          <p:nvPr/>
+        </p:nvPicPr>
+        <p:blipFill>
+          <a:blip r:embed="rId2"/>
+          <a:stretch>
+            <a:fillRect/>
+          </a:stretch>
+        </p:blipFill>
+        <p:spPr>
+          <a:xfrm>
+            <a:off x="678991" y="3913631"/>
+            <a:ext cx="7786018" cy="2532888"/>
+          </a:xfrm>
+          <a:prstGeom prst="rect">
+            <a:avLst/>
+          </a:prstGeom>
+        </p:spPr>
+      </p:pic>
+    </p:spTree>
+  </p:cSld>
+  <p:clrMapOvr>
+    <a:masterClrMapping/>
+  </p:clrMapOvr>
+</p:sld>
+</file>
+
+<file path=ppt/slides/slide25.xml><?xml version="1.0" encoding="utf-8"?>
+<p:sld xmlns:a="http://schemas.openxmlformats.org/drawingml/2006/main" xmlns:p="http://schemas.openxmlformats.org/presentationml/2006/main" xmlns:r="http://schemas.openxmlformats.org/officeDocument/2006/relationships">
+  <p:cSld>
+    <p:spTree>
+      <p:nvGrpSpPr>
+        <p:cNvPr id="1" name=""/>
+        <p:cNvGrpSpPr/>
+        <p:nvPr/>
+      </p:nvGrpSpPr>
+      <p:grpSpPr/>
+      <p:sp>
+        <p:nvSpPr>
+          <p:cNvPr id="2" name="Title 1"/>
+          <p:cNvSpPr>
+            <a:spLocks noGrp="1"/>
+          </p:cNvSpPr>
+          <p:nvPr>
+            <p:ph type="title"/>
+          </p:nvPr>
+        </p:nvSpPr>
+        <p:spPr/>
+        <p:txBody>
+          <a:bodyPr/>
+          <a:lstStyle/>
+          <a:p>
+            <a:r>
+              <a:t>Why per-tile beats any fixed mix</a:t>
+            </a:r>
+          </a:p>
+        </p:txBody>
+      </p:sp>
+      <p:sp>
+        <p:nvSpPr>
+          <p:cNvPr id="3" name="Content Placeholder 2"/>
+          <p:cNvSpPr>
+            <a:spLocks noGrp="1"/>
+          </p:cNvSpPr>
+          <p:nvPr>
+            <p:ph idx="1"/>
+          </p:nvPr>
+        </p:nvSpPr>
+        <p:spPr>
+          <a:xfrm>
+            <a:off x="508000" y="1417320"/>
+            <a:ext cx="8128000" cy="1963420"/>
+          </a:xfrm>
+        </p:spPr>
+        <p:txBody>
+          <a:bodyPr/>
+          <a:lstStyle/>
+          <a:p>
+            <a:pPr/>
+            <a:r>
+              <a:rPr sz="1200" b="1">
+                <a:solidFill>
+                  <a:srgbClr val="0065BD"/>
+                </a:solidFill>
+              </a:rPr>
+              <a:t>Cost additive over tiles, MSE a mean over tiles ⇒ both affine in the assignment</a:t>
+            </a:r>
+          </a:p>
+          <a:p>
+            <a:pPr lvl="1"/>
+            <a:r>
+              <a:rPr sz="1000" b="0"/>
+              <a:t>fixed proportions → convex hull of the K exit points</a:t>
+            </a:r>
+          </a:p>
+          <a:p>
+            <a:pPr lvl="1"/>
+            <a:r>
+              <a:rPr sz="1000" b="0"/>
+              <a:t>per-tile assignment → Minkowski average of the N tile hulls</a:t>
+            </a:r>
+          </a:p>
+          <a:p>
+            <a:pPr/>
+            <a:r>
+              <a:rPr sz="1200" b="1">
+                <a:solidFill>
+                  <a:srgbClr val="0065BD"/>
+                </a:solidFill>
+              </a:rPr>
+              <a:t>Gap  =  min-of-average  −  average-of-min  ≥  0</a:t>
+            </a:r>
+          </a:p>
+          <a:p>
+            <a:pPr lvl="1"/>
+            <a:r>
+              <a:rPr sz="1000" b="0"/>
+              <a:t>zero iff every tile prefers the same exit — this IS the value of adaptivity</a:t>
+            </a:r>
+          </a:p>
+          <a:p>
+            <a:pPr/>
+            <a:r>
+              <a:rPr sz="1200" b="1">
+                <a:solidFill>
+                  <a:srgbClr val="0065BD"/>
+                </a:solidFill>
+              </a:rPr>
+              <a:t>Measured Δ/J:  0.39%  →  2.09%  with rate</a:t>
+            </a:r>
+          </a:p>
+          <a:p>
+            <a:pPr/>
+            <a:r>
+              <a:rPr sz="1200" b="1">
+                <a:solidFill>
+                  <a:srgbClr val="0065BD"/>
+                </a:solidFill>
+              </a:rPr>
+              <a:t>Same mechanism per sequence · best/worst CTC clip 3.8× at qp 63 vs 1.5× at qp 0</a:t>
+            </a:r>
+          </a:p>
+        </p:txBody>
+      </p:sp>
+      <p:pic>
+        <p:nvPicPr>
+          <p:cNvPr id="4" name="Picture 3" descr="nf_heterogeneity.png"/>
+          <p:cNvPicPr>
+            <a:picLocks noChangeAspect="1"/>
+          </p:cNvPicPr>
+          <p:nvPr/>
+        </p:nvPicPr>
+        <p:blipFill>
+          <a:blip r:embed="rId2"/>
+          <a:stretch>
+            <a:fillRect/>
+          </a:stretch>
+        </p:blipFill>
+        <p:spPr>
+          <a:xfrm>
+            <a:off x="411480" y="3545332"/>
+            <a:ext cx="8321039" cy="2261733"/>
+          </a:xfrm>
+          <a:prstGeom prst="rect">
+            <a:avLst/>
+          </a:prstGeom>
+        </p:spPr>
+      </p:pic>
+    </p:spTree>
+  </p:cSld>
+  <p:clrMapOvr>
+    <a:masterClrMapping/>
+  </p:clrMapOvr>
+</p:sld>
+</file>
+
+<file path=ppt/slides/slide26.xml><?xml version="1.0" encoding="utf-8"?>
+<p:sld xmlns:a="http://schemas.openxmlformats.org/drawingml/2006/main" xmlns:p="http://schemas.openxmlformats.org/presentationml/2006/main" xmlns:r="http://schemas.openxmlformats.org/officeDocument/2006/relationships">
+  <p:cSld>
+    <p:spTree>
+      <p:nvGrpSpPr>
+        <p:cNvPr id="1" name=""/>
+        <p:cNvGrpSpPr/>
+        <p:nvPr/>
+      </p:nvGrpSpPr>
+      <p:grpSpPr/>
+      <p:sp>
+        <p:nvSpPr>
+          <p:cNvPr id="2" name="Title 1"/>
+          <p:cNvSpPr>
+            <a:spLocks noGrp="1"/>
+          </p:cNvSpPr>
+          <p:nvPr>
+            <p:ph type="title"/>
+          </p:nvPr>
+        </p:nvSpPr>
+        <p:spPr/>
+        <p:txBody>
+          <a:bodyPr/>
+          <a:lstStyle/>
+          <a:p>
+            <a:r>
               <a:t>What is still owed</a:t>
             </a:r>
           </a:p>
@@ -5824,14 +6756,14 @@
                   <a:srgbClr val="0065BD"/>
                 </a:solidFill>
               </a:rPr>
-              <a:t>Deepest-exit drift vs release   BEST  -0.003 / -0.016 / -0.033   ·   VERBATIM (no anchor)  -0.092 / -0.127 / -0.169   at qp 0/32/63</a:t>
+              <a:t>Deepest-exit drift vs release   BEST  -0.003 / -0.016 / -0.033   ·   VERBATIM (no anchor)  -0.119 / -0.132 / -0.174   at qp 0/32/63</a:t>
             </a:r>
           </a:p>
           <a:p>
             <a:pPr lvl="1"/>
             <a:r>
               <a:rPr sz="900" b="0"/>
-              <a:t>Saving at 0.1 dB, same architecture:  anchor 0: unreachable at every rate  ·  anchor 1: 5/4/4/3/3%  ·  anchor 10: 42/42/42/42/42%   (CONTROL→BEST moves four flags, so it is the bundle)</a:t>
+              <a:t>Saving at 0.1 dB, same architecture:  anchor 0: unreachable at every rate  ·  anchor 1: 3/3/2/2/2%  ·  anchor 10: 42/42/42/42/42%   (CONTROL→BEST moves four flags, so it is the bundle)</a:t>
             </a:r>
           </a:p>
           <a:p>

--- a/paper/FLEX-UF_LMT.pptx
+++ b/paper/FLEX-UF_LMT.pptx
@@ -5435,7 +5435,7 @@
         <p:spPr>
           <a:xfrm>
             <a:off x="508000" y="1417320"/>
-            <a:ext cx="8128000" cy="1722120"/>
+            <a:ext cx="8128000" cy="2928619"/>
           </a:xfrm>
         </p:spPr>
         <p:txBody>
@@ -5456,7 +5456,7 @@
             <a:pPr lvl="1"/>
             <a:r>
               <a:rPr sz="1000" b="0"/>
-              <a:t>router trained JOINTLY with a moving decoder → collapsed, agreement 0.000 at qp 63</a:t>
+              <a:t>that was ONE router — BEST's, trained jointly with a moving decoder — not routing as such. Agreement 0.000 at qp 63, 239 of 240 tiles to one exit</a:t>
             </a:r>
           </a:p>
           <a:p>
@@ -5467,14 +5467,35 @@
                   <a:srgbClr val="0065BD"/>
                 </a:solidFill>
               </a:rPr>
-              <a:t>Retrained against the FROZEN decoder: 0.848 agreement, budget met at every rate</a:t>
+              <a:t>Routing works. Three routers, three outcomes:</a:t>
             </a:r>
           </a:p>
           <a:p>
             <a:pPr lvl="1"/>
             <a:r>
               <a:rPr sz="1000" b="0"/>
-              <a:t>⇒ the limit was the training target, not the information</a:t>
+              <a:t>BEST, joint          collapsed to a qp-dependent constant</a:t>
+            </a:r>
+          </a:p>
+          <a:p>
+            <a:pPr lvl="1"/>
+            <a:r>
+              <a:rPr sz="1000" b="0"/>
+              <a:t>FINE12, joint        did NOT collapse · budget met, β ≈ −0.01</a:t>
+            </a:r>
+          </a:p>
+          <a:p>
+            <a:pPr lvl="1"/>
+            <a:r>
+              <a:rPr sz="1000" b="0"/>
+              <a:t>retrained on FROZEN  0.848–0.923 agreement · budget met at every rate</a:t>
+            </a:r>
+          </a:p>
+          <a:p>
+            <a:pPr lvl="1"/>
+            <a:r>
+              <a:rPr sz="1000" b="0"/>
+              <a:t>⇒ the limit was the training target, not the information — and joint training does not always break it, which is itself unexplained</a:t>
             </a:r>
           </a:p>
           <a:p>
@@ -5513,8 +5534,8 @@
         </p:blipFill>
         <p:spPr>
           <a:xfrm>
-            <a:off x="411480" y="3304032"/>
-            <a:ext cx="8321039" cy="2827166"/>
+            <a:off x="1722958" y="4510531"/>
+            <a:ext cx="5698083" cy="1935987"/>
           </a:xfrm>
           <a:prstGeom prst="rect">
             <a:avLst/>
